--- a/docs/project_slides.pptx
+++ b/docs/project_slides.pptx
@@ -128,7 +128,7 @@
                 </a:solidFill>
                 <a:latin typeface="Calibri"/>
               </a:rPr>
-              <a:t>Listed-spread volume by week, median of 8 recent rolls (%)</a:t>
+              <a:t>Mean absolute net spread change, 57 held-out rolls (ticks)</a:t>
             </a:r>
           </a:p>
         </c:rich>
@@ -139,7 +139,7 @@
     <c:autoTitleDeleted val="0"/>
     <c:plotArea>
       <c:barChart>
-        <c:barDir val="bar"/>
+        <c:barDir val="col"/>
         <c:grouping val="clustered"/>
         <c:ser>
           <c:idx val="0"/>
@@ -150,7 +150,7 @@
               <c:strCache>
                 <c:ptCount val="1"/>
                 <c:pt idx="0">
-                  <c:v>Share of listed-spread volume (%)</c:v>
+                  <c:v>Mean absolute net spread change (ticks)</c:v>
                 </c:pt>
               </c:strCache>
             </c:strRef>
@@ -159,20 +159,12 @@
             <c:idx val="0"/>
             <c:spPr>
               <a:solidFill>
-                <a:srgbClr val="9AA7C7"/>
+                <a:srgbClr val="3B5BA9"/>
               </a:solidFill>
             </c:spPr>
           </c:dPt>
           <c:dPt>
             <c:idx val="1"/>
-            <c:spPr>
-              <a:solidFill>
-                <a:srgbClr val="3B5BA9"/>
-              </a:solidFill>
-            </c:spPr>
-          </c:dPt>
-          <c:dPt>
-            <c:idx val="2"/>
             <c:spPr>
               <a:solidFill>
                 <a:srgbClr val="E3A71B"/>
@@ -181,16 +173,13 @@
           </c:dPt>
           <c:cat>
             <c:strRef>
-              <c:f>Sheet1!$A$2:$A$4</c:f>
+              <c:f>Sheet1!$A$2:$A$3</c:f>
               <c:strCache>
-                <c:ptCount val="3"/>
+                <c:ptCount val="2"/>
                 <c:pt idx="0">
-                  <c:v>Week before the roll week</c:v>
+                  <c:v>Roll week</c:v>
                 </c:pt>
                 <c:pt idx="1">
-                  <c:v>Roll week</c:v>
-                </c:pt>
-                <c:pt idx="2">
                   <c:v>Control week</c:v>
                 </c:pt>
               </c:strCache>
@@ -198,31 +187,28 @@
           </c:cat>
           <c:val>
             <c:numRef>
-              <c:f>Sheet1!$B$2:$B$4</c:f>
+              <c:f>Sheet1!$B$2:$B$3</c:f>
               <c:numCache>
                 <c:formatCode>General</c:formatCode>
-                <c:ptCount val="3"/>
+                <c:ptCount val="2"/>
                 <c:pt idx="0">
-                  <c:v>12</c:v>
+                  <c:v>3.22</c:v>
                 </c:pt>
                 <c:pt idx="1">
-                  <c:v>83</c:v>
-                </c:pt>
-                <c:pt idx="2">
-                  <c:v>1</c:v>
+                  <c:v>2.7</c:v>
                 </c:pt>
               </c:numCache>
             </c:numRef>
           </c:val>
         </c:ser>
         <c:dLbls>
-          <c:numFmt formatCode="0" sourceLinked="0"/>
+          <c:numFmt formatCode="0.00" sourceLinked="0"/>
           <c:txPr>
             <a:bodyPr/>
             <a:lstStyle/>
             <a:p>
               <a:pPr>
-                <a:defRPr sz="1200">
+                <a:defRPr sz="1400">
                   <a:solidFill>
                     <a:srgbClr val="1B2336"/>
                   </a:solidFill>
@@ -240,17 +226,17 @@
           <c:showBubbleSize val="0"/>
           <c:showLeaderLines val="1"/>
         </c:dLbls>
-        <c:gapWidth val="45"/>
+        <c:gapWidth val="60"/>
         <c:axId val="-2068027336"/>
         <c:axId val="-2113994440"/>
       </c:barChart>
       <c:catAx>
         <c:axId val="-2068027336"/>
         <c:scaling>
-          <c:orientation val="maxMin"/>
+          <c:orientation val="minMax"/>
         </c:scaling>
         <c:delete val="0"/>
-        <c:axPos val="l"/>
+        <c:axPos val="b"/>
         <c:majorTickMark val="out"/>
         <c:minorTickMark val="none"/>
         <c:tickLblPos val="nextTo"/>
@@ -266,7 +252,7 @@
           <a:lstStyle/>
           <a:p>
             <a:pPr>
-              <a:defRPr sz="1200">
+              <a:defRPr sz="1400">
                 <a:solidFill>
                   <a:srgbClr val="1B2336"/>
                 </a:solidFill>
@@ -285,11 +271,11 @@
       <c:valAx>
         <c:axId val="-2113994440"/>
         <c:scaling>
-          <c:max val="100.0"/>
+          <c:max val="4.0"/>
           <c:min val="0.0"/>
         </c:scaling>
         <c:delete/>
-        <c:axPos val="b"/>
+        <c:axPos val="l"/>
         <c:majorTickMark val="out"/>
         <c:minorTickMark val="none"/>
         <c:tickLblPos val="nextTo"/>
@@ -780,7 +766,7 @@
           <a:lstStyle/>
           <a:p>
             <a:r>
-              <a:t>The spread is the deferred contract's price minus the front contract's, measured in ticks at 10:00 Chicago time. The roll window is the last full Monday to Friday week before the front contract expires. The control window is the same pattern four weeks earlier for the same pair. For each roll we compare the absolute net move in the roll week with the absolute net move in the control week. The recent eight rolls are where the idea came from, so they cannot also be the test; the main test uses the 57 earlier rolls. The plan was written and signed off by all four of us before the main test is run.</a:t>
+              <a:t>The spread is the deferred contract's price minus the front contract's, measured in ticks at 10:00 Chicago time. The roll window is the last full Monday to Friday week before the front contract expires; the listed calendar spread trades 80 to 87 percent of its volume in that week in the eight recent rolls. The control window is the same pattern four weeks earlier for the same pair. For each roll we compare the absolute net move in the roll week with the absolute net move in the control week. The recent eight rolls are where the idea came from, so they cannot also be the test; the main test uses the 57 earlier rolls.</a:t>
             </a:r>
           </a:p>
         </p:txBody>
@@ -850,7 +836,7 @@
           <a:lstStyle/>
           <a:p>
             <a:r>
-              <a:t>Everything is a Python package with tests, built through pull requests that every member reviews. The data step downloads named contracts from Databento and caches them locally. The roll calendar uses the formula 'two business days before the third Wednesday' and we checked it against Databento's own definitions: 64 of 65 match. The one miss, 6EM3 in June 2023, expired a business day early because of Juneteenth, a CME holiday; that fix is in review. Statuses are as of late October.</a:t>
+              <a:t>Everything is a Python package with tests, built through pull requests that every member reviews. The data step downloads named contracts from Databento and caches them locally. The roll calendar uses the formula 'two business days before the third Wednesday' and we checked it against Databento's own definitions: 64 of 65 match. The one miss, 6EM3 in June 2023, expired a business day early because of Juneteenth, a CME holiday; the fix is in review along with the statistics and the main-test runner. Statuses are as of October 26.</a:t>
             </a:r>
           </a:p>
         </p:txBody>
@@ -920,7 +906,7 @@
           <a:lstStyle/>
           <a:p>
             <a:r>
-              <a:t>These are descriptive checks on the eight recent rolls, using volume and quote quality only; we have not looked at spread changes in the main sample. First, the listed calendar spread trades almost entirely in the roll week, which supports our window rule. Second, outright volume only crosses over on the Friday, about two days after spread trading peaks on Wednesday, so outright volume alone understates when rolling happens. Third, a liquidity check across all 65 rolls found the control week is usable but noisier: the deferred contract trades about 1 to 2 percent of its roll-week volume and its quotes are roughly twice as wide.</a:t>
+              <a:t>This is the main test on the 57 held-out rolls from September 2010 to September 2024. Roll weeks move a little more than control weeks, 3.2 ticks against 2.7 on average, but the average difference of half a tick is well inside the noise: the 95 percent interval runs from minus 1 to plus 2.2 ticks, and both the sign test and the Wilcoxon test are far from significant. The spread rose in 24 of the 50 roll weeks with a nonzero move, so there is no consistent direction either. The planned sensitivity checks, which drop wide quotes, drop weeks with Fed or ECB decisions, and adjust for carry, all agree. One added check, a control week three weeks out instead of four, gives a block-bootstrap interval that just excludes zero; it was not in the plan and comes from three large roll weeks. Because H1 and H2 do not hold we do not compute H3, the dollar cost. Numbers are from the main-test pull request, which is still in review.</a:t>
             </a:r>
           </a:p>
         </p:txBody>
@@ -990,7 +976,7 @@
           <a:lstStyle/>
           <a:p>
             <a:r>
-              <a:t>We fixed the analysis before running the main test, and every member signed off. That includes the statistics, the two bootstrap versions, and how we handle holidays and wide quotes. Be upfront about two limits. First, the control-week deferred contract is thinly quoted, which makes control moves look bigger and biases the magnitude test toward finding nothing, so a null result is weak evidence. Second, calendar spreads mostly reflect the interest-rate gap, so we compare with observed rates, and we cannot say who pays or that rolling caused a move. Remaining work: build the per-roll results table, run the main test on the 57 held-out rolls, robustness checks and the final report.</a:t>
+              <a:t>Be upfront about what the result means. We found no evidence of a roll-week effect, but the test is weaker than a flat no. The control week is further from expiry, where the deferred contract is quoted about twice as wide, which makes control moves look bigger and pushes the test toward finding nothing. In simulation a roll-week move 1.5 times the control's is detected only about 29 to 43 percent of the time with 57 rolls. Calendar spreads also mostly reflect the interest-rate gap, so we cannot say who pays or that rolling caused a move. Finally, we ran the main test on October 25 before the last team member's sign-off and before tagging the plan; that is recorded in the plan's deviation log.</a:t>
             </a:r>
           </a:p>
         </p:txBody>
@@ -4491,7 +4477,7 @@
         <p:spPr>
           <a:xfrm>
             <a:off x="548640" y="1325880"/>
-            <a:ext cx="3840480" cy="3017520"/>
+            <a:ext cx="3840480" cy="3108960"/>
           </a:xfrm>
           <a:prstGeom prst="rect">
             <a:avLst/>
@@ -4552,7 +4538,7 @@
                 </a:solidFill>
                 <a:latin typeface="Calibri"/>
               </a:rPr>
-              <a:t> Each roll week is compared with a control week four weeks earlier, same contract pair.</a:t>
+              <a:t> Roll week vs. a control week four weeks earlier. Listed-spread volume peaks in the roll week (80 to 87%).</a:t>
             </a:r>
           </a:p>
           <a:p>
@@ -6213,7 +6199,7 @@
                 </a:solidFill>
                 <a:latin typeface="Calibri"/>
               </a:rPr>
-              <a:t>Sign, Wilcoxon, bootstrap</a:t>
+              <a:t>Sign, Wilcoxon, bootstrap, runner</a:t>
             </a:r>
           </a:p>
         </p:txBody>
@@ -6399,7 +6385,7 @@
                 </a:solidFill>
                 <a:latin typeface="Cambria"/>
               </a:rPr>
-              <a:t>57 + 8</a:t>
+              <a:t>65 rolls</a:t>
             </a:r>
           </a:p>
         </p:txBody>
@@ -6434,7 +6420,7 @@
                 </a:solidFill>
                 <a:latin typeface="Calibri"/>
               </a:rPr>
-              <a:t>held-out rolls plus recent exploratory rolls</a:t>
+              <a:t>57 held out for the test, 8 recent ones exploratory</a:t>
             </a:r>
           </a:p>
         </p:txBody>
@@ -6469,7 +6455,7 @@
                 </a:solidFill>
                 <a:latin typeface="Cambria"/>
               </a:rPr>
-              <a:t>90+</a:t>
+              <a:t>190+</a:t>
             </a:r>
           </a:p>
         </p:txBody>
@@ -6565,14 +6551,14 @@
                 </a:solidFill>
                 <a:latin typeface="Cambria"/>
               </a:rPr>
-              <a:t>What the data show before any test</a:t>
+              <a:t>No evidence of a roll effect</a:t>
             </a:r>
           </a:p>
         </p:txBody>
       </p:sp>
       <p:graphicFrame>
         <p:nvGraphicFramePr>
-          <p:cNvPr id="3" name="Spread volume by week"/>
+          <p:cNvPr id="3" name="Mean absolute change"/>
           <p:cNvGraphicFramePr>
             <a:graphicFrameLocks noGrp="1"/>
           </p:cNvGraphicFramePr>
@@ -6580,7 +6566,7 @@
         </p:nvGraphicFramePr>
         <p:xfrm>
           <a:off x="457200" y="1234440"/>
-          <a:ext cx="4572000" cy="3246120"/>
+          <a:ext cx="4023360" cy="3200400"/>
         </p:xfrm>
         <a:graphic>
           <a:graphicData uri="http://schemas.openxmlformats.org/drawingml/2006/chart">
@@ -6590,14 +6576,14 @@
       </p:graphicFrame>
       <p:sp>
         <p:nvSpPr>
-          <p:cNvPr id="4" name="Findings"/>
+          <p:cNvPr id="4" name="TextBox 3"/>
           <p:cNvSpPr txBox="1"/>
           <p:nvPr/>
         </p:nvSpPr>
         <p:spPr>
           <a:xfrm>
-            <a:off x="5303520" y="1325880"/>
-            <a:ext cx="3383280" cy="3108960"/>
+            <a:off x="4846320" y="1325880"/>
+            <a:ext cx="3840480" cy="502920"/>
           </a:xfrm>
           <a:prstGeom prst="rect">
             <a:avLst/>
@@ -6610,81 +6596,15 @@
           </a:bodyPr>
           <a:lstStyle/>
           <a:p>
-            <a:pPr algn="l" marL="201168" indent="-201168">
-              <a:spcAft>
-                <a:spcPts val="1000"/>
-              </a:spcAft>
-              <a:buChar char="•"/>
-            </a:pPr>
-            <a:r>
-              <a:rPr sz="1400" b="1" i="0">
-                <a:solidFill>
-                  <a:srgbClr val="0F2A6B"/>
-                </a:solidFill>
-                <a:latin typeface="Calibri"/>
+            <a:pPr algn="l"/>
+            <a:r>
+              <a:rPr sz="2600" b="1" i="0">
+                <a:solidFill>
+                  <a:srgbClr val="3B5BA9"/>
+                </a:solidFill>
+                <a:latin typeface="Cambria"/>
               </a:rPr>
-              <a:t>Rolling is concentrated.</a:t>
-            </a:r>
-            <a:r>
-              <a:rPr sz="1400" b="0" i="0">
-                <a:solidFill>
-                  <a:srgbClr val="1B2336"/>
-                </a:solidFill>
-                <a:latin typeface="Calibri"/>
-              </a:rPr>
-              <a:t> 80 to 87% of listed-spread volume trades in the roll week, 0 to 1% in the control week.</a:t>
-            </a:r>
-          </a:p>
-          <a:p>
-            <a:pPr algn="l" marL="201168" indent="-201168">
-              <a:spcAft>
-                <a:spcPts val="1000"/>
-              </a:spcAft>
-              <a:buChar char="•"/>
-            </a:pPr>
-            <a:r>
-              <a:rPr sz="1400" b="1" i="0">
-                <a:solidFill>
-                  <a:srgbClr val="0F2A6B"/>
-                </a:solidFill>
-                <a:latin typeface="Calibri"/>
-              </a:rPr>
-              <a:t>Outright volume lags.</a:t>
-            </a:r>
-            <a:r>
-              <a:rPr sz="1400" b="0" i="0">
-                <a:solidFill>
-                  <a:srgbClr val="1B2336"/>
-                </a:solidFill>
-                <a:latin typeface="Calibri"/>
-              </a:rPr>
-              <a:t> The deferred contract passes half of outright volume 3 days before expiry in 63 of 65 rolls, about two days after spread trading peaks.</a:t>
-            </a:r>
-          </a:p>
-          <a:p>
-            <a:pPr algn="l" marL="201168" indent="-201168">
-              <a:spcAft>
-                <a:spcPts val="1000"/>
-              </a:spcAft>
-              <a:buChar char="•"/>
-            </a:pPr>
-            <a:r>
-              <a:rPr sz="1400" b="1" i="0">
-                <a:solidFill>
-                  <a:srgbClr val="0F2A6B"/>
-                </a:solidFill>
-                <a:latin typeface="Calibri"/>
-              </a:rPr>
-              <a:t>The control is thin.</a:t>
-            </a:r>
-            <a:r>
-              <a:rPr sz="1400" b="0" i="0">
-                <a:solidFill>
-                  <a:srgbClr val="1B2336"/>
-                </a:solidFill>
-                <a:latin typeface="Calibri"/>
-              </a:rPr>
-              <a:t> Control-week deferred quotes are about twice as wide, so control moves are noisier.</a:t>
+              <a:t>+0.52 ticks</a:t>
             </a:r>
           </a:p>
         </p:txBody>
@@ -6697,8 +6617,8 @@
         </p:nvSpPr>
         <p:spPr>
           <a:xfrm>
-            <a:off x="548640" y="4572000"/>
-            <a:ext cx="7589520" cy="274320"/>
+            <a:off x="4846320" y="1828800"/>
+            <a:ext cx="3840480" cy="365760"/>
           </a:xfrm>
           <a:prstGeom prst="rect">
             <a:avLst/>
@@ -6713,13 +6633,188 @@
           <a:p>
             <a:pPr algn="l"/>
             <a:r>
-              <a:rPr sz="1100" b="0" i="1">
-                <a:solidFill>
-                  <a:srgbClr val="7A869E"/>
+              <a:rPr sz="1300" b="0" i="0">
+                <a:solidFill>
+                  <a:srgbClr val="1B2336"/>
                 </a:solidFill>
                 <a:latin typeface="Calibri"/>
               </a:rPr>
-              <a:t>Exploratory: the 8 recent rolls, volume and quote quality only. No spread changes were examined.</a:t>
+              <a:t>mean of d = |roll| minus |control|, per roll</a:t>
+            </a:r>
+          </a:p>
+        </p:txBody>
+      </p:sp>
+      <p:sp>
+        <p:nvSpPr>
+          <p:cNvPr id="6" name="TextBox 5"/>
+          <p:cNvSpPr txBox="1"/>
+          <p:nvPr/>
+        </p:nvSpPr>
+        <p:spPr>
+          <a:xfrm>
+            <a:off x="4846320" y="2331720"/>
+            <a:ext cx="3840480" cy="502920"/>
+          </a:xfrm>
+          <a:prstGeom prst="rect">
+            <a:avLst/>
+          </a:prstGeom>
+          <a:noFill/>
+        </p:spPr>
+        <p:txBody>
+          <a:bodyPr wrap="square" lIns="0" rIns="0" tIns="0" bIns="0" anchor="t">
+            <a:spAutoFit/>
+          </a:bodyPr>
+          <a:lstStyle/>
+          <a:p>
+            <a:pPr algn="l"/>
+            <a:r>
+              <a:rPr sz="2600" b="1" i="0">
+                <a:solidFill>
+                  <a:srgbClr val="3B5BA9"/>
+                </a:solidFill>
+                <a:latin typeface="Cambria"/>
+              </a:rPr>
+              <a:t>−0.96 to +2.19</a:t>
+            </a:r>
+          </a:p>
+        </p:txBody>
+      </p:sp>
+      <p:sp>
+        <p:nvSpPr>
+          <p:cNvPr id="7" name="TextBox 6"/>
+          <p:cNvSpPr txBox="1"/>
+          <p:nvPr/>
+        </p:nvSpPr>
+        <p:spPr>
+          <a:xfrm>
+            <a:off x="4846320" y="2834639"/>
+            <a:ext cx="3840480" cy="365760"/>
+          </a:xfrm>
+          <a:prstGeom prst="rect">
+            <a:avLst/>
+          </a:prstGeom>
+          <a:noFill/>
+        </p:spPr>
+        <p:txBody>
+          <a:bodyPr wrap="square" lIns="0" rIns="0" tIns="0" bIns="0" anchor="t">
+            <a:spAutoFit/>
+          </a:bodyPr>
+          <a:lstStyle/>
+          <a:p>
+            <a:pPr algn="l"/>
+            <a:r>
+              <a:rPr sz="1300" b="0" i="0">
+                <a:solidFill>
+                  <a:srgbClr val="1B2336"/>
+                </a:solidFill>
+                <a:latin typeface="Calibri"/>
+              </a:rPr>
+              <a:t>95% bootstrap interval, includes zero</a:t>
+            </a:r>
+          </a:p>
+        </p:txBody>
+      </p:sp>
+      <p:sp>
+        <p:nvSpPr>
+          <p:cNvPr id="8" name="TextBox 7"/>
+          <p:cNvSpPr txBox="1"/>
+          <p:nvPr/>
+        </p:nvSpPr>
+        <p:spPr>
+          <a:xfrm>
+            <a:off x="4846320" y="3337560"/>
+            <a:ext cx="3840480" cy="502920"/>
+          </a:xfrm>
+          <a:prstGeom prst="rect">
+            <a:avLst/>
+          </a:prstGeom>
+          <a:noFill/>
+        </p:spPr>
+        <p:txBody>
+          <a:bodyPr wrap="square" lIns="0" rIns="0" tIns="0" bIns="0" anchor="t">
+            <a:spAutoFit/>
+          </a:bodyPr>
+          <a:lstStyle/>
+          <a:p>
+            <a:pPr algn="l"/>
+            <a:r>
+              <a:rPr sz="2600" b="1" i="0">
+                <a:solidFill>
+                  <a:srgbClr val="3B5BA9"/>
+                </a:solidFill>
+                <a:latin typeface="Cambria"/>
+              </a:rPr>
+              <a:t>p = 0.89 and 0.37</a:t>
+            </a:r>
+          </a:p>
+        </p:txBody>
+      </p:sp>
+      <p:sp>
+        <p:nvSpPr>
+          <p:cNvPr id="9" name="TextBox 8"/>
+          <p:cNvSpPr txBox="1"/>
+          <p:nvPr/>
+        </p:nvSpPr>
+        <p:spPr>
+          <a:xfrm>
+            <a:off x="4846320" y="3840480"/>
+            <a:ext cx="3840480" cy="365760"/>
+          </a:xfrm>
+          <a:prstGeom prst="rect">
+            <a:avLst/>
+          </a:prstGeom>
+          <a:noFill/>
+        </p:spPr>
+        <p:txBody>
+          <a:bodyPr wrap="square" lIns="0" rIns="0" tIns="0" bIns="0" anchor="t">
+            <a:spAutoFit/>
+          </a:bodyPr>
+          <a:lstStyle/>
+          <a:p>
+            <a:pPr algn="l"/>
+            <a:r>
+              <a:rPr sz="1300" b="0" i="0">
+                <a:solidFill>
+                  <a:srgbClr val="1B2336"/>
+                </a:solidFill>
+                <a:latin typeface="Calibri"/>
+              </a:rPr>
+              <a:t>sign test and Wilcoxon test</a:t>
+            </a:r>
+          </a:p>
+        </p:txBody>
+      </p:sp>
+      <p:sp>
+        <p:nvSpPr>
+          <p:cNvPr id="10" name="TextBox 9"/>
+          <p:cNvSpPr txBox="1"/>
+          <p:nvPr/>
+        </p:nvSpPr>
+        <p:spPr>
+          <a:xfrm>
+            <a:off x="548640" y="4526280"/>
+            <a:ext cx="8046720" cy="411480"/>
+          </a:xfrm>
+          <a:prstGeom prst="rect">
+            <a:avLst/>
+          </a:prstGeom>
+          <a:noFill/>
+        </p:spPr>
+        <p:txBody>
+          <a:bodyPr wrap="square" lIns="0" rIns="0" tIns="0" bIns="0" anchor="t">
+            <a:spAutoFit/>
+          </a:bodyPr>
+          <a:lstStyle/>
+          <a:p>
+            <a:pPr algn="l"/>
+            <a:r>
+              <a:rPr sz="1100" b="0" i="1">
+                <a:solidFill>
+                  <a:srgbClr val="7A869E"/>
+                </a:solidFill>
+                <a:latin typeface="Calibri"/>
+              </a:rPr>
+              <a:t>Planned sensitivity checks agree (narrow quotes, no Fed or ECB weeks, carry-adjusted). One added check, a 3-week control, is borderline. H3 not computed.</a:t>
             </a:r>
           </a:p>
         </p:txBody>
@@ -6780,14 +6875,14 @@
                 </a:solidFill>
                 <a:latin typeface="Cambria"/>
               </a:rPr>
-              <a:t>What we will and won't claim</a:t>
-            </a:r>
-          </a:p>
-        </p:txBody>
-      </p:sp>
-      <p:sp>
-        <p:nvSpPr>
-          <p:cNvPr id="3" name="Fixed card"/>
+              <a:t>What we can and can't conclude</a:t>
+            </a:r>
+          </a:p>
+        </p:txBody>
+      </p:sp>
+      <p:sp>
+        <p:nvSpPr>
+          <p:cNvPr id="3" name="Can say card"/>
           <p:cNvSpPr/>
           <p:nvPr/>
         </p:nvSpPr>
@@ -6863,7 +6958,7 @@
                 </a:solidFill>
                 <a:latin typeface="Cambria"/>
               </a:rPr>
-              <a:t>Fixed in advance</a:t>
+              <a:t>What we can say</a:t>
             </a:r>
           </a:p>
         </p:txBody>
@@ -6903,7 +6998,7 @@
                 </a:solidFill>
                 <a:latin typeface="Calibri"/>
               </a:rPr>
-              <a:t>Hypotheses, windows, snapshot time and quote-age limit</a:t>
+              <a:t>No detectable roll-week effect in 57 held-out rolls, and the planned sensitivity checks agree</a:t>
             </a:r>
           </a:p>
           <a:p>
@@ -6920,7 +7015,7 @@
                 </a:solidFill>
                 <a:latin typeface="Calibri"/>
               </a:rPr>
-              <a:t>Sign test, Wilcoxon test and two bootstrap intervals</a:t>
+              <a:t>Listed-spread volume does concentrate in the roll week</a:t>
             </a:r>
           </a:p>
           <a:p>
@@ -6937,31 +7032,14 @@
                 </a:solidFill>
                 <a:latin typeface="Calibri"/>
               </a:rPr>
-              <a:t>Observed USD and EUR rates for a carry comparison</a:t>
-            </a:r>
-          </a:p>
-          <a:p>
-            <a:pPr algn="l" marL="201168" indent="-201168">
-              <a:spcAft>
-                <a:spcPts val="800"/>
-              </a:spcAft>
-              <a:buChar char="•"/>
-            </a:pPr>
-            <a:r>
-              <a:rPr sz="1400" b="0" i="0">
-                <a:solidFill>
-                  <a:srgbClr val="1B2336"/>
-                </a:solidFill>
-                <a:latin typeface="Calibri"/>
-              </a:rPr>
-              <a:t>Plan signed off by all four before the test runs</a:t>
-            </a:r>
-          </a:p>
-        </p:txBody>
-      </p:sp>
-      <p:sp>
-        <p:nvSpPr>
-          <p:cNvPr id="6" name="Limits card"/>
+              <a:t>The plan was written before the test, and every later change is logged</a:t>
+            </a:r>
+          </a:p>
+        </p:txBody>
+      </p:sp>
+      <p:sp>
+        <p:nvSpPr>
+          <p:cNvPr id="6" name="Cannot say card"/>
           <p:cNvSpPr/>
           <p:nvPr/>
         </p:nvSpPr>
@@ -7037,7 +7115,7 @@
                 </a:solidFill>
                 <a:latin typeface="Cambria"/>
               </a:rPr>
-              <a:t>Limits and next steps</a:t>
+              <a:t>What we can't say</a:t>
             </a:r>
           </a:p>
         </p:txBody>
@@ -7077,7 +7155,7 @@
                 </a:solidFill>
                 <a:latin typeface="Calibri"/>
               </a:rPr>
-              <a:t>A null result is not proof of no effect: noisy control quotes bias the test toward none</a:t>
+              <a:t>That there is no effect: noisy control quotes bias the test toward none, and a move 1.5 times the control's is caught only 29 to 43% of the time</a:t>
             </a:r>
           </a:p>
           <a:p>
@@ -7094,7 +7172,7 @@
                 </a:solidFill>
                 <a:latin typeface="Calibri"/>
               </a:rPr>
-              <a:t>Spread moves also reflect rates; we cannot show who pays</a:t>
+              <a:t>Who pays, or that rolling caused any move</a:t>
             </a:r>
           </a:p>
           <a:p>
@@ -7111,7 +7189,7 @@
                 </a:solidFill>
                 <a:latin typeface="Calibri"/>
               </a:rPr>
-              <a:t>Next: per-roll table, main test on 57 rolls, robustness checks, report</a:t>
+              <a:t>That the plan was fully frozen: the test ran before the last sign-off</a:t>
             </a:r>
           </a:p>
         </p:txBody>

--- a/docs/project_slides.pptx
+++ b/docs/project_slides.pptx
@@ -836,7 +836,7 @@
           <a:lstStyle/>
           <a:p>
             <a:r>
-              <a:t>Everything is a Python package with tests, built through pull requests that every member reviews. The data step downloads named contracts from Databento and caches them locally. The roll calendar uses the formula 'two business days before the third Wednesday' and we checked it against Databento's own definitions: 64 of 65 match. The one miss, 6EM3 in June 2023, expired a business day early because of Juneteenth, a CME holiday; the fix is in review along with the statistics and the main-test runner. Statuses are as of October 26.</a:t>
+              <a:t>Everything is a Python package with tests, built through pull requests that every member reviews. The data step downloads named contracts from Databento and caches them locally. The roll calendar uses the formula 'two business days before the third Wednesday' and we checked it against Databento's own definitions: 64 of 65 match. The one miss, 6EM3 in June 2023, expired a business day early because of Juneteenth, a CME holiday; the holiday fix, the statistics and the main-test runner were merged on October 26.</a:t>
             </a:r>
           </a:p>
         </p:txBody>
@@ -906,7 +906,7 @@
           <a:lstStyle/>
           <a:p>
             <a:r>
-              <a:t>This is the main test on the 57 held-out rolls from September 2010 to September 2024. Roll weeks move a little more than control weeks, 3.2 ticks against 2.7 on average, but the average difference of half a tick is well inside the noise: the 95 percent interval runs from minus 1 to plus 2.2 ticks, and both the sign test and the Wilcoxon test are far from significant. The spread rose in 24 of the 50 roll weeks with a nonzero move, so there is no consistent direction either. The planned sensitivity checks, which drop wide quotes, drop weeks with Fed or ECB decisions, and adjust for carry, all agree. One added check, a control week three weeks out instead of four, gives a block-bootstrap interval that just excludes zero; it was not in the plan and comes from three large roll weeks. Because H1 and H2 do not hold we do not compute H3, the dollar cost. Numbers are from the main-test pull request, which is still in review.</a:t>
+              <a:t>This is the main test on the 57 held-out rolls from September 2010 to September 2024. Roll weeks move a little more than control weeks, 3.2 ticks against 2.7 on average, but the average difference of half a tick is well inside the noise: the 95 percent interval runs from minus 1 to plus 2.2 ticks, and both the sign test and the Wilcoxon test are far from significant. The spread rose in 24 of the 50 roll weeks with a nonzero move, so there is no consistent direction either. The planned sensitivity checks, which drop wide quotes, drop weeks with Fed or ECB decisions, and adjust for carry, all agree. One added check, a control week three weeks out instead of four, gives a block-bootstrap interval that just excludes zero; it was not in the plan and comes from three large roll weeks. Because H1 and H2 do not hold we do not compute H3, the dollar cost. Numbers are from the main-test pull request, merged on October 26.</a:t>
             </a:r>
           </a:p>
         </p:txBody>
@@ -5519,7 +5519,7 @@
             </a:avLst>
           </a:prstGeom>
           <a:solidFill>
-            <a:srgbClr val="E3A71B"/>
+            <a:srgbClr val="2E8B6E"/>
           </a:solidFill>
           <a:ln>
             <a:noFill/>
@@ -5574,11 +5574,11 @@
             <a:r>
               <a:rPr sz="1100" b="1" i="0">
                 <a:solidFill>
-                  <a:srgbClr val="1B2336"/>
+                  <a:srgbClr val="FFFFFF"/>
                 </a:solidFill>
                 <a:latin typeface="Calibri"/>
               </a:rPr>
-              <a:t>in review</a:t>
+              <a:t>merged</a:t>
             </a:r>
           </a:p>
         </p:txBody>
@@ -6221,7 +6221,7 @@
             </a:avLst>
           </a:prstGeom>
           <a:solidFill>
-            <a:srgbClr val="E3A71B"/>
+            <a:srgbClr val="2E8B6E"/>
           </a:solidFill>
           <a:ln>
             <a:noFill/>
@@ -6276,11 +6276,11 @@
             <a:r>
               <a:rPr sz="1100" b="1" i="0">
                 <a:solidFill>
-                  <a:srgbClr val="1B2336"/>
+                  <a:srgbClr val="FFFFFF"/>
                 </a:solidFill>
                 <a:latin typeface="Calibri"/>
               </a:rPr>
-              <a:t>in review</a:t>
+              <a:t>merged</a:t>
             </a:r>
           </a:p>
         </p:txBody>

--- a/docs/project_slides.pptx
+++ b/docs/project_slides.pptx
@@ -10,6 +10,9 @@
     <p:sldId id="258" r:id="rId10"/>
     <p:sldId id="259" r:id="rId11"/>
     <p:sldId id="260" r:id="rId12"/>
+    <p:sldId id="261" r:id="rId13"/>
+    <p:sldId id="262" r:id="rId14"/>
+    <p:sldId id="263" r:id="rId15"/>
   </p:sldIdLst>
   <p:sldSz cx="9144000" cy="5143500" type="screen4x3"/>
   <p:notesSz cx="6858000" cy="9144000"/>
@@ -112,6 +115,210 @@
 </file>
 
 <file path=ppt/charts/chart1.xml><?xml version="1.0" encoding="utf-8"?>
+<c:chartSpace xmlns:c="http://schemas.openxmlformats.org/drawingml/2006/chart" xmlns:a="http://schemas.openxmlformats.org/drawingml/2006/main" xmlns:r="http://schemas.openxmlformats.org/officeDocument/2006/relationships">
+  <c:date1904 val="0"/>
+  <c:chart>
+    <c:title>
+      <c:tx>
+        <c:rich>
+          <a:bodyPr/>
+          <a:lstStyle/>
+          <a:p>
+            <a:r>
+              <a:rPr sz="1200" b="0">
+                <a:solidFill>
+                  <a:srgbClr val="1B2336"/>
+                </a:solidFill>
+                <a:latin typeface="Calibri"/>
+              </a:rPr>
+              <a:t>Listed-spread volume by week, median of 8 recent rolls (%)</a:t>
+            </a:r>
+          </a:p>
+        </c:rich>
+      </c:tx>
+      <c:layout/>
+      <c:overlay val="0"/>
+    </c:title>
+    <c:autoTitleDeleted val="0"/>
+    <c:plotArea>
+      <c:barChart>
+        <c:barDir val="bar"/>
+        <c:grouping val="clustered"/>
+        <c:ser>
+          <c:idx val="0"/>
+          <c:order val="0"/>
+          <c:tx>
+            <c:strRef>
+              <c:f>Sheet1!$B$1</c:f>
+              <c:strCache>
+                <c:ptCount val="1"/>
+                <c:pt idx="0">
+                  <c:v>Share of listed-spread volume (%)</c:v>
+                </c:pt>
+              </c:strCache>
+            </c:strRef>
+          </c:tx>
+          <c:dPt>
+            <c:idx val="0"/>
+            <c:spPr>
+              <a:solidFill>
+                <a:srgbClr val="9AA7C7"/>
+              </a:solidFill>
+            </c:spPr>
+          </c:dPt>
+          <c:dPt>
+            <c:idx val="1"/>
+            <c:spPr>
+              <a:solidFill>
+                <a:srgbClr val="3B5BA9"/>
+              </a:solidFill>
+            </c:spPr>
+          </c:dPt>
+          <c:dPt>
+            <c:idx val="2"/>
+            <c:spPr>
+              <a:solidFill>
+                <a:srgbClr val="E3A71B"/>
+              </a:solidFill>
+            </c:spPr>
+          </c:dPt>
+          <c:cat>
+            <c:strRef>
+              <c:f>Sheet1!$A$2:$A$4</c:f>
+              <c:strCache>
+                <c:ptCount val="3"/>
+                <c:pt idx="0">
+                  <c:v>Week before the roll week</c:v>
+                </c:pt>
+                <c:pt idx="1">
+                  <c:v>Roll week</c:v>
+                </c:pt>
+                <c:pt idx="2">
+                  <c:v>Control week</c:v>
+                </c:pt>
+              </c:strCache>
+            </c:strRef>
+          </c:cat>
+          <c:val>
+            <c:numRef>
+              <c:f>Sheet1!$B$2:$B$4</c:f>
+              <c:numCache>
+                <c:formatCode>General</c:formatCode>
+                <c:ptCount val="3"/>
+                <c:pt idx="0">
+                  <c:v>12</c:v>
+                </c:pt>
+                <c:pt idx="1">
+                  <c:v>83</c:v>
+                </c:pt>
+                <c:pt idx="2">
+                  <c:v>1</c:v>
+                </c:pt>
+              </c:numCache>
+            </c:numRef>
+          </c:val>
+        </c:ser>
+        <c:dLbls>
+          <c:numFmt formatCode="0" sourceLinked="0"/>
+          <c:txPr>
+            <a:bodyPr/>
+            <a:lstStyle/>
+            <a:p>
+              <a:pPr>
+                <a:defRPr sz="1200">
+                  <a:solidFill>
+                    <a:srgbClr val="1B2336"/>
+                  </a:solidFill>
+                  <a:latin typeface="Calibri"/>
+                </a:defRPr>
+              </a:pPr>
+            </a:p>
+          </c:txPr>
+          <c:dLblPos val="outEnd"/>
+          <c:showLegendKey val="0"/>
+          <c:showVal val="1"/>
+          <c:showCatName val="0"/>
+          <c:showSerName val="0"/>
+          <c:showPercent val="0"/>
+          <c:showBubbleSize val="0"/>
+          <c:showLeaderLines val="1"/>
+        </c:dLbls>
+        <c:gapWidth val="45"/>
+        <c:axId val="-2068027336"/>
+        <c:axId val="-2113994440"/>
+      </c:barChart>
+      <c:catAx>
+        <c:axId val="-2068027336"/>
+        <c:scaling>
+          <c:orientation val="maxMin"/>
+        </c:scaling>
+        <c:delete val="0"/>
+        <c:axPos val="l"/>
+        <c:majorTickMark val="out"/>
+        <c:minorTickMark val="none"/>
+        <c:tickLblPos val="nextTo"/>
+        <c:spPr>
+          <a:ln>
+            <a:solidFill>
+              <a:srgbClr val="9AA7C7"/>
+            </a:solidFill>
+          </a:ln>
+        </c:spPr>
+        <c:txPr>
+          <a:bodyPr/>
+          <a:lstStyle/>
+          <a:p>
+            <a:pPr>
+              <a:defRPr sz="1200">
+                <a:solidFill>
+                  <a:srgbClr val="1B2336"/>
+                </a:solidFill>
+                <a:latin typeface="Calibri"/>
+              </a:defRPr>
+            </a:pPr>
+          </a:p>
+        </c:txPr>
+        <c:crossAx val="-2113994440"/>
+        <c:crosses val="autoZero"/>
+        <c:auto val="1"/>
+        <c:lblAlgn val="ctr"/>
+        <c:lblOffset val="100"/>
+        <c:noMultiLvlLbl val="0"/>
+      </c:catAx>
+      <c:valAx>
+        <c:axId val="-2113994440"/>
+        <c:scaling>
+          <c:max val="100.0"/>
+          <c:min val="0.0"/>
+        </c:scaling>
+        <c:delete/>
+        <c:axPos val="b"/>
+        <c:majorTickMark val="out"/>
+        <c:minorTickMark val="none"/>
+        <c:tickLblPos val="nextTo"/>
+        <c:crossAx val="-2068027336"/>
+        <c:crosses val="autoZero"/>
+      </c:valAx>
+    </c:plotArea>
+    <c:dispBlanksAs val="gap"/>
+  </c:chart>
+  <c:txPr>
+    <a:bodyPr/>
+    <a:lstStyle/>
+    <a:p>
+      <a:pPr>
+        <a:defRPr sz="1800"/>
+      </a:pPr>
+      <a:endParaRPr lang="en-US"/>
+    </a:p>
+  </c:txPr>
+  <c:externalData r:id="rId1">
+    <c:autoUpdate val="0"/>
+  </c:externalData>
+</c:chartSpace>
+</file>
+
+<file path=ppt/charts/chart2.xml><?xml version="1.0" encoding="utf-8"?>
 <c:chartSpace xmlns:c="http://schemas.openxmlformats.org/drawingml/2006/chart" xmlns:a="http://schemas.openxmlformats.org/drawingml/2006/main" xmlns:r="http://schemas.openxmlformats.org/officeDocument/2006/relationships">
   <c:date1904 val="0"/>
   <c:chart>
@@ -766,7 +973,7 @@
           <a:lstStyle/>
           <a:p>
             <a:r>
-              <a:t>The spread is the deferred contract's price minus the front contract's, measured in ticks at 10:00 Chicago time. The roll window is the last full Monday to Friday week before the front contract expires; the listed calendar spread trades 80 to 87 percent of its volume in that week in the eight recent rolls. The control window is the same pattern four weeks earlier for the same pair. For each roll we compare the absolute net move in the roll week with the absolute net move in the control week. The recent eight rolls are where the idea came from, so they cannot also be the test; the main test uses the 57 earlier rolls.</a:t>
+              <a:t>Euro FX futures (6E) expire every March, June, September and December. Anyone holding a position has to roll, and because the calendar fixes the timing, much of that volume lands in the same few days. H1 asks whether the calendar spread moves more in roll weeks; H2 whether it moves in a consistent direction; H3, the dollar cost, only matters if H1 and H2 hold. The idea started from an informal look at the eight most recent rolls, where the spread seemed to rise in every roll week. Using the final definitions, it rose in four of the eight. That does not matter for the test, but it is why those eight rolls are kept out of it.</a:t>
             </a:r>
           </a:p>
         </p:txBody>
@@ -836,7 +1043,7 @@
           <a:lstStyle/>
           <a:p>
             <a:r>
-              <a:t>Everything is a Python package with tests, built through pull requests that every member reviews. The data step downloads named contracts from Databento and caches them locally. The roll calendar uses the formula 'two business days before the third Wednesday' and we checked it against Databento's own definitions: 64 of 65 match. The one miss, 6EM3 in June 2023, expired a business day early because of Juneteenth, a CME holiday; the holiday fix, the statistics and the main-test runner were merged on October 26.</a:t>
+              <a:t>The spread is the deferred contract's price minus the front contract's, measured in ticks at 10:00 Chicago time. The roll window is the last full Monday to Friday week before the front contract expires; the control window is the same pattern four weeks earlier for the same pair. For each window we take the net move from the preceding Friday's snapshot to its ending Friday's, so only two snapshots enter each number. The statistic d compares the absolute net move in the roll week with the absolute net move in the control week, one value per roll. We test d with a sign test, a Wilcoxon signed-rank test, and two bootstrap intervals: a percentile bootstrap, and a circular block bootstrap over blocks of four consecutive rolls, which allows for shared interest-rate regimes. The unit is the roll, not the minute.</a:t>
             </a:r>
           </a:p>
         </p:txBody>
@@ -906,7 +1113,7 @@
           <a:lstStyle/>
           <a:p>
             <a:r>
-              <a:t>This is the main test on the 57 held-out rolls from September 2010 to September 2024. Roll weeks move a little more than control weeks, 3.2 ticks against 2.7 on average, but the average difference of half a tick is well inside the noise: the 95 percent interval runs from minus 1 to plus 2.2 ticks, and both the sign test and the Wilcoxon test are far from significant. The spread rose in 24 of the 50 roll weeks with a nonzero move, so there is no consistent direction either. The planned sensitivity checks, which drop wide quotes, drop weeks with Fed or ECB decisions, and adjust for carry, all agree. One added check, a control week three weeks out instead of four, gives a block-bootstrap interval that just excludes zero; it was not in the plan and comes from three large roll weeks. Because H1 and H2 do not hold we do not compute H3, the dollar cost. Numbers are from the main-test pull request, merged on October 26.</a:t>
+              <a:t>Everything is a Python package with tests, built through pull requests that every member reviews. The data step downloads named contracts, not continuous series, so no return is computed across a contract switch, and caches them. The roll calendar uses the formula 'two business days before the third Wednesday'; we checked it against Databento's own definitions and 64 of 65 match. The one miss, June 2023, expired a day early for Juneteenth, which the calendar now handles. Across all 65 rolls only seven snapshot days were dropped: five CME holidays and two days in June 2014 with no quotes. The runner shows the estimated cost before any download.</a:t>
             </a:r>
           </a:p>
         </p:txBody>
@@ -976,7 +1183,217 @@
           <a:lstStyle/>
           <a:p>
             <a:r>
-              <a:t>Be upfront about what the result means. We found no evidence of a roll-week effect, but the test is weaker than a flat no. The control week is further from expiry, where the deferred contract is quoted about twice as wide, which makes control moves look bigger and pushes the test toward finding nothing. In simulation a roll-week move 1.5 times the control's is detected only about 29 to 43 percent of the time with 57 rolls. Calendar spreads also mostly reflect the interest-rate gap, so we cannot say who pays or that rolling caused a move. Finally, we ran the main test on October 25 before the last team member's sign-off and before tagging the plan; that is recorded in the plan's deviation log.</a:t>
+              <a:t>These are descriptive checks that do not use spread changes in the main sample. First, the listed calendar spread trades almost entirely in the roll week, which supports our window rule. Second, outright volume only crosses over on the Friday, about two days after spread trading peaks on Wednesday, so outright volume alone understates when rolling happens. Third, a liquidity check across all 65 rolls found the control week is usable but noisier: its deferred contract trades about 1 to 2 percent of its roll-week volume and its quotes are roughly twice as wide. Fourth, answering a question from the professor, Fed and ECB decisions fall inside 29 of the 57 roll windows but only one control window, so meetings and rolls are not independent and we run the test again without them.</a:t>
+            </a:r>
+          </a:p>
+        </p:txBody>
+      </p:sp>
+      <p:sp>
+        <p:nvSpPr>
+          <p:cNvPr id="4" name="Slide Number Placeholder 3"/>
+          <p:cNvSpPr>
+            <a:spLocks noGrp="1"/>
+          </p:cNvSpPr>
+          <p:nvPr>
+            <p:ph type="sldNum" idx="5" sz="quarter"/>
+          </p:nvPr>
+        </p:nvSpPr>
+        <p:spPr/>
+      </p:sp>
+    </p:spTree>
+  </p:cSld>
+  <p:clrMapOvr>
+    <a:masterClrMapping/>
+  </p:clrMapOvr>
+</p:notes>
+</file>
+
+<file path=ppt/notesSlides/notesSlide6.xml><?xml version="1.0" encoding="utf-8"?>
+<p:notes xmlns:a="http://schemas.openxmlformats.org/drawingml/2006/main" xmlns:p="http://schemas.openxmlformats.org/presentationml/2006/main" xmlns:r="http://schemas.openxmlformats.org/officeDocument/2006/relationships">
+  <p:cSld>
+    <p:spTree>
+      <p:nvGrpSpPr>
+        <p:cNvPr id="1" name=""/>
+        <p:cNvGrpSpPr/>
+        <p:nvPr/>
+      </p:nvGrpSpPr>
+      <p:grpSpPr>
+        <a:xfrm>
+          <a:off x="0" y="0"/>
+          <a:ext cx="0" cy="0"/>
+          <a:chOff x="0" y="0"/>
+          <a:chExt cx="0" cy="0"/>
+        </a:xfrm>
+      </p:grpSpPr>
+      <p:sp>
+        <p:nvSpPr>
+          <p:cNvPr id="2" name="Slide Image Placeholder 1"/>
+          <p:cNvSpPr>
+            <a:spLocks noGrp="1"/>
+          </p:cNvSpPr>
+          <p:nvPr>
+            <p:ph type="sldImg" idx="2"/>
+          </p:nvPr>
+        </p:nvSpPr>
+        <p:spPr/>
+      </p:sp>
+      <p:sp>
+        <p:nvSpPr>
+          <p:cNvPr id="3" name="Notes Placeholder 2"/>
+          <p:cNvSpPr>
+            <a:spLocks noGrp="1"/>
+          </p:cNvSpPr>
+          <p:nvPr>
+            <p:ph type="body" idx="3" sz="quarter"/>
+          </p:nvPr>
+        </p:nvSpPr>
+        <p:spPr/>
+        <p:txBody>
+          <a:bodyPr/>
+          <a:lstStyle/>
+          <a:p>
+            <a:r>
+              <a:t>This is the main test on the 57 held-out rolls. Roll weeks move a little more than control weeks, 3.2 ticks against 2.7 on average, but the average difference of half a tick is well inside the noise: the 95 percent interval runs from minus 1 to plus 2.2 ticks, and both the sign test and the Wilcoxon test are far from significant. The spread rose in 24 of the 50 roll weeks with a nonzero move, so there is no consistent direction either, and the mean of roll minus control is minus 0.45 ticks with an interval from minus 2.3 to plus 1.6. Because H1 and H2 do not hold we do not compute H3, the dollar cost.</a:t>
+            </a:r>
+          </a:p>
+        </p:txBody>
+      </p:sp>
+      <p:sp>
+        <p:nvSpPr>
+          <p:cNvPr id="4" name="Slide Number Placeholder 3"/>
+          <p:cNvSpPr>
+            <a:spLocks noGrp="1"/>
+          </p:cNvSpPr>
+          <p:nvPr>
+            <p:ph type="sldNum" idx="5" sz="quarter"/>
+          </p:nvPr>
+        </p:nvSpPr>
+        <p:spPr/>
+      </p:sp>
+    </p:spTree>
+  </p:cSld>
+  <p:clrMapOvr>
+    <a:masterClrMapping/>
+  </p:clrMapOvr>
+</p:notes>
+</file>
+
+<file path=ppt/notesSlides/notesSlide7.xml><?xml version="1.0" encoding="utf-8"?>
+<p:notes xmlns:a="http://schemas.openxmlformats.org/drawingml/2006/main" xmlns:p="http://schemas.openxmlformats.org/presentationml/2006/main" xmlns:r="http://schemas.openxmlformats.org/officeDocument/2006/relationships">
+  <p:cSld>
+    <p:spTree>
+      <p:nvGrpSpPr>
+        <p:cNvPr id="1" name=""/>
+        <p:cNvGrpSpPr/>
+        <p:nvPr/>
+      </p:nvGrpSpPr>
+      <p:grpSpPr>
+        <a:xfrm>
+          <a:off x="0" y="0"/>
+          <a:ext cx="0" cy="0"/>
+          <a:chOff x="0" y="0"/>
+          <a:chExt cx="0" cy="0"/>
+        </a:xfrm>
+      </p:grpSpPr>
+      <p:sp>
+        <p:nvSpPr>
+          <p:cNvPr id="2" name="Slide Image Placeholder 1"/>
+          <p:cNvSpPr>
+            <a:spLocks noGrp="1"/>
+          </p:cNvSpPr>
+          <p:nvPr>
+            <p:ph type="sldImg" idx="2"/>
+          </p:nvPr>
+        </p:nvSpPr>
+        <p:spPr/>
+      </p:sp>
+      <p:sp>
+        <p:nvSpPr>
+          <p:cNvPr id="3" name="Notes Placeholder 2"/>
+          <p:cNvSpPr>
+            <a:spLocks noGrp="1"/>
+          </p:cNvSpPr>
+          <p:nvPr>
+            <p:ph type="body" idx="3" sz="quarter"/>
+          </p:nvPr>
+        </p:nvSpPr>
+        <p:spPr/>
+        <p:txBody>
+          <a:bodyPr/>
+          <a:lstStyle/>
+          <a:p>
+            <a:r>
+              <a:t>Each row is the same H1 estimate under a different specification, with its 95 percent percentile bootstrap interval; none of the planned specifications has an interval that excludes zero. Dropping rolls with wide quotes, dropping rolls with a Fed or ECB decision in either window, and both carry adjustments, which use observed USD and EUR rates, all agree with the main test. The control windows two and three weeks out were added after the plan to see whether the thin four-week control was hiding an effect. At two weeks nothing changes. At three weeks the percentile interval still includes zero, but the circular block bootstrap interval, from plus 0.04 to plus 2.46, just excludes it; this comes from a few large roll weeks, and because it is a check we added after seeing results we treat it as inconclusive. The eight recent rolls, shown last, go the other way and also include zero.</a:t>
+            </a:r>
+          </a:p>
+        </p:txBody>
+      </p:sp>
+      <p:sp>
+        <p:nvSpPr>
+          <p:cNvPr id="4" name="Slide Number Placeholder 3"/>
+          <p:cNvSpPr>
+            <a:spLocks noGrp="1"/>
+          </p:cNvSpPr>
+          <p:nvPr>
+            <p:ph type="sldNum" idx="5" sz="quarter"/>
+          </p:nvPr>
+        </p:nvSpPr>
+        <p:spPr/>
+      </p:sp>
+    </p:spTree>
+  </p:cSld>
+  <p:clrMapOvr>
+    <a:masterClrMapping/>
+  </p:clrMapOvr>
+</p:notes>
+</file>
+
+<file path=ppt/notesSlides/notesSlide8.xml><?xml version="1.0" encoding="utf-8"?>
+<p:notes xmlns:a="http://schemas.openxmlformats.org/drawingml/2006/main" xmlns:p="http://schemas.openxmlformats.org/presentationml/2006/main" xmlns:r="http://schemas.openxmlformats.org/officeDocument/2006/relationships">
+  <p:cSld>
+    <p:spTree>
+      <p:nvGrpSpPr>
+        <p:cNvPr id="1" name=""/>
+        <p:cNvGrpSpPr/>
+        <p:nvPr/>
+      </p:nvGrpSpPr>
+      <p:grpSpPr>
+        <a:xfrm>
+          <a:off x="0" y="0"/>
+          <a:ext cx="0" cy="0"/>
+          <a:chOff x="0" y="0"/>
+          <a:chExt cx="0" cy="0"/>
+        </a:xfrm>
+      </p:grpSpPr>
+      <p:sp>
+        <p:nvSpPr>
+          <p:cNvPr id="2" name="Slide Image Placeholder 1"/>
+          <p:cNvSpPr>
+            <a:spLocks noGrp="1"/>
+          </p:cNvSpPr>
+          <p:nvPr>
+            <p:ph type="sldImg" idx="2"/>
+          </p:nvPr>
+        </p:nvSpPr>
+        <p:spPr/>
+      </p:sp>
+      <p:sp>
+        <p:nvSpPr>
+          <p:cNvPr id="3" name="Notes Placeholder 2"/>
+          <p:cNvSpPr>
+            <a:spLocks noGrp="1"/>
+          </p:cNvSpPr>
+          <p:nvPr>
+            <p:ph type="body" idx="3" sz="quarter"/>
+          </p:nvPr>
+        </p:nvSpPr>
+        <p:spPr/>
+        <p:txBody>
+          <a:bodyPr/>
+          <a:lstStyle/>
+          <a:p>
+            <a:r>
+              <a:t>Be upfront about what the result means. We found no evidence of a roll-week effect, but the test is weaker than a flat no. The control week is further from expiry, where the deferred contract is quoted about twice as wide, which makes control moves look bigger and pushes the test toward finding nothing. In simulation a roll-week move 1.5 times the control's is detected only about 29 to 43 percent of the time with 57 rolls, and a move twice as large 68 to 85 percent. Calendar spreads also mostly reflect the interest-rate gap, so we cannot say who pays or that rolling caused a move. Finally, we ran the main test on October 25 before the last team member's sign-off and before tagging the plan; that is recorded in the plan's deviation log. Things we cut for time: a reversal check, other currencies, and CFTC positioning.</a:t>
             </a:r>
           </a:p>
         </p:txBody>
@@ -4463,21 +4880,21 @@
                 </a:solidFill>
                 <a:latin typeface="Cambria"/>
               </a:rPr>
-              <a:t>How we test it</a:t>
-            </a:r>
-          </a:p>
-        </p:txBody>
-      </p:sp>
-      <p:sp>
-        <p:nvSpPr>
-          <p:cNvPr id="3" name="Method bullets"/>
+              <a:t>Why rolls might cost something</a:t>
+            </a:r>
+          </a:p>
+        </p:txBody>
+      </p:sp>
+      <p:sp>
+        <p:nvSpPr>
+          <p:cNvPr id="3" name="Why it matters"/>
           <p:cNvSpPr txBox="1"/>
           <p:nvPr/>
         </p:nvSpPr>
         <p:spPr>
           <a:xfrm>
-            <a:off x="548640" y="1325880"/>
-            <a:ext cx="3840480" cy="3108960"/>
+            <a:off x="548640" y="1280160"/>
+            <a:ext cx="3749039" cy="2377440"/>
           </a:xfrm>
           <a:prstGeom prst="rect">
             <a:avLst/>
@@ -4497,22 +4914,13 @@
               <a:buChar char="•"/>
             </a:pPr>
             <a:r>
-              <a:rPr sz="1500" b="1" i="0">
-                <a:solidFill>
-                  <a:srgbClr val="0F2A6B"/>
+              <a:rPr sz="1500" b="0" i="0">
+                <a:solidFill>
+                  <a:srgbClr val="1B2336"/>
                 </a:solidFill>
                 <a:latin typeface="Calibri"/>
               </a:rPr>
-              <a:t>Spread, in ticks.</a:t>
-            </a:r>
-            <a:r>
-              <a:rPr sz="1500" b="0" i="0">
-                <a:solidFill>
-                  <a:srgbClr val="1B2336"/>
-                </a:solidFill>
-                <a:latin typeface="Calibri"/>
-              </a:rPr>
-              <a:t> Deferred midpoint minus front midpoint at 10:00 Chicago each weekday.</a:t>
+              <a:t>Funds hedging euro exposure must close the expiring contract and open the next one.</a:t>
             </a:r>
           </a:p>
           <a:p>
@@ -4523,22 +4931,13 @@
               <a:buChar char="•"/>
             </a:pPr>
             <a:r>
-              <a:rPr sz="1500" b="1" i="0">
-                <a:solidFill>
-                  <a:srgbClr val="0F2A6B"/>
+              <a:rPr sz="1500" b="0" i="0">
+                <a:solidFill>
+                  <a:srgbClr val="1B2336"/>
                 </a:solidFill>
                 <a:latin typeface="Calibri"/>
               </a:rPr>
-              <a:t>Paired by roll.</a:t>
-            </a:r>
-            <a:r>
-              <a:rPr sz="1500" b="0" i="0">
-                <a:solidFill>
-                  <a:srgbClr val="1B2336"/>
-                </a:solidFill>
-                <a:latin typeface="Calibri"/>
-              </a:rPr>
-              <a:t> Roll week vs. a control week four weeks earlier. Listed-spread volume peaks in the roll week (80 to 87%).</a:t>
+              <a:t>The calendar fixes the timing, so volume lands in the same few days each quarter and other traders can anticipate it.</a:t>
             </a:r>
           </a:p>
           <a:p>
@@ -4549,184 +4948,31 @@
               <a:buChar char="•"/>
             </a:pPr>
             <a:r>
-              <a:rPr sz="1500" b="1" i="0">
-                <a:solidFill>
-                  <a:srgbClr val="0F2A6B"/>
+              <a:rPr sz="1500" b="0" i="0">
+                <a:solidFill>
+                  <a:srgbClr val="1B2336"/>
                 </a:solidFill>
                 <a:latin typeface="Calibri"/>
               </a:rPr>
-              <a:t>Test statistic.</a:t>
-            </a:r>
-            <a:r>
-              <a:rPr sz="1500" b="0" i="0">
-                <a:solidFill>
-                  <a:srgbClr val="1B2336"/>
-                </a:solidFill>
-                <a:latin typeface="Calibri"/>
-              </a:rPr>
-              <a:t> d = |net roll-week move| minus |net control-week move|, one number per roll.</a:t>
-            </a:r>
-          </a:p>
-          <a:p>
-            <a:pPr algn="l" marL="201168" indent="-201168">
-              <a:spcAft>
-                <a:spcPts val="1000"/>
-              </a:spcAft>
-              <a:buChar char="•"/>
-            </a:pPr>
-            <a:r>
-              <a:rPr sz="1500" b="1" i="0">
-                <a:solidFill>
-                  <a:srgbClr val="0F2A6B"/>
-                </a:solidFill>
-                <a:latin typeface="Calibri"/>
-              </a:rPr>
-              <a:t>Held out.</a:t>
-            </a:r>
-            <a:r>
-              <a:rPr sz="1500" b="0" i="0">
-                <a:solidFill>
-                  <a:srgbClr val="1B2336"/>
-                </a:solidFill>
-                <a:latin typeface="Calibri"/>
-              </a:rPr>
-              <a:t> 57 rolls from 2010 to 2024 for the test. The 8 recent rolls are exploratory only.</a:t>
-            </a:r>
-          </a:p>
-        </p:txBody>
-      </p:sp>
-      <p:sp>
-        <p:nvSpPr>
-          <p:cNvPr id="4" name="TextBox 3"/>
-          <p:cNvSpPr txBox="1"/>
-          <p:nvPr/>
-        </p:nvSpPr>
-        <p:spPr>
-          <a:xfrm>
-            <a:off x="4709160" y="1783080"/>
-            <a:ext cx="3931920" cy="320040"/>
-          </a:xfrm>
-          <a:prstGeom prst="rect">
-            <a:avLst/>
-          </a:prstGeom>
-          <a:noFill/>
-        </p:spPr>
-        <p:txBody>
-          <a:bodyPr wrap="square" lIns="0" rIns="0" tIns="0" bIns="0" anchor="t">
-            <a:spAutoFit/>
-          </a:bodyPr>
-          <a:lstStyle/>
-          <a:p>
-            <a:pPr algn="l"/>
-            <a:r>
-              <a:rPr sz="1200" b="0" i="0">
-                <a:solidFill>
-                  <a:srgbClr val="7A869E"/>
-                </a:solidFill>
-                <a:latin typeface="Calibri"/>
-              </a:rPr>
-              <a:t>Weeks before expiry</a:t>
-            </a:r>
-          </a:p>
-        </p:txBody>
-      </p:sp>
-      <p:sp>
-        <p:nvSpPr>
-          <p:cNvPr id="5" name="Week 1"/>
+              <a:t>If that crowding pushes the price of switching against rollers, they pay a cost that appears on no fee schedule.</a:t>
+            </a:r>
+          </a:p>
+        </p:txBody>
+      </p:sp>
+      <p:sp>
+        <p:nvSpPr>
+          <p:cNvPr id="4" name="Hypothesis H1"/>
           <p:cNvSpPr/>
           <p:nvPr/>
         </p:nvSpPr>
         <p:spPr>
           <a:xfrm>
-            <a:off x="4709160" y="2377440"/>
-            <a:ext cx="713232" cy="822960"/>
+            <a:off x="4663440" y="1280160"/>
+            <a:ext cx="3931920" cy="777240"/>
           </a:xfrm>
           <a:prstGeom prst="roundRect">
             <a:avLst>
-              <a:gd name="adj" fmla="val 10000"/>
-            </a:avLst>
-          </a:prstGeom>
-          <a:solidFill>
-            <a:srgbClr val="E3A71B"/>
-          </a:solidFill>
-          <a:ln w="9525">
-            <a:solidFill>
-              <a:srgbClr val="E3A71B"/>
-            </a:solidFill>
-          </a:ln>
-          <a:effectLst/>
-        </p:spPr>
-        <p:style>
-          <a:lnRef idx="1">
-            <a:schemeClr val="accent1"/>
-          </a:lnRef>
-          <a:fillRef idx="3">
-            <a:schemeClr val="accent1"/>
-          </a:fillRef>
-          <a:effectRef idx="2">
-            <a:schemeClr val="accent1"/>
-          </a:effectRef>
-          <a:fontRef idx="minor">
-            <a:schemeClr val="lt1"/>
-          </a:fontRef>
-        </p:style>
-        <p:txBody>
-          <a:bodyPr rtlCol="0" anchor="ctr"/>
-          <a:lstStyle/>
-          <a:p>
-            <a:pPr algn="ctr"/>
-          </a:p>
-        </p:txBody>
-      </p:sp>
-      <p:sp>
-        <p:nvSpPr>
-          <p:cNvPr id="6" name="TextBox 5"/>
-          <p:cNvSpPr txBox="1"/>
-          <p:nvPr/>
-        </p:nvSpPr>
-        <p:spPr>
-          <a:xfrm>
-            <a:off x="4736592" y="2377440"/>
-            <a:ext cx="658368" cy="822960"/>
-          </a:xfrm>
-          <a:prstGeom prst="rect">
-            <a:avLst/>
-          </a:prstGeom>
-          <a:noFill/>
-        </p:spPr>
-        <p:txBody>
-          <a:bodyPr wrap="square" lIns="0" rIns="0" tIns="0" bIns="0" anchor="ctr">
-            <a:spAutoFit/>
-          </a:bodyPr>
-          <a:lstStyle/>
-          <a:p>
-            <a:pPr algn="ctr"/>
-            <a:r>
-              <a:rPr sz="1200" b="1" i="0">
-                <a:solidFill>
-                  <a:srgbClr val="1B2336"/>
-                </a:solidFill>
-                <a:latin typeface="Calibri"/>
-              </a:rPr>
-              <a:t>Control week</a:t>
-            </a:r>
-          </a:p>
-        </p:txBody>
-      </p:sp>
-      <p:sp>
-        <p:nvSpPr>
-          <p:cNvPr id="7" name="Week 2"/>
-          <p:cNvSpPr/>
-          <p:nvPr/>
-        </p:nvSpPr>
-        <p:spPr>
-          <a:xfrm>
-            <a:off x="5495544" y="2377440"/>
-            <a:ext cx="713232" cy="822960"/>
-          </a:xfrm>
-          <a:prstGeom prst="roundRect">
-            <a:avLst>
-              <a:gd name="adj" fmla="val 10000"/>
+              <a:gd name="adj" fmla="val 8000"/>
             </a:avLst>
           </a:prstGeom>
           <a:solidFill>
@@ -4763,18 +5009,141 @@
       </p:sp>
       <p:sp>
         <p:nvSpPr>
-          <p:cNvPr id="8" name="Week 3"/>
+          <p:cNvPr id="5" name="Badge H1"/>
           <p:cNvSpPr/>
           <p:nvPr/>
         </p:nvSpPr>
         <p:spPr>
           <a:xfrm>
-            <a:off x="6281928" y="2377440"/>
-            <a:ext cx="713232" cy="822960"/>
+            <a:off x="4800600" y="1435607"/>
+            <a:ext cx="475488" cy="475488"/>
+          </a:xfrm>
+          <a:prstGeom prst="ellipse">
+            <a:avLst/>
+          </a:prstGeom>
+          <a:solidFill>
+            <a:srgbClr val="3B5BA9"/>
+          </a:solidFill>
+          <a:ln>
+            <a:noFill/>
+          </a:ln>
+          <a:effectLst/>
+        </p:spPr>
+        <p:style>
+          <a:lnRef idx="1">
+            <a:schemeClr val="accent1"/>
+          </a:lnRef>
+          <a:fillRef idx="3">
+            <a:schemeClr val="accent1"/>
+          </a:fillRef>
+          <a:effectRef idx="2">
+            <a:schemeClr val="accent1"/>
+          </a:effectRef>
+          <a:fontRef idx="minor">
+            <a:schemeClr val="lt1"/>
+          </a:fontRef>
+        </p:style>
+        <p:txBody>
+          <a:bodyPr rtlCol="0" anchor="ctr"/>
+          <a:lstStyle/>
+          <a:p>
+            <a:pPr algn="ctr"/>
+          </a:p>
+        </p:txBody>
+      </p:sp>
+      <p:sp>
+        <p:nvSpPr>
+          <p:cNvPr id="6" name="TextBox 5"/>
+          <p:cNvSpPr txBox="1"/>
+          <p:nvPr/>
+        </p:nvSpPr>
+        <p:spPr>
+          <a:xfrm>
+            <a:off x="4800600" y="1435607"/>
+            <a:ext cx="475488" cy="475488"/>
+          </a:xfrm>
+          <a:prstGeom prst="rect">
+            <a:avLst/>
+          </a:prstGeom>
+          <a:noFill/>
+        </p:spPr>
+        <p:txBody>
+          <a:bodyPr wrap="square" lIns="0" rIns="0" tIns="0" bIns="0" anchor="ctr">
+            <a:spAutoFit/>
+          </a:bodyPr>
+          <a:lstStyle/>
+          <a:p>
+            <a:pPr algn="ctr"/>
+            <a:r>
+              <a:rPr sz="1400" b="1" i="0">
+                <a:solidFill>
+                  <a:srgbClr val="FFFFFF"/>
+                </a:solidFill>
+                <a:latin typeface="Calibri"/>
+              </a:rPr>
+              <a:t>H1</a:t>
+            </a:r>
+          </a:p>
+        </p:txBody>
+      </p:sp>
+      <p:sp>
+        <p:nvSpPr>
+          <p:cNvPr id="7" name="TextBox 6"/>
+          <p:cNvSpPr txBox="1"/>
+          <p:nvPr/>
+        </p:nvSpPr>
+        <p:spPr>
+          <a:xfrm>
+            <a:off x="5394960" y="1325880"/>
+            <a:ext cx="3108960" cy="685800"/>
+          </a:xfrm>
+          <a:prstGeom prst="rect">
+            <a:avLst/>
+          </a:prstGeom>
+          <a:noFill/>
+        </p:spPr>
+        <p:txBody>
+          <a:bodyPr wrap="square" lIns="0" rIns="0" tIns="0" bIns="0" anchor="ctr">
+            <a:spAutoFit/>
+          </a:bodyPr>
+          <a:lstStyle/>
+          <a:p>
+            <a:pPr algn="l"/>
+            <a:r>
+              <a:rPr sz="1300" b="1" i="0">
+                <a:solidFill>
+                  <a:srgbClr val="0F2A6B"/>
+                </a:solidFill>
+                <a:latin typeface="Calibri"/>
+              </a:rPr>
+              <a:t>Magnitude. </a:t>
+            </a:r>
+            <a:r>
+              <a:rPr sz="1300" b="0" i="0">
+                <a:solidFill>
+                  <a:srgbClr val="1B2336"/>
+                </a:solidFill>
+                <a:latin typeface="Calibri"/>
+              </a:rPr>
+              <a:t>The spread moves more, in absolute terms, in roll weeks than in matched control weeks.</a:t>
+            </a:r>
+          </a:p>
+        </p:txBody>
+      </p:sp>
+      <p:sp>
+        <p:nvSpPr>
+          <p:cNvPr id="8" name="Hypothesis H2"/>
+          <p:cNvSpPr/>
+          <p:nvPr/>
+        </p:nvSpPr>
+        <p:spPr>
+          <a:xfrm>
+            <a:off x="4663440" y="2148839"/>
+            <a:ext cx="3931920" cy="777240"/>
           </a:xfrm>
           <a:prstGeom prst="roundRect">
             <a:avLst>
-              <a:gd name="adj" fmla="val 10000"/>
+              <a:gd name="adj" fmla="val 8000"/>
             </a:avLst>
           </a:prstGeom>
           <a:solidFill>
@@ -4811,18 +5180,141 @@
       </p:sp>
       <p:sp>
         <p:nvSpPr>
-          <p:cNvPr id="9" name="Week 4"/>
+          <p:cNvPr id="9" name="Badge H2"/>
           <p:cNvSpPr/>
           <p:nvPr/>
         </p:nvSpPr>
         <p:spPr>
           <a:xfrm>
-            <a:off x="7068312" y="2377440"/>
-            <a:ext cx="713232" cy="822960"/>
+            <a:off x="4800600" y="2304287"/>
+            <a:ext cx="475488" cy="475488"/>
+          </a:xfrm>
+          <a:prstGeom prst="ellipse">
+            <a:avLst/>
+          </a:prstGeom>
+          <a:solidFill>
+            <a:srgbClr val="3B5BA9"/>
+          </a:solidFill>
+          <a:ln>
+            <a:noFill/>
+          </a:ln>
+          <a:effectLst/>
+        </p:spPr>
+        <p:style>
+          <a:lnRef idx="1">
+            <a:schemeClr val="accent1"/>
+          </a:lnRef>
+          <a:fillRef idx="3">
+            <a:schemeClr val="accent1"/>
+          </a:fillRef>
+          <a:effectRef idx="2">
+            <a:schemeClr val="accent1"/>
+          </a:effectRef>
+          <a:fontRef idx="minor">
+            <a:schemeClr val="lt1"/>
+          </a:fontRef>
+        </p:style>
+        <p:txBody>
+          <a:bodyPr rtlCol="0" anchor="ctr"/>
+          <a:lstStyle/>
+          <a:p>
+            <a:pPr algn="ctr"/>
+          </a:p>
+        </p:txBody>
+      </p:sp>
+      <p:sp>
+        <p:nvSpPr>
+          <p:cNvPr id="10" name="TextBox 9"/>
+          <p:cNvSpPr txBox="1"/>
+          <p:nvPr/>
+        </p:nvSpPr>
+        <p:spPr>
+          <a:xfrm>
+            <a:off x="4800600" y="2304287"/>
+            <a:ext cx="475488" cy="475488"/>
+          </a:xfrm>
+          <a:prstGeom prst="rect">
+            <a:avLst/>
+          </a:prstGeom>
+          <a:noFill/>
+        </p:spPr>
+        <p:txBody>
+          <a:bodyPr wrap="square" lIns="0" rIns="0" tIns="0" bIns="0" anchor="ctr">
+            <a:spAutoFit/>
+          </a:bodyPr>
+          <a:lstStyle/>
+          <a:p>
+            <a:pPr algn="ctr"/>
+            <a:r>
+              <a:rPr sz="1400" b="1" i="0">
+                <a:solidFill>
+                  <a:srgbClr val="FFFFFF"/>
+                </a:solidFill>
+                <a:latin typeface="Calibri"/>
+              </a:rPr>
+              <a:t>H2</a:t>
+            </a:r>
+          </a:p>
+        </p:txBody>
+      </p:sp>
+      <p:sp>
+        <p:nvSpPr>
+          <p:cNvPr id="11" name="TextBox 10"/>
+          <p:cNvSpPr txBox="1"/>
+          <p:nvPr/>
+        </p:nvSpPr>
+        <p:spPr>
+          <a:xfrm>
+            <a:off x="5394960" y="2194559"/>
+            <a:ext cx="3108960" cy="685800"/>
+          </a:xfrm>
+          <a:prstGeom prst="rect">
+            <a:avLst/>
+          </a:prstGeom>
+          <a:noFill/>
+        </p:spPr>
+        <p:txBody>
+          <a:bodyPr wrap="square" lIns="0" rIns="0" tIns="0" bIns="0" anchor="ctr">
+            <a:spAutoFit/>
+          </a:bodyPr>
+          <a:lstStyle/>
+          <a:p>
+            <a:pPr algn="l"/>
+            <a:r>
+              <a:rPr sz="1300" b="1" i="0">
+                <a:solidFill>
+                  <a:srgbClr val="0F2A6B"/>
+                </a:solidFill>
+                <a:latin typeface="Calibri"/>
+              </a:rPr>
+              <a:t>Direction. </a:t>
+            </a:r>
+            <a:r>
+              <a:rPr sz="1300" b="0" i="0">
+                <a:solidFill>
+                  <a:srgbClr val="1B2336"/>
+                </a:solidFill>
+                <a:latin typeface="Calibri"/>
+              </a:rPr>
+              <a:t>The spread systematically rises or falls in roll weeks.</a:t>
+            </a:r>
+          </a:p>
+        </p:txBody>
+      </p:sp>
+      <p:sp>
+        <p:nvSpPr>
+          <p:cNvPr id="12" name="Hypothesis H3"/>
+          <p:cNvSpPr/>
+          <p:nvPr/>
+        </p:nvSpPr>
+        <p:spPr>
+          <a:xfrm>
+            <a:off x="4663440" y="3017520"/>
+            <a:ext cx="3931920" cy="777240"/>
           </a:xfrm>
           <a:prstGeom prst="roundRect">
             <a:avLst>
-              <a:gd name="adj" fmla="val 10000"/>
+              <a:gd name="adj" fmla="val 8000"/>
             </a:avLst>
           </a:prstGeom>
           <a:solidFill>
@@ -4859,27 +5351,23 @@
       </p:sp>
       <p:sp>
         <p:nvSpPr>
-          <p:cNvPr id="10" name="Week 5"/>
+          <p:cNvPr id="13" name="Badge H3"/>
           <p:cNvSpPr/>
           <p:nvPr/>
         </p:nvSpPr>
         <p:spPr>
           <a:xfrm>
-            <a:off x="7854696" y="2377440"/>
-            <a:ext cx="713232" cy="822960"/>
-          </a:xfrm>
-          <a:prstGeom prst="roundRect">
-            <a:avLst>
-              <a:gd name="adj" fmla="val 10000"/>
-            </a:avLst>
+            <a:off x="4800600" y="3172968"/>
+            <a:ext cx="475488" cy="475488"/>
+          </a:xfrm>
+          <a:prstGeom prst="ellipse">
+            <a:avLst/>
           </a:prstGeom>
           <a:solidFill>
-            <a:srgbClr val="3B5BA9"/>
+            <a:srgbClr val="7A869E"/>
           </a:solidFill>
-          <a:ln w="9525">
-            <a:solidFill>
-              <a:srgbClr val="3B5BA9"/>
-            </a:solidFill>
+          <a:ln>
+            <a:noFill/>
           </a:ln>
           <a:effectLst/>
         </p:spPr>
@@ -4907,14 +5395,14 @@
       </p:sp>
       <p:sp>
         <p:nvSpPr>
-          <p:cNvPr id="11" name="TextBox 10"/>
+          <p:cNvPr id="14" name="TextBox 13"/>
           <p:cNvSpPr txBox="1"/>
           <p:nvPr/>
         </p:nvSpPr>
         <p:spPr>
           <a:xfrm>
-            <a:off x="7882127" y="2377440"/>
-            <a:ext cx="658368" cy="822960"/>
+            <a:off x="4800600" y="3172968"/>
+            <a:ext cx="475488" cy="475488"/>
           </a:xfrm>
           <a:prstGeom prst="rect">
             <a:avLst/>
@@ -4929,36 +5417,84 @@
           <a:p>
             <a:pPr algn="ctr"/>
             <a:r>
-              <a:rPr sz="1200" b="1" i="0">
+              <a:rPr sz="1400" b="1" i="0">
                 <a:solidFill>
                   <a:srgbClr val="FFFFFF"/>
                 </a:solidFill>
                 <a:latin typeface="Calibri"/>
               </a:rPr>
-              <a:t>Roll week</a:t>
-            </a:r>
-          </a:p>
-        </p:txBody>
-      </p:sp>
-      <p:sp>
-        <p:nvSpPr>
-          <p:cNvPr id="12" name="Expiry flag"/>
+              <a:t>H3</a:t>
+            </a:r>
+          </a:p>
+        </p:txBody>
+      </p:sp>
+      <p:sp>
+        <p:nvSpPr>
+          <p:cNvPr id="15" name="TextBox 14"/>
+          <p:cNvSpPr txBox="1"/>
+          <p:nvPr/>
+        </p:nvSpPr>
+        <p:spPr>
+          <a:xfrm>
+            <a:off x="5394960" y="3063239"/>
+            <a:ext cx="3108960" cy="685800"/>
+          </a:xfrm>
+          <a:prstGeom prst="rect">
+            <a:avLst/>
+          </a:prstGeom>
+          <a:noFill/>
+        </p:spPr>
+        <p:txBody>
+          <a:bodyPr wrap="square" lIns="0" rIns="0" tIns="0" bIns="0" anchor="ctr">
+            <a:spAutoFit/>
+          </a:bodyPr>
+          <a:lstStyle/>
+          <a:p>
+            <a:pPr algn="l"/>
+            <a:r>
+              <a:rPr sz="1300" b="1" i="0">
+                <a:solidFill>
+                  <a:srgbClr val="0F2A6B"/>
+                </a:solidFill>
+                <a:latin typeface="Calibri"/>
+              </a:rPr>
+              <a:t>Cost. </a:t>
+            </a:r>
+            <a:r>
+              <a:rPr sz="1300" b="0" i="0">
+                <a:solidFill>
+                  <a:srgbClr val="1B2336"/>
+                </a:solidFill>
+                <a:latin typeface="Calibri"/>
+              </a:rPr>
+              <a:t>Only if H1 and H2 hold: turn the excess move into dollars per contract rolled.</a:t>
+            </a:r>
+          </a:p>
+        </p:txBody>
+      </p:sp>
+      <p:sp>
+        <p:nvSpPr>
+          <p:cNvPr id="16" name="Origin note"/>
           <p:cNvSpPr/>
           <p:nvPr/>
         </p:nvSpPr>
         <p:spPr>
           <a:xfrm>
-            <a:off x="8659367" y="2331720"/>
-            <a:ext cx="228600" cy="365760"/>
-          </a:xfrm>
-          <a:prstGeom prst="triangle">
-            <a:avLst/>
+            <a:off x="548640" y="4023360"/>
+            <a:ext cx="8046720" cy="731520"/>
+          </a:xfrm>
+          <a:prstGeom prst="roundRect">
+            <a:avLst>
+              <a:gd name="adj" fmla="val 8000"/>
+            </a:avLst>
           </a:prstGeom>
           <a:solidFill>
-            <a:srgbClr val="B5483A"/>
+            <a:srgbClr val="FFFFFF"/>
           </a:solidFill>
-          <a:ln>
-            <a:noFill/>
+          <a:ln w="9525">
+            <a:solidFill>
+              <a:srgbClr val="E3A71B"/>
+            </a:solidFill>
           </a:ln>
           <a:effectLst/>
         </p:spPr>
@@ -4986,14 +5522,14 @@
       </p:sp>
       <p:sp>
         <p:nvSpPr>
-          <p:cNvPr id="13" name="TextBox 12"/>
+          <p:cNvPr id="17" name="TextBox 16"/>
           <p:cNvSpPr txBox="1"/>
           <p:nvPr/>
         </p:nvSpPr>
         <p:spPr>
           <a:xfrm>
-            <a:off x="8366759" y="2834640"/>
-            <a:ext cx="822960" cy="274320"/>
+            <a:off x="731520" y="4023360"/>
+            <a:ext cx="7680960" cy="731520"/>
           </a:xfrm>
           <a:prstGeom prst="rect">
             <a:avLst/>
@@ -5001,90 +5537,29 @@
           <a:noFill/>
         </p:spPr>
         <p:txBody>
-          <a:bodyPr wrap="square" lIns="0" rIns="0" tIns="0" bIns="0" anchor="t">
+          <a:bodyPr wrap="square" lIns="0" rIns="0" tIns="0" bIns="0" anchor="ctr">
             <a:spAutoFit/>
           </a:bodyPr>
           <a:lstStyle/>
           <a:p>
-            <a:pPr algn="ctr"/>
-            <a:r>
-              <a:rPr sz="1200" b="1" i="0">
-                <a:solidFill>
-                  <a:srgbClr val="B5483A"/>
+            <a:pPr algn="l"/>
+            <a:r>
+              <a:rPr sz="1300" b="1" i="0">
+                <a:solidFill>
+                  <a:srgbClr val="0F2A6B"/>
                 </a:solidFill>
                 <a:latin typeface="Calibri"/>
               </a:rPr>
-              <a:t>Expiry</a:t>
-            </a:r>
-          </a:p>
-        </p:txBody>
-      </p:sp>
-      <p:sp>
-        <p:nvSpPr>
-          <p:cNvPr id="14" name="TextBox 13"/>
-          <p:cNvSpPr txBox="1"/>
-          <p:nvPr/>
-        </p:nvSpPr>
-        <p:spPr>
-          <a:xfrm>
-            <a:off x="4709160" y="3337560"/>
-            <a:ext cx="3566160" cy="320040"/>
-          </a:xfrm>
-          <a:prstGeom prst="rect">
-            <a:avLst/>
-          </a:prstGeom>
-          <a:noFill/>
-        </p:spPr>
-        <p:txBody>
-          <a:bodyPr wrap="square" lIns="0" rIns="0" tIns="0" bIns="0" anchor="t">
-            <a:spAutoFit/>
-          </a:bodyPr>
-          <a:lstStyle/>
-          <a:p>
-            <a:pPr algn="ctr"/>
-            <a:r>
-              <a:rPr sz="1200" b="0" i="0">
+              <a:t>Where the idea came from. </a:t>
+            </a:r>
+            <a:r>
+              <a:rPr sz="1300" b="0" i="0">
                 <a:solidFill>
                   <a:srgbClr val="1B2336"/>
                 </a:solidFill>
                 <a:latin typeface="Calibri"/>
               </a:rPr>
-              <a:t>4 weeks apart</a:t>
-            </a:r>
-          </a:p>
-        </p:txBody>
-      </p:sp>
-      <p:sp>
-        <p:nvSpPr>
-          <p:cNvPr id="15" name="TextBox 14"/>
-          <p:cNvSpPr txBox="1"/>
-          <p:nvPr/>
-        </p:nvSpPr>
-        <p:spPr>
-          <a:xfrm>
-            <a:off x="4709160" y="3703320"/>
-            <a:ext cx="4023360" cy="548640"/>
-          </a:xfrm>
-          <a:prstGeom prst="rect">
-            <a:avLst/>
-          </a:prstGeom>
-          <a:noFill/>
-        </p:spPr>
-        <p:txBody>
-          <a:bodyPr wrap="square" lIns="0" rIns="0" tIns="0" bIns="0" anchor="t">
-            <a:spAutoFit/>
-          </a:bodyPr>
-          <a:lstStyle/>
-          <a:p>
-            <a:pPr algn="l"/>
-            <a:r>
-              <a:rPr sz="1200" b="0" i="0">
-                <a:solidFill>
-                  <a:srgbClr val="7A869E"/>
-                </a:solidFill>
-                <a:latin typeface="Calibri"/>
-              </a:rPr>
-              <a:t>Each window: Friday 10:00 snapshot to Friday 10:00 snapshot</a:t>
+              <a:t>A quick look at the 8 most recent rolls suggested the spread rose in every roll week. Under our final definitions it rose in 4 of 8, so those rolls stay exploratory and cannot also be the test.</a:t>
             </a:r>
           </a:p>
         </p:txBody>
@@ -5145,25 +5620,270 @@
                 </a:solidFill>
                 <a:latin typeface="Cambria"/>
               </a:rPr>
-              <a:t>What we built</a:t>
-            </a:r>
-          </a:p>
-        </p:txBody>
-      </p:sp>
-      <p:sp>
-        <p:nvSpPr>
-          <p:cNvPr id="3" name="Step Data"/>
+              <a:t>How we test it</a:t>
+            </a:r>
+          </a:p>
+        </p:txBody>
+      </p:sp>
+      <p:sp>
+        <p:nvSpPr>
+          <p:cNvPr id="3" name="Method bullets"/>
+          <p:cNvSpPr txBox="1"/>
+          <p:nvPr/>
+        </p:nvSpPr>
+        <p:spPr>
+          <a:xfrm>
+            <a:off x="548640" y="1280160"/>
+            <a:ext cx="3931920" cy="2331720"/>
+          </a:xfrm>
+          <a:prstGeom prst="rect">
+            <a:avLst/>
+          </a:prstGeom>
+          <a:noFill/>
+        </p:spPr>
+        <p:txBody>
+          <a:bodyPr wrap="square" lIns="0" rIns="0" tIns="0" bIns="0" anchor="t">
+            <a:spAutoFit/>
+          </a:bodyPr>
+          <a:lstStyle/>
+          <a:p>
+            <a:pPr algn="l" marL="201168" indent="-201168">
+              <a:spcAft>
+                <a:spcPts val="800"/>
+              </a:spcAft>
+              <a:buChar char="•"/>
+            </a:pPr>
+            <a:r>
+              <a:rPr sz="1400" b="1" i="0">
+                <a:solidFill>
+                  <a:srgbClr val="0F2A6B"/>
+                </a:solidFill>
+                <a:latin typeface="Calibri"/>
+              </a:rPr>
+              <a:t>Spread, in ticks.</a:t>
+            </a:r>
+            <a:r>
+              <a:rPr sz="1400" b="0" i="0">
+                <a:solidFill>
+                  <a:srgbClr val="1B2336"/>
+                </a:solidFill>
+                <a:latin typeface="Calibri"/>
+              </a:rPr>
+              <a:t> Deferred midpoint minus front midpoint, from the bid and ask at 10:00 Chicago each weekday.</a:t>
+            </a:r>
+          </a:p>
+          <a:p>
+            <a:pPr algn="l" marL="201168" indent="-201168">
+              <a:spcAft>
+                <a:spcPts val="800"/>
+              </a:spcAft>
+              <a:buChar char="•"/>
+            </a:pPr>
+            <a:r>
+              <a:rPr sz="1400" b="1" i="0">
+                <a:solidFill>
+                  <a:srgbClr val="0F2A6B"/>
+                </a:solidFill>
+                <a:latin typeface="Calibri"/>
+              </a:rPr>
+              <a:t>Net move per window.</a:t>
+            </a:r>
+            <a:r>
+              <a:rPr sz="1400" b="0" i="0">
+                <a:solidFill>
+                  <a:srgbClr val="1B2336"/>
+                </a:solidFill>
+                <a:latin typeface="Calibri"/>
+              </a:rPr>
+              <a:t> Friday 10:00 snapshot to the next Friday 10:00 snapshot.</a:t>
+            </a:r>
+          </a:p>
+          <a:p>
+            <a:pPr algn="l" marL="201168" indent="-201168">
+              <a:spcAft>
+                <a:spcPts val="800"/>
+              </a:spcAft>
+              <a:buChar char="•"/>
+            </a:pPr>
+            <a:r>
+              <a:rPr sz="1400" b="1" i="0">
+                <a:solidFill>
+                  <a:srgbClr val="0F2A6B"/>
+                </a:solidFill>
+                <a:latin typeface="Calibri"/>
+              </a:rPr>
+              <a:t>Test statistic.</a:t>
+            </a:r>
+            <a:r>
+              <a:rPr sz="1400" b="0" i="0">
+                <a:solidFill>
+                  <a:srgbClr val="1B2336"/>
+                </a:solidFill>
+                <a:latin typeface="Calibri"/>
+              </a:rPr>
+              <a:t> d = |net roll-week move| minus |net control-week move|, one number per roll.</a:t>
+            </a:r>
+          </a:p>
+          <a:p>
+            <a:pPr algn="l" marL="201168" indent="-201168">
+              <a:spcAft>
+                <a:spcPts val="800"/>
+              </a:spcAft>
+              <a:buChar char="•"/>
+            </a:pPr>
+            <a:r>
+              <a:rPr sz="1400" b="1" i="0">
+                <a:solidFill>
+                  <a:srgbClr val="0F2A6B"/>
+                </a:solidFill>
+                <a:latin typeface="Calibri"/>
+              </a:rPr>
+              <a:t>Held out.</a:t>
+            </a:r>
+            <a:r>
+              <a:rPr sz="1400" b="0" i="0">
+                <a:solidFill>
+                  <a:srgbClr val="1B2336"/>
+                </a:solidFill>
+                <a:latin typeface="Calibri"/>
+              </a:rPr>
+              <a:t> 57 rolls from 2010 to 2024 for the test. The 8 recent rolls are exploratory only.</a:t>
+            </a:r>
+          </a:p>
+        </p:txBody>
+      </p:sp>
+      <p:sp>
+        <p:nvSpPr>
+          <p:cNvPr id="4" name="TextBox 3"/>
+          <p:cNvSpPr txBox="1"/>
+          <p:nvPr/>
+        </p:nvSpPr>
+        <p:spPr>
+          <a:xfrm>
+            <a:off x="4663440" y="1691640"/>
+            <a:ext cx="3840480" cy="320040"/>
+          </a:xfrm>
+          <a:prstGeom prst="rect">
+            <a:avLst/>
+          </a:prstGeom>
+          <a:noFill/>
+        </p:spPr>
+        <p:txBody>
+          <a:bodyPr wrap="square" lIns="0" rIns="0" tIns="0" bIns="0" anchor="t">
+            <a:spAutoFit/>
+          </a:bodyPr>
+          <a:lstStyle/>
+          <a:p>
+            <a:pPr algn="l"/>
+            <a:r>
+              <a:rPr sz="1200" b="0" i="0">
+                <a:solidFill>
+                  <a:srgbClr val="7A869E"/>
+                </a:solidFill>
+                <a:latin typeface="Calibri"/>
+              </a:rPr>
+              <a:t>Weeks before expiry</a:t>
+            </a:r>
+          </a:p>
+        </p:txBody>
+      </p:sp>
+      <p:sp>
+        <p:nvSpPr>
+          <p:cNvPr id="5" name="Week 1"/>
           <p:cNvSpPr/>
           <p:nvPr/>
         </p:nvSpPr>
         <p:spPr>
           <a:xfrm>
-            <a:off x="548640" y="1417320"/>
-            <a:ext cx="1463040" cy="1600200"/>
+            <a:off x="4663440" y="2240280"/>
+            <a:ext cx="676656" cy="777240"/>
           </a:xfrm>
           <a:prstGeom prst="roundRect">
             <a:avLst>
-              <a:gd name="adj" fmla="val 7000"/>
+              <a:gd name="adj" fmla="val 10000"/>
+            </a:avLst>
+          </a:prstGeom>
+          <a:solidFill>
+            <a:srgbClr val="E3A71B"/>
+          </a:solidFill>
+          <a:ln w="9525">
+            <a:solidFill>
+              <a:srgbClr val="E3A71B"/>
+            </a:solidFill>
+          </a:ln>
+          <a:effectLst/>
+        </p:spPr>
+        <p:style>
+          <a:lnRef idx="1">
+            <a:schemeClr val="accent1"/>
+          </a:lnRef>
+          <a:fillRef idx="3">
+            <a:schemeClr val="accent1"/>
+          </a:fillRef>
+          <a:effectRef idx="2">
+            <a:schemeClr val="accent1"/>
+          </a:effectRef>
+          <a:fontRef idx="minor">
+            <a:schemeClr val="lt1"/>
+          </a:fontRef>
+        </p:style>
+        <p:txBody>
+          <a:bodyPr rtlCol="0" anchor="ctr"/>
+          <a:lstStyle/>
+          <a:p>
+            <a:pPr algn="ctr"/>
+          </a:p>
+        </p:txBody>
+      </p:sp>
+      <p:sp>
+        <p:nvSpPr>
+          <p:cNvPr id="6" name="TextBox 5"/>
+          <p:cNvSpPr txBox="1"/>
+          <p:nvPr/>
+        </p:nvSpPr>
+        <p:spPr>
+          <a:xfrm>
+            <a:off x="4690872" y="2240280"/>
+            <a:ext cx="621792" cy="777240"/>
+          </a:xfrm>
+          <a:prstGeom prst="rect">
+            <a:avLst/>
+          </a:prstGeom>
+          <a:noFill/>
+        </p:spPr>
+        <p:txBody>
+          <a:bodyPr wrap="square" lIns="0" rIns="0" tIns="0" bIns="0" anchor="ctr">
+            <a:spAutoFit/>
+          </a:bodyPr>
+          <a:lstStyle/>
+          <a:p>
+            <a:pPr algn="ctr"/>
+            <a:r>
+              <a:rPr sz="1200" b="1" i="0">
+                <a:solidFill>
+                  <a:srgbClr val="1B2336"/>
+                </a:solidFill>
+                <a:latin typeface="Calibri"/>
+              </a:rPr>
+              <a:t>Control week</a:t>
+            </a:r>
+          </a:p>
+        </p:txBody>
+      </p:sp>
+      <p:sp>
+        <p:nvSpPr>
+          <p:cNvPr id="7" name="Week 2"/>
+          <p:cNvSpPr/>
+          <p:nvPr/>
+        </p:nvSpPr>
+        <p:spPr>
+          <a:xfrm>
+            <a:off x="5413248" y="2240280"/>
+            <a:ext cx="676656" cy="777240"/>
+          </a:xfrm>
+          <a:prstGeom prst="roundRect">
+            <a:avLst>
+              <a:gd name="adj" fmla="val 10000"/>
             </a:avLst>
           </a:prstGeom>
           <a:solidFill>
@@ -5200,204 +5920,18 @@
       </p:sp>
       <p:sp>
         <p:nvSpPr>
-          <p:cNvPr id="4" name="TextBox 3"/>
-          <p:cNvSpPr txBox="1"/>
-          <p:nvPr/>
-        </p:nvSpPr>
-        <p:spPr>
-          <a:xfrm>
-            <a:off x="640080" y="1527048"/>
-            <a:ext cx="1280160" cy="365760"/>
-          </a:xfrm>
-          <a:prstGeom prst="rect">
-            <a:avLst/>
-          </a:prstGeom>
-          <a:noFill/>
-        </p:spPr>
-        <p:txBody>
-          <a:bodyPr wrap="square" lIns="0" rIns="0" tIns="0" bIns="0" anchor="t">
-            <a:spAutoFit/>
-          </a:bodyPr>
-          <a:lstStyle/>
-          <a:p>
-            <a:pPr algn="l"/>
-            <a:r>
-              <a:rPr sz="1600" b="1" i="0">
-                <a:solidFill>
-                  <a:srgbClr val="0F2A6B"/>
-                </a:solidFill>
-                <a:latin typeface="Cambria"/>
-              </a:rPr>
-              <a:t>Data</a:t>
-            </a:r>
-          </a:p>
-        </p:txBody>
-      </p:sp>
-      <p:sp>
-        <p:nvSpPr>
-          <p:cNvPr id="5" name="TextBox 4"/>
-          <p:cNvSpPr txBox="1"/>
-          <p:nvPr/>
-        </p:nvSpPr>
-        <p:spPr>
-          <a:xfrm>
-            <a:off x="640080" y="1920240"/>
-            <a:ext cx="1280160" cy="640080"/>
-          </a:xfrm>
-          <a:prstGeom prst="rect">
-            <a:avLst/>
-          </a:prstGeom>
-          <a:noFill/>
-        </p:spPr>
-        <p:txBody>
-          <a:bodyPr wrap="square" lIns="0" rIns="0" tIns="0" bIns="0" anchor="t">
-            <a:spAutoFit/>
-          </a:bodyPr>
-          <a:lstStyle/>
-          <a:p>
-            <a:pPr algn="l"/>
-            <a:r>
-              <a:rPr sz="1200" b="0" i="0">
-                <a:solidFill>
-                  <a:srgbClr val="1B2336"/>
-                </a:solidFill>
-                <a:latin typeface="Calibri"/>
-              </a:rPr>
-              <a:t>Databento download with a local cache</a:t>
-            </a:r>
-          </a:p>
-        </p:txBody>
-      </p:sp>
-      <p:sp>
-        <p:nvSpPr>
-          <p:cNvPr id="6" name="Status Data"/>
+          <p:cNvPr id="8" name="Week 3"/>
           <p:cNvSpPr/>
           <p:nvPr/>
         </p:nvSpPr>
         <p:spPr>
           <a:xfrm>
-            <a:off x="640080" y="2606039"/>
-            <a:ext cx="868680" cy="274320"/>
+            <a:off x="6163055" y="2240280"/>
+            <a:ext cx="676656" cy="777240"/>
           </a:xfrm>
           <a:prstGeom prst="roundRect">
             <a:avLst>
-              <a:gd name="adj" fmla="val 50000"/>
-            </a:avLst>
-          </a:prstGeom>
-          <a:solidFill>
-            <a:srgbClr val="2E8B6E"/>
-          </a:solidFill>
-          <a:ln>
-            <a:noFill/>
-          </a:ln>
-          <a:effectLst/>
-        </p:spPr>
-        <p:style>
-          <a:lnRef idx="1">
-            <a:schemeClr val="accent1"/>
-          </a:lnRef>
-          <a:fillRef idx="3">
-            <a:schemeClr val="accent1"/>
-          </a:fillRef>
-          <a:effectRef idx="2">
-            <a:schemeClr val="accent1"/>
-          </a:effectRef>
-          <a:fontRef idx="minor">
-            <a:schemeClr val="lt1"/>
-          </a:fontRef>
-        </p:style>
-        <p:txBody>
-          <a:bodyPr rtlCol="0" anchor="ctr"/>
-          <a:lstStyle/>
-          <a:p>
-            <a:pPr algn="ctr"/>
-          </a:p>
-        </p:txBody>
-      </p:sp>
-      <p:sp>
-        <p:nvSpPr>
-          <p:cNvPr id="7" name="TextBox 6"/>
-          <p:cNvSpPr txBox="1"/>
-          <p:nvPr/>
-        </p:nvSpPr>
-        <p:spPr>
-          <a:xfrm>
-            <a:off x="640080" y="2606039"/>
-            <a:ext cx="868680" cy="274320"/>
-          </a:xfrm>
-          <a:prstGeom prst="rect">
-            <a:avLst/>
-          </a:prstGeom>
-          <a:noFill/>
-        </p:spPr>
-        <p:txBody>
-          <a:bodyPr wrap="square" lIns="0" rIns="0" tIns="0" bIns="0" anchor="ctr">
-            <a:spAutoFit/>
-          </a:bodyPr>
-          <a:lstStyle/>
-          <a:p>
-            <a:pPr algn="ctr"/>
-            <a:r>
-              <a:rPr sz="1100" b="1" i="0">
-                <a:solidFill>
-                  <a:srgbClr val="FFFFFF"/>
-                </a:solidFill>
-                <a:latin typeface="Calibri"/>
-              </a:rPr>
-              <a:t>merged</a:t>
-            </a:r>
-          </a:p>
-        </p:txBody>
-      </p:sp>
-      <p:sp>
-        <p:nvSpPr>
-          <p:cNvPr id="8" name="TextBox 7"/>
-          <p:cNvSpPr txBox="1"/>
-          <p:nvPr/>
-        </p:nvSpPr>
-        <p:spPr>
-          <a:xfrm>
-            <a:off x="1938528" y="1920240"/>
-            <a:ext cx="329184" cy="457200"/>
-          </a:xfrm>
-          <a:prstGeom prst="rect">
-            <a:avLst/>
-          </a:prstGeom>
-          <a:noFill/>
-        </p:spPr>
-        <p:txBody>
-          <a:bodyPr wrap="square" lIns="0" rIns="0" tIns="0" bIns="0" anchor="t">
-            <a:spAutoFit/>
-          </a:bodyPr>
-          <a:lstStyle/>
-          <a:p>
-            <a:pPr algn="ctr"/>
-            <a:r>
-              <a:rPr sz="1600" b="0" i="0">
-                <a:solidFill>
-                  <a:srgbClr val="7A869E"/>
-                </a:solidFill>
-                <a:latin typeface="Calibri"/>
-              </a:rPr>
-              <a:t>→</a:t>
-            </a:r>
-          </a:p>
-        </p:txBody>
-      </p:sp>
-      <p:sp>
-        <p:nvSpPr>
-          <p:cNvPr id="9" name="Step Roll calendar"/>
-          <p:cNvSpPr/>
-          <p:nvPr/>
-        </p:nvSpPr>
-        <p:spPr>
-          <a:xfrm>
-            <a:off x="2194560" y="1417320"/>
-            <a:ext cx="1463040" cy="1600200"/>
-          </a:xfrm>
-          <a:prstGeom prst="roundRect">
-            <a:avLst>
-              <a:gd name="adj" fmla="val 7000"/>
+              <a:gd name="adj" fmla="val 10000"/>
             </a:avLst>
           </a:prstGeom>
           <a:solidFill>
@@ -5434,204 +5968,18 @@
       </p:sp>
       <p:sp>
         <p:nvSpPr>
-          <p:cNvPr id="10" name="TextBox 9"/>
-          <p:cNvSpPr txBox="1"/>
-          <p:nvPr/>
-        </p:nvSpPr>
-        <p:spPr>
-          <a:xfrm>
-            <a:off x="2286000" y="1527048"/>
-            <a:ext cx="1280160" cy="365760"/>
-          </a:xfrm>
-          <a:prstGeom prst="rect">
-            <a:avLst/>
-          </a:prstGeom>
-          <a:noFill/>
-        </p:spPr>
-        <p:txBody>
-          <a:bodyPr wrap="square" lIns="0" rIns="0" tIns="0" bIns="0" anchor="t">
-            <a:spAutoFit/>
-          </a:bodyPr>
-          <a:lstStyle/>
-          <a:p>
-            <a:pPr algn="l"/>
-            <a:r>
-              <a:rPr sz="1600" b="1" i="0">
-                <a:solidFill>
-                  <a:srgbClr val="0F2A6B"/>
-                </a:solidFill>
-                <a:latin typeface="Cambria"/>
-              </a:rPr>
-              <a:t>Roll calendar</a:t>
-            </a:r>
-          </a:p>
-        </p:txBody>
-      </p:sp>
-      <p:sp>
-        <p:nvSpPr>
-          <p:cNvPr id="11" name="TextBox 10"/>
-          <p:cNvSpPr txBox="1"/>
-          <p:nvPr/>
-        </p:nvSpPr>
-        <p:spPr>
-          <a:xfrm>
-            <a:off x="2286000" y="1920240"/>
-            <a:ext cx="1280160" cy="640080"/>
-          </a:xfrm>
-          <a:prstGeom prst="rect">
-            <a:avLst/>
-          </a:prstGeom>
-          <a:noFill/>
-        </p:spPr>
-        <p:txBody>
-          <a:bodyPr wrap="square" lIns="0" rIns="0" tIns="0" bIns="0" anchor="t">
-            <a:spAutoFit/>
-          </a:bodyPr>
-          <a:lstStyle/>
-          <a:p>
-            <a:pPr algn="l"/>
-            <a:r>
-              <a:rPr sz="1200" b="0" i="0">
-                <a:solidFill>
-                  <a:srgbClr val="1B2336"/>
-                </a:solidFill>
-                <a:latin typeface="Calibri"/>
-              </a:rPr>
-              <a:t>Expiries, with CME holidays</a:t>
-            </a:r>
-          </a:p>
-        </p:txBody>
-      </p:sp>
-      <p:sp>
-        <p:nvSpPr>
-          <p:cNvPr id="12" name="Status Roll calendar"/>
+          <p:cNvPr id="9" name="Week 4"/>
           <p:cNvSpPr/>
           <p:nvPr/>
         </p:nvSpPr>
         <p:spPr>
           <a:xfrm>
-            <a:off x="2286000" y="2606039"/>
-            <a:ext cx="868680" cy="274320"/>
+            <a:off x="6912864" y="2240280"/>
+            <a:ext cx="676656" cy="777240"/>
           </a:xfrm>
           <a:prstGeom prst="roundRect">
             <a:avLst>
-              <a:gd name="adj" fmla="val 50000"/>
-            </a:avLst>
-          </a:prstGeom>
-          <a:solidFill>
-            <a:srgbClr val="2E8B6E"/>
-          </a:solidFill>
-          <a:ln>
-            <a:noFill/>
-          </a:ln>
-          <a:effectLst/>
-        </p:spPr>
-        <p:style>
-          <a:lnRef idx="1">
-            <a:schemeClr val="accent1"/>
-          </a:lnRef>
-          <a:fillRef idx="3">
-            <a:schemeClr val="accent1"/>
-          </a:fillRef>
-          <a:effectRef idx="2">
-            <a:schemeClr val="accent1"/>
-          </a:effectRef>
-          <a:fontRef idx="minor">
-            <a:schemeClr val="lt1"/>
-          </a:fontRef>
-        </p:style>
-        <p:txBody>
-          <a:bodyPr rtlCol="0" anchor="ctr"/>
-          <a:lstStyle/>
-          <a:p>
-            <a:pPr algn="ctr"/>
-          </a:p>
-        </p:txBody>
-      </p:sp>
-      <p:sp>
-        <p:nvSpPr>
-          <p:cNvPr id="13" name="TextBox 12"/>
-          <p:cNvSpPr txBox="1"/>
-          <p:nvPr/>
-        </p:nvSpPr>
-        <p:spPr>
-          <a:xfrm>
-            <a:off x="2286000" y="2606039"/>
-            <a:ext cx="868680" cy="274320"/>
-          </a:xfrm>
-          <a:prstGeom prst="rect">
-            <a:avLst/>
-          </a:prstGeom>
-          <a:noFill/>
-        </p:spPr>
-        <p:txBody>
-          <a:bodyPr wrap="square" lIns="0" rIns="0" tIns="0" bIns="0" anchor="ctr">
-            <a:spAutoFit/>
-          </a:bodyPr>
-          <a:lstStyle/>
-          <a:p>
-            <a:pPr algn="ctr"/>
-            <a:r>
-              <a:rPr sz="1100" b="1" i="0">
-                <a:solidFill>
-                  <a:srgbClr val="FFFFFF"/>
-                </a:solidFill>
-                <a:latin typeface="Calibri"/>
-              </a:rPr>
-              <a:t>merged</a:t>
-            </a:r>
-          </a:p>
-        </p:txBody>
-      </p:sp>
-      <p:sp>
-        <p:nvSpPr>
-          <p:cNvPr id="14" name="TextBox 13"/>
-          <p:cNvSpPr txBox="1"/>
-          <p:nvPr/>
-        </p:nvSpPr>
-        <p:spPr>
-          <a:xfrm>
-            <a:off x="3584448" y="1920240"/>
-            <a:ext cx="329184" cy="457200"/>
-          </a:xfrm>
-          <a:prstGeom prst="rect">
-            <a:avLst/>
-          </a:prstGeom>
-          <a:noFill/>
-        </p:spPr>
-        <p:txBody>
-          <a:bodyPr wrap="square" lIns="0" rIns="0" tIns="0" bIns="0" anchor="t">
-            <a:spAutoFit/>
-          </a:bodyPr>
-          <a:lstStyle/>
-          <a:p>
-            <a:pPr algn="ctr"/>
-            <a:r>
-              <a:rPr sz="1600" b="0" i="0">
-                <a:solidFill>
-                  <a:srgbClr val="7A869E"/>
-                </a:solidFill>
-                <a:latin typeface="Calibri"/>
-              </a:rPr>
-              <a:t>→</a:t>
-            </a:r>
-          </a:p>
-        </p:txBody>
-      </p:sp>
-      <p:sp>
-        <p:nvSpPr>
-          <p:cNvPr id="15" name="Step Windows"/>
-          <p:cNvSpPr/>
-          <p:nvPr/>
-        </p:nvSpPr>
-        <p:spPr>
-          <a:xfrm>
-            <a:off x="3840480" y="1417320"/>
-            <a:ext cx="1463040" cy="1600200"/>
-          </a:xfrm>
-          <a:prstGeom prst="roundRect">
-            <a:avLst>
-              <a:gd name="adj" fmla="val 7000"/>
+              <a:gd name="adj" fmla="val 10000"/>
             </a:avLst>
           </a:prstGeom>
           <a:solidFill>
@@ -5668,14 +6016,62 @@
       </p:sp>
       <p:sp>
         <p:nvSpPr>
-          <p:cNvPr id="16" name="TextBox 15"/>
+          <p:cNvPr id="10" name="Week 5"/>
+          <p:cNvSpPr/>
+          <p:nvPr/>
+        </p:nvSpPr>
+        <p:spPr>
+          <a:xfrm>
+            <a:off x="7662671" y="2240280"/>
+            <a:ext cx="676656" cy="777240"/>
+          </a:xfrm>
+          <a:prstGeom prst="roundRect">
+            <a:avLst>
+              <a:gd name="adj" fmla="val 10000"/>
+            </a:avLst>
+          </a:prstGeom>
+          <a:solidFill>
+            <a:srgbClr val="3B5BA9"/>
+          </a:solidFill>
+          <a:ln w="9525">
+            <a:solidFill>
+              <a:srgbClr val="3B5BA9"/>
+            </a:solidFill>
+          </a:ln>
+          <a:effectLst/>
+        </p:spPr>
+        <p:style>
+          <a:lnRef idx="1">
+            <a:schemeClr val="accent1"/>
+          </a:lnRef>
+          <a:fillRef idx="3">
+            <a:schemeClr val="accent1"/>
+          </a:fillRef>
+          <a:effectRef idx="2">
+            <a:schemeClr val="accent1"/>
+          </a:effectRef>
+          <a:fontRef idx="minor">
+            <a:schemeClr val="lt1"/>
+          </a:fontRef>
+        </p:style>
+        <p:txBody>
+          <a:bodyPr rtlCol="0" anchor="ctr"/>
+          <a:lstStyle/>
+          <a:p>
+            <a:pPr algn="ctr"/>
+          </a:p>
+        </p:txBody>
+      </p:sp>
+      <p:sp>
+        <p:nvSpPr>
+          <p:cNvPr id="11" name="TextBox 10"/>
           <p:cNvSpPr txBox="1"/>
           <p:nvPr/>
         </p:nvSpPr>
         <p:spPr>
           <a:xfrm>
-            <a:off x="3931920" y="1527048"/>
-            <a:ext cx="1280160" cy="365760"/>
+            <a:off x="7690103" y="2240280"/>
+            <a:ext cx="621792" cy="777240"/>
           </a:xfrm>
           <a:prstGeom prst="rect">
             <a:avLst/>
@@ -5683,77 +6079,40 @@
           <a:noFill/>
         </p:spPr>
         <p:txBody>
-          <a:bodyPr wrap="square" lIns="0" rIns="0" tIns="0" bIns="0" anchor="t">
+          <a:bodyPr wrap="square" lIns="0" rIns="0" tIns="0" bIns="0" anchor="ctr">
             <a:spAutoFit/>
           </a:bodyPr>
           <a:lstStyle/>
           <a:p>
-            <a:pPr algn="l"/>
-            <a:r>
-              <a:rPr sz="1600" b="1" i="0">
-                <a:solidFill>
-                  <a:srgbClr val="0F2A6B"/>
-                </a:solidFill>
-                <a:latin typeface="Cambria"/>
-              </a:rPr>
-              <a:t>Windows</a:t>
-            </a:r>
-          </a:p>
-        </p:txBody>
-      </p:sp>
-      <p:sp>
-        <p:nvSpPr>
-          <p:cNvPr id="17" name="TextBox 16"/>
-          <p:cNvSpPr txBox="1"/>
-          <p:nvPr/>
-        </p:nvSpPr>
-        <p:spPr>
-          <a:xfrm>
-            <a:off x="3931920" y="1920240"/>
-            <a:ext cx="1280160" cy="640080"/>
-          </a:xfrm>
-          <a:prstGeom prst="rect">
-            <a:avLst/>
-          </a:prstGeom>
-          <a:noFill/>
-        </p:spPr>
-        <p:txBody>
-          <a:bodyPr wrap="square" lIns="0" rIns="0" tIns="0" bIns="0" anchor="t">
-            <a:spAutoFit/>
-          </a:bodyPr>
-          <a:lstStyle/>
-          <a:p>
-            <a:pPr algn="l"/>
-            <a:r>
-              <a:rPr sz="1200" b="0" i="0">
-                <a:solidFill>
-                  <a:srgbClr val="1B2336"/>
+            <a:pPr algn="ctr"/>
+            <a:r>
+              <a:rPr sz="1200" b="1" i="0">
+                <a:solidFill>
+                  <a:srgbClr val="FFFFFF"/>
                 </a:solidFill>
                 <a:latin typeface="Calibri"/>
               </a:rPr>
-              <a:t>Roll and control weeks</a:t>
-            </a:r>
-          </a:p>
-        </p:txBody>
-      </p:sp>
-      <p:sp>
-        <p:nvSpPr>
-          <p:cNvPr id="18" name="Status Windows"/>
+              <a:t>Roll week</a:t>
+            </a:r>
+          </a:p>
+        </p:txBody>
+      </p:sp>
+      <p:sp>
+        <p:nvSpPr>
+          <p:cNvPr id="12" name="Expiry flag"/>
           <p:cNvSpPr/>
           <p:nvPr/>
         </p:nvSpPr>
         <p:spPr>
           <a:xfrm>
-            <a:off x="3931920" y="2606039"/>
-            <a:ext cx="868680" cy="274320"/>
-          </a:xfrm>
-          <a:prstGeom prst="roundRect">
-            <a:avLst>
-              <a:gd name="adj" fmla="val 50000"/>
-            </a:avLst>
+            <a:off x="8430767" y="2194560"/>
+            <a:ext cx="228600" cy="365760"/>
+          </a:xfrm>
+          <a:prstGeom prst="triangle">
+            <a:avLst/>
           </a:prstGeom>
           <a:solidFill>
-            <a:srgbClr val="2E8B6E"/>
+            <a:srgbClr val="B5483A"/>
           </a:solidFill>
           <a:ln>
             <a:noFill/>
@@ -5784,49 +6143,14 @@
       </p:sp>
       <p:sp>
         <p:nvSpPr>
-          <p:cNvPr id="19" name="TextBox 18"/>
+          <p:cNvPr id="13" name="TextBox 12"/>
           <p:cNvSpPr txBox="1"/>
           <p:nvPr/>
         </p:nvSpPr>
         <p:spPr>
           <a:xfrm>
-            <a:off x="3931920" y="2606039"/>
-            <a:ext cx="868680" cy="274320"/>
-          </a:xfrm>
-          <a:prstGeom prst="rect">
-            <a:avLst/>
-          </a:prstGeom>
-          <a:noFill/>
-        </p:spPr>
-        <p:txBody>
-          <a:bodyPr wrap="square" lIns="0" rIns="0" tIns="0" bIns="0" anchor="ctr">
-            <a:spAutoFit/>
-          </a:bodyPr>
-          <a:lstStyle/>
-          <a:p>
-            <a:pPr algn="ctr"/>
-            <a:r>
-              <a:rPr sz="1100" b="1" i="0">
-                <a:solidFill>
-                  <a:srgbClr val="FFFFFF"/>
-                </a:solidFill>
-                <a:latin typeface="Calibri"/>
-              </a:rPr>
-              <a:t>merged</a:t>
-            </a:r>
-          </a:p>
-        </p:txBody>
-      </p:sp>
-      <p:sp>
-        <p:nvSpPr>
-          <p:cNvPr id="20" name="TextBox 19"/>
-          <p:cNvSpPr txBox="1"/>
-          <p:nvPr/>
-        </p:nvSpPr>
-        <p:spPr>
-          <a:xfrm>
-            <a:off x="5230368" y="1920240"/>
-            <a:ext cx="329184" cy="457200"/>
+            <a:off x="8046719" y="3063240"/>
+            <a:ext cx="822960" cy="274320"/>
           </a:xfrm>
           <a:prstGeom prst="rect">
             <a:avLst/>
@@ -5841,31 +6165,66 @@
           <a:p>
             <a:pPr algn="ctr"/>
             <a:r>
-              <a:rPr sz="1600" b="0" i="0">
-                <a:solidFill>
-                  <a:srgbClr val="7A869E"/>
+              <a:rPr sz="1200" b="1" i="0">
+                <a:solidFill>
+                  <a:srgbClr val="B5483A"/>
                 </a:solidFill>
                 <a:latin typeface="Calibri"/>
               </a:rPr>
-              <a:t>→</a:t>
-            </a:r>
-          </a:p>
-        </p:txBody>
-      </p:sp>
-      <p:sp>
-        <p:nvSpPr>
-          <p:cNvPr id="21" name="Step Spread"/>
+              <a:t>Expiry</a:t>
+            </a:r>
+          </a:p>
+        </p:txBody>
+      </p:sp>
+      <p:sp>
+        <p:nvSpPr>
+          <p:cNvPr id="14" name="TextBox 13"/>
+          <p:cNvSpPr txBox="1"/>
+          <p:nvPr/>
+        </p:nvSpPr>
+        <p:spPr>
+          <a:xfrm>
+            <a:off x="4663440" y="3108960"/>
+            <a:ext cx="3383280" cy="274320"/>
+          </a:xfrm>
+          <a:prstGeom prst="rect">
+            <a:avLst/>
+          </a:prstGeom>
+          <a:noFill/>
+        </p:spPr>
+        <p:txBody>
+          <a:bodyPr wrap="square" lIns="0" rIns="0" tIns="0" bIns="0" anchor="t">
+            <a:spAutoFit/>
+          </a:bodyPr>
+          <a:lstStyle/>
+          <a:p>
+            <a:pPr algn="l"/>
+            <a:r>
+              <a:rPr sz="1200" b="0" i="0">
+                <a:solidFill>
+                  <a:srgbClr val="1B2336"/>
+                </a:solidFill>
+                <a:latin typeface="Calibri"/>
+              </a:rPr>
+              <a:t>4 weeks apart, same contract pair</a:t>
+            </a:r>
+          </a:p>
+        </p:txBody>
+      </p:sp>
+      <p:sp>
+        <p:nvSpPr>
+          <p:cNvPr id="15" name="Test Sign test"/>
           <p:cNvSpPr/>
           <p:nvPr/>
         </p:nvSpPr>
         <p:spPr>
           <a:xfrm>
-            <a:off x="5486400" y="1417320"/>
-            <a:ext cx="1463040" cy="1600200"/>
+            <a:off x="548640" y="3749039"/>
+            <a:ext cx="2560320" cy="822960"/>
           </a:xfrm>
           <a:prstGeom prst="roundRect">
             <a:avLst>
-              <a:gd name="adj" fmla="val 7000"/>
+              <a:gd name="adj" fmla="val 8000"/>
             </a:avLst>
           </a:prstGeom>
           <a:solidFill>
@@ -5902,130 +6261,14 @@
       </p:sp>
       <p:sp>
         <p:nvSpPr>
-          <p:cNvPr id="22" name="TextBox 21"/>
+          <p:cNvPr id="16" name="TextBox 15"/>
           <p:cNvSpPr txBox="1"/>
           <p:nvPr/>
         </p:nvSpPr>
         <p:spPr>
           <a:xfrm>
-            <a:off x="5577840" y="1527048"/>
-            <a:ext cx="1280160" cy="365760"/>
-          </a:xfrm>
-          <a:prstGeom prst="rect">
-            <a:avLst/>
-          </a:prstGeom>
-          <a:noFill/>
-        </p:spPr>
-        <p:txBody>
-          <a:bodyPr wrap="square" lIns="0" rIns="0" tIns="0" bIns="0" anchor="t">
-            <a:spAutoFit/>
-          </a:bodyPr>
-          <a:lstStyle/>
-          <a:p>
-            <a:pPr algn="l"/>
-            <a:r>
-              <a:rPr sz="1600" b="1" i="0">
-                <a:solidFill>
-                  <a:srgbClr val="0F2A6B"/>
-                </a:solidFill>
-                <a:latin typeface="Cambria"/>
-              </a:rPr>
-              <a:t>Spread</a:t>
-            </a:r>
-          </a:p>
-        </p:txBody>
-      </p:sp>
-      <p:sp>
-        <p:nvSpPr>
-          <p:cNvPr id="23" name="TextBox 22"/>
-          <p:cNvSpPr txBox="1"/>
-          <p:nvPr/>
-        </p:nvSpPr>
-        <p:spPr>
-          <a:xfrm>
-            <a:off x="5577840" y="1920240"/>
-            <a:ext cx="1280160" cy="640080"/>
-          </a:xfrm>
-          <a:prstGeom prst="rect">
-            <a:avLst/>
-          </a:prstGeom>
-          <a:noFill/>
-        </p:spPr>
-        <p:txBody>
-          <a:bodyPr wrap="square" lIns="0" rIns="0" tIns="0" bIns="0" anchor="t">
-            <a:spAutoFit/>
-          </a:bodyPr>
-          <a:lstStyle/>
-          <a:p>
-            <a:pPr algn="l"/>
-            <a:r>
-              <a:rPr sz="1200" b="0" i="0">
-                <a:solidFill>
-                  <a:srgbClr val="1B2336"/>
-                </a:solidFill>
-                <a:latin typeface="Calibri"/>
-              </a:rPr>
-              <a:t>10:00 snapshots and quote checks</a:t>
-            </a:r>
-          </a:p>
-        </p:txBody>
-      </p:sp>
-      <p:sp>
-        <p:nvSpPr>
-          <p:cNvPr id="24" name="Status Spread"/>
-          <p:cNvSpPr/>
-          <p:nvPr/>
-        </p:nvSpPr>
-        <p:spPr>
-          <a:xfrm>
-            <a:off x="5577840" y="2606039"/>
-            <a:ext cx="868680" cy="274320"/>
-          </a:xfrm>
-          <a:prstGeom prst="roundRect">
-            <a:avLst>
-              <a:gd name="adj" fmla="val 50000"/>
-            </a:avLst>
-          </a:prstGeom>
-          <a:solidFill>
-            <a:srgbClr val="2E8B6E"/>
-          </a:solidFill>
-          <a:ln>
-            <a:noFill/>
-          </a:ln>
-          <a:effectLst/>
-        </p:spPr>
-        <p:style>
-          <a:lnRef idx="1">
-            <a:schemeClr val="accent1"/>
-          </a:lnRef>
-          <a:fillRef idx="3">
-            <a:schemeClr val="accent1"/>
-          </a:fillRef>
-          <a:effectRef idx="2">
-            <a:schemeClr val="accent1"/>
-          </a:effectRef>
-          <a:fontRef idx="minor">
-            <a:schemeClr val="lt1"/>
-          </a:fontRef>
-        </p:style>
-        <p:txBody>
-          <a:bodyPr rtlCol="0" anchor="ctr"/>
-          <a:lstStyle/>
-          <a:p>
-            <a:pPr algn="ctr"/>
-          </a:p>
-        </p:txBody>
-      </p:sp>
-      <p:sp>
-        <p:nvSpPr>
-          <p:cNvPr id="25" name="TextBox 24"/>
-          <p:cNvSpPr txBox="1"/>
-          <p:nvPr/>
-        </p:nvSpPr>
-        <p:spPr>
-          <a:xfrm>
-            <a:off x="5577840" y="2606039"/>
-            <a:ext cx="868680" cy="274320"/>
+            <a:off x="685800" y="3749039"/>
+            <a:ext cx="2286000" cy="822960"/>
           </a:xfrm>
           <a:prstGeom prst="rect">
             <a:avLst/>
@@ -6038,68 +6281,45 @@
           </a:bodyPr>
           <a:lstStyle/>
           <a:p>
-            <a:pPr algn="ctr"/>
-            <a:r>
-              <a:rPr sz="1100" b="1" i="0">
-                <a:solidFill>
-                  <a:srgbClr val="FFFFFF"/>
+            <a:pPr algn="l"/>
+            <a:r>
+              <a:rPr sz="1400" b="1" i="0">
+                <a:solidFill>
+                  <a:srgbClr val="0F2A6B"/>
                 </a:solidFill>
                 <a:latin typeface="Calibri"/>
               </a:rPr>
-              <a:t>merged</a:t>
-            </a:r>
-          </a:p>
-        </p:txBody>
-      </p:sp>
-      <p:sp>
-        <p:nvSpPr>
-          <p:cNvPr id="26" name="TextBox 25"/>
-          <p:cNvSpPr txBox="1"/>
-          <p:nvPr/>
-        </p:nvSpPr>
-        <p:spPr>
-          <a:xfrm>
-            <a:off x="6876288" y="1920240"/>
-            <a:ext cx="329184" cy="457200"/>
-          </a:xfrm>
-          <a:prstGeom prst="rect">
-            <a:avLst/>
-          </a:prstGeom>
-          <a:noFill/>
-        </p:spPr>
-        <p:txBody>
-          <a:bodyPr wrap="square" lIns="0" rIns="0" tIns="0" bIns="0" anchor="t">
-            <a:spAutoFit/>
-          </a:bodyPr>
-          <a:lstStyle/>
-          <a:p>
-            <a:pPr algn="ctr"/>
-            <a:r>
-              <a:rPr sz="1600" b="0" i="0">
-                <a:solidFill>
-                  <a:srgbClr val="7A869E"/>
+              <a:t>Sign test</a:t>
+            </a:r>
+          </a:p>
+          <a:p>
+            <a:pPr algn="l"/>
+            <a:r>
+              <a:rPr sz="1200" b="0" i="0">
+                <a:solidFill>
+                  <a:srgbClr val="1B2336"/>
                 </a:solidFill>
                 <a:latin typeface="Calibri"/>
               </a:rPr>
-              <a:t>→</a:t>
-            </a:r>
-          </a:p>
-        </p:txBody>
-      </p:sp>
-      <p:sp>
-        <p:nvSpPr>
-          <p:cNvPr id="27" name="Step Statistics"/>
+              <a:t>direction of d across rolls</a:t>
+            </a:r>
+          </a:p>
+        </p:txBody>
+      </p:sp>
+      <p:sp>
+        <p:nvSpPr>
+          <p:cNvPr id="17" name="Test Wilcoxon"/>
           <p:cNvSpPr/>
           <p:nvPr/>
         </p:nvSpPr>
         <p:spPr>
           <a:xfrm>
-            <a:off x="7132320" y="1417320"/>
-            <a:ext cx="1463040" cy="1600200"/>
+            <a:off x="3291840" y="3749039"/>
+            <a:ext cx="2560320" cy="822960"/>
           </a:xfrm>
           <a:prstGeom prst="roundRect">
             <a:avLst>
-              <a:gd name="adj" fmla="val 7000"/>
+              <a:gd name="adj" fmla="val 8000"/>
             </a:avLst>
           </a:prstGeom>
           <a:solidFill>
@@ -6136,14 +6356,14 @@
       </p:sp>
       <p:sp>
         <p:nvSpPr>
-          <p:cNvPr id="28" name="TextBox 27"/>
+          <p:cNvPr id="18" name="TextBox 17"/>
           <p:cNvSpPr txBox="1"/>
           <p:nvPr/>
         </p:nvSpPr>
         <p:spPr>
           <a:xfrm>
-            <a:off x="7223759" y="1527048"/>
-            <a:ext cx="1280160" cy="365760"/>
+            <a:off x="3429000" y="3749039"/>
+            <a:ext cx="2286000" cy="822960"/>
           </a:xfrm>
           <a:prstGeom prst="rect">
             <a:avLst/>
@@ -6151,45 +6371,22 @@
           <a:noFill/>
         </p:spPr>
         <p:txBody>
-          <a:bodyPr wrap="square" lIns="0" rIns="0" tIns="0" bIns="0" anchor="t">
+          <a:bodyPr wrap="square" lIns="0" rIns="0" tIns="0" bIns="0" anchor="ctr">
             <a:spAutoFit/>
           </a:bodyPr>
           <a:lstStyle/>
           <a:p>
             <a:pPr algn="l"/>
             <a:r>
-              <a:rPr sz="1600" b="1" i="0">
+              <a:rPr sz="1400" b="1" i="0">
                 <a:solidFill>
                   <a:srgbClr val="0F2A6B"/>
                 </a:solidFill>
-                <a:latin typeface="Cambria"/>
-              </a:rPr>
-              <a:t>Statistics</a:t>
-            </a:r>
-          </a:p>
-        </p:txBody>
-      </p:sp>
-      <p:sp>
-        <p:nvSpPr>
-          <p:cNvPr id="29" name="TextBox 28"/>
-          <p:cNvSpPr txBox="1"/>
-          <p:nvPr/>
-        </p:nvSpPr>
-        <p:spPr>
-          <a:xfrm>
-            <a:off x="7223759" y="1920240"/>
-            <a:ext cx="1280160" cy="640080"/>
-          </a:xfrm>
-          <a:prstGeom prst="rect">
-            <a:avLst/>
-          </a:prstGeom>
-          <a:noFill/>
-        </p:spPr>
-        <p:txBody>
-          <a:bodyPr wrap="square" lIns="0" rIns="0" tIns="0" bIns="0" anchor="t">
-            <a:spAutoFit/>
-          </a:bodyPr>
-          <a:lstStyle/>
+                <a:latin typeface="Calibri"/>
+              </a:rPr>
+              <a:t>Wilcoxon</a:t>
+            </a:r>
+          </a:p>
           <a:p>
             <a:pPr algn="l"/>
             <a:r>
@@ -6199,32 +6396,34 @@
                 </a:solidFill>
                 <a:latin typeface="Calibri"/>
               </a:rPr>
-              <a:t>Sign, Wilcoxon, bootstrap, runner</a:t>
-            </a:r>
-          </a:p>
-        </p:txBody>
-      </p:sp>
-      <p:sp>
-        <p:nvSpPr>
-          <p:cNvPr id="30" name="Status Statistics"/>
+              <a:t>signed-rank test on d</a:t>
+            </a:r>
+          </a:p>
+        </p:txBody>
+      </p:sp>
+      <p:sp>
+        <p:nvSpPr>
+          <p:cNvPr id="19" name="Test Bootstrap"/>
           <p:cNvSpPr/>
           <p:nvPr/>
         </p:nvSpPr>
         <p:spPr>
           <a:xfrm>
-            <a:off x="7223759" y="2606039"/>
-            <a:ext cx="868680" cy="274320"/>
+            <a:off x="6035040" y="3749039"/>
+            <a:ext cx="2560320" cy="822960"/>
           </a:xfrm>
           <a:prstGeom prst="roundRect">
             <a:avLst>
-              <a:gd name="adj" fmla="val 50000"/>
+              <a:gd name="adj" fmla="val 8000"/>
             </a:avLst>
           </a:prstGeom>
           <a:solidFill>
-            <a:srgbClr val="2E8B6E"/>
+            <a:srgbClr val="EDF0F8"/>
           </a:solidFill>
-          <a:ln>
-            <a:noFill/>
+          <a:ln w="9525">
+            <a:solidFill>
+              <a:srgbClr val="9AA7C7"/>
+            </a:solidFill>
           </a:ln>
           <a:effectLst/>
         </p:spPr>
@@ -6252,14 +6451,14 @@
       </p:sp>
       <p:sp>
         <p:nvSpPr>
-          <p:cNvPr id="31" name="TextBox 30"/>
+          <p:cNvPr id="20" name="TextBox 19"/>
           <p:cNvSpPr txBox="1"/>
           <p:nvPr/>
         </p:nvSpPr>
         <p:spPr>
           <a:xfrm>
-            <a:off x="7223759" y="2606039"/>
-            <a:ext cx="868680" cy="274320"/>
+            <a:off x="6172200" y="3749039"/>
+            <a:ext cx="2286000" cy="822960"/>
           </a:xfrm>
           <a:prstGeom prst="rect">
             <a:avLst/>
@@ -6272,225 +6471,27 @@
           </a:bodyPr>
           <a:lstStyle/>
           <a:p>
-            <a:pPr algn="ctr"/>
-            <a:r>
-              <a:rPr sz="1100" b="1" i="0">
-                <a:solidFill>
-                  <a:srgbClr val="FFFFFF"/>
+            <a:pPr algn="l"/>
+            <a:r>
+              <a:rPr sz="1400" b="1" i="0">
+                <a:solidFill>
+                  <a:srgbClr val="0F2A6B"/>
                 </a:solidFill>
                 <a:latin typeface="Calibri"/>
               </a:rPr>
-              <a:t>merged</a:t>
-            </a:r>
-          </a:p>
-        </p:txBody>
-      </p:sp>
-      <p:sp>
-        <p:nvSpPr>
-          <p:cNvPr id="32" name="TextBox 31"/>
-          <p:cNvSpPr txBox="1"/>
-          <p:nvPr/>
-        </p:nvSpPr>
-        <p:spPr>
-          <a:xfrm>
-            <a:off x="548640" y="3383280"/>
-            <a:ext cx="2560320" cy="640080"/>
-          </a:xfrm>
-          <a:prstGeom prst="rect">
-            <a:avLst/>
-          </a:prstGeom>
-          <a:noFill/>
-        </p:spPr>
-        <p:txBody>
-          <a:bodyPr wrap="square" lIns="0" rIns="0" tIns="0" bIns="0" anchor="t">
-            <a:spAutoFit/>
-          </a:bodyPr>
-          <a:lstStyle/>
+              <a:t>Bootstrap</a:t>
+            </a:r>
+          </a:p>
           <a:p>
             <a:pPr algn="l"/>
             <a:r>
-              <a:rPr sz="3600" b="1" i="0">
-                <a:solidFill>
-                  <a:srgbClr val="3B5BA9"/>
-                </a:solidFill>
-                <a:latin typeface="Cambria"/>
-              </a:rPr>
-              <a:t>64 of 65</a:t>
-            </a:r>
-          </a:p>
-        </p:txBody>
-      </p:sp>
-      <p:sp>
-        <p:nvSpPr>
-          <p:cNvPr id="33" name="TextBox 32"/>
-          <p:cNvSpPr txBox="1"/>
-          <p:nvPr/>
-        </p:nvSpPr>
-        <p:spPr>
-          <a:xfrm>
-            <a:off x="548640" y="4023360"/>
-            <a:ext cx="2468880" cy="548640"/>
-          </a:xfrm>
-          <a:prstGeom prst="rect">
-            <a:avLst/>
-          </a:prstGeom>
-          <a:noFill/>
-        </p:spPr>
-        <p:txBody>
-          <a:bodyPr wrap="square" lIns="0" rIns="0" tIns="0" bIns="0" anchor="t">
-            <a:spAutoFit/>
-          </a:bodyPr>
-          <a:lstStyle/>
-          <a:p>
-            <a:pPr algn="l"/>
-            <a:r>
               <a:rPr sz="1200" b="0" i="0">
                 <a:solidFill>
                   <a:srgbClr val="1B2336"/>
                 </a:solidFill>
                 <a:latin typeface="Calibri"/>
               </a:rPr>
-              <a:t>front-contract expiries match Databento, 2010 to 2026</a:t>
-            </a:r>
-          </a:p>
-        </p:txBody>
-      </p:sp>
-      <p:sp>
-        <p:nvSpPr>
-          <p:cNvPr id="34" name="TextBox 33"/>
-          <p:cNvSpPr txBox="1"/>
-          <p:nvPr/>
-        </p:nvSpPr>
-        <p:spPr>
-          <a:xfrm>
-            <a:off x="3291840" y="3383280"/>
-            <a:ext cx="2560320" cy="640080"/>
-          </a:xfrm>
-          <a:prstGeom prst="rect">
-            <a:avLst/>
-          </a:prstGeom>
-          <a:noFill/>
-        </p:spPr>
-        <p:txBody>
-          <a:bodyPr wrap="square" lIns="0" rIns="0" tIns="0" bIns="0" anchor="t">
-            <a:spAutoFit/>
-          </a:bodyPr>
-          <a:lstStyle/>
-          <a:p>
-            <a:pPr algn="l"/>
-            <a:r>
-              <a:rPr sz="3600" b="1" i="0">
-                <a:solidFill>
-                  <a:srgbClr val="3B5BA9"/>
-                </a:solidFill>
-                <a:latin typeface="Cambria"/>
-              </a:rPr>
-              <a:t>65 rolls</a:t>
-            </a:r>
-          </a:p>
-        </p:txBody>
-      </p:sp>
-      <p:sp>
-        <p:nvSpPr>
-          <p:cNvPr id="35" name="TextBox 34"/>
-          <p:cNvSpPr txBox="1"/>
-          <p:nvPr/>
-        </p:nvSpPr>
-        <p:spPr>
-          <a:xfrm>
-            <a:off x="3291840" y="4023360"/>
-            <a:ext cx="2468880" cy="548640"/>
-          </a:xfrm>
-          <a:prstGeom prst="rect">
-            <a:avLst/>
-          </a:prstGeom>
-          <a:noFill/>
-        </p:spPr>
-        <p:txBody>
-          <a:bodyPr wrap="square" lIns="0" rIns="0" tIns="0" bIns="0" anchor="t">
-            <a:spAutoFit/>
-          </a:bodyPr>
-          <a:lstStyle/>
-          <a:p>
-            <a:pPr algn="l"/>
-            <a:r>
-              <a:rPr sz="1200" b="0" i="0">
-                <a:solidFill>
-                  <a:srgbClr val="1B2336"/>
-                </a:solidFill>
-                <a:latin typeface="Calibri"/>
-              </a:rPr>
-              <a:t>57 held out for the test, 8 recent ones exploratory</a:t>
-            </a:r>
-          </a:p>
-        </p:txBody>
-      </p:sp>
-      <p:sp>
-        <p:nvSpPr>
-          <p:cNvPr id="36" name="TextBox 35"/>
-          <p:cNvSpPr txBox="1"/>
-          <p:nvPr/>
-        </p:nvSpPr>
-        <p:spPr>
-          <a:xfrm>
-            <a:off x="6035040" y="3383280"/>
-            <a:ext cx="2560320" cy="640080"/>
-          </a:xfrm>
-          <a:prstGeom prst="rect">
-            <a:avLst/>
-          </a:prstGeom>
-          <a:noFill/>
-        </p:spPr>
-        <p:txBody>
-          <a:bodyPr wrap="square" lIns="0" rIns="0" tIns="0" bIns="0" anchor="t">
-            <a:spAutoFit/>
-          </a:bodyPr>
-          <a:lstStyle/>
-          <a:p>
-            <a:pPr algn="l"/>
-            <a:r>
-              <a:rPr sz="3600" b="1" i="0">
-                <a:solidFill>
-                  <a:srgbClr val="3B5BA9"/>
-                </a:solidFill>
-                <a:latin typeface="Cambria"/>
-              </a:rPr>
-              <a:t>190+</a:t>
-            </a:r>
-          </a:p>
-        </p:txBody>
-      </p:sp>
-      <p:sp>
-        <p:nvSpPr>
-          <p:cNvPr id="37" name="TextBox 36"/>
-          <p:cNvSpPr txBox="1"/>
-          <p:nvPr/>
-        </p:nvSpPr>
-        <p:spPr>
-          <a:xfrm>
-            <a:off x="6035040" y="4023360"/>
-            <a:ext cx="2468880" cy="548640"/>
-          </a:xfrm>
-          <a:prstGeom prst="rect">
-            <a:avLst/>
-          </a:prstGeom>
-          <a:noFill/>
-        </p:spPr>
-        <p:txBody>
-          <a:bodyPr wrap="square" lIns="0" rIns="0" tIns="0" bIns="0" anchor="t">
-            <a:spAutoFit/>
-          </a:bodyPr>
-          <a:lstStyle/>
-          <a:p>
-            <a:pPr algn="l"/>
-            <a:r>
-              <a:rPr sz="1200" b="0" i="0">
-                <a:solidFill>
-                  <a:srgbClr val="1B2336"/>
-                </a:solidFill>
-                <a:latin typeface="Calibri"/>
-              </a:rPr>
-              <a:t>automated tests, run on Linux and Windows for every pull request</a:t>
+              <a:t>95% interval for the mean of d</a:t>
             </a:r>
           </a:p>
         </p:txBody>
@@ -6551,29 +6552,59 @@
                 </a:solidFill>
                 <a:latin typeface="Cambria"/>
               </a:rPr>
-              <a:t>No evidence of a roll effect</a:t>
-            </a:r>
-          </a:p>
-        </p:txBody>
-      </p:sp>
-      <p:graphicFrame>
-        <p:nvGraphicFramePr>
-          <p:cNvPr id="3" name="Mean absolute change"/>
-          <p:cNvGraphicFramePr>
-            <a:graphicFrameLocks noGrp="1"/>
-          </p:cNvGraphicFramePr>
-          <p:nvPr/>
-        </p:nvGraphicFramePr>
-        <p:xfrm>
-          <a:off x="457200" y="1234440"/>
-          <a:ext cx="4023360" cy="3200400"/>
-        </p:xfrm>
-        <a:graphic>
-          <a:graphicData uri="http://schemas.openxmlformats.org/drawingml/2006/chart">
-            <c:chart xmlns:c="http://schemas.openxmlformats.org/drawingml/2006/chart" r:id="rId2"/>
-          </a:graphicData>
-        </a:graphic>
-      </p:graphicFrame>
+              <a:t>What we built and checked</a:t>
+            </a:r>
+          </a:p>
+        </p:txBody>
+      </p:sp>
+      <p:sp>
+        <p:nvSpPr>
+          <p:cNvPr id="3" name="Step Data"/>
+          <p:cNvSpPr/>
+          <p:nvPr/>
+        </p:nvSpPr>
+        <p:spPr>
+          <a:xfrm>
+            <a:off x="548640" y="1280160"/>
+            <a:ext cx="1463040" cy="1508760"/>
+          </a:xfrm>
+          <a:prstGeom prst="roundRect">
+            <a:avLst>
+              <a:gd name="adj" fmla="val 7000"/>
+            </a:avLst>
+          </a:prstGeom>
+          <a:solidFill>
+            <a:srgbClr val="EDF0F8"/>
+          </a:solidFill>
+          <a:ln w="9525">
+            <a:solidFill>
+              <a:srgbClr val="9AA7C7"/>
+            </a:solidFill>
+          </a:ln>
+          <a:effectLst/>
+        </p:spPr>
+        <p:style>
+          <a:lnRef idx="1">
+            <a:schemeClr val="accent1"/>
+          </a:lnRef>
+          <a:fillRef idx="3">
+            <a:schemeClr val="accent1"/>
+          </a:fillRef>
+          <a:effectRef idx="2">
+            <a:schemeClr val="accent1"/>
+          </a:effectRef>
+          <a:fontRef idx="minor">
+            <a:schemeClr val="lt1"/>
+          </a:fontRef>
+        </p:style>
+        <p:txBody>
+          <a:bodyPr rtlCol="0" anchor="ctr"/>
+          <a:lstStyle/>
+          <a:p>
+            <a:pPr algn="ctr"/>
+          </a:p>
+        </p:txBody>
+      </p:sp>
       <p:sp>
         <p:nvSpPr>
           <p:cNvPr id="4" name="TextBox 3"/>
@@ -6582,8 +6613,8 @@
         </p:nvSpPr>
         <p:spPr>
           <a:xfrm>
-            <a:off x="4846320" y="1325880"/>
-            <a:ext cx="3840480" cy="502920"/>
+            <a:off x="640080" y="1389888"/>
+            <a:ext cx="1280160" cy="365760"/>
           </a:xfrm>
           <a:prstGeom prst="rect">
             <a:avLst/>
@@ -6598,13 +6629,13 @@
           <a:p>
             <a:pPr algn="l"/>
             <a:r>
-              <a:rPr sz="2600" b="1" i="0">
-                <a:solidFill>
-                  <a:srgbClr val="3B5BA9"/>
+              <a:rPr sz="1600" b="1" i="0">
+                <a:solidFill>
+                  <a:srgbClr val="0F2A6B"/>
                 </a:solidFill>
                 <a:latin typeface="Cambria"/>
               </a:rPr>
-              <a:t>+0.52 ticks</a:t>
+              <a:t>Data</a:t>
             </a:r>
           </a:p>
         </p:txBody>
@@ -6617,8 +6648,8 @@
         </p:nvSpPr>
         <p:spPr>
           <a:xfrm>
-            <a:off x="4846320" y="1828800"/>
-            <a:ext cx="3840480" cy="365760"/>
+            <a:off x="640080" y="1783080"/>
+            <a:ext cx="1280160" cy="566928"/>
           </a:xfrm>
           <a:prstGeom prst="rect">
             <a:avLst/>
@@ -6633,27 +6664,108 @@
           <a:p>
             <a:pPr algn="l"/>
             <a:r>
-              <a:rPr sz="1300" b="0" i="0">
+              <a:rPr sz="1200" b="0" i="0">
                 <a:solidFill>
                   <a:srgbClr val="1B2336"/>
                 </a:solidFill>
                 <a:latin typeface="Calibri"/>
               </a:rPr>
-              <a:t>mean of d = |roll| minus |control|, per roll</a:t>
-            </a:r>
-          </a:p>
-        </p:txBody>
-      </p:sp>
-      <p:sp>
-        <p:nvSpPr>
-          <p:cNvPr id="6" name="TextBox 5"/>
+              <a:t>Databento 6E quotes and bars, cached locally</a:t>
+            </a:r>
+          </a:p>
+        </p:txBody>
+      </p:sp>
+      <p:sp>
+        <p:nvSpPr>
+          <p:cNvPr id="6" name="Status Data"/>
+          <p:cNvSpPr/>
+          <p:nvPr/>
+        </p:nvSpPr>
+        <p:spPr>
+          <a:xfrm>
+            <a:off x="640080" y="2404872"/>
+            <a:ext cx="868680" cy="256032"/>
+          </a:xfrm>
+          <a:prstGeom prst="roundRect">
+            <a:avLst>
+              <a:gd name="adj" fmla="val 50000"/>
+            </a:avLst>
+          </a:prstGeom>
+          <a:solidFill>
+            <a:srgbClr val="2E8B6E"/>
+          </a:solidFill>
+          <a:ln>
+            <a:noFill/>
+          </a:ln>
+          <a:effectLst/>
+        </p:spPr>
+        <p:style>
+          <a:lnRef idx="1">
+            <a:schemeClr val="accent1"/>
+          </a:lnRef>
+          <a:fillRef idx="3">
+            <a:schemeClr val="accent1"/>
+          </a:fillRef>
+          <a:effectRef idx="2">
+            <a:schemeClr val="accent1"/>
+          </a:effectRef>
+          <a:fontRef idx="minor">
+            <a:schemeClr val="lt1"/>
+          </a:fontRef>
+        </p:style>
+        <p:txBody>
+          <a:bodyPr rtlCol="0" anchor="ctr"/>
+          <a:lstStyle/>
+          <a:p>
+            <a:pPr algn="ctr"/>
+          </a:p>
+        </p:txBody>
+      </p:sp>
+      <p:sp>
+        <p:nvSpPr>
+          <p:cNvPr id="7" name="TextBox 6"/>
           <p:cNvSpPr txBox="1"/>
           <p:nvPr/>
         </p:nvSpPr>
         <p:spPr>
           <a:xfrm>
-            <a:off x="4846320" y="2331720"/>
-            <a:ext cx="3840480" cy="502920"/>
+            <a:off x="640080" y="2404872"/>
+            <a:ext cx="868680" cy="256032"/>
+          </a:xfrm>
+          <a:prstGeom prst="rect">
+            <a:avLst/>
+          </a:prstGeom>
+          <a:noFill/>
+        </p:spPr>
+        <p:txBody>
+          <a:bodyPr wrap="square" lIns="0" rIns="0" tIns="0" bIns="0" anchor="ctr">
+            <a:spAutoFit/>
+          </a:bodyPr>
+          <a:lstStyle/>
+          <a:p>
+            <a:pPr algn="ctr"/>
+            <a:r>
+              <a:rPr sz="1100" b="1" i="0">
+                <a:solidFill>
+                  <a:srgbClr val="FFFFFF"/>
+                </a:solidFill>
+                <a:latin typeface="Calibri"/>
+              </a:rPr>
+              <a:t>merged</a:t>
+            </a:r>
+          </a:p>
+        </p:txBody>
+      </p:sp>
+      <p:sp>
+        <p:nvSpPr>
+          <p:cNvPr id="8" name="TextBox 7"/>
+          <p:cNvSpPr txBox="1"/>
+          <p:nvPr/>
+        </p:nvSpPr>
+        <p:spPr>
+          <a:xfrm>
+            <a:off x="1938528" y="1783080"/>
+            <a:ext cx="329184" cy="457200"/>
           </a:xfrm>
           <a:prstGeom prst="rect">
             <a:avLst/>
@@ -6666,29 +6778,77 @@
           </a:bodyPr>
           <a:lstStyle/>
           <a:p>
-            <a:pPr algn="l"/>
-            <a:r>
-              <a:rPr sz="2600" b="1" i="0">
-                <a:solidFill>
-                  <a:srgbClr val="3B5BA9"/>
-                </a:solidFill>
-                <a:latin typeface="Cambria"/>
-              </a:rPr>
-              <a:t>−0.96 to +2.19</a:t>
-            </a:r>
-          </a:p>
-        </p:txBody>
-      </p:sp>
-      <p:sp>
-        <p:nvSpPr>
-          <p:cNvPr id="7" name="TextBox 6"/>
+            <a:pPr algn="ctr"/>
+            <a:r>
+              <a:rPr sz="1600" b="0" i="0">
+                <a:solidFill>
+                  <a:srgbClr val="7A869E"/>
+                </a:solidFill>
+                <a:latin typeface="Calibri"/>
+              </a:rPr>
+              <a:t>→</a:t>
+            </a:r>
+          </a:p>
+        </p:txBody>
+      </p:sp>
+      <p:sp>
+        <p:nvSpPr>
+          <p:cNvPr id="9" name="Step Roll calendar"/>
+          <p:cNvSpPr/>
+          <p:nvPr/>
+        </p:nvSpPr>
+        <p:spPr>
+          <a:xfrm>
+            <a:off x="2194560" y="1280160"/>
+            <a:ext cx="1463040" cy="1508760"/>
+          </a:xfrm>
+          <a:prstGeom prst="roundRect">
+            <a:avLst>
+              <a:gd name="adj" fmla="val 7000"/>
+            </a:avLst>
+          </a:prstGeom>
+          <a:solidFill>
+            <a:srgbClr val="EDF0F8"/>
+          </a:solidFill>
+          <a:ln w="9525">
+            <a:solidFill>
+              <a:srgbClr val="9AA7C7"/>
+            </a:solidFill>
+          </a:ln>
+          <a:effectLst/>
+        </p:spPr>
+        <p:style>
+          <a:lnRef idx="1">
+            <a:schemeClr val="accent1"/>
+          </a:lnRef>
+          <a:fillRef idx="3">
+            <a:schemeClr val="accent1"/>
+          </a:fillRef>
+          <a:effectRef idx="2">
+            <a:schemeClr val="accent1"/>
+          </a:effectRef>
+          <a:fontRef idx="minor">
+            <a:schemeClr val="lt1"/>
+          </a:fontRef>
+        </p:style>
+        <p:txBody>
+          <a:bodyPr rtlCol="0" anchor="ctr"/>
+          <a:lstStyle/>
+          <a:p>
+            <a:pPr algn="ctr"/>
+          </a:p>
+        </p:txBody>
+      </p:sp>
+      <p:sp>
+        <p:nvSpPr>
+          <p:cNvPr id="10" name="TextBox 9"/>
           <p:cNvSpPr txBox="1"/>
           <p:nvPr/>
         </p:nvSpPr>
         <p:spPr>
           <a:xfrm>
-            <a:off x="4846320" y="2834639"/>
-            <a:ext cx="3840480" cy="365760"/>
+            <a:off x="2286000" y="1389888"/>
+            <a:ext cx="1280160" cy="365760"/>
           </a:xfrm>
           <a:prstGeom prst="rect">
             <a:avLst/>
@@ -6703,27 +6863,27 @@
           <a:p>
             <a:pPr algn="l"/>
             <a:r>
-              <a:rPr sz="1300" b="0" i="0">
-                <a:solidFill>
-                  <a:srgbClr val="1B2336"/>
-                </a:solidFill>
-                <a:latin typeface="Calibri"/>
-              </a:rPr>
-              <a:t>95% bootstrap interval, includes zero</a:t>
-            </a:r>
-          </a:p>
-        </p:txBody>
-      </p:sp>
-      <p:sp>
-        <p:nvSpPr>
-          <p:cNvPr id="8" name="TextBox 7"/>
+              <a:rPr sz="1600" b="1" i="0">
+                <a:solidFill>
+                  <a:srgbClr val="0F2A6B"/>
+                </a:solidFill>
+                <a:latin typeface="Cambria"/>
+              </a:rPr>
+              <a:t>Roll calendar</a:t>
+            </a:r>
+          </a:p>
+        </p:txBody>
+      </p:sp>
+      <p:sp>
+        <p:nvSpPr>
+          <p:cNvPr id="11" name="TextBox 10"/>
           <p:cNvSpPr txBox="1"/>
           <p:nvPr/>
         </p:nvSpPr>
         <p:spPr>
           <a:xfrm>
-            <a:off x="4846320" y="3337560"/>
-            <a:ext cx="3840480" cy="502920"/>
+            <a:off x="2286000" y="1783080"/>
+            <a:ext cx="1280160" cy="566928"/>
           </a:xfrm>
           <a:prstGeom prst="rect">
             <a:avLst/>
@@ -6738,27 +6898,108 @@
           <a:p>
             <a:pPr algn="l"/>
             <a:r>
-              <a:rPr sz="2600" b="1" i="0">
-                <a:solidFill>
-                  <a:srgbClr val="3B5BA9"/>
-                </a:solidFill>
-                <a:latin typeface="Cambria"/>
-              </a:rPr>
-              <a:t>p = 0.89 and 0.37</a:t>
-            </a:r>
-          </a:p>
-        </p:txBody>
-      </p:sp>
-      <p:sp>
-        <p:nvSpPr>
-          <p:cNvPr id="9" name="TextBox 8"/>
+              <a:rPr sz="1200" b="0" i="0">
+                <a:solidFill>
+                  <a:srgbClr val="1B2336"/>
+                </a:solidFill>
+                <a:latin typeface="Calibri"/>
+              </a:rPr>
+              <a:t>Expiries, with CME holidays</a:t>
+            </a:r>
+          </a:p>
+        </p:txBody>
+      </p:sp>
+      <p:sp>
+        <p:nvSpPr>
+          <p:cNvPr id="12" name="Status Roll calendar"/>
+          <p:cNvSpPr/>
+          <p:nvPr/>
+        </p:nvSpPr>
+        <p:spPr>
+          <a:xfrm>
+            <a:off x="2286000" y="2404872"/>
+            <a:ext cx="868680" cy="256032"/>
+          </a:xfrm>
+          <a:prstGeom prst="roundRect">
+            <a:avLst>
+              <a:gd name="adj" fmla="val 50000"/>
+            </a:avLst>
+          </a:prstGeom>
+          <a:solidFill>
+            <a:srgbClr val="2E8B6E"/>
+          </a:solidFill>
+          <a:ln>
+            <a:noFill/>
+          </a:ln>
+          <a:effectLst/>
+        </p:spPr>
+        <p:style>
+          <a:lnRef idx="1">
+            <a:schemeClr val="accent1"/>
+          </a:lnRef>
+          <a:fillRef idx="3">
+            <a:schemeClr val="accent1"/>
+          </a:fillRef>
+          <a:effectRef idx="2">
+            <a:schemeClr val="accent1"/>
+          </a:effectRef>
+          <a:fontRef idx="minor">
+            <a:schemeClr val="lt1"/>
+          </a:fontRef>
+        </p:style>
+        <p:txBody>
+          <a:bodyPr rtlCol="0" anchor="ctr"/>
+          <a:lstStyle/>
+          <a:p>
+            <a:pPr algn="ctr"/>
+          </a:p>
+        </p:txBody>
+      </p:sp>
+      <p:sp>
+        <p:nvSpPr>
+          <p:cNvPr id="13" name="TextBox 12"/>
           <p:cNvSpPr txBox="1"/>
           <p:nvPr/>
         </p:nvSpPr>
         <p:spPr>
           <a:xfrm>
-            <a:off x="4846320" y="3840480"/>
-            <a:ext cx="3840480" cy="365760"/>
+            <a:off x="2286000" y="2404872"/>
+            <a:ext cx="868680" cy="256032"/>
+          </a:xfrm>
+          <a:prstGeom prst="rect">
+            <a:avLst/>
+          </a:prstGeom>
+          <a:noFill/>
+        </p:spPr>
+        <p:txBody>
+          <a:bodyPr wrap="square" lIns="0" rIns="0" tIns="0" bIns="0" anchor="ctr">
+            <a:spAutoFit/>
+          </a:bodyPr>
+          <a:lstStyle/>
+          <a:p>
+            <a:pPr algn="ctr"/>
+            <a:r>
+              <a:rPr sz="1100" b="1" i="0">
+                <a:solidFill>
+                  <a:srgbClr val="FFFFFF"/>
+                </a:solidFill>
+                <a:latin typeface="Calibri"/>
+              </a:rPr>
+              <a:t>merged</a:t>
+            </a:r>
+          </a:p>
+        </p:txBody>
+      </p:sp>
+      <p:sp>
+        <p:nvSpPr>
+          <p:cNvPr id="14" name="TextBox 13"/>
+          <p:cNvSpPr txBox="1"/>
+          <p:nvPr/>
+        </p:nvSpPr>
+        <p:spPr>
+          <a:xfrm>
+            <a:off x="3584448" y="1783080"/>
+            <a:ext cx="329184" cy="457200"/>
           </a:xfrm>
           <a:prstGeom prst="rect">
             <a:avLst/>
@@ -6771,29 +7012,77 @@
           </a:bodyPr>
           <a:lstStyle/>
           <a:p>
-            <a:pPr algn="l"/>
-            <a:r>
-              <a:rPr sz="1300" b="0" i="0">
-                <a:solidFill>
-                  <a:srgbClr val="1B2336"/>
+            <a:pPr algn="ctr"/>
+            <a:r>
+              <a:rPr sz="1600" b="0" i="0">
+                <a:solidFill>
+                  <a:srgbClr val="7A869E"/>
                 </a:solidFill>
                 <a:latin typeface="Calibri"/>
               </a:rPr>
-              <a:t>sign test and Wilcoxon test</a:t>
-            </a:r>
-          </a:p>
-        </p:txBody>
-      </p:sp>
-      <p:sp>
-        <p:nvSpPr>
-          <p:cNvPr id="10" name="TextBox 9"/>
+              <a:t>→</a:t>
+            </a:r>
+          </a:p>
+        </p:txBody>
+      </p:sp>
+      <p:sp>
+        <p:nvSpPr>
+          <p:cNvPr id="15" name="Step Windows"/>
+          <p:cNvSpPr/>
+          <p:nvPr/>
+        </p:nvSpPr>
+        <p:spPr>
+          <a:xfrm>
+            <a:off x="3840480" y="1280160"/>
+            <a:ext cx="1463040" cy="1508760"/>
+          </a:xfrm>
+          <a:prstGeom prst="roundRect">
+            <a:avLst>
+              <a:gd name="adj" fmla="val 7000"/>
+            </a:avLst>
+          </a:prstGeom>
+          <a:solidFill>
+            <a:srgbClr val="EDF0F8"/>
+          </a:solidFill>
+          <a:ln w="9525">
+            <a:solidFill>
+              <a:srgbClr val="9AA7C7"/>
+            </a:solidFill>
+          </a:ln>
+          <a:effectLst/>
+        </p:spPr>
+        <p:style>
+          <a:lnRef idx="1">
+            <a:schemeClr val="accent1"/>
+          </a:lnRef>
+          <a:fillRef idx="3">
+            <a:schemeClr val="accent1"/>
+          </a:fillRef>
+          <a:effectRef idx="2">
+            <a:schemeClr val="accent1"/>
+          </a:effectRef>
+          <a:fontRef idx="minor">
+            <a:schemeClr val="lt1"/>
+          </a:fontRef>
+        </p:style>
+        <p:txBody>
+          <a:bodyPr rtlCol="0" anchor="ctr"/>
+          <a:lstStyle/>
+          <a:p>
+            <a:pPr algn="ctr"/>
+          </a:p>
+        </p:txBody>
+      </p:sp>
+      <p:sp>
+        <p:nvSpPr>
+          <p:cNvPr id="16" name="TextBox 15"/>
           <p:cNvSpPr txBox="1"/>
           <p:nvPr/>
         </p:nvSpPr>
         <p:spPr>
           <a:xfrm>
-            <a:off x="548640" y="4526280"/>
-            <a:ext cx="8046720" cy="411480"/>
+            <a:off x="3931920" y="1389888"/>
+            <a:ext cx="1280160" cy="365760"/>
           </a:xfrm>
           <a:prstGeom prst="rect">
             <a:avLst/>
@@ -6808,13 +7097,807 @@
           <a:p>
             <a:pPr algn="l"/>
             <a:r>
-              <a:rPr sz="1100" b="0" i="1">
+              <a:rPr sz="1600" b="1" i="0">
+                <a:solidFill>
+                  <a:srgbClr val="0F2A6B"/>
+                </a:solidFill>
+                <a:latin typeface="Cambria"/>
+              </a:rPr>
+              <a:t>Windows</a:t>
+            </a:r>
+          </a:p>
+        </p:txBody>
+      </p:sp>
+      <p:sp>
+        <p:nvSpPr>
+          <p:cNvPr id="17" name="TextBox 16"/>
+          <p:cNvSpPr txBox="1"/>
+          <p:nvPr/>
+        </p:nvSpPr>
+        <p:spPr>
+          <a:xfrm>
+            <a:off x="3931920" y="1783080"/>
+            <a:ext cx="1280160" cy="566928"/>
+          </a:xfrm>
+          <a:prstGeom prst="rect">
+            <a:avLst/>
+          </a:prstGeom>
+          <a:noFill/>
+        </p:spPr>
+        <p:txBody>
+          <a:bodyPr wrap="square" lIns="0" rIns="0" tIns="0" bIns="0" anchor="t">
+            <a:spAutoFit/>
+          </a:bodyPr>
+          <a:lstStyle/>
+          <a:p>
+            <a:pPr algn="l"/>
+            <a:r>
+              <a:rPr sz="1200" b="0" i="0">
+                <a:solidFill>
+                  <a:srgbClr val="1B2336"/>
+                </a:solidFill>
+                <a:latin typeface="Calibri"/>
+              </a:rPr>
+              <a:t>Roll and control weeks</a:t>
+            </a:r>
+          </a:p>
+        </p:txBody>
+      </p:sp>
+      <p:sp>
+        <p:nvSpPr>
+          <p:cNvPr id="18" name="Status Windows"/>
+          <p:cNvSpPr/>
+          <p:nvPr/>
+        </p:nvSpPr>
+        <p:spPr>
+          <a:xfrm>
+            <a:off x="3931920" y="2404872"/>
+            <a:ext cx="868680" cy="256032"/>
+          </a:xfrm>
+          <a:prstGeom prst="roundRect">
+            <a:avLst>
+              <a:gd name="adj" fmla="val 50000"/>
+            </a:avLst>
+          </a:prstGeom>
+          <a:solidFill>
+            <a:srgbClr val="2E8B6E"/>
+          </a:solidFill>
+          <a:ln>
+            <a:noFill/>
+          </a:ln>
+          <a:effectLst/>
+        </p:spPr>
+        <p:style>
+          <a:lnRef idx="1">
+            <a:schemeClr val="accent1"/>
+          </a:lnRef>
+          <a:fillRef idx="3">
+            <a:schemeClr val="accent1"/>
+          </a:fillRef>
+          <a:effectRef idx="2">
+            <a:schemeClr val="accent1"/>
+          </a:effectRef>
+          <a:fontRef idx="minor">
+            <a:schemeClr val="lt1"/>
+          </a:fontRef>
+        </p:style>
+        <p:txBody>
+          <a:bodyPr rtlCol="0" anchor="ctr"/>
+          <a:lstStyle/>
+          <a:p>
+            <a:pPr algn="ctr"/>
+          </a:p>
+        </p:txBody>
+      </p:sp>
+      <p:sp>
+        <p:nvSpPr>
+          <p:cNvPr id="19" name="TextBox 18"/>
+          <p:cNvSpPr txBox="1"/>
+          <p:nvPr/>
+        </p:nvSpPr>
+        <p:spPr>
+          <a:xfrm>
+            <a:off x="3931920" y="2404872"/>
+            <a:ext cx="868680" cy="256032"/>
+          </a:xfrm>
+          <a:prstGeom prst="rect">
+            <a:avLst/>
+          </a:prstGeom>
+          <a:noFill/>
+        </p:spPr>
+        <p:txBody>
+          <a:bodyPr wrap="square" lIns="0" rIns="0" tIns="0" bIns="0" anchor="ctr">
+            <a:spAutoFit/>
+          </a:bodyPr>
+          <a:lstStyle/>
+          <a:p>
+            <a:pPr algn="ctr"/>
+            <a:r>
+              <a:rPr sz="1100" b="1" i="0">
+                <a:solidFill>
+                  <a:srgbClr val="FFFFFF"/>
+                </a:solidFill>
+                <a:latin typeface="Calibri"/>
+              </a:rPr>
+              <a:t>merged</a:t>
+            </a:r>
+          </a:p>
+        </p:txBody>
+      </p:sp>
+      <p:sp>
+        <p:nvSpPr>
+          <p:cNvPr id="20" name="TextBox 19"/>
+          <p:cNvSpPr txBox="1"/>
+          <p:nvPr/>
+        </p:nvSpPr>
+        <p:spPr>
+          <a:xfrm>
+            <a:off x="5230368" y="1783080"/>
+            <a:ext cx="329184" cy="457200"/>
+          </a:xfrm>
+          <a:prstGeom prst="rect">
+            <a:avLst/>
+          </a:prstGeom>
+          <a:noFill/>
+        </p:spPr>
+        <p:txBody>
+          <a:bodyPr wrap="square" lIns="0" rIns="0" tIns="0" bIns="0" anchor="t">
+            <a:spAutoFit/>
+          </a:bodyPr>
+          <a:lstStyle/>
+          <a:p>
+            <a:pPr algn="ctr"/>
+            <a:r>
+              <a:rPr sz="1600" b="0" i="0">
                 <a:solidFill>
                   <a:srgbClr val="7A869E"/>
                 </a:solidFill>
                 <a:latin typeface="Calibri"/>
               </a:rPr>
-              <a:t>Planned sensitivity checks agree (narrow quotes, no Fed or ECB weeks, carry-adjusted). One added check, a 3-week control, is borderline. H3 not computed.</a:t>
+              <a:t>→</a:t>
+            </a:r>
+          </a:p>
+        </p:txBody>
+      </p:sp>
+      <p:sp>
+        <p:nvSpPr>
+          <p:cNvPr id="21" name="Step Spread"/>
+          <p:cNvSpPr/>
+          <p:nvPr/>
+        </p:nvSpPr>
+        <p:spPr>
+          <a:xfrm>
+            <a:off x="5486400" y="1280160"/>
+            <a:ext cx="1463040" cy="1508760"/>
+          </a:xfrm>
+          <a:prstGeom prst="roundRect">
+            <a:avLst>
+              <a:gd name="adj" fmla="val 7000"/>
+            </a:avLst>
+          </a:prstGeom>
+          <a:solidFill>
+            <a:srgbClr val="EDF0F8"/>
+          </a:solidFill>
+          <a:ln w="9525">
+            <a:solidFill>
+              <a:srgbClr val="9AA7C7"/>
+            </a:solidFill>
+          </a:ln>
+          <a:effectLst/>
+        </p:spPr>
+        <p:style>
+          <a:lnRef idx="1">
+            <a:schemeClr val="accent1"/>
+          </a:lnRef>
+          <a:fillRef idx="3">
+            <a:schemeClr val="accent1"/>
+          </a:fillRef>
+          <a:effectRef idx="2">
+            <a:schemeClr val="accent1"/>
+          </a:effectRef>
+          <a:fontRef idx="minor">
+            <a:schemeClr val="lt1"/>
+          </a:fontRef>
+        </p:style>
+        <p:txBody>
+          <a:bodyPr rtlCol="0" anchor="ctr"/>
+          <a:lstStyle/>
+          <a:p>
+            <a:pPr algn="ctr"/>
+          </a:p>
+        </p:txBody>
+      </p:sp>
+      <p:sp>
+        <p:nvSpPr>
+          <p:cNvPr id="22" name="TextBox 21"/>
+          <p:cNvSpPr txBox="1"/>
+          <p:nvPr/>
+        </p:nvSpPr>
+        <p:spPr>
+          <a:xfrm>
+            <a:off x="5577840" y="1389888"/>
+            <a:ext cx="1280160" cy="365760"/>
+          </a:xfrm>
+          <a:prstGeom prst="rect">
+            <a:avLst/>
+          </a:prstGeom>
+          <a:noFill/>
+        </p:spPr>
+        <p:txBody>
+          <a:bodyPr wrap="square" lIns="0" rIns="0" tIns="0" bIns="0" anchor="t">
+            <a:spAutoFit/>
+          </a:bodyPr>
+          <a:lstStyle/>
+          <a:p>
+            <a:pPr algn="l"/>
+            <a:r>
+              <a:rPr sz="1600" b="1" i="0">
+                <a:solidFill>
+                  <a:srgbClr val="0F2A6B"/>
+                </a:solidFill>
+                <a:latin typeface="Cambria"/>
+              </a:rPr>
+              <a:t>Spread</a:t>
+            </a:r>
+          </a:p>
+        </p:txBody>
+      </p:sp>
+      <p:sp>
+        <p:nvSpPr>
+          <p:cNvPr id="23" name="TextBox 22"/>
+          <p:cNvSpPr txBox="1"/>
+          <p:nvPr/>
+        </p:nvSpPr>
+        <p:spPr>
+          <a:xfrm>
+            <a:off x="5577840" y="1783080"/>
+            <a:ext cx="1280160" cy="566928"/>
+          </a:xfrm>
+          <a:prstGeom prst="rect">
+            <a:avLst/>
+          </a:prstGeom>
+          <a:noFill/>
+        </p:spPr>
+        <p:txBody>
+          <a:bodyPr wrap="square" lIns="0" rIns="0" tIns="0" bIns="0" anchor="t">
+            <a:spAutoFit/>
+          </a:bodyPr>
+          <a:lstStyle/>
+          <a:p>
+            <a:pPr algn="l"/>
+            <a:r>
+              <a:rPr sz="1200" b="0" i="0">
+                <a:solidFill>
+                  <a:srgbClr val="1B2336"/>
+                </a:solidFill>
+                <a:latin typeface="Calibri"/>
+              </a:rPr>
+              <a:t>10:00 snapshots and quote checks</a:t>
+            </a:r>
+          </a:p>
+        </p:txBody>
+      </p:sp>
+      <p:sp>
+        <p:nvSpPr>
+          <p:cNvPr id="24" name="Status Spread"/>
+          <p:cNvSpPr/>
+          <p:nvPr/>
+        </p:nvSpPr>
+        <p:spPr>
+          <a:xfrm>
+            <a:off x="5577840" y="2404872"/>
+            <a:ext cx="868680" cy="256032"/>
+          </a:xfrm>
+          <a:prstGeom prst="roundRect">
+            <a:avLst>
+              <a:gd name="adj" fmla="val 50000"/>
+            </a:avLst>
+          </a:prstGeom>
+          <a:solidFill>
+            <a:srgbClr val="2E8B6E"/>
+          </a:solidFill>
+          <a:ln>
+            <a:noFill/>
+          </a:ln>
+          <a:effectLst/>
+        </p:spPr>
+        <p:style>
+          <a:lnRef idx="1">
+            <a:schemeClr val="accent1"/>
+          </a:lnRef>
+          <a:fillRef idx="3">
+            <a:schemeClr val="accent1"/>
+          </a:fillRef>
+          <a:effectRef idx="2">
+            <a:schemeClr val="accent1"/>
+          </a:effectRef>
+          <a:fontRef idx="minor">
+            <a:schemeClr val="lt1"/>
+          </a:fontRef>
+        </p:style>
+        <p:txBody>
+          <a:bodyPr rtlCol="0" anchor="ctr"/>
+          <a:lstStyle/>
+          <a:p>
+            <a:pPr algn="ctr"/>
+          </a:p>
+        </p:txBody>
+      </p:sp>
+      <p:sp>
+        <p:nvSpPr>
+          <p:cNvPr id="25" name="TextBox 24"/>
+          <p:cNvSpPr txBox="1"/>
+          <p:nvPr/>
+        </p:nvSpPr>
+        <p:spPr>
+          <a:xfrm>
+            <a:off x="5577840" y="2404872"/>
+            <a:ext cx="868680" cy="256032"/>
+          </a:xfrm>
+          <a:prstGeom prst="rect">
+            <a:avLst/>
+          </a:prstGeom>
+          <a:noFill/>
+        </p:spPr>
+        <p:txBody>
+          <a:bodyPr wrap="square" lIns="0" rIns="0" tIns="0" bIns="0" anchor="ctr">
+            <a:spAutoFit/>
+          </a:bodyPr>
+          <a:lstStyle/>
+          <a:p>
+            <a:pPr algn="ctr"/>
+            <a:r>
+              <a:rPr sz="1100" b="1" i="0">
+                <a:solidFill>
+                  <a:srgbClr val="FFFFFF"/>
+                </a:solidFill>
+                <a:latin typeface="Calibri"/>
+              </a:rPr>
+              <a:t>merged</a:t>
+            </a:r>
+          </a:p>
+        </p:txBody>
+      </p:sp>
+      <p:sp>
+        <p:nvSpPr>
+          <p:cNvPr id="26" name="TextBox 25"/>
+          <p:cNvSpPr txBox="1"/>
+          <p:nvPr/>
+        </p:nvSpPr>
+        <p:spPr>
+          <a:xfrm>
+            <a:off x="6876288" y="1783080"/>
+            <a:ext cx="329184" cy="457200"/>
+          </a:xfrm>
+          <a:prstGeom prst="rect">
+            <a:avLst/>
+          </a:prstGeom>
+          <a:noFill/>
+        </p:spPr>
+        <p:txBody>
+          <a:bodyPr wrap="square" lIns="0" rIns="0" tIns="0" bIns="0" anchor="t">
+            <a:spAutoFit/>
+          </a:bodyPr>
+          <a:lstStyle/>
+          <a:p>
+            <a:pPr algn="ctr"/>
+            <a:r>
+              <a:rPr sz="1600" b="0" i="0">
+                <a:solidFill>
+                  <a:srgbClr val="7A869E"/>
+                </a:solidFill>
+                <a:latin typeface="Calibri"/>
+              </a:rPr>
+              <a:t>→</a:t>
+            </a:r>
+          </a:p>
+        </p:txBody>
+      </p:sp>
+      <p:sp>
+        <p:nvSpPr>
+          <p:cNvPr id="27" name="Step Statistics"/>
+          <p:cNvSpPr/>
+          <p:nvPr/>
+        </p:nvSpPr>
+        <p:spPr>
+          <a:xfrm>
+            <a:off x="7132320" y="1280160"/>
+            <a:ext cx="1463040" cy="1508760"/>
+          </a:xfrm>
+          <a:prstGeom prst="roundRect">
+            <a:avLst>
+              <a:gd name="adj" fmla="val 7000"/>
+            </a:avLst>
+          </a:prstGeom>
+          <a:solidFill>
+            <a:srgbClr val="EDF0F8"/>
+          </a:solidFill>
+          <a:ln w="9525">
+            <a:solidFill>
+              <a:srgbClr val="9AA7C7"/>
+            </a:solidFill>
+          </a:ln>
+          <a:effectLst/>
+        </p:spPr>
+        <p:style>
+          <a:lnRef idx="1">
+            <a:schemeClr val="accent1"/>
+          </a:lnRef>
+          <a:fillRef idx="3">
+            <a:schemeClr val="accent1"/>
+          </a:fillRef>
+          <a:effectRef idx="2">
+            <a:schemeClr val="accent1"/>
+          </a:effectRef>
+          <a:fontRef idx="minor">
+            <a:schemeClr val="lt1"/>
+          </a:fontRef>
+        </p:style>
+        <p:txBody>
+          <a:bodyPr rtlCol="0" anchor="ctr"/>
+          <a:lstStyle/>
+          <a:p>
+            <a:pPr algn="ctr"/>
+          </a:p>
+        </p:txBody>
+      </p:sp>
+      <p:sp>
+        <p:nvSpPr>
+          <p:cNvPr id="28" name="TextBox 27"/>
+          <p:cNvSpPr txBox="1"/>
+          <p:nvPr/>
+        </p:nvSpPr>
+        <p:spPr>
+          <a:xfrm>
+            <a:off x="7223759" y="1389888"/>
+            <a:ext cx="1280160" cy="365760"/>
+          </a:xfrm>
+          <a:prstGeom prst="rect">
+            <a:avLst/>
+          </a:prstGeom>
+          <a:noFill/>
+        </p:spPr>
+        <p:txBody>
+          <a:bodyPr wrap="square" lIns="0" rIns="0" tIns="0" bIns="0" anchor="t">
+            <a:spAutoFit/>
+          </a:bodyPr>
+          <a:lstStyle/>
+          <a:p>
+            <a:pPr algn="l"/>
+            <a:r>
+              <a:rPr sz="1600" b="1" i="0">
+                <a:solidFill>
+                  <a:srgbClr val="0F2A6B"/>
+                </a:solidFill>
+                <a:latin typeface="Cambria"/>
+              </a:rPr>
+              <a:t>Statistics</a:t>
+            </a:r>
+          </a:p>
+        </p:txBody>
+      </p:sp>
+      <p:sp>
+        <p:nvSpPr>
+          <p:cNvPr id="29" name="TextBox 28"/>
+          <p:cNvSpPr txBox="1"/>
+          <p:nvPr/>
+        </p:nvSpPr>
+        <p:spPr>
+          <a:xfrm>
+            <a:off x="7223759" y="1783080"/>
+            <a:ext cx="1280160" cy="566928"/>
+          </a:xfrm>
+          <a:prstGeom prst="rect">
+            <a:avLst/>
+          </a:prstGeom>
+          <a:noFill/>
+        </p:spPr>
+        <p:txBody>
+          <a:bodyPr wrap="square" lIns="0" rIns="0" tIns="0" bIns="0" anchor="t">
+            <a:spAutoFit/>
+          </a:bodyPr>
+          <a:lstStyle/>
+          <a:p>
+            <a:pPr algn="l"/>
+            <a:r>
+              <a:rPr sz="1200" b="0" i="0">
+                <a:solidFill>
+                  <a:srgbClr val="1B2336"/>
+                </a:solidFill>
+                <a:latin typeface="Calibri"/>
+              </a:rPr>
+              <a:t>Tests, bootstrap, runner</a:t>
+            </a:r>
+          </a:p>
+        </p:txBody>
+      </p:sp>
+      <p:sp>
+        <p:nvSpPr>
+          <p:cNvPr id="30" name="Status Statistics"/>
+          <p:cNvSpPr/>
+          <p:nvPr/>
+        </p:nvSpPr>
+        <p:spPr>
+          <a:xfrm>
+            <a:off x="7223759" y="2404872"/>
+            <a:ext cx="868680" cy="256032"/>
+          </a:xfrm>
+          <a:prstGeom prst="roundRect">
+            <a:avLst>
+              <a:gd name="adj" fmla="val 50000"/>
+            </a:avLst>
+          </a:prstGeom>
+          <a:solidFill>
+            <a:srgbClr val="2E8B6E"/>
+          </a:solidFill>
+          <a:ln>
+            <a:noFill/>
+          </a:ln>
+          <a:effectLst/>
+        </p:spPr>
+        <p:style>
+          <a:lnRef idx="1">
+            <a:schemeClr val="accent1"/>
+          </a:lnRef>
+          <a:fillRef idx="3">
+            <a:schemeClr val="accent1"/>
+          </a:fillRef>
+          <a:effectRef idx="2">
+            <a:schemeClr val="accent1"/>
+          </a:effectRef>
+          <a:fontRef idx="minor">
+            <a:schemeClr val="lt1"/>
+          </a:fontRef>
+        </p:style>
+        <p:txBody>
+          <a:bodyPr rtlCol="0" anchor="ctr"/>
+          <a:lstStyle/>
+          <a:p>
+            <a:pPr algn="ctr"/>
+          </a:p>
+        </p:txBody>
+      </p:sp>
+      <p:sp>
+        <p:nvSpPr>
+          <p:cNvPr id="31" name="TextBox 30"/>
+          <p:cNvSpPr txBox="1"/>
+          <p:nvPr/>
+        </p:nvSpPr>
+        <p:spPr>
+          <a:xfrm>
+            <a:off x="7223759" y="2404872"/>
+            <a:ext cx="868680" cy="256032"/>
+          </a:xfrm>
+          <a:prstGeom prst="rect">
+            <a:avLst/>
+          </a:prstGeom>
+          <a:noFill/>
+        </p:spPr>
+        <p:txBody>
+          <a:bodyPr wrap="square" lIns="0" rIns="0" tIns="0" bIns="0" anchor="ctr">
+            <a:spAutoFit/>
+          </a:bodyPr>
+          <a:lstStyle/>
+          <a:p>
+            <a:pPr algn="ctr"/>
+            <a:r>
+              <a:rPr sz="1100" b="1" i="0">
+                <a:solidFill>
+                  <a:srgbClr val="FFFFFF"/>
+                </a:solidFill>
+                <a:latin typeface="Calibri"/>
+              </a:rPr>
+              <a:t>merged</a:t>
+            </a:r>
+          </a:p>
+        </p:txBody>
+      </p:sp>
+      <p:sp>
+        <p:nvSpPr>
+          <p:cNvPr id="32" name="TextBox 31"/>
+          <p:cNvSpPr txBox="1"/>
+          <p:nvPr/>
+        </p:nvSpPr>
+        <p:spPr>
+          <a:xfrm>
+            <a:off x="548640" y="3017520"/>
+            <a:ext cx="2560320" cy="640080"/>
+          </a:xfrm>
+          <a:prstGeom prst="rect">
+            <a:avLst/>
+          </a:prstGeom>
+          <a:noFill/>
+        </p:spPr>
+        <p:txBody>
+          <a:bodyPr wrap="square" lIns="0" rIns="0" tIns="0" bIns="0" anchor="t">
+            <a:spAutoFit/>
+          </a:bodyPr>
+          <a:lstStyle/>
+          <a:p>
+            <a:pPr algn="l"/>
+            <a:r>
+              <a:rPr sz="3600" b="1" i="0">
+                <a:solidFill>
+                  <a:srgbClr val="3B5BA9"/>
+                </a:solidFill>
+                <a:latin typeface="Cambria"/>
+              </a:rPr>
+              <a:t>64 of 65</a:t>
+            </a:r>
+          </a:p>
+        </p:txBody>
+      </p:sp>
+      <p:sp>
+        <p:nvSpPr>
+          <p:cNvPr id="33" name="TextBox 32"/>
+          <p:cNvSpPr txBox="1"/>
+          <p:nvPr/>
+        </p:nvSpPr>
+        <p:spPr>
+          <a:xfrm>
+            <a:off x="548640" y="3657600"/>
+            <a:ext cx="2468880" cy="822960"/>
+          </a:xfrm>
+          <a:prstGeom prst="rect">
+            <a:avLst/>
+          </a:prstGeom>
+          <a:noFill/>
+        </p:spPr>
+        <p:txBody>
+          <a:bodyPr wrap="square" lIns="0" rIns="0" tIns="0" bIns="0" anchor="t">
+            <a:spAutoFit/>
+          </a:bodyPr>
+          <a:lstStyle/>
+          <a:p>
+            <a:pPr algn="l"/>
+            <a:r>
+              <a:rPr sz="1200" b="0" i="0">
+                <a:solidFill>
+                  <a:srgbClr val="1B2336"/>
+                </a:solidFill>
+                <a:latin typeface="Calibri"/>
+              </a:rPr>
+              <a:t>front-contract expiries match Databento's definitions, 2010 to 2026</a:t>
+            </a:r>
+          </a:p>
+        </p:txBody>
+      </p:sp>
+      <p:sp>
+        <p:nvSpPr>
+          <p:cNvPr id="34" name="TextBox 33"/>
+          <p:cNvSpPr txBox="1"/>
+          <p:nvPr/>
+        </p:nvSpPr>
+        <p:spPr>
+          <a:xfrm>
+            <a:off x="3291840" y="3017520"/>
+            <a:ext cx="2560320" cy="640080"/>
+          </a:xfrm>
+          <a:prstGeom prst="rect">
+            <a:avLst/>
+          </a:prstGeom>
+          <a:noFill/>
+        </p:spPr>
+        <p:txBody>
+          <a:bodyPr wrap="square" lIns="0" rIns="0" tIns="0" bIns="0" anchor="t">
+            <a:spAutoFit/>
+          </a:bodyPr>
+          <a:lstStyle/>
+          <a:p>
+            <a:pPr algn="l"/>
+            <a:r>
+              <a:rPr sz="3600" b="1" i="0">
+                <a:solidFill>
+                  <a:srgbClr val="3B5BA9"/>
+                </a:solidFill>
+                <a:latin typeface="Cambria"/>
+              </a:rPr>
+              <a:t>7 days</a:t>
+            </a:r>
+          </a:p>
+        </p:txBody>
+      </p:sp>
+      <p:sp>
+        <p:nvSpPr>
+          <p:cNvPr id="35" name="TextBox 34"/>
+          <p:cNvSpPr txBox="1"/>
+          <p:nvPr/>
+        </p:nvSpPr>
+        <p:spPr>
+          <a:xfrm>
+            <a:off x="3291840" y="3657600"/>
+            <a:ext cx="2468880" cy="822960"/>
+          </a:xfrm>
+          <a:prstGeom prst="rect">
+            <a:avLst/>
+          </a:prstGeom>
+          <a:noFill/>
+        </p:spPr>
+        <p:txBody>
+          <a:bodyPr wrap="square" lIns="0" rIns="0" tIns="0" bIns="0" anchor="t">
+            <a:spAutoFit/>
+          </a:bodyPr>
+          <a:lstStyle/>
+          <a:p>
+            <a:pPr algn="l"/>
+            <a:r>
+              <a:rPr sz="1200" b="0" i="0">
+                <a:solidFill>
+                  <a:srgbClr val="1B2336"/>
+                </a:solidFill>
+                <a:latin typeface="Calibri"/>
+              </a:rPr>
+              <a:t>dropped out of all 65 rolls: 5 CME holidays and 2 days with no quotes</a:t>
+            </a:r>
+          </a:p>
+        </p:txBody>
+      </p:sp>
+      <p:sp>
+        <p:nvSpPr>
+          <p:cNvPr id="36" name="TextBox 35"/>
+          <p:cNvSpPr txBox="1"/>
+          <p:nvPr/>
+        </p:nvSpPr>
+        <p:spPr>
+          <a:xfrm>
+            <a:off x="6035040" y="3017520"/>
+            <a:ext cx="2560320" cy="640080"/>
+          </a:xfrm>
+          <a:prstGeom prst="rect">
+            <a:avLst/>
+          </a:prstGeom>
+          <a:noFill/>
+        </p:spPr>
+        <p:txBody>
+          <a:bodyPr wrap="square" lIns="0" rIns="0" tIns="0" bIns="0" anchor="t">
+            <a:spAutoFit/>
+          </a:bodyPr>
+          <a:lstStyle/>
+          <a:p>
+            <a:pPr algn="l"/>
+            <a:r>
+              <a:rPr sz="3600" b="1" i="0">
+                <a:solidFill>
+                  <a:srgbClr val="3B5BA9"/>
+                </a:solidFill>
+                <a:latin typeface="Cambria"/>
+              </a:rPr>
+              <a:t>190+</a:t>
+            </a:r>
+          </a:p>
+        </p:txBody>
+      </p:sp>
+      <p:sp>
+        <p:nvSpPr>
+          <p:cNvPr id="37" name="TextBox 36"/>
+          <p:cNvSpPr txBox="1"/>
+          <p:nvPr/>
+        </p:nvSpPr>
+        <p:spPr>
+          <a:xfrm>
+            <a:off x="6035040" y="3657600"/>
+            <a:ext cx="2468880" cy="822960"/>
+          </a:xfrm>
+          <a:prstGeom prst="rect">
+            <a:avLst/>
+          </a:prstGeom>
+          <a:noFill/>
+        </p:spPr>
+        <p:txBody>
+          <a:bodyPr wrap="square" lIns="0" rIns="0" tIns="0" bIns="0" anchor="t">
+            <a:spAutoFit/>
+          </a:bodyPr>
+          <a:lstStyle/>
+          <a:p>
+            <a:pPr algn="l"/>
+            <a:r>
+              <a:rPr sz="1200" b="0" i="0">
+                <a:solidFill>
+                  <a:srgbClr val="1B2336"/>
+                </a:solidFill>
+                <a:latin typeface="Calibri"/>
+              </a:rPr>
+              <a:t>automated tests, run on Linux and Windows for every pull request</a:t>
             </a:r>
           </a:p>
         </p:txBody>
@@ -6875,6 +7958,2009 @@
                 </a:solidFill>
                 <a:latin typeface="Cambria"/>
               </a:rPr>
+              <a:t>What the data show before any test</a:t>
+            </a:r>
+          </a:p>
+        </p:txBody>
+      </p:sp>
+      <p:graphicFrame>
+        <p:nvGraphicFramePr>
+          <p:cNvPr id="3" name="Spread volume by week"/>
+          <p:cNvGraphicFramePr>
+            <a:graphicFrameLocks noGrp="1"/>
+          </p:cNvGraphicFramePr>
+          <p:nvPr/>
+        </p:nvGraphicFramePr>
+        <p:xfrm>
+          <a:off x="457200" y="1234440"/>
+          <a:ext cx="4480560" cy="3108960"/>
+        </p:xfrm>
+        <a:graphic>
+          <a:graphicData uri="http://schemas.openxmlformats.org/drawingml/2006/chart">
+            <c:chart xmlns:c="http://schemas.openxmlformats.org/drawingml/2006/chart" r:id="rId2"/>
+          </a:graphicData>
+        </a:graphic>
+      </p:graphicFrame>
+      <p:sp>
+        <p:nvSpPr>
+          <p:cNvPr id="4" name="Findings"/>
+          <p:cNvSpPr txBox="1"/>
+          <p:nvPr/>
+        </p:nvSpPr>
+        <p:spPr>
+          <a:xfrm>
+            <a:off x="5212080" y="1280160"/>
+            <a:ext cx="3474720" cy="3200400"/>
+          </a:xfrm>
+          <a:prstGeom prst="rect">
+            <a:avLst/>
+          </a:prstGeom>
+          <a:noFill/>
+        </p:spPr>
+        <p:txBody>
+          <a:bodyPr wrap="square" lIns="0" rIns="0" tIns="0" bIns="0" anchor="t">
+            <a:spAutoFit/>
+          </a:bodyPr>
+          <a:lstStyle/>
+          <a:p>
+            <a:pPr algn="l" marL="201168" indent="-201168">
+              <a:spcAft>
+                <a:spcPts val="800"/>
+              </a:spcAft>
+              <a:buChar char="•"/>
+            </a:pPr>
+            <a:r>
+              <a:rPr sz="1300" b="1" i="0">
+                <a:solidFill>
+                  <a:srgbClr val="0F2A6B"/>
+                </a:solidFill>
+                <a:latin typeface="Calibri"/>
+              </a:rPr>
+              <a:t>Rolling is concentrated.</a:t>
+            </a:r>
+            <a:r>
+              <a:rPr sz="1300" b="0" i="0">
+                <a:solidFill>
+                  <a:srgbClr val="1B2336"/>
+                </a:solidFill>
+                <a:latin typeface="Calibri"/>
+              </a:rPr>
+              <a:t> The roll week holds 80 to 87% of listed-spread volume; the control week 0 to 1%.</a:t>
+            </a:r>
+          </a:p>
+          <a:p>
+            <a:pPr algn="l" marL="201168" indent="-201168">
+              <a:spcAft>
+                <a:spcPts val="800"/>
+              </a:spcAft>
+              <a:buChar char="•"/>
+            </a:pPr>
+            <a:r>
+              <a:rPr sz="1300" b="1" i="0">
+                <a:solidFill>
+                  <a:srgbClr val="0F2A6B"/>
+                </a:solidFill>
+                <a:latin typeface="Calibri"/>
+              </a:rPr>
+              <a:t>Outright volume lags.</a:t>
+            </a:r>
+            <a:r>
+              <a:rPr sz="1300" b="0" i="0">
+                <a:solidFill>
+                  <a:srgbClr val="1B2336"/>
+                </a:solidFill>
+                <a:latin typeface="Calibri"/>
+              </a:rPr>
+              <a:t> The deferred contract passes half of outright volume 3 days before expiry in 63 of 65 rolls.</a:t>
+            </a:r>
+          </a:p>
+          <a:p>
+            <a:pPr algn="l" marL="201168" indent="-201168">
+              <a:spcAft>
+                <a:spcPts val="800"/>
+              </a:spcAft>
+              <a:buChar char="•"/>
+            </a:pPr>
+            <a:r>
+              <a:rPr sz="1300" b="1" i="0">
+                <a:solidFill>
+                  <a:srgbClr val="0F2A6B"/>
+                </a:solidFill>
+                <a:latin typeface="Calibri"/>
+              </a:rPr>
+              <a:t>The control is thin.</a:t>
+            </a:r>
+            <a:r>
+              <a:rPr sz="1300" b="0" i="0">
+                <a:solidFill>
+                  <a:srgbClr val="1B2336"/>
+                </a:solidFill>
+                <a:latin typeface="Calibri"/>
+              </a:rPr>
+              <a:t> Its deferred contract trades 1 to 2% of roll-week volume and is quoted about twice as wide.</a:t>
+            </a:r>
+          </a:p>
+          <a:p>
+            <a:pPr algn="l" marL="201168" indent="-201168">
+              <a:spcAft>
+                <a:spcPts val="800"/>
+              </a:spcAft>
+              <a:buChar char="•"/>
+            </a:pPr>
+            <a:r>
+              <a:rPr sz="1300" b="1" i="0">
+                <a:solidFill>
+                  <a:srgbClr val="0F2A6B"/>
+                </a:solidFill>
+                <a:latin typeface="Calibri"/>
+              </a:rPr>
+              <a:t>Meetings line up.</a:t>
+            </a:r>
+            <a:r>
+              <a:rPr sz="1300" b="0" i="0">
+                <a:solidFill>
+                  <a:srgbClr val="1B2336"/>
+                </a:solidFill>
+                <a:latin typeface="Calibri"/>
+              </a:rPr>
+              <a:t> A Fed or ECB decision falls in 29 of 57 roll windows, but only 1 control window.</a:t>
+            </a:r>
+          </a:p>
+        </p:txBody>
+      </p:sp>
+      <p:sp>
+        <p:nvSpPr>
+          <p:cNvPr id="5" name="TextBox 4"/>
+          <p:cNvSpPr txBox="1"/>
+          <p:nvPr/>
+        </p:nvSpPr>
+        <p:spPr>
+          <a:xfrm>
+            <a:off x="548640" y="4572000"/>
+            <a:ext cx="8046720" cy="274320"/>
+          </a:xfrm>
+          <a:prstGeom prst="rect">
+            <a:avLst/>
+          </a:prstGeom>
+          <a:noFill/>
+        </p:spPr>
+        <p:txBody>
+          <a:bodyPr wrap="square" lIns="0" rIns="0" tIns="0" bIns="0" anchor="t">
+            <a:spAutoFit/>
+          </a:bodyPr>
+          <a:lstStyle/>
+          <a:p>
+            <a:pPr algn="l"/>
+            <a:r>
+              <a:rPr sz="1100" b="0" i="1">
+                <a:solidFill>
+                  <a:srgbClr val="7A869E"/>
+                </a:solidFill>
+                <a:latin typeface="Calibri"/>
+              </a:rPr>
+              <a:t>Volume shares: the 8 recent rolls, volume only. Liquidity and meetings: all 65 rolls, quote quality only. No spread changes were examined.</a:t>
+            </a:r>
+          </a:p>
+        </p:txBody>
+      </p:sp>
+    </p:spTree>
+  </p:cSld>
+  <p:clrMapOvr>
+    <a:masterClrMapping/>
+  </p:clrMapOvr>
+</p:sld>
+</file>
+
+<file path=ppt/slides/slide6.xml><?xml version="1.0" encoding="utf-8"?>
+<p:sld xmlns:a="http://schemas.openxmlformats.org/drawingml/2006/main" xmlns:p="http://schemas.openxmlformats.org/presentationml/2006/main" xmlns:r="http://schemas.openxmlformats.org/officeDocument/2006/relationships">
+  <p:cSld>
+    <p:bg>
+      <p:bgPr>
+        <a:solidFill>
+          <a:srgbClr val="FFFFFF"/>
+        </a:solidFill>
+        <a:effectLst/>
+      </p:bgPr>
+    </p:bg>
+    <p:spTree>
+      <p:nvGrpSpPr>
+        <p:cNvPr id="1" name=""/>
+        <p:cNvGrpSpPr/>
+        <p:nvPr/>
+      </p:nvGrpSpPr>
+      <p:grpSpPr/>
+      <p:sp>
+        <p:nvSpPr>
+          <p:cNvPr id="2" name="Title"/>
+          <p:cNvSpPr txBox="1"/>
+          <p:nvPr/>
+        </p:nvSpPr>
+        <p:spPr>
+          <a:xfrm>
+            <a:off x="548640" y="320040"/>
+            <a:ext cx="8046720" cy="731520"/>
+          </a:xfrm>
+          <a:prstGeom prst="rect">
+            <a:avLst/>
+          </a:prstGeom>
+          <a:noFill/>
+        </p:spPr>
+        <p:txBody>
+          <a:bodyPr wrap="square" lIns="0" rIns="0" tIns="0" bIns="0" anchor="ctr">
+            <a:spAutoFit/>
+          </a:bodyPr>
+          <a:lstStyle/>
+          <a:p>
+            <a:pPr algn="l"/>
+            <a:r>
+              <a:rPr sz="3200" b="1" i="0">
+                <a:solidFill>
+                  <a:srgbClr val="0F2A6B"/>
+                </a:solidFill>
+                <a:latin typeface="Cambria"/>
+              </a:rPr>
+              <a:t>No evidence of a roll effect</a:t>
+            </a:r>
+          </a:p>
+        </p:txBody>
+      </p:sp>
+      <p:graphicFrame>
+        <p:nvGraphicFramePr>
+          <p:cNvPr id="3" name="Mean absolute change"/>
+          <p:cNvGraphicFramePr>
+            <a:graphicFrameLocks noGrp="1"/>
+          </p:cNvGraphicFramePr>
+          <p:nvPr/>
+        </p:nvGraphicFramePr>
+        <p:xfrm>
+          <a:off x="457200" y="1234440"/>
+          <a:ext cx="4023360" cy="3200400"/>
+        </p:xfrm>
+        <a:graphic>
+          <a:graphicData uri="http://schemas.openxmlformats.org/drawingml/2006/chart">
+            <c:chart xmlns:c="http://schemas.openxmlformats.org/drawingml/2006/chart" r:id="rId2"/>
+          </a:graphicData>
+        </a:graphic>
+      </p:graphicFrame>
+      <p:sp>
+        <p:nvSpPr>
+          <p:cNvPr id="4" name="TextBox 3"/>
+          <p:cNvSpPr txBox="1"/>
+          <p:nvPr/>
+        </p:nvSpPr>
+        <p:spPr>
+          <a:xfrm>
+            <a:off x="4846320" y="1280160"/>
+            <a:ext cx="3840480" cy="411480"/>
+          </a:xfrm>
+          <a:prstGeom prst="rect">
+            <a:avLst/>
+          </a:prstGeom>
+          <a:noFill/>
+        </p:spPr>
+        <p:txBody>
+          <a:bodyPr wrap="square" lIns="0" rIns="0" tIns="0" bIns="0" anchor="t">
+            <a:spAutoFit/>
+          </a:bodyPr>
+          <a:lstStyle/>
+          <a:p>
+            <a:pPr algn="l"/>
+            <a:r>
+              <a:rPr sz="2200" b="1" i="0">
+                <a:solidFill>
+                  <a:srgbClr val="3B5BA9"/>
+                </a:solidFill>
+                <a:latin typeface="Cambria"/>
+              </a:rPr>
+              <a:t>+0.52 ticks</a:t>
+            </a:r>
+          </a:p>
+        </p:txBody>
+      </p:sp>
+      <p:sp>
+        <p:nvSpPr>
+          <p:cNvPr id="5" name="TextBox 4"/>
+          <p:cNvSpPr txBox="1"/>
+          <p:nvPr/>
+        </p:nvSpPr>
+        <p:spPr>
+          <a:xfrm>
+            <a:off x="4846320" y="1691639"/>
+            <a:ext cx="3840480" cy="320040"/>
+          </a:xfrm>
+          <a:prstGeom prst="rect">
+            <a:avLst/>
+          </a:prstGeom>
+          <a:noFill/>
+        </p:spPr>
+        <p:txBody>
+          <a:bodyPr wrap="square" lIns="0" rIns="0" tIns="0" bIns="0" anchor="t">
+            <a:spAutoFit/>
+          </a:bodyPr>
+          <a:lstStyle/>
+          <a:p>
+            <a:pPr algn="l"/>
+            <a:r>
+              <a:rPr sz="1200" b="0" i="0">
+                <a:solidFill>
+                  <a:srgbClr val="1B2336"/>
+                </a:solidFill>
+                <a:latin typeface="Calibri"/>
+              </a:rPr>
+              <a:t>H1: mean of d = |roll| minus |control|, per roll</a:t>
+            </a:r>
+          </a:p>
+        </p:txBody>
+      </p:sp>
+      <p:sp>
+        <p:nvSpPr>
+          <p:cNvPr id="6" name="TextBox 5"/>
+          <p:cNvSpPr txBox="1"/>
+          <p:nvPr/>
+        </p:nvSpPr>
+        <p:spPr>
+          <a:xfrm>
+            <a:off x="4846320" y="2057400"/>
+            <a:ext cx="3840480" cy="411480"/>
+          </a:xfrm>
+          <a:prstGeom prst="rect">
+            <a:avLst/>
+          </a:prstGeom>
+          <a:noFill/>
+        </p:spPr>
+        <p:txBody>
+          <a:bodyPr wrap="square" lIns="0" rIns="0" tIns="0" bIns="0" anchor="t">
+            <a:spAutoFit/>
+          </a:bodyPr>
+          <a:lstStyle/>
+          <a:p>
+            <a:pPr algn="l"/>
+            <a:r>
+              <a:rPr sz="2200" b="1" i="0">
+                <a:solidFill>
+                  <a:srgbClr val="3B5BA9"/>
+                </a:solidFill>
+                <a:latin typeface="Cambria"/>
+              </a:rPr>
+              <a:t>−0.96 to +2.19</a:t>
+            </a:r>
+          </a:p>
+        </p:txBody>
+      </p:sp>
+      <p:sp>
+        <p:nvSpPr>
+          <p:cNvPr id="7" name="TextBox 6"/>
+          <p:cNvSpPr txBox="1"/>
+          <p:nvPr/>
+        </p:nvSpPr>
+        <p:spPr>
+          <a:xfrm>
+            <a:off x="4846320" y="2468880"/>
+            <a:ext cx="3840480" cy="320040"/>
+          </a:xfrm>
+          <a:prstGeom prst="rect">
+            <a:avLst/>
+          </a:prstGeom>
+          <a:noFill/>
+        </p:spPr>
+        <p:txBody>
+          <a:bodyPr wrap="square" lIns="0" rIns="0" tIns="0" bIns="0" anchor="t">
+            <a:spAutoFit/>
+          </a:bodyPr>
+          <a:lstStyle/>
+          <a:p>
+            <a:pPr algn="l"/>
+            <a:r>
+              <a:rPr sz="1200" b="0" i="0">
+                <a:solidFill>
+                  <a:srgbClr val="1B2336"/>
+                </a:solidFill>
+                <a:latin typeface="Calibri"/>
+              </a:rPr>
+              <a:t>95% bootstrap interval, includes zero</a:t>
+            </a:r>
+          </a:p>
+        </p:txBody>
+      </p:sp>
+      <p:sp>
+        <p:nvSpPr>
+          <p:cNvPr id="8" name="TextBox 7"/>
+          <p:cNvSpPr txBox="1"/>
+          <p:nvPr/>
+        </p:nvSpPr>
+        <p:spPr>
+          <a:xfrm>
+            <a:off x="4846320" y="2834639"/>
+            <a:ext cx="3840480" cy="411480"/>
+          </a:xfrm>
+          <a:prstGeom prst="rect">
+            <a:avLst/>
+          </a:prstGeom>
+          <a:noFill/>
+        </p:spPr>
+        <p:txBody>
+          <a:bodyPr wrap="square" lIns="0" rIns="0" tIns="0" bIns="0" anchor="t">
+            <a:spAutoFit/>
+          </a:bodyPr>
+          <a:lstStyle/>
+          <a:p>
+            <a:pPr algn="l"/>
+            <a:r>
+              <a:rPr sz="2200" b="1" i="0">
+                <a:solidFill>
+                  <a:srgbClr val="3B5BA9"/>
+                </a:solidFill>
+                <a:latin typeface="Cambria"/>
+              </a:rPr>
+              <a:t>p = 0.89 and 0.37</a:t>
+            </a:r>
+          </a:p>
+        </p:txBody>
+      </p:sp>
+      <p:sp>
+        <p:nvSpPr>
+          <p:cNvPr id="9" name="TextBox 8"/>
+          <p:cNvSpPr txBox="1"/>
+          <p:nvPr/>
+        </p:nvSpPr>
+        <p:spPr>
+          <a:xfrm>
+            <a:off x="4846320" y="3246120"/>
+            <a:ext cx="3840480" cy="320040"/>
+          </a:xfrm>
+          <a:prstGeom prst="rect">
+            <a:avLst/>
+          </a:prstGeom>
+          <a:noFill/>
+        </p:spPr>
+        <p:txBody>
+          <a:bodyPr wrap="square" lIns="0" rIns="0" tIns="0" bIns="0" anchor="t">
+            <a:spAutoFit/>
+          </a:bodyPr>
+          <a:lstStyle/>
+          <a:p>
+            <a:pPr algn="l"/>
+            <a:r>
+              <a:rPr sz="1200" b="0" i="0">
+                <a:solidFill>
+                  <a:srgbClr val="1B2336"/>
+                </a:solidFill>
+                <a:latin typeface="Calibri"/>
+              </a:rPr>
+              <a:t>sign test and Wilcoxon test</a:t>
+            </a:r>
+          </a:p>
+        </p:txBody>
+      </p:sp>
+      <p:sp>
+        <p:nvSpPr>
+          <p:cNvPr id="10" name="TextBox 9"/>
+          <p:cNvSpPr txBox="1"/>
+          <p:nvPr/>
+        </p:nvSpPr>
+        <p:spPr>
+          <a:xfrm>
+            <a:off x="4846320" y="3611879"/>
+            <a:ext cx="3840480" cy="411480"/>
+          </a:xfrm>
+          <a:prstGeom prst="rect">
+            <a:avLst/>
+          </a:prstGeom>
+          <a:noFill/>
+        </p:spPr>
+        <p:txBody>
+          <a:bodyPr wrap="square" lIns="0" rIns="0" tIns="0" bIns="0" anchor="t">
+            <a:spAutoFit/>
+          </a:bodyPr>
+          <a:lstStyle/>
+          <a:p>
+            <a:pPr algn="l"/>
+            <a:r>
+              <a:rPr sz="2200" b="1" i="0">
+                <a:solidFill>
+                  <a:srgbClr val="3B5BA9"/>
+                </a:solidFill>
+                <a:latin typeface="Cambria"/>
+              </a:rPr>
+              <a:t>24 of 50</a:t>
+            </a:r>
+          </a:p>
+        </p:txBody>
+      </p:sp>
+      <p:sp>
+        <p:nvSpPr>
+          <p:cNvPr id="11" name="TextBox 10"/>
+          <p:cNvSpPr txBox="1"/>
+          <p:nvPr/>
+        </p:nvSpPr>
+        <p:spPr>
+          <a:xfrm>
+            <a:off x="4846320" y="4023359"/>
+            <a:ext cx="3840480" cy="320040"/>
+          </a:xfrm>
+          <a:prstGeom prst="rect">
+            <a:avLst/>
+          </a:prstGeom>
+          <a:noFill/>
+        </p:spPr>
+        <p:txBody>
+          <a:bodyPr wrap="square" lIns="0" rIns="0" tIns="0" bIns="0" anchor="t">
+            <a:spAutoFit/>
+          </a:bodyPr>
+          <a:lstStyle/>
+          <a:p>
+            <a:pPr algn="l"/>
+            <a:r>
+              <a:rPr sz="1200" b="0" i="0">
+                <a:solidFill>
+                  <a:srgbClr val="1B2336"/>
+                </a:solidFill>
+                <a:latin typeface="Calibri"/>
+              </a:rPr>
+              <a:t>roll weeks where the spread rose (H2), p = 0.89</a:t>
+            </a:r>
+          </a:p>
+        </p:txBody>
+      </p:sp>
+      <p:sp>
+        <p:nvSpPr>
+          <p:cNvPr id="12" name="TextBox 11"/>
+          <p:cNvSpPr txBox="1"/>
+          <p:nvPr/>
+        </p:nvSpPr>
+        <p:spPr>
+          <a:xfrm>
+            <a:off x="548640" y="4572000"/>
+            <a:ext cx="8046720" cy="274320"/>
+          </a:xfrm>
+          <a:prstGeom prst="rect">
+            <a:avLst/>
+          </a:prstGeom>
+          <a:noFill/>
+        </p:spPr>
+        <p:txBody>
+          <a:bodyPr wrap="square" lIns="0" rIns="0" tIns="0" bIns="0" anchor="t">
+            <a:spAutoFit/>
+          </a:bodyPr>
+          <a:lstStyle/>
+          <a:p>
+            <a:pPr algn="l"/>
+            <a:r>
+              <a:rPr sz="1100" b="0" i="1">
+                <a:solidFill>
+                  <a:srgbClr val="7A869E"/>
+                </a:solidFill>
+                <a:latin typeface="Calibri"/>
+              </a:rPr>
+              <a:t>57 held-out rolls, September 2010 to September 2024. H3 (the dollar cost) is not computed because H1 and H2 do not hold.</a:t>
+            </a:r>
+          </a:p>
+        </p:txBody>
+      </p:sp>
+    </p:spTree>
+  </p:cSld>
+  <p:clrMapOvr>
+    <a:masterClrMapping/>
+  </p:clrMapOvr>
+</p:sld>
+</file>
+
+<file path=ppt/slides/slide7.xml><?xml version="1.0" encoding="utf-8"?>
+<p:sld xmlns:a="http://schemas.openxmlformats.org/drawingml/2006/main" xmlns:p="http://schemas.openxmlformats.org/presentationml/2006/main" xmlns:r="http://schemas.openxmlformats.org/officeDocument/2006/relationships">
+  <p:cSld>
+    <p:bg>
+      <p:bgPr>
+        <a:solidFill>
+          <a:srgbClr val="FFFFFF"/>
+        </a:solidFill>
+        <a:effectLst/>
+      </p:bgPr>
+    </p:bg>
+    <p:spTree>
+      <p:nvGrpSpPr>
+        <p:cNvPr id="1" name=""/>
+        <p:cNvGrpSpPr/>
+        <p:nvPr/>
+      </p:nvGrpSpPr>
+      <p:grpSpPr/>
+      <p:sp>
+        <p:nvSpPr>
+          <p:cNvPr id="2" name="Title"/>
+          <p:cNvSpPr txBox="1"/>
+          <p:nvPr/>
+        </p:nvSpPr>
+        <p:spPr>
+          <a:xfrm>
+            <a:off x="548640" y="320040"/>
+            <a:ext cx="8046720" cy="731520"/>
+          </a:xfrm>
+          <a:prstGeom prst="rect">
+            <a:avLst/>
+          </a:prstGeom>
+          <a:noFill/>
+        </p:spPr>
+        <p:txBody>
+          <a:bodyPr wrap="square" lIns="0" rIns="0" tIns="0" bIns="0" anchor="ctr">
+            <a:spAutoFit/>
+          </a:bodyPr>
+          <a:lstStyle/>
+          <a:p>
+            <a:pPr algn="l"/>
+            <a:r>
+              <a:rPr sz="3200" b="1" i="0">
+                <a:solidFill>
+                  <a:srgbClr val="0F2A6B"/>
+                </a:solidFill>
+                <a:latin typeface="Cambria"/>
+              </a:rPr>
+              <a:t>Robust under every planned check</a:t>
+            </a:r>
+          </a:p>
+        </p:txBody>
+      </p:sp>
+      <p:sp>
+        <p:nvSpPr>
+          <p:cNvPr id="3" name="TextBox 2"/>
+          <p:cNvSpPr txBox="1"/>
+          <p:nvPr/>
+        </p:nvSpPr>
+        <p:spPr>
+          <a:xfrm>
+            <a:off x="4251960" y="3895344"/>
+            <a:ext cx="457200" cy="228600"/>
+          </a:xfrm>
+          <a:prstGeom prst="rect">
+            <a:avLst/>
+          </a:prstGeom>
+          <a:noFill/>
+        </p:spPr>
+        <p:txBody>
+          <a:bodyPr wrap="square" lIns="0" rIns="0" tIns="0" bIns="0" anchor="t">
+            <a:spAutoFit/>
+          </a:bodyPr>
+          <a:lstStyle/>
+          <a:p>
+            <a:pPr algn="ctr"/>
+            <a:r>
+              <a:rPr sz="1100" b="0" i="0">
+                <a:solidFill>
+                  <a:srgbClr val="7A869E"/>
+                </a:solidFill>
+                <a:latin typeface="Calibri"/>
+              </a:rPr>
+              <a:t>−3</a:t>
+            </a:r>
+          </a:p>
+        </p:txBody>
+      </p:sp>
+      <p:sp>
+        <p:nvSpPr>
+          <p:cNvPr id="4" name="TextBox 3"/>
+          <p:cNvSpPr txBox="1"/>
+          <p:nvPr/>
+        </p:nvSpPr>
+        <p:spPr>
+          <a:xfrm>
+            <a:off x="4922520" y="3895344"/>
+            <a:ext cx="457200" cy="228600"/>
+          </a:xfrm>
+          <a:prstGeom prst="rect">
+            <a:avLst/>
+          </a:prstGeom>
+          <a:noFill/>
+        </p:spPr>
+        <p:txBody>
+          <a:bodyPr wrap="square" lIns="0" rIns="0" tIns="0" bIns="0" anchor="t">
+            <a:spAutoFit/>
+          </a:bodyPr>
+          <a:lstStyle/>
+          <a:p>
+            <a:pPr algn="ctr"/>
+            <a:r>
+              <a:rPr sz="1100" b="0" i="0">
+                <a:solidFill>
+                  <a:srgbClr val="7A869E"/>
+                </a:solidFill>
+                <a:latin typeface="Calibri"/>
+              </a:rPr>
+              <a:t>−2</a:t>
+            </a:r>
+          </a:p>
+        </p:txBody>
+      </p:sp>
+      <p:sp>
+        <p:nvSpPr>
+          <p:cNvPr id="5" name="TextBox 4"/>
+          <p:cNvSpPr txBox="1"/>
+          <p:nvPr/>
+        </p:nvSpPr>
+        <p:spPr>
+          <a:xfrm>
+            <a:off x="5593080" y="3895344"/>
+            <a:ext cx="457200" cy="228600"/>
+          </a:xfrm>
+          <a:prstGeom prst="rect">
+            <a:avLst/>
+          </a:prstGeom>
+          <a:noFill/>
+        </p:spPr>
+        <p:txBody>
+          <a:bodyPr wrap="square" lIns="0" rIns="0" tIns="0" bIns="0" anchor="t">
+            <a:spAutoFit/>
+          </a:bodyPr>
+          <a:lstStyle/>
+          <a:p>
+            <a:pPr algn="ctr"/>
+            <a:r>
+              <a:rPr sz="1100" b="0" i="0">
+                <a:solidFill>
+                  <a:srgbClr val="7A869E"/>
+                </a:solidFill>
+                <a:latin typeface="Calibri"/>
+              </a:rPr>
+              <a:t>−1</a:t>
+            </a:r>
+          </a:p>
+        </p:txBody>
+      </p:sp>
+      <p:sp>
+        <p:nvSpPr>
+          <p:cNvPr id="6" name="TextBox 5"/>
+          <p:cNvSpPr txBox="1"/>
+          <p:nvPr/>
+        </p:nvSpPr>
+        <p:spPr>
+          <a:xfrm>
+            <a:off x="6263640" y="3895344"/>
+            <a:ext cx="457200" cy="228600"/>
+          </a:xfrm>
+          <a:prstGeom prst="rect">
+            <a:avLst/>
+          </a:prstGeom>
+          <a:noFill/>
+        </p:spPr>
+        <p:txBody>
+          <a:bodyPr wrap="square" lIns="0" rIns="0" tIns="0" bIns="0" anchor="t">
+            <a:spAutoFit/>
+          </a:bodyPr>
+          <a:lstStyle/>
+          <a:p>
+            <a:pPr algn="ctr"/>
+            <a:r>
+              <a:rPr sz="1100" b="0" i="0">
+                <a:solidFill>
+                  <a:srgbClr val="7A869E"/>
+                </a:solidFill>
+                <a:latin typeface="Calibri"/>
+              </a:rPr>
+              <a:t>0</a:t>
+            </a:r>
+          </a:p>
+        </p:txBody>
+      </p:sp>
+      <p:sp>
+        <p:nvSpPr>
+          <p:cNvPr id="7" name="TextBox 6"/>
+          <p:cNvSpPr txBox="1"/>
+          <p:nvPr/>
+        </p:nvSpPr>
+        <p:spPr>
+          <a:xfrm>
+            <a:off x="6934200" y="3895344"/>
+            <a:ext cx="457200" cy="228600"/>
+          </a:xfrm>
+          <a:prstGeom prst="rect">
+            <a:avLst/>
+          </a:prstGeom>
+          <a:noFill/>
+        </p:spPr>
+        <p:txBody>
+          <a:bodyPr wrap="square" lIns="0" rIns="0" tIns="0" bIns="0" anchor="t">
+            <a:spAutoFit/>
+          </a:bodyPr>
+          <a:lstStyle/>
+          <a:p>
+            <a:pPr algn="ctr"/>
+            <a:r>
+              <a:rPr sz="1100" b="0" i="0">
+                <a:solidFill>
+                  <a:srgbClr val="7A869E"/>
+                </a:solidFill>
+                <a:latin typeface="Calibri"/>
+              </a:rPr>
+              <a:t>+1</a:t>
+            </a:r>
+          </a:p>
+        </p:txBody>
+      </p:sp>
+      <p:sp>
+        <p:nvSpPr>
+          <p:cNvPr id="8" name="TextBox 7"/>
+          <p:cNvSpPr txBox="1"/>
+          <p:nvPr/>
+        </p:nvSpPr>
+        <p:spPr>
+          <a:xfrm>
+            <a:off x="7604760" y="3895344"/>
+            <a:ext cx="457200" cy="228600"/>
+          </a:xfrm>
+          <a:prstGeom prst="rect">
+            <a:avLst/>
+          </a:prstGeom>
+          <a:noFill/>
+        </p:spPr>
+        <p:txBody>
+          <a:bodyPr wrap="square" lIns="0" rIns="0" tIns="0" bIns="0" anchor="t">
+            <a:spAutoFit/>
+          </a:bodyPr>
+          <a:lstStyle/>
+          <a:p>
+            <a:pPr algn="ctr"/>
+            <a:r>
+              <a:rPr sz="1100" b="0" i="0">
+                <a:solidFill>
+                  <a:srgbClr val="7A869E"/>
+                </a:solidFill>
+                <a:latin typeface="Calibri"/>
+              </a:rPr>
+              <a:t>+2</a:t>
+            </a:r>
+          </a:p>
+        </p:txBody>
+      </p:sp>
+      <p:sp>
+        <p:nvSpPr>
+          <p:cNvPr id="9" name="TextBox 8"/>
+          <p:cNvSpPr txBox="1"/>
+          <p:nvPr/>
+        </p:nvSpPr>
+        <p:spPr>
+          <a:xfrm>
+            <a:off x="8275320" y="3895344"/>
+            <a:ext cx="457200" cy="228600"/>
+          </a:xfrm>
+          <a:prstGeom prst="rect">
+            <a:avLst/>
+          </a:prstGeom>
+          <a:noFill/>
+        </p:spPr>
+        <p:txBody>
+          <a:bodyPr wrap="square" lIns="0" rIns="0" tIns="0" bIns="0" anchor="t">
+            <a:spAutoFit/>
+          </a:bodyPr>
+          <a:lstStyle/>
+          <a:p>
+            <a:pPr algn="ctr"/>
+            <a:r>
+              <a:rPr sz="1100" b="0" i="0">
+                <a:solidFill>
+                  <a:srgbClr val="7A869E"/>
+                </a:solidFill>
+                <a:latin typeface="Calibri"/>
+              </a:rPr>
+              <a:t>+3</a:t>
+            </a:r>
+          </a:p>
+        </p:txBody>
+      </p:sp>
+      <p:sp>
+        <p:nvSpPr>
+          <p:cNvPr id="10" name="Zero line"/>
+          <p:cNvSpPr/>
+          <p:nvPr/>
+        </p:nvSpPr>
+        <p:spPr>
+          <a:xfrm>
+            <a:off x="6483096" y="1280160"/>
+            <a:ext cx="18288" cy="2569464"/>
+          </a:xfrm>
+          <a:prstGeom prst="rect">
+            <a:avLst/>
+          </a:prstGeom>
+          <a:solidFill>
+            <a:srgbClr val="7A869E"/>
+          </a:solidFill>
+          <a:ln>
+            <a:noFill/>
+          </a:ln>
+          <a:effectLst/>
+        </p:spPr>
+        <p:style>
+          <a:lnRef idx="1">
+            <a:schemeClr val="accent1"/>
+          </a:lnRef>
+          <a:fillRef idx="3">
+            <a:schemeClr val="accent1"/>
+          </a:fillRef>
+          <a:effectRef idx="2">
+            <a:schemeClr val="accent1"/>
+          </a:effectRef>
+          <a:fontRef idx="minor">
+            <a:schemeClr val="lt1"/>
+          </a:fontRef>
+        </p:style>
+        <p:txBody>
+          <a:bodyPr rtlCol="0" anchor="ctr"/>
+          <a:lstStyle/>
+          <a:p>
+            <a:pPr algn="ctr"/>
+          </a:p>
+        </p:txBody>
+      </p:sp>
+      <p:sp>
+        <p:nvSpPr>
+          <p:cNvPr id="11" name="TextBox 10"/>
+          <p:cNvSpPr txBox="1"/>
+          <p:nvPr/>
+        </p:nvSpPr>
+        <p:spPr>
+          <a:xfrm>
+            <a:off x="548640" y="1325880"/>
+            <a:ext cx="3840480" cy="210312"/>
+          </a:xfrm>
+          <a:prstGeom prst="rect">
+            <a:avLst/>
+          </a:prstGeom>
+          <a:noFill/>
+        </p:spPr>
+        <p:txBody>
+          <a:bodyPr wrap="square" lIns="0" rIns="0" tIns="0" bIns="0" anchor="t">
+            <a:spAutoFit/>
+          </a:bodyPr>
+          <a:lstStyle/>
+          <a:p>
+            <a:pPr algn="l"/>
+            <a:r>
+              <a:rPr sz="1300" b="1" i="0">
+                <a:solidFill>
+                  <a:srgbClr val="1B2336"/>
+                </a:solidFill>
+                <a:latin typeface="Calibri"/>
+              </a:rPr>
+              <a:t>Main test, 57 rolls</a:t>
+            </a:r>
+          </a:p>
+        </p:txBody>
+      </p:sp>
+      <p:sp>
+        <p:nvSpPr>
+          <p:cNvPr id="12" name="TextBox 11"/>
+          <p:cNvSpPr txBox="1"/>
+          <p:nvPr/>
+        </p:nvSpPr>
+        <p:spPr>
+          <a:xfrm>
+            <a:off x="548640" y="1545336"/>
+            <a:ext cx="3840480" cy="182880"/>
+          </a:xfrm>
+          <a:prstGeom prst="rect">
+            <a:avLst/>
+          </a:prstGeom>
+          <a:noFill/>
+        </p:spPr>
+        <p:txBody>
+          <a:bodyPr wrap="square" lIns="0" rIns="0" tIns="0" bIns="0" anchor="t">
+            <a:spAutoFit/>
+          </a:bodyPr>
+          <a:lstStyle/>
+          <a:p>
+            <a:pPr algn="l"/>
+            <a:r>
+              <a:rPr sz="1100" b="0" i="0">
+                <a:solidFill>
+                  <a:srgbClr val="7A869E"/>
+                </a:solidFill>
+                <a:latin typeface="Calibri"/>
+              </a:rPr>
+              <a:t>+0.52  (−0.96 to +2.19)</a:t>
+            </a:r>
+          </a:p>
+        </p:txBody>
+      </p:sp>
+      <p:sp>
+        <p:nvSpPr>
+          <p:cNvPr id="13" name="Interval 1"/>
+          <p:cNvSpPr/>
+          <p:nvPr/>
+        </p:nvSpPr>
+        <p:spPr>
+          <a:xfrm>
+            <a:off x="5848502" y="1508760"/>
+            <a:ext cx="2112263" cy="36576"/>
+          </a:xfrm>
+          <a:prstGeom prst="rect">
+            <a:avLst/>
+          </a:prstGeom>
+          <a:solidFill>
+            <a:srgbClr val="3B5BA9"/>
+          </a:solidFill>
+          <a:ln>
+            <a:noFill/>
+          </a:ln>
+          <a:effectLst/>
+        </p:spPr>
+        <p:style>
+          <a:lnRef idx="1">
+            <a:schemeClr val="accent1"/>
+          </a:lnRef>
+          <a:fillRef idx="3">
+            <a:schemeClr val="accent1"/>
+          </a:fillRef>
+          <a:effectRef idx="2">
+            <a:schemeClr val="accent1"/>
+          </a:effectRef>
+          <a:fontRef idx="minor">
+            <a:schemeClr val="lt1"/>
+          </a:fontRef>
+        </p:style>
+        <p:txBody>
+          <a:bodyPr rtlCol="0" anchor="ctr"/>
+          <a:lstStyle/>
+          <a:p>
+            <a:pPr algn="ctr"/>
+          </a:p>
+        </p:txBody>
+      </p:sp>
+      <p:sp>
+        <p:nvSpPr>
+          <p:cNvPr id="14" name="Estimate 1"/>
+          <p:cNvSpPr/>
+          <p:nvPr/>
+        </p:nvSpPr>
+        <p:spPr>
+          <a:xfrm>
+            <a:off x="6776923" y="1444752"/>
+            <a:ext cx="128016" cy="164592"/>
+          </a:xfrm>
+          <a:prstGeom prst="ellipse">
+            <a:avLst/>
+          </a:prstGeom>
+          <a:solidFill>
+            <a:srgbClr val="3B5BA9"/>
+          </a:solidFill>
+          <a:ln>
+            <a:noFill/>
+          </a:ln>
+          <a:effectLst/>
+        </p:spPr>
+        <p:style>
+          <a:lnRef idx="1">
+            <a:schemeClr val="accent1"/>
+          </a:lnRef>
+          <a:fillRef idx="3">
+            <a:schemeClr val="accent1"/>
+          </a:fillRef>
+          <a:effectRef idx="2">
+            <a:schemeClr val="accent1"/>
+          </a:effectRef>
+          <a:fontRef idx="minor">
+            <a:schemeClr val="lt1"/>
+          </a:fontRef>
+        </p:style>
+        <p:txBody>
+          <a:bodyPr rtlCol="0" anchor="ctr"/>
+          <a:lstStyle/>
+          <a:p>
+            <a:pPr algn="ctr"/>
+          </a:p>
+        </p:txBody>
+      </p:sp>
+      <p:sp>
+        <p:nvSpPr>
+          <p:cNvPr id="15" name="TextBox 14"/>
+          <p:cNvSpPr txBox="1"/>
+          <p:nvPr/>
+        </p:nvSpPr>
+        <p:spPr>
+          <a:xfrm>
+            <a:off x="548640" y="1746504"/>
+            <a:ext cx="3840480" cy="210312"/>
+          </a:xfrm>
+          <a:prstGeom prst="rect">
+            <a:avLst/>
+          </a:prstGeom>
+          <a:noFill/>
+        </p:spPr>
+        <p:txBody>
+          <a:bodyPr wrap="square" lIns="0" rIns="0" tIns="0" bIns="0" anchor="t">
+            <a:spAutoFit/>
+          </a:bodyPr>
+          <a:lstStyle/>
+          <a:p>
+            <a:pPr algn="l"/>
+            <a:r>
+              <a:rPr sz="1300" b="0" i="0">
+                <a:solidFill>
+                  <a:srgbClr val="1B2336"/>
+                </a:solidFill>
+                <a:latin typeface="Calibri"/>
+              </a:rPr>
+              <a:t>Narrow quotes only, 34 rolls</a:t>
+            </a:r>
+          </a:p>
+        </p:txBody>
+      </p:sp>
+      <p:sp>
+        <p:nvSpPr>
+          <p:cNvPr id="16" name="TextBox 15"/>
+          <p:cNvSpPr txBox="1"/>
+          <p:nvPr/>
+        </p:nvSpPr>
+        <p:spPr>
+          <a:xfrm>
+            <a:off x="548640" y="1965960"/>
+            <a:ext cx="3840480" cy="182880"/>
+          </a:xfrm>
+          <a:prstGeom prst="rect">
+            <a:avLst/>
+          </a:prstGeom>
+          <a:noFill/>
+        </p:spPr>
+        <p:txBody>
+          <a:bodyPr wrap="square" lIns="0" rIns="0" tIns="0" bIns="0" anchor="t">
+            <a:spAutoFit/>
+          </a:bodyPr>
+          <a:lstStyle/>
+          <a:p>
+            <a:pPr algn="l"/>
+            <a:r>
+              <a:rPr sz="1100" b="0" i="0">
+                <a:solidFill>
+                  <a:srgbClr val="7A869E"/>
+                </a:solidFill>
+                <a:latin typeface="Calibri"/>
+              </a:rPr>
+              <a:t>+0.40  (−0.96 to +2.10)</a:t>
+            </a:r>
+          </a:p>
+        </p:txBody>
+      </p:sp>
+      <p:sp>
+        <p:nvSpPr>
+          <p:cNvPr id="17" name="Interval 2"/>
+          <p:cNvSpPr/>
+          <p:nvPr/>
+        </p:nvSpPr>
+        <p:spPr>
+          <a:xfrm>
+            <a:off x="5848502" y="1929384"/>
+            <a:ext cx="2051913" cy="36576"/>
+          </a:xfrm>
+          <a:prstGeom prst="rect">
+            <a:avLst/>
+          </a:prstGeom>
+          <a:solidFill>
+            <a:srgbClr val="7A869E"/>
+          </a:solidFill>
+          <a:ln>
+            <a:noFill/>
+          </a:ln>
+          <a:effectLst/>
+        </p:spPr>
+        <p:style>
+          <a:lnRef idx="1">
+            <a:schemeClr val="accent1"/>
+          </a:lnRef>
+          <a:fillRef idx="3">
+            <a:schemeClr val="accent1"/>
+          </a:fillRef>
+          <a:effectRef idx="2">
+            <a:schemeClr val="accent1"/>
+          </a:effectRef>
+          <a:fontRef idx="minor">
+            <a:schemeClr val="lt1"/>
+          </a:fontRef>
+        </p:style>
+        <p:txBody>
+          <a:bodyPr rtlCol="0" anchor="ctr"/>
+          <a:lstStyle/>
+          <a:p>
+            <a:pPr algn="ctr"/>
+          </a:p>
+        </p:txBody>
+      </p:sp>
+      <p:sp>
+        <p:nvSpPr>
+          <p:cNvPr id="18" name="Estimate 2"/>
+          <p:cNvSpPr/>
+          <p:nvPr/>
+        </p:nvSpPr>
+        <p:spPr>
+          <a:xfrm>
+            <a:off x="6696456" y="1865376"/>
+            <a:ext cx="128016" cy="164592"/>
+          </a:xfrm>
+          <a:prstGeom prst="ellipse">
+            <a:avLst/>
+          </a:prstGeom>
+          <a:solidFill>
+            <a:srgbClr val="7A869E"/>
+          </a:solidFill>
+          <a:ln>
+            <a:noFill/>
+          </a:ln>
+          <a:effectLst/>
+        </p:spPr>
+        <p:style>
+          <a:lnRef idx="1">
+            <a:schemeClr val="accent1"/>
+          </a:lnRef>
+          <a:fillRef idx="3">
+            <a:schemeClr val="accent1"/>
+          </a:fillRef>
+          <a:effectRef idx="2">
+            <a:schemeClr val="accent1"/>
+          </a:effectRef>
+          <a:fontRef idx="minor">
+            <a:schemeClr val="lt1"/>
+          </a:fontRef>
+        </p:style>
+        <p:txBody>
+          <a:bodyPr rtlCol="0" anchor="ctr"/>
+          <a:lstStyle/>
+          <a:p>
+            <a:pPr algn="ctr"/>
+          </a:p>
+        </p:txBody>
+      </p:sp>
+      <p:sp>
+        <p:nvSpPr>
+          <p:cNvPr id="19" name="TextBox 18"/>
+          <p:cNvSpPr txBox="1"/>
+          <p:nvPr/>
+        </p:nvSpPr>
+        <p:spPr>
+          <a:xfrm>
+            <a:off x="548640" y="2167128"/>
+            <a:ext cx="3840480" cy="210312"/>
+          </a:xfrm>
+          <a:prstGeom prst="rect">
+            <a:avLst/>
+          </a:prstGeom>
+          <a:noFill/>
+        </p:spPr>
+        <p:txBody>
+          <a:bodyPr wrap="square" lIns="0" rIns="0" tIns="0" bIns="0" anchor="t">
+            <a:spAutoFit/>
+          </a:bodyPr>
+          <a:lstStyle/>
+          <a:p>
+            <a:pPr algn="l"/>
+            <a:r>
+              <a:rPr sz="1300" b="0" i="0">
+                <a:solidFill>
+                  <a:srgbClr val="1B2336"/>
+                </a:solidFill>
+                <a:latin typeface="Calibri"/>
+              </a:rPr>
+              <a:t>No Fed or ECB weeks, 27 rolls</a:t>
+            </a:r>
+          </a:p>
+        </p:txBody>
+      </p:sp>
+      <p:sp>
+        <p:nvSpPr>
+          <p:cNvPr id="20" name="TextBox 19"/>
+          <p:cNvSpPr txBox="1"/>
+          <p:nvPr/>
+        </p:nvSpPr>
+        <p:spPr>
+          <a:xfrm>
+            <a:off x="548640" y="2386584"/>
+            <a:ext cx="3840480" cy="182880"/>
+          </a:xfrm>
+          <a:prstGeom prst="rect">
+            <a:avLst/>
+          </a:prstGeom>
+          <a:noFill/>
+        </p:spPr>
+        <p:txBody>
+          <a:bodyPr wrap="square" lIns="0" rIns="0" tIns="0" bIns="0" anchor="t">
+            <a:spAutoFit/>
+          </a:bodyPr>
+          <a:lstStyle/>
+          <a:p>
+            <a:pPr algn="l"/>
+            <a:r>
+              <a:rPr sz="1100" b="0" i="0">
+                <a:solidFill>
+                  <a:srgbClr val="7A869E"/>
+                </a:solidFill>
+                <a:latin typeface="Calibri"/>
+              </a:rPr>
+              <a:t>+0.52  (−1.09 to +2.65)</a:t>
+            </a:r>
+          </a:p>
+        </p:txBody>
+      </p:sp>
+      <p:sp>
+        <p:nvSpPr>
+          <p:cNvPr id="21" name="Interval 3"/>
+          <p:cNvSpPr/>
+          <p:nvPr/>
+        </p:nvSpPr>
+        <p:spPr>
+          <a:xfrm>
+            <a:off x="5761329" y="2350008"/>
+            <a:ext cx="2507894" cy="36576"/>
+          </a:xfrm>
+          <a:prstGeom prst="rect">
+            <a:avLst/>
+          </a:prstGeom>
+          <a:solidFill>
+            <a:srgbClr val="7A869E"/>
+          </a:solidFill>
+          <a:ln>
+            <a:noFill/>
+          </a:ln>
+          <a:effectLst/>
+        </p:spPr>
+        <p:style>
+          <a:lnRef idx="1">
+            <a:schemeClr val="accent1"/>
+          </a:lnRef>
+          <a:fillRef idx="3">
+            <a:schemeClr val="accent1"/>
+          </a:fillRef>
+          <a:effectRef idx="2">
+            <a:schemeClr val="accent1"/>
+          </a:effectRef>
+          <a:fontRef idx="minor">
+            <a:schemeClr val="lt1"/>
+          </a:fontRef>
+        </p:style>
+        <p:txBody>
+          <a:bodyPr rtlCol="0" anchor="ctr"/>
+          <a:lstStyle/>
+          <a:p>
+            <a:pPr algn="ctr"/>
+          </a:p>
+        </p:txBody>
+      </p:sp>
+      <p:sp>
+        <p:nvSpPr>
+          <p:cNvPr id="22" name="Estimate 3"/>
+          <p:cNvSpPr/>
+          <p:nvPr/>
+        </p:nvSpPr>
+        <p:spPr>
+          <a:xfrm>
+            <a:off x="6776923" y="2286000"/>
+            <a:ext cx="128016" cy="164592"/>
+          </a:xfrm>
+          <a:prstGeom prst="ellipse">
+            <a:avLst/>
+          </a:prstGeom>
+          <a:solidFill>
+            <a:srgbClr val="7A869E"/>
+          </a:solidFill>
+          <a:ln>
+            <a:noFill/>
+          </a:ln>
+          <a:effectLst/>
+        </p:spPr>
+        <p:style>
+          <a:lnRef idx="1">
+            <a:schemeClr val="accent1"/>
+          </a:lnRef>
+          <a:fillRef idx="3">
+            <a:schemeClr val="accent1"/>
+          </a:fillRef>
+          <a:effectRef idx="2">
+            <a:schemeClr val="accent1"/>
+          </a:effectRef>
+          <a:fontRef idx="minor">
+            <a:schemeClr val="lt1"/>
+          </a:fontRef>
+        </p:style>
+        <p:txBody>
+          <a:bodyPr rtlCol="0" anchor="ctr"/>
+          <a:lstStyle/>
+          <a:p>
+            <a:pPr algn="ctr"/>
+          </a:p>
+        </p:txBody>
+      </p:sp>
+      <p:sp>
+        <p:nvSpPr>
+          <p:cNvPr id="23" name="TextBox 22"/>
+          <p:cNvSpPr txBox="1"/>
+          <p:nvPr/>
+        </p:nvSpPr>
+        <p:spPr>
+          <a:xfrm>
+            <a:off x="548640" y="2587752"/>
+            <a:ext cx="3840480" cy="210312"/>
+          </a:xfrm>
+          <a:prstGeom prst="rect">
+            <a:avLst/>
+          </a:prstGeom>
+          <a:noFill/>
+        </p:spPr>
+        <p:txBody>
+          <a:bodyPr wrap="square" lIns="0" rIns="0" tIns="0" bIns="0" anchor="t">
+            <a:spAutoFit/>
+          </a:bodyPr>
+          <a:lstStyle/>
+          <a:p>
+            <a:pPr algn="l"/>
+            <a:r>
+              <a:rPr sz="1300" b="0" i="0">
+                <a:solidFill>
+                  <a:srgbClr val="1B2336"/>
+                </a:solidFill>
+                <a:latin typeface="Calibri"/>
+              </a:rPr>
+              <a:t>Control 2 weeks out*, 57 rolls</a:t>
+            </a:r>
+          </a:p>
+        </p:txBody>
+      </p:sp>
+      <p:sp>
+        <p:nvSpPr>
+          <p:cNvPr id="24" name="TextBox 23"/>
+          <p:cNvSpPr txBox="1"/>
+          <p:nvPr/>
+        </p:nvSpPr>
+        <p:spPr>
+          <a:xfrm>
+            <a:off x="548640" y="2807208"/>
+            <a:ext cx="3840480" cy="182880"/>
+          </a:xfrm>
+          <a:prstGeom prst="rect">
+            <a:avLst/>
+          </a:prstGeom>
+          <a:noFill/>
+        </p:spPr>
+        <p:txBody>
+          <a:bodyPr wrap="square" lIns="0" rIns="0" tIns="0" bIns="0" anchor="t">
+            <a:spAutoFit/>
+          </a:bodyPr>
+          <a:lstStyle/>
+          <a:p>
+            <a:pPr algn="l"/>
+            <a:r>
+              <a:rPr sz="1100" b="0" i="0">
+                <a:solidFill>
+                  <a:srgbClr val="7A869E"/>
+                </a:solidFill>
+                <a:latin typeface="Calibri"/>
+              </a:rPr>
+              <a:t>+0.12  (−1.31 to +1.68)</a:t>
+            </a:r>
+          </a:p>
+        </p:txBody>
+      </p:sp>
+      <p:sp>
+        <p:nvSpPr>
+          <p:cNvPr id="25" name="Interval 4"/>
+          <p:cNvSpPr/>
+          <p:nvPr/>
+        </p:nvSpPr>
+        <p:spPr>
+          <a:xfrm>
+            <a:off x="5613806" y="2770632"/>
+            <a:ext cx="2004974" cy="36576"/>
+          </a:xfrm>
+          <a:prstGeom prst="rect">
+            <a:avLst/>
+          </a:prstGeom>
+          <a:solidFill>
+            <a:srgbClr val="7A869E"/>
+          </a:solidFill>
+          <a:ln>
+            <a:noFill/>
+          </a:ln>
+          <a:effectLst/>
+        </p:spPr>
+        <p:style>
+          <a:lnRef idx="1">
+            <a:schemeClr val="accent1"/>
+          </a:lnRef>
+          <a:fillRef idx="3">
+            <a:schemeClr val="accent1"/>
+          </a:fillRef>
+          <a:effectRef idx="2">
+            <a:schemeClr val="accent1"/>
+          </a:effectRef>
+          <a:fontRef idx="minor">
+            <a:schemeClr val="lt1"/>
+          </a:fontRef>
+        </p:style>
+        <p:txBody>
+          <a:bodyPr rtlCol="0" anchor="ctr"/>
+          <a:lstStyle/>
+          <a:p>
+            <a:pPr algn="ctr"/>
+          </a:p>
+        </p:txBody>
+      </p:sp>
+      <p:sp>
+        <p:nvSpPr>
+          <p:cNvPr id="26" name="Estimate 4"/>
+          <p:cNvSpPr/>
+          <p:nvPr/>
+        </p:nvSpPr>
+        <p:spPr>
+          <a:xfrm>
+            <a:off x="6508699" y="2706624"/>
+            <a:ext cx="128016" cy="164592"/>
+          </a:xfrm>
+          <a:prstGeom prst="ellipse">
+            <a:avLst/>
+          </a:prstGeom>
+          <a:solidFill>
+            <a:srgbClr val="7A869E"/>
+          </a:solidFill>
+          <a:ln>
+            <a:noFill/>
+          </a:ln>
+          <a:effectLst/>
+        </p:spPr>
+        <p:style>
+          <a:lnRef idx="1">
+            <a:schemeClr val="accent1"/>
+          </a:lnRef>
+          <a:fillRef idx="3">
+            <a:schemeClr val="accent1"/>
+          </a:fillRef>
+          <a:effectRef idx="2">
+            <a:schemeClr val="accent1"/>
+          </a:effectRef>
+          <a:fontRef idx="minor">
+            <a:schemeClr val="lt1"/>
+          </a:fontRef>
+        </p:style>
+        <p:txBody>
+          <a:bodyPr rtlCol="0" anchor="ctr"/>
+          <a:lstStyle/>
+          <a:p>
+            <a:pPr algn="ctr"/>
+          </a:p>
+        </p:txBody>
+      </p:sp>
+      <p:sp>
+        <p:nvSpPr>
+          <p:cNvPr id="27" name="TextBox 26"/>
+          <p:cNvSpPr txBox="1"/>
+          <p:nvPr/>
+        </p:nvSpPr>
+        <p:spPr>
+          <a:xfrm>
+            <a:off x="548640" y="3008376"/>
+            <a:ext cx="3840480" cy="210312"/>
+          </a:xfrm>
+          <a:prstGeom prst="rect">
+            <a:avLst/>
+          </a:prstGeom>
+          <a:noFill/>
+        </p:spPr>
+        <p:txBody>
+          <a:bodyPr wrap="square" lIns="0" rIns="0" tIns="0" bIns="0" anchor="t">
+            <a:spAutoFit/>
+          </a:bodyPr>
+          <a:lstStyle/>
+          <a:p>
+            <a:pPr algn="l"/>
+            <a:r>
+              <a:rPr sz="1300" b="0" i="0">
+                <a:solidFill>
+                  <a:srgbClr val="1B2336"/>
+                </a:solidFill>
+                <a:latin typeface="Calibri"/>
+              </a:rPr>
+              <a:t>Control 3 weeks out*, 57 rolls</a:t>
+            </a:r>
+          </a:p>
+        </p:txBody>
+      </p:sp>
+      <p:sp>
+        <p:nvSpPr>
+          <p:cNvPr id="28" name="TextBox 27"/>
+          <p:cNvSpPr txBox="1"/>
+          <p:nvPr/>
+        </p:nvSpPr>
+        <p:spPr>
+          <a:xfrm>
+            <a:off x="548640" y="3227832"/>
+            <a:ext cx="3840480" cy="182880"/>
+          </a:xfrm>
+          <a:prstGeom prst="rect">
+            <a:avLst/>
+          </a:prstGeom>
+          <a:noFill/>
+        </p:spPr>
+        <p:txBody>
+          <a:bodyPr wrap="square" lIns="0" rIns="0" tIns="0" bIns="0" anchor="t">
+            <a:spAutoFit/>
+          </a:bodyPr>
+          <a:lstStyle/>
+          <a:p>
+            <a:pPr algn="l"/>
+            <a:r>
+              <a:rPr sz="1100" b="0" i="0">
+                <a:solidFill>
+                  <a:srgbClr val="7A869E"/>
+                </a:solidFill>
+                <a:latin typeface="Calibri"/>
+              </a:rPr>
+              <a:t>+1.17  (−0.21 to +2.78)</a:t>
+            </a:r>
+          </a:p>
+        </p:txBody>
+      </p:sp>
+      <p:sp>
+        <p:nvSpPr>
+          <p:cNvPr id="29" name="Interval 5"/>
+          <p:cNvSpPr/>
+          <p:nvPr/>
+        </p:nvSpPr>
+        <p:spPr>
+          <a:xfrm>
+            <a:off x="6351422" y="3191256"/>
+            <a:ext cx="2004974" cy="36576"/>
+          </a:xfrm>
+          <a:prstGeom prst="rect">
+            <a:avLst/>
+          </a:prstGeom>
+          <a:solidFill>
+            <a:srgbClr val="7A869E"/>
+          </a:solidFill>
+          <a:ln>
+            <a:noFill/>
+          </a:ln>
+          <a:effectLst/>
+        </p:spPr>
+        <p:style>
+          <a:lnRef idx="1">
+            <a:schemeClr val="accent1"/>
+          </a:lnRef>
+          <a:fillRef idx="3">
+            <a:schemeClr val="accent1"/>
+          </a:fillRef>
+          <a:effectRef idx="2">
+            <a:schemeClr val="accent1"/>
+          </a:effectRef>
+          <a:fontRef idx="minor">
+            <a:schemeClr val="lt1"/>
+          </a:fontRef>
+        </p:style>
+        <p:txBody>
+          <a:bodyPr rtlCol="0" anchor="ctr"/>
+          <a:lstStyle/>
+          <a:p>
+            <a:pPr algn="ctr"/>
+          </a:p>
+        </p:txBody>
+      </p:sp>
+      <p:sp>
+        <p:nvSpPr>
+          <p:cNvPr id="30" name="Estimate 5"/>
+          <p:cNvSpPr/>
+          <p:nvPr/>
+        </p:nvSpPr>
+        <p:spPr>
+          <a:xfrm>
+            <a:off x="7212787" y="3127248"/>
+            <a:ext cx="128016" cy="164592"/>
+          </a:xfrm>
+          <a:prstGeom prst="ellipse">
+            <a:avLst/>
+          </a:prstGeom>
+          <a:solidFill>
+            <a:srgbClr val="7A869E"/>
+          </a:solidFill>
+          <a:ln>
+            <a:noFill/>
+          </a:ln>
+          <a:effectLst/>
+        </p:spPr>
+        <p:style>
+          <a:lnRef idx="1">
+            <a:schemeClr val="accent1"/>
+          </a:lnRef>
+          <a:fillRef idx="3">
+            <a:schemeClr val="accent1"/>
+          </a:fillRef>
+          <a:effectRef idx="2">
+            <a:schemeClr val="accent1"/>
+          </a:effectRef>
+          <a:fontRef idx="minor">
+            <a:schemeClr val="lt1"/>
+          </a:fontRef>
+        </p:style>
+        <p:txBody>
+          <a:bodyPr rtlCol="0" anchor="ctr"/>
+          <a:lstStyle/>
+          <a:p>
+            <a:pPr algn="ctr"/>
+          </a:p>
+        </p:txBody>
+      </p:sp>
+      <p:sp>
+        <p:nvSpPr>
+          <p:cNvPr id="31" name="TextBox 30"/>
+          <p:cNvSpPr txBox="1"/>
+          <p:nvPr/>
+        </p:nvSpPr>
+        <p:spPr>
+          <a:xfrm>
+            <a:off x="548640" y="3429000"/>
+            <a:ext cx="3840480" cy="210312"/>
+          </a:xfrm>
+          <a:prstGeom prst="rect">
+            <a:avLst/>
+          </a:prstGeom>
+          <a:noFill/>
+        </p:spPr>
+        <p:txBody>
+          <a:bodyPr wrap="square" lIns="0" rIns="0" tIns="0" bIns="0" anchor="t">
+            <a:spAutoFit/>
+          </a:bodyPr>
+          <a:lstStyle/>
+          <a:p>
+            <a:pPr algn="l"/>
+            <a:r>
+              <a:rPr sz="1300" b="0" i="0">
+                <a:solidFill>
+                  <a:srgbClr val="1B2336"/>
+                </a:solidFill>
+                <a:latin typeface="Calibri"/>
+              </a:rPr>
+              <a:t>8 recent rolls, exploratory</a:t>
+            </a:r>
+          </a:p>
+        </p:txBody>
+      </p:sp>
+      <p:sp>
+        <p:nvSpPr>
+          <p:cNvPr id="32" name="TextBox 31"/>
+          <p:cNvSpPr txBox="1"/>
+          <p:nvPr/>
+        </p:nvSpPr>
+        <p:spPr>
+          <a:xfrm>
+            <a:off x="548640" y="3648456"/>
+            <a:ext cx="3840480" cy="182880"/>
+          </a:xfrm>
+          <a:prstGeom prst="rect">
+            <a:avLst/>
+          </a:prstGeom>
+          <a:noFill/>
+        </p:spPr>
+        <p:txBody>
+          <a:bodyPr wrap="square" lIns="0" rIns="0" tIns="0" bIns="0" anchor="t">
+            <a:spAutoFit/>
+          </a:bodyPr>
+          <a:lstStyle/>
+          <a:p>
+            <a:pPr algn="l"/>
+            <a:r>
+              <a:rPr sz="1100" b="0" i="0">
+                <a:solidFill>
+                  <a:srgbClr val="7A869E"/>
+                </a:solidFill>
+                <a:latin typeface="Calibri"/>
+              </a:rPr>
+              <a:t>−0.88  (−2.44 to +0.38)</a:t>
+            </a:r>
+          </a:p>
+        </p:txBody>
+      </p:sp>
+      <p:sp>
+        <p:nvSpPr>
+          <p:cNvPr id="33" name="Interval 6"/>
+          <p:cNvSpPr/>
+          <p:nvPr/>
+        </p:nvSpPr>
+        <p:spPr>
+          <a:xfrm>
+            <a:off x="4856073" y="3611880"/>
+            <a:ext cx="1890979" cy="36576"/>
+          </a:xfrm>
+          <a:prstGeom prst="rect">
+            <a:avLst/>
+          </a:prstGeom>
+          <a:solidFill>
+            <a:srgbClr val="E3A71B"/>
+          </a:solidFill>
+          <a:ln>
+            <a:noFill/>
+          </a:ln>
+          <a:effectLst/>
+        </p:spPr>
+        <p:style>
+          <a:lnRef idx="1">
+            <a:schemeClr val="accent1"/>
+          </a:lnRef>
+          <a:fillRef idx="3">
+            <a:schemeClr val="accent1"/>
+          </a:fillRef>
+          <a:effectRef idx="2">
+            <a:schemeClr val="accent1"/>
+          </a:effectRef>
+          <a:fontRef idx="minor">
+            <a:schemeClr val="lt1"/>
+          </a:fontRef>
+        </p:style>
+        <p:txBody>
+          <a:bodyPr rtlCol="0" anchor="ctr"/>
+          <a:lstStyle/>
+          <a:p>
+            <a:pPr algn="ctr"/>
+          </a:p>
+        </p:txBody>
+      </p:sp>
+      <p:sp>
+        <p:nvSpPr>
+          <p:cNvPr id="34" name="Estimate 6"/>
+          <p:cNvSpPr/>
+          <p:nvPr/>
+        </p:nvSpPr>
+        <p:spPr>
+          <a:xfrm>
+            <a:off x="5838139" y="3547872"/>
+            <a:ext cx="128016" cy="164592"/>
+          </a:xfrm>
+          <a:prstGeom prst="ellipse">
+            <a:avLst/>
+          </a:prstGeom>
+          <a:solidFill>
+            <a:srgbClr val="E3A71B"/>
+          </a:solidFill>
+          <a:ln>
+            <a:noFill/>
+          </a:ln>
+          <a:effectLst/>
+        </p:spPr>
+        <p:style>
+          <a:lnRef idx="1">
+            <a:schemeClr val="accent1"/>
+          </a:lnRef>
+          <a:fillRef idx="3">
+            <a:schemeClr val="accent1"/>
+          </a:fillRef>
+          <a:effectRef idx="2">
+            <a:schemeClr val="accent1"/>
+          </a:effectRef>
+          <a:fontRef idx="minor">
+            <a:schemeClr val="lt1"/>
+          </a:fontRef>
+        </p:style>
+        <p:txBody>
+          <a:bodyPr rtlCol="0" anchor="ctr"/>
+          <a:lstStyle/>
+          <a:p>
+            <a:pPr algn="ctr"/>
+          </a:p>
+        </p:txBody>
+      </p:sp>
+      <p:sp>
+        <p:nvSpPr>
+          <p:cNvPr id="35" name="TextBox 34"/>
+          <p:cNvSpPr txBox="1"/>
+          <p:nvPr/>
+        </p:nvSpPr>
+        <p:spPr>
+          <a:xfrm>
+            <a:off x="4206240" y="4142232"/>
+            <a:ext cx="4572000" cy="274320"/>
+          </a:xfrm>
+          <a:prstGeom prst="rect">
+            <a:avLst/>
+          </a:prstGeom>
+          <a:noFill/>
+        </p:spPr>
+        <p:txBody>
+          <a:bodyPr wrap="square" lIns="0" rIns="0" tIns="0" bIns="0" anchor="t">
+            <a:spAutoFit/>
+          </a:bodyPr>
+          <a:lstStyle/>
+          <a:p>
+            <a:pPr algn="ctr"/>
+            <a:r>
+              <a:rPr sz="1200" b="0" i="0">
+                <a:solidFill>
+                  <a:srgbClr val="1B2336"/>
+                </a:solidFill>
+                <a:latin typeface="Calibri"/>
+              </a:rPr>
+              <a:t>H1 estimate in ticks, with 95% interval</a:t>
+            </a:r>
+          </a:p>
+        </p:txBody>
+      </p:sp>
+      <p:sp>
+        <p:nvSpPr>
+          <p:cNvPr id="36" name="TextBox 35"/>
+          <p:cNvSpPr txBox="1"/>
+          <p:nvPr/>
+        </p:nvSpPr>
+        <p:spPr>
+          <a:xfrm>
+            <a:off x="548640" y="4572000"/>
+            <a:ext cx="8046720" cy="411480"/>
+          </a:xfrm>
+          <a:prstGeom prst="rect">
+            <a:avLst/>
+          </a:prstGeom>
+          <a:noFill/>
+        </p:spPr>
+        <p:txBody>
+          <a:bodyPr wrap="square" lIns="0" rIns="0" tIns="0" bIns="0" anchor="t">
+            <a:spAutoFit/>
+          </a:bodyPr>
+          <a:lstStyle/>
+          <a:p>
+            <a:pPr algn="l"/>
+            <a:r>
+              <a:rPr sz="1100" b="0" i="1">
+                <a:solidFill>
+                  <a:srgbClr val="7A869E"/>
+                </a:solidFill>
+                <a:latin typeface="Calibri"/>
+              </a:rPr>
+              <a:t>Carry-adjusted versions (basis points) also include zero: +1.9 (−0.8 to +4.9) and +2.4 (−0.3 to +5.4). * Added after the plan. At 3 weeks the block interval just excludes zero.</a:t>
+            </a:r>
+          </a:p>
+        </p:txBody>
+      </p:sp>
+    </p:spTree>
+  </p:cSld>
+  <p:clrMapOvr>
+    <a:masterClrMapping/>
+  </p:clrMapOvr>
+</p:sld>
+</file>
+
+<file path=ppt/slides/slide8.xml><?xml version="1.0" encoding="utf-8"?>
+<p:sld xmlns:a="http://schemas.openxmlformats.org/drawingml/2006/main" xmlns:p="http://schemas.openxmlformats.org/presentationml/2006/main" xmlns:r="http://schemas.openxmlformats.org/officeDocument/2006/relationships">
+  <p:cSld>
+    <p:bg>
+      <p:bgPr>
+        <a:solidFill>
+          <a:srgbClr val="FFFFFF"/>
+        </a:solidFill>
+        <a:effectLst/>
+      </p:bgPr>
+    </p:bg>
+    <p:spTree>
+      <p:nvGrpSpPr>
+        <p:cNvPr id="1" name=""/>
+        <p:cNvGrpSpPr/>
+        <p:nvPr/>
+      </p:nvGrpSpPr>
+      <p:grpSpPr/>
+      <p:sp>
+        <p:nvSpPr>
+          <p:cNvPr id="2" name="Title"/>
+          <p:cNvSpPr txBox="1"/>
+          <p:nvPr/>
+        </p:nvSpPr>
+        <p:spPr>
+          <a:xfrm>
+            <a:off x="548640" y="320040"/>
+            <a:ext cx="8046720" cy="731520"/>
+          </a:xfrm>
+          <a:prstGeom prst="rect">
+            <a:avLst/>
+          </a:prstGeom>
+          <a:noFill/>
+        </p:spPr>
+        <p:txBody>
+          <a:bodyPr wrap="square" lIns="0" rIns="0" tIns="0" bIns="0" anchor="ctr">
+            <a:spAutoFit/>
+          </a:bodyPr>
+          <a:lstStyle/>
+          <a:p>
+            <a:pPr algn="l"/>
+            <a:r>
+              <a:rPr sz="3200" b="1" i="0">
+                <a:solidFill>
+                  <a:srgbClr val="0F2A6B"/>
+                </a:solidFill>
+                <a:latin typeface="Cambria"/>
+              </a:rPr>
               <a:t>What we can and can't conclude</a:t>
             </a:r>
           </a:p>
@@ -6888,8 +9974,8 @@
         </p:nvSpPr>
         <p:spPr>
           <a:xfrm>
-            <a:off x="548640" y="1325880"/>
-            <a:ext cx="3840480" cy="3154680"/>
+            <a:off x="548640" y="1280160"/>
+            <a:ext cx="3931920" cy="2834640"/>
           </a:xfrm>
           <a:prstGeom prst="roundRect">
             <a:avLst>
@@ -6936,8 +10022,8 @@
         </p:nvSpPr>
         <p:spPr>
           <a:xfrm>
-            <a:off x="777240" y="1463040"/>
-            <a:ext cx="3383280" cy="411480"/>
+            <a:off x="777240" y="1389888"/>
+            <a:ext cx="3474720" cy="411480"/>
           </a:xfrm>
           <a:prstGeom prst="rect">
             <a:avLst/>
@@ -6971,8 +10057,8 @@
         </p:nvSpPr>
         <p:spPr>
           <a:xfrm>
-            <a:off x="777240" y="1965960"/>
-            <a:ext cx="3383280" cy="2377440"/>
+            <a:off x="777240" y="1874519"/>
+            <a:ext cx="3474720" cy="2194560"/>
           </a:xfrm>
           <a:prstGeom prst="rect">
             <a:avLst/>
@@ -6987,29 +10073,29 @@
           <a:p>
             <a:pPr algn="l" marL="201168" indent="-201168">
               <a:spcAft>
-                <a:spcPts val="800"/>
+                <a:spcPts val="600"/>
               </a:spcAft>
               <a:buChar char="•"/>
             </a:pPr>
             <a:r>
-              <a:rPr sz="1400" b="0" i="0">
+              <a:rPr sz="1300" b="0" i="0">
                 <a:solidFill>
                   <a:srgbClr val="1B2336"/>
                 </a:solidFill>
                 <a:latin typeface="Calibri"/>
               </a:rPr>
-              <a:t>No detectable roll-week effect in 57 held-out rolls, and the planned sensitivity checks agree</a:t>
+              <a:t>No detectable roll-week effect in 57 held-out rolls, and the planned checks agree</a:t>
             </a:r>
           </a:p>
           <a:p>
             <a:pPr algn="l" marL="201168" indent="-201168">
               <a:spcAft>
-                <a:spcPts val="800"/>
+                <a:spcPts val="600"/>
               </a:spcAft>
               <a:buChar char="•"/>
             </a:pPr>
             <a:r>
-              <a:rPr sz="1400" b="0" i="0">
+              <a:rPr sz="1300" b="0" i="0">
                 <a:solidFill>
                   <a:srgbClr val="1B2336"/>
                 </a:solidFill>
@@ -7021,18 +10107,35 @@
           <a:p>
             <a:pPr algn="l" marL="201168" indent="-201168">
               <a:spcAft>
-                <a:spcPts val="800"/>
+                <a:spcPts val="600"/>
               </a:spcAft>
               <a:buChar char="•"/>
             </a:pPr>
             <a:r>
-              <a:rPr sz="1400" b="0" i="0">
+              <a:rPr sz="1300" b="0" i="0">
                 <a:solidFill>
                   <a:srgbClr val="1B2336"/>
                 </a:solidFill>
                 <a:latin typeface="Calibri"/>
               </a:rPr>
-              <a:t>The plan was written before the test, and every later change is logged</a:t>
+              <a:t>Central-bank decisions cluster in roll weeks, so they matter</a:t>
+            </a:r>
+          </a:p>
+          <a:p>
+            <a:pPr algn="l" marL="201168" indent="-201168">
+              <a:spcAft>
+                <a:spcPts val="600"/>
+              </a:spcAft>
+              <a:buChar char="•"/>
+            </a:pPr>
+            <a:r>
+              <a:rPr sz="1300" b="0" i="0">
+                <a:solidFill>
+                  <a:srgbClr val="1B2336"/>
+                </a:solidFill>
+                <a:latin typeface="Calibri"/>
+              </a:rPr>
+              <a:t>Every analysis choice is in the plan, and every later change is logged</a:t>
             </a:r>
           </a:p>
         </p:txBody>
@@ -7045,8 +10148,8 @@
         </p:nvSpPr>
         <p:spPr>
           <a:xfrm>
-            <a:off x="4754880" y="1325880"/>
-            <a:ext cx="3840480" cy="3154680"/>
+            <a:off x="4663440" y="1280160"/>
+            <a:ext cx="3931920" cy="2834640"/>
           </a:xfrm>
           <a:prstGeom prst="roundRect">
             <a:avLst>
@@ -7093,8 +10196,8 @@
         </p:nvSpPr>
         <p:spPr>
           <a:xfrm>
-            <a:off x="4983480" y="1463040"/>
-            <a:ext cx="3383280" cy="411480"/>
+            <a:off x="4892040" y="1389888"/>
+            <a:ext cx="3474720" cy="411480"/>
           </a:xfrm>
           <a:prstGeom prst="rect">
             <a:avLst/>
@@ -7128,8 +10231,8 @@
         </p:nvSpPr>
         <p:spPr>
           <a:xfrm>
-            <a:off x="4983480" y="1965960"/>
-            <a:ext cx="3383280" cy="2377440"/>
+            <a:off x="4892040" y="1874519"/>
+            <a:ext cx="3474720" cy="2194560"/>
           </a:xfrm>
           <a:prstGeom prst="rect">
             <a:avLst/>
@@ -7144,12 +10247,12 @@
           <a:p>
             <a:pPr algn="l" marL="201168" indent="-201168">
               <a:spcAft>
-                <a:spcPts val="800"/>
+                <a:spcPts val="600"/>
               </a:spcAft>
               <a:buChar char="•"/>
             </a:pPr>
             <a:r>
-              <a:rPr sz="1400" b="0" i="0">
+              <a:rPr sz="1300" b="0" i="0">
                 <a:solidFill>
                   <a:srgbClr val="1B2336"/>
                 </a:solidFill>
@@ -7161,12 +10264,12 @@
           <a:p>
             <a:pPr algn="l" marL="201168" indent="-201168">
               <a:spcAft>
-                <a:spcPts val="800"/>
+                <a:spcPts val="600"/>
               </a:spcAft>
               <a:buChar char="•"/>
             </a:pPr>
             <a:r>
-              <a:rPr sz="1400" b="0" i="0">
+              <a:rPr sz="1300" b="0" i="0">
                 <a:solidFill>
                   <a:srgbClr val="1B2336"/>
                 </a:solidFill>
@@ -7178,18 +10281,62 @@
           <a:p>
             <a:pPr algn="l" marL="201168" indent="-201168">
               <a:spcAft>
-                <a:spcPts val="800"/>
+                <a:spcPts val="600"/>
               </a:spcAft>
               <a:buChar char="•"/>
             </a:pPr>
             <a:r>
-              <a:rPr sz="1400" b="0" i="0">
+              <a:rPr sz="1300" b="0" i="0">
                 <a:solidFill>
                   <a:srgbClr val="1B2336"/>
                 </a:solidFill>
                 <a:latin typeface="Calibri"/>
               </a:rPr>
               <a:t>That the plan was fully frozen: the test ran before the last sign-off</a:t>
+            </a:r>
+          </a:p>
+        </p:txBody>
+      </p:sp>
+      <p:sp>
+        <p:nvSpPr>
+          <p:cNvPr id="9" name="TextBox 8"/>
+          <p:cNvSpPr txBox="1"/>
+          <p:nvPr/>
+        </p:nvSpPr>
+        <p:spPr>
+          <a:xfrm>
+            <a:off x="548640" y="4297680"/>
+            <a:ext cx="8046720" cy="548640"/>
+          </a:xfrm>
+          <a:prstGeom prst="rect">
+            <a:avLst/>
+          </a:prstGeom>
+          <a:noFill/>
+        </p:spPr>
+        <p:txBody>
+          <a:bodyPr wrap="square" lIns="0" rIns="0" tIns="0" bIns="0" anchor="t">
+            <a:spAutoFit/>
+          </a:bodyPr>
+          <a:lstStyle/>
+          <a:p>
+            <a:pPr algn="l"/>
+            <a:r>
+              <a:rPr sz="1300" b="1" i="0">
+                <a:solidFill>
+                  <a:srgbClr val="0F2A6B"/>
+                </a:solidFill>
+                <a:latin typeface="Calibri"/>
+              </a:rPr>
+              <a:t>Cut for time: </a:t>
+            </a:r>
+            <a:r>
+              <a:rPr sz="1300" b="0" i="0">
+                <a:solidFill>
+                  <a:srgbClr val="1B2336"/>
+                </a:solidFill>
+                <a:latin typeface="Calibri"/>
+              </a:rPr>
+              <a:t>a reversal check before expiry, other currencies (6J, 6B), and CFTC positioning.</a:t>
             </a:r>
           </a:p>
         </p:txBody>

--- a/docs/project_slides.pptx
+++ b/docs/project_slides.pptx
@@ -8287,7 +8287,7 @@
                 </a:solidFill>
                 <a:latin typeface="Calibri"/>
               </a:rPr>
-              <a:t>H1: mean of d = |roll| minus |control|, per roll</a:t>
+              <a:t>H1 (magnitude): mean of d = |roll| minus |control|, per roll</a:t>
             </a:r>
           </a:p>
         </p:txBody>
@@ -8497,7 +8497,7 @@
                 </a:solidFill>
                 <a:latin typeface="Calibri"/>
               </a:rPr>
-              <a:t>roll weeks where the spread rose (H2), p = 0.89</a:t>
+              <a:t>roll weeks where the spread rose (H2, direction), p = 0.89</a:t>
             </a:r>
           </a:p>
         </p:txBody>
@@ -8532,7 +8532,7 @@
                 </a:solidFill>
                 <a:latin typeface="Calibri"/>
               </a:rPr>
-              <a:t>57 held-out rolls, September 2010 to September 2024. H3 (the dollar cost) is not computed because H1 and H2 do not hold.</a:t>
+              <a:t>57 held-out rolls, September 2010 to September 2024. H3 (the dollar cost) is not computed because H1 (magnitude) and H2 (direction) do not hold.</a:t>
             </a:r>
           </a:p>
         </p:txBody>
@@ -9865,7 +9865,7 @@
                 </a:solidFill>
                 <a:latin typeface="Calibri"/>
               </a:rPr>
-              <a:t>H1 estimate in ticks, with 95% interval</a:t>
+              <a:t>H1 (magnitude) estimate in ticks, with 95% interval</a:t>
             </a:r>
           </a:p>
         </p:txBody>

--- a/docs/project_slides.pptx
+++ b/docs/project_slides.pptx
@@ -8287,7 +8287,7 @@
                 </a:solidFill>
                 <a:latin typeface="Calibri"/>
               </a:rPr>
-              <a:t>H1 (magnitude): mean of d = |roll| minus |control|, per roll</a:t>
+              <a:t>H1 (magnitude): mean of |roll| minus |control|</a:t>
             </a:r>
           </a:p>
         </p:txBody>
@@ -8497,7 +8497,7 @@
                 </a:solidFill>
                 <a:latin typeface="Calibri"/>
               </a:rPr>
-              <a:t>roll weeks where the spread rose (H2, direction), p = 0.89</a:t>
+              <a:t>roll weeks with a rise (H2, direction), p = 0.89</a:t>
             </a:r>
           </a:p>
         </p:txBody>
@@ -8510,8 +8510,8 @@
         </p:nvSpPr>
         <p:spPr>
           <a:xfrm>
-            <a:off x="548640" y="4572000"/>
-            <a:ext cx="8046720" cy="274320"/>
+            <a:off x="548640" y="4526280"/>
+            <a:ext cx="8046720" cy="411480"/>
           </a:xfrm>
           <a:prstGeom prst="rect">
             <a:avLst/>

--- a/docs/project_slides.pptx
+++ b/docs/project_slides.pptx
@@ -4,17 +4,20 @@
   <p:sldMasterIdLst>
     <p:sldMasterId id="2147483648" r:id="rId1"/>
   </p:sldMasterIdLst>
+  <p:notesMasterIdLst>
+    <p:notesMasterId r:id="rId10"/>
+  </p:notesMasterIdLst>
   <p:sldIdLst>
-    <p:sldId id="256" r:id="rId7"/>
-    <p:sldId id="257" r:id="rId9"/>
-    <p:sldId id="258" r:id="rId10"/>
-    <p:sldId id="259" r:id="rId11"/>
-    <p:sldId id="260" r:id="rId12"/>
-    <p:sldId id="261" r:id="rId13"/>
-    <p:sldId id="262" r:id="rId14"/>
-    <p:sldId id="263" r:id="rId15"/>
+    <p:sldId id="256" r:id="rId2"/>
+    <p:sldId id="257" r:id="rId3"/>
+    <p:sldId id="258" r:id="rId4"/>
+    <p:sldId id="259" r:id="rId5"/>
+    <p:sldId id="260" r:id="rId6"/>
+    <p:sldId id="261" r:id="rId7"/>
+    <p:sldId id="262" r:id="rId8"/>
+    <p:sldId id="263" r:id="rId9"/>
   </p:sldIdLst>
-  <p:sldSz cx="9144000" cy="5143500" type="screen4x3"/>
+  <p:sldSz cx="9144000" cy="5143500" type="screen16x9"/>
   <p:notesSz cx="6858000" cy="9144000"/>
   <p:defaultTextStyle>
     <a:defPPr>
@@ -111,12 +114,31 @@
       </a:defRPr>
     </a:lvl9pPr>
   </p:defaultTextStyle>
+  <p:extLst>
+    <p:ext uri="{EFAFB233-063F-42B5-8137-9DF3F51BA10A}">
+      <p15:sldGuideLst xmlns:p15="http://schemas.microsoft.com/office/powerpoint/2012/main">
+        <p15:guide id="1" orient="horz" pos="2160">
+          <p15:clr>
+            <a:srgbClr val="A4A3A4"/>
+          </p15:clr>
+        </p15:guide>
+        <p15:guide id="2" pos="2880">
+          <p15:clr>
+            <a:srgbClr val="A4A3A4"/>
+          </p15:clr>
+        </p15:guide>
+      </p15:sldGuideLst>
+    </p:ext>
+  </p:extLst>
 </p:presentation>
 </file>
 
 <file path=ppt/charts/chart1.xml><?xml version="1.0" encoding="utf-8"?>
-<c:chartSpace xmlns:c="http://schemas.openxmlformats.org/drawingml/2006/chart" xmlns:a="http://schemas.openxmlformats.org/drawingml/2006/main" xmlns:r="http://schemas.openxmlformats.org/officeDocument/2006/relationships">
+<c:chartSpace xmlns:c="http://schemas.openxmlformats.org/drawingml/2006/chart" xmlns:a="http://schemas.openxmlformats.org/drawingml/2006/main" xmlns:r="http://schemas.openxmlformats.org/officeDocument/2006/relationships" xmlns:c16r2="http://schemas.microsoft.com/office/drawing/2015/06/chart">
   <c:date1904 val="0"/>
+  <c:lang val="en-US"/>
+  <c:roundedCorners val="1"/>
+  <c:style val="2"/>
   <c:chart>
     <c:title>
       <c:tx>
@@ -136,14 +158,15 @@
           </a:p>
         </c:rich>
       </c:tx>
-      <c:layout/>
       <c:overlay val="0"/>
     </c:title>
     <c:autoTitleDeleted val="0"/>
     <c:plotArea>
+      <c:layout/>
       <c:barChart>
         <c:barDir val="bar"/>
         <c:grouping val="clustered"/>
+        <c:varyColors val="1"/>
         <c:ser>
           <c:idx val="0"/>
           <c:order val="0"/>
@@ -158,30 +181,90 @@
               </c:strCache>
             </c:strRef>
           </c:tx>
+          <c:invertIfNegative val="1"/>
           <c:dPt>
             <c:idx val="0"/>
+            <c:invertIfNegative val="1"/>
+            <c:bubble3D val="0"/>
             <c:spPr>
               <a:solidFill>
                 <a:srgbClr val="9AA7C7"/>
               </a:solidFill>
             </c:spPr>
+            <c:extLst>
+              <c:ext xmlns:c16="http://schemas.microsoft.com/office/drawing/2014/chart" uri="{C3380CC4-5D6E-409C-BE32-E72D297353CC}">
+                <c16:uniqueId val="{00000001-0906-BC4F-89CC-B8D2599C4B5A}"/>
+              </c:ext>
+            </c:extLst>
           </c:dPt>
           <c:dPt>
             <c:idx val="1"/>
+            <c:invertIfNegative val="1"/>
+            <c:bubble3D val="0"/>
             <c:spPr>
               <a:solidFill>
                 <a:srgbClr val="3B5BA9"/>
               </a:solidFill>
             </c:spPr>
+            <c:extLst>
+              <c:ext xmlns:c16="http://schemas.microsoft.com/office/drawing/2014/chart" uri="{C3380CC4-5D6E-409C-BE32-E72D297353CC}">
+                <c16:uniqueId val="{00000003-0906-BC4F-89CC-B8D2599C4B5A}"/>
+              </c:ext>
+            </c:extLst>
           </c:dPt>
           <c:dPt>
             <c:idx val="2"/>
+            <c:invertIfNegative val="1"/>
+            <c:bubble3D val="0"/>
             <c:spPr>
               <a:solidFill>
                 <a:srgbClr val="E3A71B"/>
               </a:solidFill>
             </c:spPr>
+            <c:extLst>
+              <c:ext xmlns:c16="http://schemas.microsoft.com/office/drawing/2014/chart" uri="{C3380CC4-5D6E-409C-BE32-E72D297353CC}">
+                <c16:uniqueId val="{00000005-0906-BC4F-89CC-B8D2599C4B5A}"/>
+              </c:ext>
+            </c:extLst>
           </c:dPt>
+          <c:dLbls>
+            <c:numFmt formatCode="0" sourceLinked="0"/>
+            <c:spPr>
+              <a:noFill/>
+              <a:ln>
+                <a:noFill/>
+              </a:ln>
+              <a:effectLst/>
+            </c:spPr>
+            <c:txPr>
+              <a:bodyPr/>
+              <a:lstStyle/>
+              <a:p>
+                <a:pPr>
+                  <a:defRPr sz="1200">
+                    <a:solidFill>
+                      <a:srgbClr val="1B2336"/>
+                    </a:solidFill>
+                    <a:latin typeface="Calibri"/>
+                  </a:defRPr>
+                </a:pPr>
+                <a:endParaRPr lang="en-US"/>
+              </a:p>
+            </c:txPr>
+            <c:dLblPos val="outEnd"/>
+            <c:showLegendKey val="0"/>
+            <c:showVal val="1"/>
+            <c:showCatName val="0"/>
+            <c:showSerName val="0"/>
+            <c:showPercent val="0"/>
+            <c:showBubbleSize val="0"/>
+            <c:showLeaderLines val="0"/>
+            <c:extLst>
+              <c:ext xmlns:c15="http://schemas.microsoft.com/office/drawing/2012/chart" uri="{CE6537A1-D6FC-4f65-9D91-7224C49458BB}">
+                <c15:showLeaderLines val="0"/>
+              </c:ext>
+            </c:extLst>
+          </c:dLbls>
           <c:cat>
             <c:strRef>
               <c:f>Sheet1!$A$2:$A$4</c:f>
@@ -217,23 +300,13 @@
               </c:numCache>
             </c:numRef>
           </c:val>
+          <c:extLst>
+            <c:ext xmlns:c16="http://schemas.microsoft.com/office/drawing/2014/chart" uri="{C3380CC4-5D6E-409C-BE32-E72D297353CC}">
+              <c16:uniqueId val="{00000006-0906-BC4F-89CC-B8D2599C4B5A}"/>
+            </c:ext>
+          </c:extLst>
         </c:ser>
         <c:dLbls>
-          <c:numFmt formatCode="0" sourceLinked="0"/>
-          <c:txPr>
-            <a:bodyPr/>
-            <a:lstStyle/>
-            <a:p>
-              <a:pPr>
-                <a:defRPr sz="1200">
-                  <a:solidFill>
-                    <a:srgbClr val="1B2336"/>
-                  </a:solidFill>
-                  <a:latin typeface="Calibri"/>
-                </a:defRPr>
-              </a:pPr>
-            </a:p>
-          </c:txPr>
           <c:dLblPos val="outEnd"/>
           <c:showLegendKey val="0"/>
           <c:showVal val="1"/>
@@ -241,7 +314,6 @@
           <c:showSerName val="0"/>
           <c:showPercent val="0"/>
           <c:showBubbleSize val="0"/>
-          <c:showLeaderLines val="1"/>
         </c:dLbls>
         <c:gapWidth val="45"/>
         <c:axId val="-2068027336"/>
@@ -254,6 +326,7 @@
         </c:scaling>
         <c:delete val="0"/>
         <c:axPos val="l"/>
+        <c:numFmt formatCode="General" sourceLinked="0"/>
         <c:majorTickMark val="out"/>
         <c:minorTickMark val="none"/>
         <c:tickLblPos val="nextTo"/>
@@ -276,6 +349,7 @@
                 <a:latin typeface="Calibri"/>
               </a:defRPr>
             </a:pPr>
+            <a:endParaRPr lang="en-US"/>
           </a:p>
         </c:txPr>
         <c:crossAx val="-2113994440"/>
@@ -288,19 +362,24 @@
       <c:valAx>
         <c:axId val="-2113994440"/>
         <c:scaling>
-          <c:max val="100.0"/>
-          <c:min val="0.0"/>
+          <c:orientation val="minMax"/>
+          <c:max val="100"/>
+          <c:min val="0"/>
         </c:scaling>
-        <c:delete/>
-        <c:axPos val="b"/>
+        <c:delete val="1"/>
+        <c:axPos val="t"/>
+        <c:numFmt formatCode="General" sourceLinked="1"/>
         <c:majorTickMark val="out"/>
         <c:minorTickMark val="none"/>
         <c:tickLblPos val="nextTo"/>
         <c:crossAx val="-2068027336"/>
         <c:crosses val="autoZero"/>
+        <c:crossBetween val="between"/>
       </c:valAx>
     </c:plotArea>
+    <c:plotVisOnly val="1"/>
     <c:dispBlanksAs val="gap"/>
+    <c:showDLblsOverMax val="1"/>
   </c:chart>
   <c:txPr>
     <a:bodyPr/>
@@ -319,8 +398,11 @@
 </file>
 
 <file path=ppt/charts/chart2.xml><?xml version="1.0" encoding="utf-8"?>
-<c:chartSpace xmlns:c="http://schemas.openxmlformats.org/drawingml/2006/chart" xmlns:a="http://schemas.openxmlformats.org/drawingml/2006/main" xmlns:r="http://schemas.openxmlformats.org/officeDocument/2006/relationships">
+<c:chartSpace xmlns:c="http://schemas.openxmlformats.org/drawingml/2006/chart" xmlns:a="http://schemas.openxmlformats.org/drawingml/2006/main" xmlns:r="http://schemas.openxmlformats.org/officeDocument/2006/relationships" xmlns:c16r2="http://schemas.microsoft.com/office/drawing/2015/06/chart">
   <c:date1904 val="0"/>
+  <c:lang val="en-US"/>
+  <c:roundedCorners val="1"/>
+  <c:style val="2"/>
   <c:chart>
     <c:title>
       <c:tx>
@@ -340,14 +422,15 @@
           </a:p>
         </c:rich>
       </c:tx>
-      <c:layout/>
       <c:overlay val="0"/>
     </c:title>
     <c:autoTitleDeleted val="0"/>
     <c:plotArea>
+      <c:layout/>
       <c:barChart>
         <c:barDir val="col"/>
         <c:grouping val="clustered"/>
+        <c:varyColors val="1"/>
         <c:ser>
           <c:idx val="0"/>
           <c:order val="0"/>
@@ -362,22 +445,75 @@
               </c:strCache>
             </c:strRef>
           </c:tx>
+          <c:invertIfNegative val="1"/>
           <c:dPt>
             <c:idx val="0"/>
+            <c:invertIfNegative val="1"/>
+            <c:bubble3D val="0"/>
             <c:spPr>
               <a:solidFill>
                 <a:srgbClr val="3B5BA9"/>
               </a:solidFill>
             </c:spPr>
+            <c:extLst>
+              <c:ext xmlns:c16="http://schemas.microsoft.com/office/drawing/2014/chart" uri="{C3380CC4-5D6E-409C-BE32-E72D297353CC}">
+                <c16:uniqueId val="{00000001-6CA8-424A-A16D-2EC3D95387C1}"/>
+              </c:ext>
+            </c:extLst>
           </c:dPt>
           <c:dPt>
             <c:idx val="1"/>
+            <c:invertIfNegative val="1"/>
+            <c:bubble3D val="0"/>
             <c:spPr>
               <a:solidFill>
                 <a:srgbClr val="E3A71B"/>
               </a:solidFill>
             </c:spPr>
+            <c:extLst>
+              <c:ext xmlns:c16="http://schemas.microsoft.com/office/drawing/2014/chart" uri="{C3380CC4-5D6E-409C-BE32-E72D297353CC}">
+                <c16:uniqueId val="{00000003-6CA8-424A-A16D-2EC3D95387C1}"/>
+              </c:ext>
+            </c:extLst>
           </c:dPt>
+          <c:dLbls>
+            <c:numFmt formatCode="0.00" sourceLinked="0"/>
+            <c:spPr>
+              <a:noFill/>
+              <a:ln>
+                <a:noFill/>
+              </a:ln>
+              <a:effectLst/>
+            </c:spPr>
+            <c:txPr>
+              <a:bodyPr/>
+              <a:lstStyle/>
+              <a:p>
+                <a:pPr>
+                  <a:defRPr sz="1400">
+                    <a:solidFill>
+                      <a:srgbClr val="1B2336"/>
+                    </a:solidFill>
+                    <a:latin typeface="Calibri"/>
+                  </a:defRPr>
+                </a:pPr>
+                <a:endParaRPr lang="en-US"/>
+              </a:p>
+            </c:txPr>
+            <c:dLblPos val="outEnd"/>
+            <c:showLegendKey val="0"/>
+            <c:showVal val="1"/>
+            <c:showCatName val="0"/>
+            <c:showSerName val="0"/>
+            <c:showPercent val="0"/>
+            <c:showBubbleSize val="0"/>
+            <c:showLeaderLines val="0"/>
+            <c:extLst>
+              <c:ext xmlns:c15="http://schemas.microsoft.com/office/drawing/2012/chart" uri="{CE6537A1-D6FC-4f65-9D91-7224C49458BB}">
+                <c15:showLeaderLines val="0"/>
+              </c:ext>
+            </c:extLst>
+          </c:dLbls>
           <c:cat>
             <c:strRef>
               <c:f>Sheet1!$A$2:$A$3</c:f>
@@ -407,23 +543,13 @@
               </c:numCache>
             </c:numRef>
           </c:val>
+          <c:extLst>
+            <c:ext xmlns:c16="http://schemas.microsoft.com/office/drawing/2014/chart" uri="{C3380CC4-5D6E-409C-BE32-E72D297353CC}">
+              <c16:uniqueId val="{00000004-6CA8-424A-A16D-2EC3D95387C1}"/>
+            </c:ext>
+          </c:extLst>
         </c:ser>
         <c:dLbls>
-          <c:numFmt formatCode="0.00" sourceLinked="0"/>
-          <c:txPr>
-            <a:bodyPr/>
-            <a:lstStyle/>
-            <a:p>
-              <a:pPr>
-                <a:defRPr sz="1400">
-                  <a:solidFill>
-                    <a:srgbClr val="1B2336"/>
-                  </a:solidFill>
-                  <a:latin typeface="Calibri"/>
-                </a:defRPr>
-              </a:pPr>
-            </a:p>
-          </c:txPr>
           <c:dLblPos val="outEnd"/>
           <c:showLegendKey val="0"/>
           <c:showVal val="1"/>
@@ -431,7 +557,6 @@
           <c:showSerName val="0"/>
           <c:showPercent val="0"/>
           <c:showBubbleSize val="0"/>
-          <c:showLeaderLines val="1"/>
         </c:dLbls>
         <c:gapWidth val="60"/>
         <c:axId val="-2068027336"/>
@@ -444,6 +569,7 @@
         </c:scaling>
         <c:delete val="0"/>
         <c:axPos val="b"/>
+        <c:numFmt formatCode="General" sourceLinked="0"/>
         <c:majorTickMark val="out"/>
         <c:minorTickMark val="none"/>
         <c:tickLblPos val="nextTo"/>
@@ -466,6 +592,7 @@
                 <a:latin typeface="Calibri"/>
               </a:defRPr>
             </a:pPr>
+            <a:endParaRPr lang="en-US"/>
           </a:p>
         </c:txPr>
         <c:crossAx val="-2113994440"/>
@@ -478,19 +605,24 @@
       <c:valAx>
         <c:axId val="-2113994440"/>
         <c:scaling>
-          <c:max val="4.0"/>
-          <c:min val="0.0"/>
+          <c:orientation val="minMax"/>
+          <c:max val="4"/>
+          <c:min val="0"/>
         </c:scaling>
-        <c:delete/>
+        <c:delete val="1"/>
         <c:axPos val="l"/>
+        <c:numFmt formatCode="General" sourceLinked="1"/>
         <c:majorTickMark val="out"/>
         <c:minorTickMark val="none"/>
         <c:tickLblPos val="nextTo"/>
         <c:crossAx val="-2068027336"/>
         <c:crosses val="autoZero"/>
+        <c:crossBetween val="between"/>
       </c:valAx>
     </c:plotArea>
+    <c:plotVisOnly val="1"/>
     <c:dispBlanksAs val="gap"/>
+    <c:showDLblsOverMax val="1"/>
   </c:chart>
   <c:txPr>
     <a:bodyPr/>
@@ -509,7 +641,7 @@
 </file>
 
 <file path=ppt/notesMasters/notesMaster1.xml><?xml version="1.0" encoding="utf-8"?>
-<p:notesMaster xmlns:a="http://schemas.openxmlformats.org/drawingml/2006/main" xmlns:p="http://schemas.openxmlformats.org/presentationml/2006/main" xmlns:r="http://schemas.openxmlformats.org/officeDocument/2006/relationships">
+<p:notesMaster xmlns:a="http://schemas.openxmlformats.org/drawingml/2006/main" xmlns:r="http://schemas.openxmlformats.org/officeDocument/2006/relationships" xmlns:p="http://schemas.openxmlformats.org/presentationml/2006/main">
   <p:cSld>
     <p:bg>
       <p:bgRef idx="1001">
@@ -530,241 +662,16 @@
           <a:chExt cx="0" cy="0"/>
         </a:xfrm>
       </p:grpSpPr>
-      <p:sp>
-        <p:nvSpPr>
-          <p:cNvPr id="2" name="Header Placeholder 1"/>
-          <p:cNvSpPr>
-            <a:spLocks noGrp="1"/>
-          </p:cNvSpPr>
-          <p:nvPr>
-            <p:ph type="hdr" sz="quarter"/>
-          </p:nvPr>
-        </p:nvSpPr>
-        <p:spPr>
-          <a:xfrm>
-            <a:off x="0" y="0"/>
-            <a:ext cx="2971800" cy="457200"/>
-          </a:xfrm>
-          <a:prstGeom prst="rect">
-            <a:avLst/>
-          </a:prstGeom>
-        </p:spPr>
-        <p:txBody>
-          <a:bodyPr vert="horz" lIns="91440" tIns="45720" rIns="91440" bIns="45720" rtlCol="0"/>
-          <a:lstStyle>
-            <a:lvl1pPr algn="l">
-              <a:defRPr sz="1200"/>
-            </a:lvl1pPr>
-          </a:lstStyle>
-          <a:p>
-            <a:endParaRPr lang="en-US"/>
-          </a:p>
-        </p:txBody>
-      </p:sp>
-      <p:sp>
-        <p:nvSpPr>
-          <p:cNvPr id="3" name="Date Placeholder 2"/>
-          <p:cNvSpPr>
-            <a:spLocks noGrp="1"/>
-          </p:cNvSpPr>
-          <p:nvPr>
-            <p:ph type="dt" idx="1"/>
-          </p:nvPr>
-        </p:nvSpPr>
-        <p:spPr>
-          <a:xfrm>
-            <a:off x="3884613" y="0"/>
-            <a:ext cx="2971800" cy="457200"/>
-          </a:xfrm>
-          <a:prstGeom prst="rect">
-            <a:avLst/>
-          </a:prstGeom>
-        </p:spPr>
-        <p:txBody>
-          <a:bodyPr vert="horz" lIns="91440" tIns="45720" rIns="91440" bIns="45720" rtlCol="0"/>
-          <a:lstStyle>
-            <a:lvl1pPr algn="r">
-              <a:defRPr sz="1200"/>
-            </a:lvl1pPr>
-          </a:lstStyle>
-          <a:p>
-            <a:fld id="{0F89C1C7-3DCD-1040-A9CF-14679D8B5DDD}" type="datetimeFigureOut">
-              <a:rPr lang="en-US" smtClean="0"/>
-              <a:t>10/17/16</a:t>
-            </a:fld>
-            <a:endParaRPr lang="en-US"/>
-          </a:p>
-        </p:txBody>
-      </p:sp>
-      <p:sp>
-        <p:nvSpPr>
-          <p:cNvPr id="4" name="Slide Image Placeholder 3"/>
-          <p:cNvSpPr>
-            <a:spLocks noGrp="1" noRot="1" noChangeAspect="1"/>
-          </p:cNvSpPr>
-          <p:nvPr>
-            <p:ph type="sldImg" idx="2"/>
-          </p:nvPr>
-        </p:nvSpPr>
-        <p:spPr>
-          <a:xfrm>
-            <a:off x="1143000" y="685800"/>
-            <a:ext cx="4572000" cy="3429000"/>
-          </a:xfrm>
-          <a:prstGeom prst="rect">
-            <a:avLst/>
-          </a:prstGeom>
-          <a:noFill/>
-          <a:ln w="12700">
-            <a:solidFill>
-              <a:prstClr val="black"/>
-            </a:solidFill>
-          </a:ln>
-        </p:spPr>
-        <p:txBody>
-          <a:bodyPr vert="horz" lIns="91440" tIns="45720" rIns="91440" bIns="45720" rtlCol="0" anchor="ctr"/>
-          <a:lstStyle/>
-          <a:p>
-            <a:endParaRPr lang="en-US"/>
-          </a:p>
-        </p:txBody>
-      </p:sp>
-      <p:sp>
-        <p:nvSpPr>
-          <p:cNvPr id="5" name="Notes Placeholder 4"/>
-          <p:cNvSpPr>
-            <a:spLocks noGrp="1"/>
-          </p:cNvSpPr>
-          <p:nvPr>
-            <p:ph type="body" sz="quarter" idx="3"/>
-          </p:nvPr>
-        </p:nvSpPr>
-        <p:spPr>
-          <a:xfrm>
-            <a:off x="685800" y="4343400"/>
-            <a:ext cx="5486400" cy="4114800"/>
-          </a:xfrm>
-          <a:prstGeom prst="rect">
-            <a:avLst/>
-          </a:prstGeom>
-        </p:spPr>
-        <p:txBody>
-          <a:bodyPr vert="horz" lIns="91440" tIns="45720" rIns="91440" bIns="45720" rtlCol="0"/>
-          <a:lstStyle/>
-          <a:p>
-            <a:pPr lvl="0"/>
-            <a:r>
-              <a:rPr lang="en-US" smtClean="0"/>
-              <a:t>Click to edit Master text styles</a:t>
-            </a:r>
-          </a:p>
-          <a:p>
-            <a:pPr lvl="1"/>
-            <a:r>
-              <a:rPr lang="en-US" smtClean="0"/>
-              <a:t>Second level</a:t>
-            </a:r>
-          </a:p>
-          <a:p>
-            <a:pPr lvl="2"/>
-            <a:r>
-              <a:rPr lang="en-US" smtClean="0"/>
-              <a:t>Third level</a:t>
-            </a:r>
-          </a:p>
-          <a:p>
-            <a:pPr lvl="3"/>
-            <a:r>
-              <a:rPr lang="en-US" smtClean="0"/>
-              <a:t>Fourth level</a:t>
-            </a:r>
-          </a:p>
-          <a:p>
-            <a:pPr lvl="4"/>
-            <a:r>
-              <a:rPr lang="en-US" smtClean="0"/>
-              <a:t>Fifth level</a:t>
-            </a:r>
-            <a:endParaRPr lang="en-US"/>
-          </a:p>
-        </p:txBody>
-      </p:sp>
-      <p:sp>
-        <p:nvSpPr>
-          <p:cNvPr id="6" name="Footer Placeholder 5"/>
-          <p:cNvSpPr>
-            <a:spLocks noGrp="1"/>
-          </p:cNvSpPr>
-          <p:nvPr>
-            <p:ph type="ftr" sz="quarter" idx="4"/>
-          </p:nvPr>
-        </p:nvSpPr>
-        <p:spPr>
-          <a:xfrm>
-            <a:off x="0" y="8685213"/>
-            <a:ext cx="2971800" cy="457200"/>
-          </a:xfrm>
-          <a:prstGeom prst="rect">
-            <a:avLst/>
-          </a:prstGeom>
-        </p:spPr>
-        <p:txBody>
-          <a:bodyPr vert="horz" lIns="91440" tIns="45720" rIns="91440" bIns="45720" rtlCol="0" anchor="b"/>
-          <a:lstStyle>
-            <a:lvl1pPr algn="l">
-              <a:defRPr sz="1200"/>
-            </a:lvl1pPr>
-          </a:lstStyle>
-          <a:p>
-            <a:endParaRPr lang="en-US"/>
-          </a:p>
-        </p:txBody>
-      </p:sp>
-      <p:sp>
-        <p:nvSpPr>
-          <p:cNvPr id="7" name="Slide Number Placeholder 6"/>
-          <p:cNvSpPr>
-            <a:spLocks noGrp="1"/>
-          </p:cNvSpPr>
-          <p:nvPr>
-            <p:ph type="sldNum" sz="quarter" idx="5"/>
-          </p:nvPr>
-        </p:nvSpPr>
-        <p:spPr>
-          <a:xfrm>
-            <a:off x="3884613" y="8685213"/>
-            <a:ext cx="2971800" cy="457200"/>
-          </a:xfrm>
-          <a:prstGeom prst="rect">
-            <a:avLst/>
-          </a:prstGeom>
-        </p:spPr>
-        <p:txBody>
-          <a:bodyPr vert="horz" lIns="91440" tIns="45720" rIns="91440" bIns="45720" rtlCol="0" anchor="b"/>
-          <a:lstStyle>
-            <a:lvl1pPr algn="r">
-              <a:defRPr sz="1200"/>
-            </a:lvl1pPr>
-          </a:lstStyle>
-          <a:p>
-            <a:fld id="{BB5E49A5-4136-284D-997B-48E1D791AD67}" type="slidenum">
-              <a:rPr lang="en-US" smtClean="0"/>
-              <a:t>‹#›</a:t>
-            </a:fld>
-            <a:endParaRPr lang="en-US"/>
-          </a:p>
-        </p:txBody>
-      </p:sp>
     </p:spTree>
     <p:extLst>
       <p:ext uri="{BB962C8B-B14F-4D97-AF65-F5344CB8AC3E}">
-        <p14:creationId xmlns:p14="http://schemas.microsoft.com/office/powerpoint/2010/main" val="2623252185"/>
+        <p14:creationId xmlns:p14="http://schemas.microsoft.com/office/powerpoint/2010/main" val="3256779068"/>
       </p:ext>
     </p:extLst>
   </p:cSld>
   <p:clrMap bg1="lt1" tx1="dk1" bg2="lt2" tx2="dk2" accent1="accent1" accent2="accent2" accent3="accent3" accent4="accent4" accent5="accent5" accent6="accent6" hlink="hlink" folHlink="folHlink"/>
   <p:notesStyle>
-    <a:lvl1pPr marL="0" algn="l" defTabSz="457200" rtl="0" eaLnBrk="1" latinLnBrk="0" hangingPunct="1">
+    <a:lvl1pPr marL="0" algn="l" defTabSz="914400" rtl="0" eaLnBrk="1" latinLnBrk="0" hangingPunct="1">
       <a:defRPr sz="1200" kern="1200">
         <a:solidFill>
           <a:schemeClr val="tx1"/>
@@ -774,7 +681,7 @@
         <a:cs typeface="+mn-cs"/>
       </a:defRPr>
     </a:lvl1pPr>
-    <a:lvl2pPr marL="457200" algn="l" defTabSz="457200" rtl="0" eaLnBrk="1" latinLnBrk="0" hangingPunct="1">
+    <a:lvl2pPr marL="457200" algn="l" defTabSz="914400" rtl="0" eaLnBrk="1" latinLnBrk="0" hangingPunct="1">
       <a:defRPr sz="1200" kern="1200">
         <a:solidFill>
           <a:schemeClr val="tx1"/>
@@ -784,7 +691,7 @@
         <a:cs typeface="+mn-cs"/>
       </a:defRPr>
     </a:lvl2pPr>
-    <a:lvl3pPr marL="914400" algn="l" defTabSz="457200" rtl="0" eaLnBrk="1" latinLnBrk="0" hangingPunct="1">
+    <a:lvl3pPr marL="914400" algn="l" defTabSz="914400" rtl="0" eaLnBrk="1" latinLnBrk="0" hangingPunct="1">
       <a:defRPr sz="1200" kern="1200">
         <a:solidFill>
           <a:schemeClr val="tx1"/>
@@ -794,7 +701,7 @@
         <a:cs typeface="+mn-cs"/>
       </a:defRPr>
     </a:lvl3pPr>
-    <a:lvl4pPr marL="1371600" algn="l" defTabSz="457200" rtl="0" eaLnBrk="1" latinLnBrk="0" hangingPunct="1">
+    <a:lvl4pPr marL="1371600" algn="l" defTabSz="914400" rtl="0" eaLnBrk="1" latinLnBrk="0" hangingPunct="1">
       <a:defRPr sz="1200" kern="1200">
         <a:solidFill>
           <a:schemeClr val="tx1"/>
@@ -804,7 +711,7 @@
         <a:cs typeface="+mn-cs"/>
       </a:defRPr>
     </a:lvl4pPr>
-    <a:lvl5pPr marL="1828800" algn="l" defTabSz="457200" rtl="0" eaLnBrk="1" latinLnBrk="0" hangingPunct="1">
+    <a:lvl5pPr marL="1828800" algn="l" defTabSz="914400" rtl="0" eaLnBrk="1" latinLnBrk="0" hangingPunct="1">
       <a:defRPr sz="1200" kern="1200">
         <a:solidFill>
           <a:schemeClr val="tx1"/>
@@ -814,7 +721,7 @@
         <a:cs typeface="+mn-cs"/>
       </a:defRPr>
     </a:lvl5pPr>
-    <a:lvl6pPr marL="2286000" algn="l" defTabSz="457200" rtl="0" eaLnBrk="1" latinLnBrk="0" hangingPunct="1">
+    <a:lvl6pPr marL="2286000" algn="l" defTabSz="914400" rtl="0" eaLnBrk="1" latinLnBrk="0" hangingPunct="1">
       <a:defRPr sz="1200" kern="1200">
         <a:solidFill>
           <a:schemeClr val="tx1"/>
@@ -824,7 +731,7 @@
         <a:cs typeface="+mn-cs"/>
       </a:defRPr>
     </a:lvl6pPr>
-    <a:lvl7pPr marL="2743200" algn="l" defTabSz="457200" rtl="0" eaLnBrk="1" latinLnBrk="0" hangingPunct="1">
+    <a:lvl7pPr marL="2743200" algn="l" defTabSz="914400" rtl="0" eaLnBrk="1" latinLnBrk="0" hangingPunct="1">
       <a:defRPr sz="1200" kern="1200">
         <a:solidFill>
           <a:schemeClr val="tx1"/>
@@ -834,7 +741,7 @@
         <a:cs typeface="+mn-cs"/>
       </a:defRPr>
     </a:lvl7pPr>
-    <a:lvl8pPr marL="3200400" algn="l" defTabSz="457200" rtl="0" eaLnBrk="1" latinLnBrk="0" hangingPunct="1">
+    <a:lvl8pPr marL="3200400" algn="l" defTabSz="914400" rtl="0" eaLnBrk="1" latinLnBrk="0" hangingPunct="1">
       <a:defRPr sz="1200" kern="1200">
         <a:solidFill>
           <a:schemeClr val="tx1"/>
@@ -844,7 +751,7 @@
         <a:cs typeface="+mn-cs"/>
       </a:defRPr>
     </a:lvl8pPr>
-    <a:lvl9pPr marL="3657600" algn="l" defTabSz="457200" rtl="0" eaLnBrk="1" latinLnBrk="0" hangingPunct="1">
+    <a:lvl9pPr marL="3657600" algn="l" defTabSz="914400" rtl="0" eaLnBrk="1" latinLnBrk="0" hangingPunct="1">
       <a:defRPr sz="1200" kern="1200">
         <a:solidFill>
           <a:schemeClr val="tx1"/>
@@ -859,7 +766,7 @@
 </file>
 
 <file path=ppt/notesSlides/notesSlide1.xml><?xml version="1.0" encoding="utf-8"?>
-<p:notes xmlns:a="http://schemas.openxmlformats.org/drawingml/2006/main" xmlns:p="http://schemas.openxmlformats.org/presentationml/2006/main" xmlns:r="http://schemas.openxmlformats.org/officeDocument/2006/relationships">
+<p:notes xmlns:a="http://schemas.openxmlformats.org/drawingml/2006/main" xmlns:r="http://schemas.openxmlformats.org/officeDocument/2006/relationships" xmlns:p="http://schemas.openxmlformats.org/presentationml/2006/main">
   <p:cSld>
     <p:spTree>
       <p:nvGrpSpPr>
@@ -879,7 +786,7 @@
         <p:nvSpPr>
           <p:cNvPr id="2" name="Slide Image Placeholder 1"/>
           <p:cNvSpPr>
-            <a:spLocks noGrp="1"/>
+            <a:spLocks noGrp="1" noRot="1" noChangeAspect="1"/>
           </p:cNvSpPr>
           <p:nvPr>
             <p:ph type="sldImg" idx="2"/>
@@ -894,7 +801,7 @@
             <a:spLocks noGrp="1"/>
           </p:cNvSpPr>
           <p:nvPr>
-            <p:ph type="body" idx="3" sz="quarter"/>
+            <p:ph type="body" sz="quarter" idx="3"/>
           </p:nvPr>
         </p:nvSpPr>
         <p:spPr/>
@@ -915,7 +822,7 @@
             <a:spLocks noGrp="1"/>
           </p:cNvSpPr>
           <p:nvPr>
-            <p:ph type="sldNum" idx="5" sz="quarter"/>
+            <p:ph type="sldNum" sz="quarter" idx="5"/>
           </p:nvPr>
         </p:nvSpPr>
         <p:spPr/>
@@ -929,7 +836,7 @@
 </file>
 
 <file path=ppt/notesSlides/notesSlide2.xml><?xml version="1.0" encoding="utf-8"?>
-<p:notes xmlns:a="http://schemas.openxmlformats.org/drawingml/2006/main" xmlns:p="http://schemas.openxmlformats.org/presentationml/2006/main" xmlns:r="http://schemas.openxmlformats.org/officeDocument/2006/relationships">
+<p:notes xmlns:a="http://schemas.openxmlformats.org/drawingml/2006/main" xmlns:r="http://schemas.openxmlformats.org/officeDocument/2006/relationships" xmlns:p="http://schemas.openxmlformats.org/presentationml/2006/main">
   <p:cSld>
     <p:spTree>
       <p:nvGrpSpPr>
@@ -949,7 +856,7 @@
         <p:nvSpPr>
           <p:cNvPr id="2" name="Slide Image Placeholder 1"/>
           <p:cNvSpPr>
-            <a:spLocks noGrp="1"/>
+            <a:spLocks noGrp="1" noRot="1" noChangeAspect="1"/>
           </p:cNvSpPr>
           <p:nvPr>
             <p:ph type="sldImg" idx="2"/>
@@ -964,7 +871,7 @@
             <a:spLocks noGrp="1"/>
           </p:cNvSpPr>
           <p:nvPr>
-            <p:ph type="body" idx="3" sz="quarter"/>
+            <p:ph type="body" sz="quarter" idx="3"/>
           </p:nvPr>
         </p:nvSpPr>
         <p:spPr/>
@@ -985,7 +892,7 @@
             <a:spLocks noGrp="1"/>
           </p:cNvSpPr>
           <p:nvPr>
-            <p:ph type="sldNum" idx="5" sz="quarter"/>
+            <p:ph type="sldNum" sz="quarter" idx="5"/>
           </p:nvPr>
         </p:nvSpPr>
         <p:spPr/>
@@ -999,7 +906,7 @@
 </file>
 
 <file path=ppt/notesSlides/notesSlide3.xml><?xml version="1.0" encoding="utf-8"?>
-<p:notes xmlns:a="http://schemas.openxmlformats.org/drawingml/2006/main" xmlns:p="http://schemas.openxmlformats.org/presentationml/2006/main" xmlns:r="http://schemas.openxmlformats.org/officeDocument/2006/relationships">
+<p:notes xmlns:a="http://schemas.openxmlformats.org/drawingml/2006/main" xmlns:r="http://schemas.openxmlformats.org/officeDocument/2006/relationships" xmlns:p="http://schemas.openxmlformats.org/presentationml/2006/main">
   <p:cSld>
     <p:spTree>
       <p:nvGrpSpPr>
@@ -1019,7 +926,7 @@
         <p:nvSpPr>
           <p:cNvPr id="2" name="Slide Image Placeholder 1"/>
           <p:cNvSpPr>
-            <a:spLocks noGrp="1"/>
+            <a:spLocks noGrp="1" noRot="1" noChangeAspect="1"/>
           </p:cNvSpPr>
           <p:nvPr>
             <p:ph type="sldImg" idx="2"/>
@@ -1034,7 +941,7 @@
             <a:spLocks noGrp="1"/>
           </p:cNvSpPr>
           <p:nvPr>
-            <p:ph type="body" idx="3" sz="quarter"/>
+            <p:ph type="body" sz="quarter" idx="3"/>
           </p:nvPr>
         </p:nvSpPr>
         <p:spPr/>
@@ -1055,7 +962,7 @@
             <a:spLocks noGrp="1"/>
           </p:cNvSpPr>
           <p:nvPr>
-            <p:ph type="sldNum" idx="5" sz="quarter"/>
+            <p:ph type="sldNum" sz="quarter" idx="5"/>
           </p:nvPr>
         </p:nvSpPr>
         <p:spPr/>
@@ -1069,7 +976,7 @@
 </file>
 
 <file path=ppt/notesSlides/notesSlide4.xml><?xml version="1.0" encoding="utf-8"?>
-<p:notes xmlns:a="http://schemas.openxmlformats.org/drawingml/2006/main" xmlns:p="http://schemas.openxmlformats.org/presentationml/2006/main" xmlns:r="http://schemas.openxmlformats.org/officeDocument/2006/relationships">
+<p:notes xmlns:a="http://schemas.openxmlformats.org/drawingml/2006/main" xmlns:r="http://schemas.openxmlformats.org/officeDocument/2006/relationships" xmlns:p="http://schemas.openxmlformats.org/presentationml/2006/main">
   <p:cSld>
     <p:spTree>
       <p:nvGrpSpPr>
@@ -1089,7 +996,7 @@
         <p:nvSpPr>
           <p:cNvPr id="2" name="Slide Image Placeholder 1"/>
           <p:cNvSpPr>
-            <a:spLocks noGrp="1"/>
+            <a:spLocks noGrp="1" noRot="1" noChangeAspect="1"/>
           </p:cNvSpPr>
           <p:nvPr>
             <p:ph type="sldImg" idx="2"/>
@@ -1104,7 +1011,7 @@
             <a:spLocks noGrp="1"/>
           </p:cNvSpPr>
           <p:nvPr>
-            <p:ph type="body" idx="3" sz="quarter"/>
+            <p:ph type="body" sz="quarter" idx="3"/>
           </p:nvPr>
         </p:nvSpPr>
         <p:spPr/>
@@ -1125,7 +1032,7 @@
             <a:spLocks noGrp="1"/>
           </p:cNvSpPr>
           <p:nvPr>
-            <p:ph type="sldNum" idx="5" sz="quarter"/>
+            <p:ph type="sldNum" sz="quarter" idx="5"/>
           </p:nvPr>
         </p:nvSpPr>
         <p:spPr/>
@@ -1139,7 +1046,7 @@
 </file>
 
 <file path=ppt/notesSlides/notesSlide5.xml><?xml version="1.0" encoding="utf-8"?>
-<p:notes xmlns:a="http://schemas.openxmlformats.org/drawingml/2006/main" xmlns:p="http://schemas.openxmlformats.org/presentationml/2006/main" xmlns:r="http://schemas.openxmlformats.org/officeDocument/2006/relationships">
+<p:notes xmlns:a="http://schemas.openxmlformats.org/drawingml/2006/main" xmlns:r="http://schemas.openxmlformats.org/officeDocument/2006/relationships" xmlns:p="http://schemas.openxmlformats.org/presentationml/2006/main">
   <p:cSld>
     <p:spTree>
       <p:nvGrpSpPr>
@@ -1159,7 +1066,7 @@
         <p:nvSpPr>
           <p:cNvPr id="2" name="Slide Image Placeholder 1"/>
           <p:cNvSpPr>
-            <a:spLocks noGrp="1"/>
+            <a:spLocks noGrp="1" noRot="1" noChangeAspect="1"/>
           </p:cNvSpPr>
           <p:nvPr>
             <p:ph type="sldImg" idx="2"/>
@@ -1174,7 +1081,7 @@
             <a:spLocks noGrp="1"/>
           </p:cNvSpPr>
           <p:nvPr>
-            <p:ph type="body" idx="3" sz="quarter"/>
+            <p:ph type="body" sz="quarter" idx="3"/>
           </p:nvPr>
         </p:nvSpPr>
         <p:spPr/>
@@ -1195,7 +1102,7 @@
             <a:spLocks noGrp="1"/>
           </p:cNvSpPr>
           <p:nvPr>
-            <p:ph type="sldNum" idx="5" sz="quarter"/>
+            <p:ph type="sldNum" sz="quarter" idx="5"/>
           </p:nvPr>
         </p:nvSpPr>
         <p:spPr/>
@@ -1209,7 +1116,7 @@
 </file>
 
 <file path=ppt/notesSlides/notesSlide6.xml><?xml version="1.0" encoding="utf-8"?>
-<p:notes xmlns:a="http://schemas.openxmlformats.org/drawingml/2006/main" xmlns:p="http://schemas.openxmlformats.org/presentationml/2006/main" xmlns:r="http://schemas.openxmlformats.org/officeDocument/2006/relationships">
+<p:notes xmlns:a="http://schemas.openxmlformats.org/drawingml/2006/main" xmlns:r="http://schemas.openxmlformats.org/officeDocument/2006/relationships" xmlns:p="http://schemas.openxmlformats.org/presentationml/2006/main">
   <p:cSld>
     <p:spTree>
       <p:nvGrpSpPr>
@@ -1229,7 +1136,7 @@
         <p:nvSpPr>
           <p:cNvPr id="2" name="Slide Image Placeholder 1"/>
           <p:cNvSpPr>
-            <a:spLocks noGrp="1"/>
+            <a:spLocks noGrp="1" noRot="1" noChangeAspect="1"/>
           </p:cNvSpPr>
           <p:nvPr>
             <p:ph type="sldImg" idx="2"/>
@@ -1244,7 +1151,7 @@
             <a:spLocks noGrp="1"/>
           </p:cNvSpPr>
           <p:nvPr>
-            <p:ph type="body" idx="3" sz="quarter"/>
+            <p:ph type="body" sz="quarter" idx="3"/>
           </p:nvPr>
         </p:nvSpPr>
         <p:spPr/>
@@ -1265,7 +1172,7 @@
             <a:spLocks noGrp="1"/>
           </p:cNvSpPr>
           <p:nvPr>
-            <p:ph type="sldNum" idx="5" sz="quarter"/>
+            <p:ph type="sldNum" sz="quarter" idx="5"/>
           </p:nvPr>
         </p:nvSpPr>
         <p:spPr/>
@@ -1279,7 +1186,7 @@
 </file>
 
 <file path=ppt/notesSlides/notesSlide7.xml><?xml version="1.0" encoding="utf-8"?>
-<p:notes xmlns:a="http://schemas.openxmlformats.org/drawingml/2006/main" xmlns:p="http://schemas.openxmlformats.org/presentationml/2006/main" xmlns:r="http://schemas.openxmlformats.org/officeDocument/2006/relationships">
+<p:notes xmlns:a="http://schemas.openxmlformats.org/drawingml/2006/main" xmlns:r="http://schemas.openxmlformats.org/officeDocument/2006/relationships" xmlns:p="http://schemas.openxmlformats.org/presentationml/2006/main">
   <p:cSld>
     <p:spTree>
       <p:nvGrpSpPr>
@@ -1299,7 +1206,7 @@
         <p:nvSpPr>
           <p:cNvPr id="2" name="Slide Image Placeholder 1"/>
           <p:cNvSpPr>
-            <a:spLocks noGrp="1"/>
+            <a:spLocks noGrp="1" noRot="1" noChangeAspect="1"/>
           </p:cNvSpPr>
           <p:nvPr>
             <p:ph type="sldImg" idx="2"/>
@@ -1314,7 +1221,7 @@
             <a:spLocks noGrp="1"/>
           </p:cNvSpPr>
           <p:nvPr>
-            <p:ph type="body" idx="3" sz="quarter"/>
+            <p:ph type="body" sz="quarter" idx="3"/>
           </p:nvPr>
         </p:nvSpPr>
         <p:spPr/>
@@ -1323,6 +1230,7 @@
           <a:lstStyle/>
           <a:p>
             <a:r>
+              <a:rPr dirty="0"/>
               <a:t>Each row is the same H1 estimate under a different specification, with its 95 percent percentile bootstrap interval; none of the planned specifications has an interval that excludes zero. Dropping rolls with wide quotes, dropping rolls with a Fed or ECB decision in either window, and both carry adjustments, which use observed USD and EUR rates, all agree with the main test. The control windows two and three weeks out were added after the plan to see whether the thin four-week control was hiding an effect. At two weeks nothing changes. At three weeks the percentile interval still includes zero, but the circular block bootstrap interval, from plus 0.04 to plus 2.46, just excludes it; this comes from a few large roll weeks, and because it is a check we added after seeing results we treat it as inconclusive. The eight recent rolls, shown last, go the other way and also include zero.</a:t>
             </a:r>
           </a:p>
@@ -1335,7 +1243,7 @@
             <a:spLocks noGrp="1"/>
           </p:cNvSpPr>
           <p:nvPr>
-            <p:ph type="sldNum" idx="5" sz="quarter"/>
+            <p:ph type="sldNum" sz="quarter" idx="5"/>
           </p:nvPr>
         </p:nvSpPr>
         <p:spPr/>
@@ -1349,7 +1257,7 @@
 </file>
 
 <file path=ppt/notesSlides/notesSlide8.xml><?xml version="1.0" encoding="utf-8"?>
-<p:notes xmlns:a="http://schemas.openxmlformats.org/drawingml/2006/main" xmlns:p="http://schemas.openxmlformats.org/presentationml/2006/main" xmlns:r="http://schemas.openxmlformats.org/officeDocument/2006/relationships">
+<p:notes xmlns:a="http://schemas.openxmlformats.org/drawingml/2006/main" xmlns:r="http://schemas.openxmlformats.org/officeDocument/2006/relationships" xmlns:p="http://schemas.openxmlformats.org/presentationml/2006/main">
   <p:cSld>
     <p:spTree>
       <p:nvGrpSpPr>
@@ -1369,7 +1277,7 @@
         <p:nvSpPr>
           <p:cNvPr id="2" name="Slide Image Placeholder 1"/>
           <p:cNvSpPr>
-            <a:spLocks noGrp="1"/>
+            <a:spLocks noGrp="1" noRot="1" noChangeAspect="1"/>
           </p:cNvSpPr>
           <p:nvPr>
             <p:ph type="sldImg" idx="2"/>
@@ -1384,7 +1292,7 @@
             <a:spLocks noGrp="1"/>
           </p:cNvSpPr>
           <p:nvPr>
-            <p:ph type="body" idx="3" sz="quarter"/>
+            <p:ph type="body" sz="quarter" idx="3"/>
           </p:nvPr>
         </p:nvSpPr>
         <p:spPr/>
@@ -1405,7 +1313,7 @@
             <a:spLocks noGrp="1"/>
           </p:cNvSpPr>
           <p:nvPr>
-            <p:ph type="sldNum" idx="5" sz="quarter"/>
+            <p:ph type="sldNum" sz="quarter" idx="5"/>
           </p:nvPr>
         </p:nvSpPr>
         <p:spPr/>
@@ -1456,10 +1364,9 @@
           <a:lstStyle/>
           <a:p>
             <a:r>
-              <a:rPr lang="en-US" smtClean="0"/>
+              <a:rPr lang="en-US"/>
               <a:t>Click to edit Master title style</a:t>
             </a:r>
-            <a:endParaRPr lang="en-US"/>
           </a:p>
         </p:txBody>
       </p:sp>
@@ -1575,10 +1482,9 @@
           </a:lstStyle>
           <a:p>
             <a:r>
-              <a:rPr lang="en-US" smtClean="0"/>
+              <a:rPr lang="en-US"/>
               <a:t>Click to edit Master subtitle style</a:t>
             </a:r>
-            <a:endParaRPr lang="en-US"/>
           </a:p>
         </p:txBody>
       </p:sp>
@@ -1599,7 +1505,7 @@
           <a:p>
             <a:fld id="{5BCAD085-E8A6-8845-BD4E-CB4CCA059FC4}" type="datetimeFigureOut">
               <a:rPr lang="en-US" smtClean="0"/>
-              <a:t>1/27/13</a:t>
+              <a:t>10/27/26</a:t>
             </a:fld>
             <a:endParaRPr lang="en-US"/>
           </a:p>
@@ -1693,10 +1599,9 @@
           <a:lstStyle/>
           <a:p>
             <a:r>
-              <a:rPr lang="en-US" smtClean="0"/>
+              <a:rPr lang="en-US"/>
               <a:t>Click to edit Master title style</a:t>
             </a:r>
-            <a:endParaRPr lang="en-US"/>
           </a:p>
         </p:txBody>
       </p:sp>
@@ -1717,38 +1622,37 @@
           <a:p>
             <a:pPr lvl="0"/>
             <a:r>
-              <a:rPr lang="en-US" smtClean="0"/>
+              <a:rPr lang="en-US"/>
               <a:t>Click to edit Master text styles</a:t>
             </a:r>
           </a:p>
           <a:p>
             <a:pPr lvl="1"/>
             <a:r>
-              <a:rPr lang="en-US" smtClean="0"/>
+              <a:rPr lang="en-US"/>
               <a:t>Second level</a:t>
             </a:r>
           </a:p>
           <a:p>
             <a:pPr lvl="2"/>
             <a:r>
-              <a:rPr lang="en-US" smtClean="0"/>
+              <a:rPr lang="en-US"/>
               <a:t>Third level</a:t>
             </a:r>
           </a:p>
           <a:p>
             <a:pPr lvl="3"/>
             <a:r>
-              <a:rPr lang="en-US" smtClean="0"/>
+              <a:rPr lang="en-US"/>
               <a:t>Fourth level</a:t>
             </a:r>
           </a:p>
           <a:p>
             <a:pPr lvl="4"/>
             <a:r>
-              <a:rPr lang="en-US" smtClean="0"/>
+              <a:rPr lang="en-US"/>
               <a:t>Fifth level</a:t>
             </a:r>
-            <a:endParaRPr lang="en-US"/>
           </a:p>
         </p:txBody>
       </p:sp>
@@ -1769,7 +1673,7 @@
           <a:p>
             <a:fld id="{5BCAD085-E8A6-8845-BD4E-CB4CCA059FC4}" type="datetimeFigureOut">
               <a:rPr lang="en-US" smtClean="0"/>
-              <a:t>1/27/13</a:t>
+              <a:t>10/27/26</a:t>
             </a:fld>
             <a:endParaRPr lang="en-US"/>
           </a:p>
@@ -1868,10 +1772,9 @@
           <a:lstStyle/>
           <a:p>
             <a:r>
-              <a:rPr lang="en-US" smtClean="0"/>
+              <a:rPr lang="en-US"/>
               <a:t>Click to edit Master title style</a:t>
             </a:r>
-            <a:endParaRPr lang="en-US"/>
           </a:p>
         </p:txBody>
       </p:sp>
@@ -1897,38 +1800,37 @@
           <a:p>
             <a:pPr lvl="0"/>
             <a:r>
-              <a:rPr lang="en-US" smtClean="0"/>
+              <a:rPr lang="en-US"/>
               <a:t>Click to edit Master text styles</a:t>
             </a:r>
           </a:p>
           <a:p>
             <a:pPr lvl="1"/>
             <a:r>
-              <a:rPr lang="en-US" smtClean="0"/>
+              <a:rPr lang="en-US"/>
               <a:t>Second level</a:t>
             </a:r>
           </a:p>
           <a:p>
             <a:pPr lvl="2"/>
             <a:r>
-              <a:rPr lang="en-US" smtClean="0"/>
+              <a:rPr lang="en-US"/>
               <a:t>Third level</a:t>
             </a:r>
           </a:p>
           <a:p>
             <a:pPr lvl="3"/>
             <a:r>
-              <a:rPr lang="en-US" smtClean="0"/>
+              <a:rPr lang="en-US"/>
               <a:t>Fourth level</a:t>
             </a:r>
           </a:p>
           <a:p>
             <a:pPr lvl="4"/>
             <a:r>
-              <a:rPr lang="en-US" smtClean="0"/>
+              <a:rPr lang="en-US"/>
               <a:t>Fifth level</a:t>
             </a:r>
-            <a:endParaRPr lang="en-US"/>
           </a:p>
         </p:txBody>
       </p:sp>
@@ -1949,7 +1851,7 @@
           <a:p>
             <a:fld id="{5BCAD085-E8A6-8845-BD4E-CB4CCA059FC4}" type="datetimeFigureOut">
               <a:rPr lang="en-US" smtClean="0"/>
-              <a:t>1/27/13</a:t>
+              <a:t>10/27/26</a:t>
             </a:fld>
             <a:endParaRPr lang="en-US"/>
           </a:p>
@@ -2043,10 +1945,9 @@
           <a:lstStyle/>
           <a:p>
             <a:r>
-              <a:rPr lang="en-US" smtClean="0"/>
+              <a:rPr lang="en-US"/>
               <a:t>Click to edit Master title style</a:t>
             </a:r>
-            <a:endParaRPr lang="en-US"/>
           </a:p>
         </p:txBody>
       </p:sp>
@@ -2067,38 +1968,37 @@
           <a:p>
             <a:pPr lvl="0"/>
             <a:r>
-              <a:rPr lang="en-US" smtClean="0"/>
+              <a:rPr lang="en-US"/>
               <a:t>Click to edit Master text styles</a:t>
             </a:r>
           </a:p>
           <a:p>
             <a:pPr lvl="1"/>
             <a:r>
-              <a:rPr lang="en-US" smtClean="0"/>
+              <a:rPr lang="en-US"/>
               <a:t>Second level</a:t>
             </a:r>
           </a:p>
           <a:p>
             <a:pPr lvl="2"/>
             <a:r>
-              <a:rPr lang="en-US" smtClean="0"/>
+              <a:rPr lang="en-US"/>
               <a:t>Third level</a:t>
             </a:r>
           </a:p>
           <a:p>
             <a:pPr lvl="3"/>
             <a:r>
-              <a:rPr lang="en-US" smtClean="0"/>
+              <a:rPr lang="en-US"/>
               <a:t>Fourth level</a:t>
             </a:r>
           </a:p>
           <a:p>
             <a:pPr lvl="4"/>
             <a:r>
-              <a:rPr lang="en-US" smtClean="0"/>
+              <a:rPr lang="en-US"/>
               <a:t>Fifth level</a:t>
             </a:r>
-            <a:endParaRPr lang="en-US"/>
           </a:p>
         </p:txBody>
       </p:sp>
@@ -2119,7 +2019,7 @@
           <a:p>
             <a:fld id="{5BCAD085-E8A6-8845-BD4E-CB4CCA059FC4}" type="datetimeFigureOut">
               <a:rPr lang="en-US" smtClean="0"/>
-              <a:t>1/27/13</a:t>
+              <a:t>10/27/26</a:t>
             </a:fld>
             <a:endParaRPr lang="en-US"/>
           </a:p>
@@ -2222,10 +2122,9 @@
           </a:lstStyle>
           <a:p>
             <a:r>
-              <a:rPr lang="en-US" smtClean="0"/>
+              <a:rPr lang="en-US"/>
               <a:t>Click to edit Master title style</a:t>
             </a:r>
-            <a:endParaRPr lang="en-US"/>
           </a:p>
         </p:txBody>
       </p:sp>
@@ -2342,7 +2241,7 @@
           <a:p>
             <a:pPr lvl="0"/>
             <a:r>
-              <a:rPr lang="en-US" smtClean="0"/>
+              <a:rPr lang="en-US"/>
               <a:t>Click to edit Master text styles</a:t>
             </a:r>
           </a:p>
@@ -2365,7 +2264,7 @@
           <a:p>
             <a:fld id="{5BCAD085-E8A6-8845-BD4E-CB4CCA059FC4}" type="datetimeFigureOut">
               <a:rPr lang="en-US" smtClean="0"/>
-              <a:t>1/27/13</a:t>
+              <a:t>10/27/26</a:t>
             </a:fld>
             <a:endParaRPr lang="en-US"/>
           </a:p>
@@ -2459,10 +2358,9 @@
           <a:lstStyle/>
           <a:p>
             <a:r>
-              <a:rPr lang="en-US" smtClean="0"/>
+              <a:rPr lang="en-US"/>
               <a:t>Click to edit Master title style</a:t>
             </a:r>
-            <a:endParaRPr lang="en-US"/>
           </a:p>
         </p:txBody>
       </p:sp>
@@ -2516,38 +2414,37 @@
           <a:p>
             <a:pPr lvl="0"/>
             <a:r>
-              <a:rPr lang="en-US" smtClean="0"/>
+              <a:rPr lang="en-US"/>
               <a:t>Click to edit Master text styles</a:t>
             </a:r>
           </a:p>
           <a:p>
             <a:pPr lvl="1"/>
             <a:r>
-              <a:rPr lang="en-US" smtClean="0"/>
+              <a:rPr lang="en-US"/>
               <a:t>Second level</a:t>
             </a:r>
           </a:p>
           <a:p>
             <a:pPr lvl="2"/>
             <a:r>
-              <a:rPr lang="en-US" smtClean="0"/>
+              <a:rPr lang="en-US"/>
               <a:t>Third level</a:t>
             </a:r>
           </a:p>
           <a:p>
             <a:pPr lvl="3"/>
             <a:r>
-              <a:rPr lang="en-US" smtClean="0"/>
+              <a:rPr lang="en-US"/>
               <a:t>Fourth level</a:t>
             </a:r>
           </a:p>
           <a:p>
             <a:pPr lvl="4"/>
             <a:r>
-              <a:rPr lang="en-US" smtClean="0"/>
+              <a:rPr lang="en-US"/>
               <a:t>Fifth level</a:t>
             </a:r>
-            <a:endParaRPr lang="en-US"/>
           </a:p>
         </p:txBody>
       </p:sp>
@@ -2601,38 +2498,37 @@
           <a:p>
             <a:pPr lvl="0"/>
             <a:r>
-              <a:rPr lang="en-US" smtClean="0"/>
+              <a:rPr lang="en-US"/>
               <a:t>Click to edit Master text styles</a:t>
             </a:r>
           </a:p>
           <a:p>
             <a:pPr lvl="1"/>
             <a:r>
-              <a:rPr lang="en-US" smtClean="0"/>
+              <a:rPr lang="en-US"/>
               <a:t>Second level</a:t>
             </a:r>
           </a:p>
           <a:p>
             <a:pPr lvl="2"/>
             <a:r>
-              <a:rPr lang="en-US" smtClean="0"/>
+              <a:rPr lang="en-US"/>
               <a:t>Third level</a:t>
             </a:r>
           </a:p>
           <a:p>
             <a:pPr lvl="3"/>
             <a:r>
-              <a:rPr lang="en-US" smtClean="0"/>
+              <a:rPr lang="en-US"/>
               <a:t>Fourth level</a:t>
             </a:r>
           </a:p>
           <a:p>
             <a:pPr lvl="4"/>
             <a:r>
-              <a:rPr lang="en-US" smtClean="0"/>
+              <a:rPr lang="en-US"/>
               <a:t>Fifth level</a:t>
             </a:r>
-            <a:endParaRPr lang="en-US"/>
           </a:p>
         </p:txBody>
       </p:sp>
@@ -2653,7 +2549,7 @@
           <a:p>
             <a:fld id="{5BCAD085-E8A6-8845-BD4E-CB4CCA059FC4}" type="datetimeFigureOut">
               <a:rPr lang="en-US" smtClean="0"/>
-              <a:t>1/27/13</a:t>
+              <a:t>10/27/26</a:t>
             </a:fld>
             <a:endParaRPr lang="en-US"/>
           </a:p>
@@ -2751,10 +2647,9 @@
           </a:lstStyle>
           <a:p>
             <a:r>
-              <a:rPr lang="en-US" smtClean="0"/>
+              <a:rPr lang="en-US"/>
               <a:t>Click to edit Master title style</a:t>
             </a:r>
-            <a:endParaRPr lang="en-US"/>
           </a:p>
         </p:txBody>
       </p:sp>
@@ -2817,7 +2712,7 @@
           <a:p>
             <a:pPr lvl="0"/>
             <a:r>
-              <a:rPr lang="en-US" smtClean="0"/>
+              <a:rPr lang="en-US"/>
               <a:t>Click to edit Master text styles</a:t>
             </a:r>
           </a:p>
@@ -2873,38 +2768,37 @@
           <a:p>
             <a:pPr lvl="0"/>
             <a:r>
-              <a:rPr lang="en-US" smtClean="0"/>
+              <a:rPr lang="en-US"/>
               <a:t>Click to edit Master text styles</a:t>
             </a:r>
           </a:p>
           <a:p>
             <a:pPr lvl="1"/>
             <a:r>
-              <a:rPr lang="en-US" smtClean="0"/>
+              <a:rPr lang="en-US"/>
               <a:t>Second level</a:t>
             </a:r>
           </a:p>
           <a:p>
             <a:pPr lvl="2"/>
             <a:r>
-              <a:rPr lang="en-US" smtClean="0"/>
+              <a:rPr lang="en-US"/>
               <a:t>Third level</a:t>
             </a:r>
           </a:p>
           <a:p>
             <a:pPr lvl="3"/>
             <a:r>
-              <a:rPr lang="en-US" smtClean="0"/>
+              <a:rPr lang="en-US"/>
               <a:t>Fourth level</a:t>
             </a:r>
           </a:p>
           <a:p>
             <a:pPr lvl="4"/>
             <a:r>
-              <a:rPr lang="en-US" smtClean="0"/>
+              <a:rPr lang="en-US"/>
               <a:t>Fifth level</a:t>
             </a:r>
-            <a:endParaRPr lang="en-US"/>
           </a:p>
         </p:txBody>
       </p:sp>
@@ -2967,7 +2861,7 @@
           <a:p>
             <a:pPr lvl="0"/>
             <a:r>
-              <a:rPr lang="en-US" smtClean="0"/>
+              <a:rPr lang="en-US"/>
               <a:t>Click to edit Master text styles</a:t>
             </a:r>
           </a:p>
@@ -3023,38 +2917,37 @@
           <a:p>
             <a:pPr lvl="0"/>
             <a:r>
-              <a:rPr lang="en-US" smtClean="0"/>
+              <a:rPr lang="en-US"/>
               <a:t>Click to edit Master text styles</a:t>
             </a:r>
           </a:p>
           <a:p>
             <a:pPr lvl="1"/>
             <a:r>
-              <a:rPr lang="en-US" smtClean="0"/>
+              <a:rPr lang="en-US"/>
               <a:t>Second level</a:t>
             </a:r>
           </a:p>
           <a:p>
             <a:pPr lvl="2"/>
             <a:r>
-              <a:rPr lang="en-US" smtClean="0"/>
+              <a:rPr lang="en-US"/>
               <a:t>Third level</a:t>
             </a:r>
           </a:p>
           <a:p>
             <a:pPr lvl="3"/>
             <a:r>
-              <a:rPr lang="en-US" smtClean="0"/>
+              <a:rPr lang="en-US"/>
               <a:t>Fourth level</a:t>
             </a:r>
           </a:p>
           <a:p>
             <a:pPr lvl="4"/>
             <a:r>
-              <a:rPr lang="en-US" smtClean="0"/>
+              <a:rPr lang="en-US"/>
               <a:t>Fifth level</a:t>
             </a:r>
-            <a:endParaRPr lang="en-US"/>
           </a:p>
         </p:txBody>
       </p:sp>
@@ -3075,7 +2968,7 @@
           <a:p>
             <a:fld id="{5BCAD085-E8A6-8845-BD4E-CB4CCA059FC4}" type="datetimeFigureOut">
               <a:rPr lang="en-US" smtClean="0"/>
-              <a:t>1/27/13</a:t>
+              <a:t>10/27/26</a:t>
             </a:fld>
             <a:endParaRPr lang="en-US"/>
           </a:p>
@@ -3169,10 +3062,9 @@
           <a:lstStyle/>
           <a:p>
             <a:r>
-              <a:rPr lang="en-US" smtClean="0"/>
+              <a:rPr lang="en-US"/>
               <a:t>Click to edit Master title style</a:t>
             </a:r>
-            <a:endParaRPr lang="en-US"/>
           </a:p>
         </p:txBody>
       </p:sp>
@@ -3193,7 +3085,7 @@
           <a:p>
             <a:fld id="{5BCAD085-E8A6-8845-BD4E-CB4CCA059FC4}" type="datetimeFigureOut">
               <a:rPr lang="en-US" smtClean="0"/>
-              <a:t>1/27/13</a:t>
+              <a:t>10/27/26</a:t>
             </a:fld>
             <a:endParaRPr lang="en-US"/>
           </a:p>
@@ -3288,7 +3180,7 @@
           <a:p>
             <a:fld id="{5BCAD085-E8A6-8845-BD4E-CB4CCA059FC4}" type="datetimeFigureOut">
               <a:rPr lang="en-US" smtClean="0"/>
-              <a:t>1/27/13</a:t>
+              <a:t>10/27/26</a:t>
             </a:fld>
             <a:endParaRPr lang="en-US"/>
           </a:p>
@@ -3391,10 +3283,9 @@
           </a:lstStyle>
           <a:p>
             <a:r>
-              <a:rPr lang="en-US" smtClean="0"/>
+              <a:rPr lang="en-US"/>
               <a:t>Click to edit Master title style</a:t>
             </a:r>
-            <a:endParaRPr lang="en-US"/>
           </a:p>
         </p:txBody>
       </p:sp>
@@ -3448,38 +3339,37 @@
           <a:p>
             <a:pPr lvl="0"/>
             <a:r>
-              <a:rPr lang="en-US" smtClean="0"/>
+              <a:rPr lang="en-US"/>
               <a:t>Click to edit Master text styles</a:t>
             </a:r>
           </a:p>
           <a:p>
             <a:pPr lvl="1"/>
             <a:r>
-              <a:rPr lang="en-US" smtClean="0"/>
+              <a:rPr lang="en-US"/>
               <a:t>Second level</a:t>
             </a:r>
           </a:p>
           <a:p>
             <a:pPr lvl="2"/>
             <a:r>
-              <a:rPr lang="en-US" smtClean="0"/>
+              <a:rPr lang="en-US"/>
               <a:t>Third level</a:t>
             </a:r>
           </a:p>
           <a:p>
             <a:pPr lvl="3"/>
             <a:r>
-              <a:rPr lang="en-US" smtClean="0"/>
+              <a:rPr lang="en-US"/>
               <a:t>Fourth level</a:t>
             </a:r>
           </a:p>
           <a:p>
             <a:pPr lvl="4"/>
             <a:r>
-              <a:rPr lang="en-US" smtClean="0"/>
+              <a:rPr lang="en-US"/>
               <a:t>Fifth level</a:t>
             </a:r>
-            <a:endParaRPr lang="en-US"/>
           </a:p>
         </p:txBody>
       </p:sp>
@@ -3542,7 +3432,7 @@
           <a:p>
             <a:pPr lvl="0"/>
             <a:r>
-              <a:rPr lang="en-US" smtClean="0"/>
+              <a:rPr lang="en-US"/>
               <a:t>Click to edit Master text styles</a:t>
             </a:r>
           </a:p>
@@ -3565,7 +3455,7 @@
           <a:p>
             <a:fld id="{5BCAD085-E8A6-8845-BD4E-CB4CCA059FC4}" type="datetimeFigureOut">
               <a:rPr lang="en-US" smtClean="0"/>
-              <a:t>1/27/13</a:t>
+              <a:t>10/27/26</a:t>
             </a:fld>
             <a:endParaRPr lang="en-US"/>
           </a:p>
@@ -3668,10 +3558,9 @@
           </a:lstStyle>
           <a:p>
             <a:r>
-              <a:rPr lang="en-US" smtClean="0"/>
+              <a:rPr lang="en-US"/>
               <a:t>Click to edit Master title style</a:t>
             </a:r>
-            <a:endParaRPr lang="en-US"/>
           </a:p>
         </p:txBody>
       </p:sp>
@@ -3795,7 +3684,7 @@
           <a:p>
             <a:pPr lvl="0"/>
             <a:r>
-              <a:rPr lang="en-US" smtClean="0"/>
+              <a:rPr lang="en-US"/>
               <a:t>Click to edit Master text styles</a:t>
             </a:r>
           </a:p>
@@ -3818,7 +3707,7 @@
           <a:p>
             <a:fld id="{5BCAD085-E8A6-8845-BD4E-CB4CCA059FC4}" type="datetimeFigureOut">
               <a:rPr lang="en-US" smtClean="0"/>
-              <a:t>1/27/13</a:t>
+              <a:t>10/27/26</a:t>
             </a:fld>
             <a:endParaRPr lang="en-US"/>
           </a:p>
@@ -3927,10 +3816,9 @@
           <a:lstStyle/>
           <a:p>
             <a:r>
-              <a:rPr lang="en-US" smtClean="0"/>
+              <a:rPr lang="en-US"/>
               <a:t>Click to edit Master title style</a:t>
             </a:r>
-            <a:endParaRPr lang="en-US"/>
           </a:p>
         </p:txBody>
       </p:sp>
@@ -3961,38 +3849,37 @@
           <a:p>
             <a:pPr lvl="0"/>
             <a:r>
-              <a:rPr lang="en-US" smtClean="0"/>
+              <a:rPr lang="en-US"/>
               <a:t>Click to edit Master text styles</a:t>
             </a:r>
           </a:p>
           <a:p>
             <a:pPr lvl="1"/>
             <a:r>
-              <a:rPr lang="en-US" smtClean="0"/>
+              <a:rPr lang="en-US"/>
               <a:t>Second level</a:t>
             </a:r>
           </a:p>
           <a:p>
             <a:pPr lvl="2"/>
             <a:r>
-              <a:rPr lang="en-US" smtClean="0"/>
+              <a:rPr lang="en-US"/>
               <a:t>Third level</a:t>
             </a:r>
           </a:p>
           <a:p>
             <a:pPr lvl="3"/>
             <a:r>
-              <a:rPr lang="en-US" smtClean="0"/>
+              <a:rPr lang="en-US"/>
               <a:t>Fourth level</a:t>
             </a:r>
           </a:p>
           <a:p>
             <a:pPr lvl="4"/>
             <a:r>
-              <a:rPr lang="en-US" smtClean="0"/>
+              <a:rPr lang="en-US"/>
               <a:t>Fifth level</a:t>
             </a:r>
-            <a:endParaRPr lang="en-US"/>
           </a:p>
         </p:txBody>
       </p:sp>
@@ -4031,7 +3918,7 @@
           <a:p>
             <a:fld id="{5BCAD085-E8A6-8845-BD4E-CB4CCA059FC4}" type="datetimeFigureOut">
               <a:rPr lang="en-US" smtClean="0"/>
-              <a:t>1/27/13</a:t>
+              <a:t>10/27/26</a:t>
             </a:fld>
             <a:endParaRPr lang="en-US"/>
           </a:p>
@@ -4390,7 +4277,7 @@
 </file>
 
 <file path=ppt/slides/slide1.xml><?xml version="1.0" encoding="utf-8"?>
-<p:sld xmlns:a="http://schemas.openxmlformats.org/drawingml/2006/main" xmlns:p="http://schemas.openxmlformats.org/presentationml/2006/main" xmlns:r="http://schemas.openxmlformats.org/officeDocument/2006/relationships">
+<p:sld xmlns:a="http://schemas.openxmlformats.org/drawingml/2006/main" xmlns:r="http://schemas.openxmlformats.org/officeDocument/2006/relationships" xmlns:p="http://schemas.openxmlformats.org/presentationml/2006/main">
   <p:cSld>
     <p:bg>
       <p:bgPr>
@@ -4406,7 +4293,14 @@
         <p:cNvGrpSpPr/>
         <p:nvPr/>
       </p:nvGrpSpPr>
-      <p:grpSpPr/>
+      <p:grpSpPr>
+        <a:xfrm>
+          <a:off x="0" y="0"/>
+          <a:ext cx="0" cy="0"/>
+          <a:chOff x="0" y="0"/>
+          <a:chExt cx="0" cy="0"/>
+        </a:xfrm>
+      </p:grpSpPr>
       <p:sp>
         <p:nvSpPr>
           <p:cNvPr id="2" name="Title"/>
@@ -4424,7 +4318,7 @@
           <a:noFill/>
         </p:spPr>
         <p:txBody>
-          <a:bodyPr wrap="square" lIns="0" rIns="0" tIns="0" bIns="0" anchor="t">
+          <a:bodyPr wrap="square" lIns="0" tIns="0" rIns="0" bIns="0" anchor="t">
             <a:spAutoFit/>
           </a:bodyPr>
           <a:lstStyle/>
@@ -4459,7 +4353,7 @@
           <a:noFill/>
         </p:spPr>
         <p:txBody>
-          <a:bodyPr wrap="square" lIns="0" rIns="0" tIns="0" bIns="0" anchor="t">
+          <a:bodyPr wrap="square" lIns="0" tIns="0" rIns="0" bIns="0" anchor="t">
             <a:spAutoFit/>
           </a:bodyPr>
           <a:lstStyle/>
@@ -4494,7 +4388,7 @@
           <a:noFill/>
         </p:spPr>
         <p:txBody>
-          <a:bodyPr wrap="square" lIns="0" rIns="0" tIns="0" bIns="0" anchor="t">
+          <a:bodyPr wrap="square" lIns="0" tIns="0" rIns="0" bIns="0" anchor="t">
             <a:spAutoFit/>
           </a:bodyPr>
           <a:lstStyle/>
@@ -4567,6 +4461,7 @@
           <a:lstStyle/>
           <a:p>
             <a:pPr algn="ctr"/>
+            <a:endParaRPr/>
           </a:p>
         </p:txBody>
       </p:sp>
@@ -4587,7 +4482,7 @@
           <a:noFill/>
         </p:spPr>
         <p:txBody>
-          <a:bodyPr wrap="square" lIns="0" rIns="0" tIns="0" bIns="0" anchor="ctr">
+          <a:bodyPr wrap="square" lIns="0" tIns="0" rIns="0" bIns="0" anchor="ctr">
             <a:spAutoFit/>
           </a:bodyPr>
           <a:lstStyle/>
@@ -4658,6 +4553,7 @@
           <a:lstStyle/>
           <a:p>
             <a:pPr algn="ctr"/>
+            <a:endParaRPr/>
           </a:p>
         </p:txBody>
       </p:sp>
@@ -4678,7 +4574,7 @@
           <a:noFill/>
         </p:spPr>
         <p:txBody>
-          <a:bodyPr wrap="square" lIns="0" rIns="0" tIns="0" bIns="0" anchor="t">
+          <a:bodyPr wrap="square" lIns="0" tIns="0" rIns="0" bIns="0" anchor="t">
             <a:spAutoFit/>
           </a:bodyPr>
           <a:lstStyle/>
@@ -4739,6 +4635,7 @@
           <a:lstStyle/>
           <a:p>
             <a:pPr algn="ctr"/>
+            <a:endParaRPr/>
           </a:p>
         </p:txBody>
       </p:sp>
@@ -4759,7 +4656,7 @@
           <a:noFill/>
         </p:spPr>
         <p:txBody>
-          <a:bodyPr wrap="square" lIns="0" rIns="0" tIns="0" bIns="0" anchor="ctr">
+          <a:bodyPr wrap="square" lIns="0" tIns="0" rIns="0" bIns="0" anchor="ctr">
             <a:spAutoFit/>
           </a:bodyPr>
           <a:lstStyle/>
@@ -4806,7 +4703,7 @@
           <a:noFill/>
         </p:spPr>
         <p:txBody>
-          <a:bodyPr wrap="square" lIns="0" rIns="0" tIns="0" bIns="0" anchor="t">
+          <a:bodyPr wrap="square" lIns="0" tIns="0" rIns="0" bIns="0" anchor="t">
             <a:spAutoFit/>
           </a:bodyPr>
           <a:lstStyle/>
@@ -4833,7 +4730,7 @@
 </file>
 
 <file path=ppt/slides/slide2.xml><?xml version="1.0" encoding="utf-8"?>
-<p:sld xmlns:a="http://schemas.openxmlformats.org/drawingml/2006/main" xmlns:p="http://schemas.openxmlformats.org/presentationml/2006/main" xmlns:r="http://schemas.openxmlformats.org/officeDocument/2006/relationships">
+<p:sld xmlns:a="http://schemas.openxmlformats.org/drawingml/2006/main" xmlns:r="http://schemas.openxmlformats.org/officeDocument/2006/relationships" xmlns:p="http://schemas.openxmlformats.org/presentationml/2006/main">
   <p:cSld>
     <p:bg>
       <p:bgPr>
@@ -4849,7 +4746,14 @@
         <p:cNvGrpSpPr/>
         <p:nvPr/>
       </p:nvGrpSpPr>
-      <p:grpSpPr/>
+      <p:grpSpPr>
+        <a:xfrm>
+          <a:off x="0" y="0"/>
+          <a:ext cx="0" cy="0"/>
+          <a:chOff x="0" y="0"/>
+          <a:chExt cx="0" cy="0"/>
+        </a:xfrm>
+      </p:grpSpPr>
       <p:sp>
         <p:nvSpPr>
           <p:cNvPr id="2" name="Title"/>
@@ -4867,7 +4771,7 @@
           <a:noFill/>
         </p:spPr>
         <p:txBody>
-          <a:bodyPr wrap="square" lIns="0" rIns="0" tIns="0" bIns="0" anchor="ctr">
+          <a:bodyPr wrap="square" lIns="0" tIns="0" rIns="0" bIns="0" anchor="ctr">
             <a:spAutoFit/>
           </a:bodyPr>
           <a:lstStyle/>
@@ -4902,12 +4806,12 @@
           <a:noFill/>
         </p:spPr>
         <p:txBody>
-          <a:bodyPr wrap="square" lIns="0" rIns="0" tIns="0" bIns="0" anchor="t">
+          <a:bodyPr wrap="square" lIns="0" tIns="0" rIns="0" bIns="0" anchor="t">
             <a:spAutoFit/>
           </a:bodyPr>
           <a:lstStyle/>
           <a:p>
-            <a:pPr algn="l" marL="201168" indent="-201168">
+            <a:pPr marL="201168" indent="-201168" algn="l">
               <a:spcAft>
                 <a:spcPts val="1000"/>
               </a:spcAft>
@@ -4924,7 +4828,7 @@
             </a:r>
           </a:p>
           <a:p>
-            <a:pPr algn="l" marL="201168" indent="-201168">
+            <a:pPr marL="201168" indent="-201168" algn="l">
               <a:spcAft>
                 <a:spcPts val="1000"/>
               </a:spcAft>
@@ -4941,7 +4845,7 @@
             </a:r>
           </a:p>
           <a:p>
-            <a:pPr algn="l" marL="201168" indent="-201168">
+            <a:pPr marL="201168" indent="-201168" algn="l">
               <a:spcAft>
                 <a:spcPts val="1000"/>
               </a:spcAft>
@@ -5004,6 +4908,7 @@
           <a:lstStyle/>
           <a:p>
             <a:pPr algn="ctr"/>
+            <a:endParaRPr/>
           </a:p>
         </p:txBody>
       </p:sp>
@@ -5048,6 +4953,7 @@
           <a:lstStyle/>
           <a:p>
             <a:pPr algn="ctr"/>
+            <a:endParaRPr/>
           </a:p>
         </p:txBody>
       </p:sp>
@@ -5068,7 +4974,7 @@
           <a:noFill/>
         </p:spPr>
         <p:txBody>
-          <a:bodyPr wrap="square" lIns="0" rIns="0" tIns="0" bIns="0" anchor="ctr">
+          <a:bodyPr wrap="square" lIns="0" tIns="0" rIns="0" bIns="0" anchor="ctr">
             <a:spAutoFit/>
           </a:bodyPr>
           <a:lstStyle/>
@@ -5103,7 +5009,7 @@
           <a:noFill/>
         </p:spPr>
         <p:txBody>
-          <a:bodyPr wrap="square" lIns="0" rIns="0" tIns="0" bIns="0" anchor="ctr">
+          <a:bodyPr wrap="square" lIns="0" tIns="0" rIns="0" bIns="0" anchor="ctr">
             <a:spAutoFit/>
           </a:bodyPr>
           <a:lstStyle/>
@@ -5175,6 +5081,7 @@
           <a:lstStyle/>
           <a:p>
             <a:pPr algn="ctr"/>
+            <a:endParaRPr/>
           </a:p>
         </p:txBody>
       </p:sp>
@@ -5219,6 +5126,7 @@
           <a:lstStyle/>
           <a:p>
             <a:pPr algn="ctr"/>
+            <a:endParaRPr/>
           </a:p>
         </p:txBody>
       </p:sp>
@@ -5239,7 +5147,7 @@
           <a:noFill/>
         </p:spPr>
         <p:txBody>
-          <a:bodyPr wrap="square" lIns="0" rIns="0" tIns="0" bIns="0" anchor="ctr">
+          <a:bodyPr wrap="square" lIns="0" tIns="0" rIns="0" bIns="0" anchor="ctr">
             <a:spAutoFit/>
           </a:bodyPr>
           <a:lstStyle/>
@@ -5274,7 +5182,7 @@
           <a:noFill/>
         </p:spPr>
         <p:txBody>
-          <a:bodyPr wrap="square" lIns="0" rIns="0" tIns="0" bIns="0" anchor="ctr">
+          <a:bodyPr wrap="square" lIns="0" tIns="0" rIns="0" bIns="0" anchor="ctr">
             <a:spAutoFit/>
           </a:bodyPr>
           <a:lstStyle/>
@@ -5346,6 +5254,7 @@
           <a:lstStyle/>
           <a:p>
             <a:pPr algn="ctr"/>
+            <a:endParaRPr/>
           </a:p>
         </p:txBody>
       </p:sp>
@@ -5390,6 +5299,7 @@
           <a:lstStyle/>
           <a:p>
             <a:pPr algn="ctr"/>
+            <a:endParaRPr/>
           </a:p>
         </p:txBody>
       </p:sp>
@@ -5410,7 +5320,7 @@
           <a:noFill/>
         </p:spPr>
         <p:txBody>
-          <a:bodyPr wrap="square" lIns="0" rIns="0" tIns="0" bIns="0" anchor="ctr">
+          <a:bodyPr wrap="square" lIns="0" tIns="0" rIns="0" bIns="0" anchor="ctr">
             <a:spAutoFit/>
           </a:bodyPr>
           <a:lstStyle/>
@@ -5445,7 +5355,7 @@
           <a:noFill/>
         </p:spPr>
         <p:txBody>
-          <a:bodyPr wrap="square" lIns="0" rIns="0" tIns="0" bIns="0" anchor="ctr">
+          <a:bodyPr wrap="square" lIns="0" tIns="0" rIns="0" bIns="0" anchor="ctr">
             <a:spAutoFit/>
           </a:bodyPr>
           <a:lstStyle/>
@@ -5517,6 +5427,7 @@
           <a:lstStyle/>
           <a:p>
             <a:pPr algn="ctr"/>
+            <a:endParaRPr/>
           </a:p>
         </p:txBody>
       </p:sp>
@@ -5537,7 +5448,7 @@
           <a:noFill/>
         </p:spPr>
         <p:txBody>
-          <a:bodyPr wrap="square" lIns="0" rIns="0" tIns="0" bIns="0" anchor="ctr">
+          <a:bodyPr wrap="square" lIns="0" tIns="0" rIns="0" bIns="0" anchor="ctr">
             <a:spAutoFit/>
           </a:bodyPr>
           <a:lstStyle/>
@@ -5573,7 +5484,7 @@
 </file>
 
 <file path=ppt/slides/slide3.xml><?xml version="1.0" encoding="utf-8"?>
-<p:sld xmlns:a="http://schemas.openxmlformats.org/drawingml/2006/main" xmlns:p="http://schemas.openxmlformats.org/presentationml/2006/main" xmlns:r="http://schemas.openxmlformats.org/officeDocument/2006/relationships">
+<p:sld xmlns:a="http://schemas.openxmlformats.org/drawingml/2006/main" xmlns:r="http://schemas.openxmlformats.org/officeDocument/2006/relationships" xmlns:p="http://schemas.openxmlformats.org/presentationml/2006/main">
   <p:cSld>
     <p:bg>
       <p:bgPr>
@@ -5589,7 +5500,14 @@
         <p:cNvGrpSpPr/>
         <p:nvPr/>
       </p:nvGrpSpPr>
-      <p:grpSpPr/>
+      <p:grpSpPr>
+        <a:xfrm>
+          <a:off x="0" y="0"/>
+          <a:ext cx="0" cy="0"/>
+          <a:chOff x="0" y="0"/>
+          <a:chExt cx="0" cy="0"/>
+        </a:xfrm>
+      </p:grpSpPr>
       <p:sp>
         <p:nvSpPr>
           <p:cNvPr id="2" name="Title"/>
@@ -5607,7 +5525,7 @@
           <a:noFill/>
         </p:spPr>
         <p:txBody>
-          <a:bodyPr wrap="square" lIns="0" rIns="0" tIns="0" bIns="0" anchor="ctr">
+          <a:bodyPr wrap="square" lIns="0" tIns="0" rIns="0" bIns="0" anchor="ctr">
             <a:spAutoFit/>
           </a:bodyPr>
           <a:lstStyle/>
@@ -5642,12 +5560,12 @@
           <a:noFill/>
         </p:spPr>
         <p:txBody>
-          <a:bodyPr wrap="square" lIns="0" rIns="0" tIns="0" bIns="0" anchor="t">
+          <a:bodyPr wrap="square" lIns="0" tIns="0" rIns="0" bIns="0" anchor="t">
             <a:spAutoFit/>
           </a:bodyPr>
           <a:lstStyle/>
           <a:p>
-            <a:pPr algn="l" marL="201168" indent="-201168">
+            <a:pPr marL="201168" indent="-201168" algn="l">
               <a:spcAft>
                 <a:spcPts val="800"/>
               </a:spcAft>
@@ -5673,7 +5591,7 @@
             </a:r>
           </a:p>
           <a:p>
-            <a:pPr algn="l" marL="201168" indent="-201168">
+            <a:pPr marL="201168" indent="-201168" algn="l">
               <a:spcAft>
                 <a:spcPts val="800"/>
               </a:spcAft>
@@ -5699,7 +5617,7 @@
             </a:r>
           </a:p>
           <a:p>
-            <a:pPr algn="l" marL="201168" indent="-201168">
+            <a:pPr marL="201168" indent="-201168" algn="l">
               <a:spcAft>
                 <a:spcPts val="800"/>
               </a:spcAft>
@@ -5725,7 +5643,7 @@
             </a:r>
           </a:p>
           <a:p>
-            <a:pPr algn="l" marL="201168" indent="-201168">
+            <a:pPr marL="201168" indent="-201168" algn="l">
               <a:spcAft>
                 <a:spcPts val="800"/>
               </a:spcAft>
@@ -5769,7 +5687,7 @@
           <a:noFill/>
         </p:spPr>
         <p:txBody>
-          <a:bodyPr wrap="square" lIns="0" rIns="0" tIns="0" bIns="0" anchor="t">
+          <a:bodyPr wrap="square" lIns="0" tIns="0" rIns="0" bIns="0" anchor="t">
             <a:spAutoFit/>
           </a:bodyPr>
           <a:lstStyle/>
@@ -5832,6 +5750,7 @@
           <a:lstStyle/>
           <a:p>
             <a:pPr algn="ctr"/>
+            <a:endParaRPr/>
           </a:p>
         </p:txBody>
       </p:sp>
@@ -5852,7 +5771,7 @@
           <a:noFill/>
         </p:spPr>
         <p:txBody>
-          <a:bodyPr wrap="square" lIns="0" rIns="0" tIns="0" bIns="0" anchor="ctr">
+          <a:bodyPr wrap="square" lIns="0" tIns="0" rIns="0" bIns="0" anchor="ctr">
             <a:spAutoFit/>
           </a:bodyPr>
           <a:lstStyle/>
@@ -5915,6 +5834,7 @@
           <a:lstStyle/>
           <a:p>
             <a:pPr algn="ctr"/>
+            <a:endParaRPr/>
           </a:p>
         </p:txBody>
       </p:sp>
@@ -5963,6 +5883,7 @@
           <a:lstStyle/>
           <a:p>
             <a:pPr algn="ctr"/>
+            <a:endParaRPr/>
           </a:p>
         </p:txBody>
       </p:sp>
@@ -6011,6 +5932,7 @@
           <a:lstStyle/>
           <a:p>
             <a:pPr algn="ctr"/>
+            <a:endParaRPr/>
           </a:p>
         </p:txBody>
       </p:sp>
@@ -6059,6 +5981,7 @@
           <a:lstStyle/>
           <a:p>
             <a:pPr algn="ctr"/>
+            <a:endParaRPr/>
           </a:p>
         </p:txBody>
       </p:sp>
@@ -6079,7 +6002,7 @@
           <a:noFill/>
         </p:spPr>
         <p:txBody>
-          <a:bodyPr wrap="square" lIns="0" rIns="0" tIns="0" bIns="0" anchor="ctr">
+          <a:bodyPr wrap="square" lIns="0" tIns="0" rIns="0" bIns="0" anchor="ctr">
             <a:spAutoFit/>
           </a:bodyPr>
           <a:lstStyle/>
@@ -6138,6 +6061,7 @@
           <a:lstStyle/>
           <a:p>
             <a:pPr algn="ctr"/>
+            <a:endParaRPr/>
           </a:p>
         </p:txBody>
       </p:sp>
@@ -6158,7 +6082,7 @@
           <a:noFill/>
         </p:spPr>
         <p:txBody>
-          <a:bodyPr wrap="square" lIns="0" rIns="0" tIns="0" bIns="0" anchor="t">
+          <a:bodyPr wrap="square" lIns="0" tIns="0" rIns="0" bIns="0" anchor="t">
             <a:spAutoFit/>
           </a:bodyPr>
           <a:lstStyle/>
@@ -6193,7 +6117,7 @@
           <a:noFill/>
         </p:spPr>
         <p:txBody>
-          <a:bodyPr wrap="square" lIns="0" rIns="0" tIns="0" bIns="0" anchor="t">
+          <a:bodyPr wrap="square" lIns="0" tIns="0" rIns="0" bIns="0" anchor="t">
             <a:spAutoFit/>
           </a:bodyPr>
           <a:lstStyle/>
@@ -6256,6 +6180,7 @@
           <a:lstStyle/>
           <a:p>
             <a:pPr algn="ctr"/>
+            <a:endParaRPr/>
           </a:p>
         </p:txBody>
       </p:sp>
@@ -6276,7 +6201,7 @@
           <a:noFill/>
         </p:spPr>
         <p:txBody>
-          <a:bodyPr wrap="square" lIns="0" rIns="0" tIns="0" bIns="0" anchor="ctr">
+          <a:bodyPr wrap="square" lIns="0" tIns="0" rIns="0" bIns="0" anchor="ctr">
             <a:spAutoFit/>
           </a:bodyPr>
           <a:lstStyle/>
@@ -6351,6 +6276,7 @@
           <a:lstStyle/>
           <a:p>
             <a:pPr algn="ctr"/>
+            <a:endParaRPr/>
           </a:p>
         </p:txBody>
       </p:sp>
@@ -6371,7 +6297,7 @@
           <a:noFill/>
         </p:spPr>
         <p:txBody>
-          <a:bodyPr wrap="square" lIns="0" rIns="0" tIns="0" bIns="0" anchor="ctr">
+          <a:bodyPr wrap="square" lIns="0" tIns="0" rIns="0" bIns="0" anchor="ctr">
             <a:spAutoFit/>
           </a:bodyPr>
           <a:lstStyle/>
@@ -6446,6 +6372,7 @@
           <a:lstStyle/>
           <a:p>
             <a:pPr algn="ctr"/>
+            <a:endParaRPr/>
           </a:p>
         </p:txBody>
       </p:sp>
@@ -6466,7 +6393,7 @@
           <a:noFill/>
         </p:spPr>
         <p:txBody>
-          <a:bodyPr wrap="square" lIns="0" rIns="0" tIns="0" bIns="0" anchor="ctr">
+          <a:bodyPr wrap="square" lIns="0" tIns="0" rIns="0" bIns="0" anchor="ctr">
             <a:spAutoFit/>
           </a:bodyPr>
           <a:lstStyle/>
@@ -6505,7 +6432,7 @@
 </file>
 
 <file path=ppt/slides/slide4.xml><?xml version="1.0" encoding="utf-8"?>
-<p:sld xmlns:a="http://schemas.openxmlformats.org/drawingml/2006/main" xmlns:p="http://schemas.openxmlformats.org/presentationml/2006/main" xmlns:r="http://schemas.openxmlformats.org/officeDocument/2006/relationships">
+<p:sld xmlns:a="http://schemas.openxmlformats.org/drawingml/2006/main" xmlns:r="http://schemas.openxmlformats.org/officeDocument/2006/relationships" xmlns:p="http://schemas.openxmlformats.org/presentationml/2006/main">
   <p:cSld>
     <p:bg>
       <p:bgPr>
@@ -6521,7 +6448,14 @@
         <p:cNvGrpSpPr/>
         <p:nvPr/>
       </p:nvGrpSpPr>
-      <p:grpSpPr/>
+      <p:grpSpPr>
+        <a:xfrm>
+          <a:off x="0" y="0"/>
+          <a:ext cx="0" cy="0"/>
+          <a:chOff x="0" y="0"/>
+          <a:chExt cx="0" cy="0"/>
+        </a:xfrm>
+      </p:grpSpPr>
       <p:sp>
         <p:nvSpPr>
           <p:cNvPr id="2" name="Title"/>
@@ -6539,7 +6473,7 @@
           <a:noFill/>
         </p:spPr>
         <p:txBody>
-          <a:bodyPr wrap="square" lIns="0" rIns="0" tIns="0" bIns="0" anchor="ctr">
+          <a:bodyPr wrap="square" lIns="0" tIns="0" rIns="0" bIns="0" anchor="ctr">
             <a:spAutoFit/>
           </a:bodyPr>
           <a:lstStyle/>
@@ -6602,6 +6536,7 @@
           <a:lstStyle/>
           <a:p>
             <a:pPr algn="ctr"/>
+            <a:endParaRPr/>
           </a:p>
         </p:txBody>
       </p:sp>
@@ -6622,7 +6557,7 @@
           <a:noFill/>
         </p:spPr>
         <p:txBody>
-          <a:bodyPr wrap="square" lIns="0" rIns="0" tIns="0" bIns="0" anchor="t">
+          <a:bodyPr wrap="square" lIns="0" tIns="0" rIns="0" bIns="0" anchor="t">
             <a:spAutoFit/>
           </a:bodyPr>
           <a:lstStyle/>
@@ -6657,7 +6592,7 @@
           <a:noFill/>
         </p:spPr>
         <p:txBody>
-          <a:bodyPr wrap="square" lIns="0" rIns="0" tIns="0" bIns="0" anchor="t">
+          <a:bodyPr wrap="square" lIns="0" tIns="0" rIns="0" bIns="0" anchor="t">
             <a:spAutoFit/>
           </a:bodyPr>
           <a:lstStyle/>
@@ -6718,6 +6653,7 @@
           <a:lstStyle/>
           <a:p>
             <a:pPr algn="ctr"/>
+            <a:endParaRPr/>
           </a:p>
         </p:txBody>
       </p:sp>
@@ -6738,7 +6674,7 @@
           <a:noFill/>
         </p:spPr>
         <p:txBody>
-          <a:bodyPr wrap="square" lIns="0" rIns="0" tIns="0" bIns="0" anchor="ctr">
+          <a:bodyPr wrap="square" lIns="0" tIns="0" rIns="0" bIns="0" anchor="ctr">
             <a:spAutoFit/>
           </a:bodyPr>
           <a:lstStyle/>
@@ -6773,7 +6709,7 @@
           <a:noFill/>
         </p:spPr>
         <p:txBody>
-          <a:bodyPr wrap="square" lIns="0" rIns="0" tIns="0" bIns="0" anchor="t">
+          <a:bodyPr wrap="square" lIns="0" tIns="0" rIns="0" bIns="0" anchor="t">
             <a:spAutoFit/>
           </a:bodyPr>
           <a:lstStyle/>
@@ -6836,6 +6772,7 @@
           <a:lstStyle/>
           <a:p>
             <a:pPr algn="ctr"/>
+            <a:endParaRPr/>
           </a:p>
         </p:txBody>
       </p:sp>
@@ -6856,7 +6793,7 @@
           <a:noFill/>
         </p:spPr>
         <p:txBody>
-          <a:bodyPr wrap="square" lIns="0" rIns="0" tIns="0" bIns="0" anchor="t">
+          <a:bodyPr wrap="square" lIns="0" tIns="0" rIns="0" bIns="0" anchor="t">
             <a:spAutoFit/>
           </a:bodyPr>
           <a:lstStyle/>
@@ -6891,7 +6828,7 @@
           <a:noFill/>
         </p:spPr>
         <p:txBody>
-          <a:bodyPr wrap="square" lIns="0" rIns="0" tIns="0" bIns="0" anchor="t">
+          <a:bodyPr wrap="square" lIns="0" tIns="0" rIns="0" bIns="0" anchor="t">
             <a:spAutoFit/>
           </a:bodyPr>
           <a:lstStyle/>
@@ -6952,6 +6889,7 @@
           <a:lstStyle/>
           <a:p>
             <a:pPr algn="ctr"/>
+            <a:endParaRPr/>
           </a:p>
         </p:txBody>
       </p:sp>
@@ -6972,7 +6910,7 @@
           <a:noFill/>
         </p:spPr>
         <p:txBody>
-          <a:bodyPr wrap="square" lIns="0" rIns="0" tIns="0" bIns="0" anchor="ctr">
+          <a:bodyPr wrap="square" lIns="0" tIns="0" rIns="0" bIns="0" anchor="ctr">
             <a:spAutoFit/>
           </a:bodyPr>
           <a:lstStyle/>
@@ -7007,7 +6945,7 @@
           <a:noFill/>
         </p:spPr>
         <p:txBody>
-          <a:bodyPr wrap="square" lIns="0" rIns="0" tIns="0" bIns="0" anchor="t">
+          <a:bodyPr wrap="square" lIns="0" tIns="0" rIns="0" bIns="0" anchor="t">
             <a:spAutoFit/>
           </a:bodyPr>
           <a:lstStyle/>
@@ -7070,6 +7008,7 @@
           <a:lstStyle/>
           <a:p>
             <a:pPr algn="ctr"/>
+            <a:endParaRPr/>
           </a:p>
         </p:txBody>
       </p:sp>
@@ -7090,7 +7029,7 @@
           <a:noFill/>
         </p:spPr>
         <p:txBody>
-          <a:bodyPr wrap="square" lIns="0" rIns="0" tIns="0" bIns="0" anchor="t">
+          <a:bodyPr wrap="square" lIns="0" tIns="0" rIns="0" bIns="0" anchor="t">
             <a:spAutoFit/>
           </a:bodyPr>
           <a:lstStyle/>
@@ -7125,7 +7064,7 @@
           <a:noFill/>
         </p:spPr>
         <p:txBody>
-          <a:bodyPr wrap="square" lIns="0" rIns="0" tIns="0" bIns="0" anchor="t">
+          <a:bodyPr wrap="square" lIns="0" tIns="0" rIns="0" bIns="0" anchor="t">
             <a:spAutoFit/>
           </a:bodyPr>
           <a:lstStyle/>
@@ -7186,6 +7125,7 @@
           <a:lstStyle/>
           <a:p>
             <a:pPr algn="ctr"/>
+            <a:endParaRPr/>
           </a:p>
         </p:txBody>
       </p:sp>
@@ -7206,7 +7146,7 @@
           <a:noFill/>
         </p:spPr>
         <p:txBody>
-          <a:bodyPr wrap="square" lIns="0" rIns="0" tIns="0" bIns="0" anchor="ctr">
+          <a:bodyPr wrap="square" lIns="0" tIns="0" rIns="0" bIns="0" anchor="ctr">
             <a:spAutoFit/>
           </a:bodyPr>
           <a:lstStyle/>
@@ -7241,7 +7181,7 @@
           <a:noFill/>
         </p:spPr>
         <p:txBody>
-          <a:bodyPr wrap="square" lIns="0" rIns="0" tIns="0" bIns="0" anchor="t">
+          <a:bodyPr wrap="square" lIns="0" tIns="0" rIns="0" bIns="0" anchor="t">
             <a:spAutoFit/>
           </a:bodyPr>
           <a:lstStyle/>
@@ -7304,6 +7244,7 @@
           <a:lstStyle/>
           <a:p>
             <a:pPr algn="ctr"/>
+            <a:endParaRPr/>
           </a:p>
         </p:txBody>
       </p:sp>
@@ -7324,7 +7265,7 @@
           <a:noFill/>
         </p:spPr>
         <p:txBody>
-          <a:bodyPr wrap="square" lIns="0" rIns="0" tIns="0" bIns="0" anchor="t">
+          <a:bodyPr wrap="square" lIns="0" tIns="0" rIns="0" bIns="0" anchor="t">
             <a:spAutoFit/>
           </a:bodyPr>
           <a:lstStyle/>
@@ -7359,7 +7300,7 @@
           <a:noFill/>
         </p:spPr>
         <p:txBody>
-          <a:bodyPr wrap="square" lIns="0" rIns="0" tIns="0" bIns="0" anchor="t">
+          <a:bodyPr wrap="square" lIns="0" tIns="0" rIns="0" bIns="0" anchor="t">
             <a:spAutoFit/>
           </a:bodyPr>
           <a:lstStyle/>
@@ -7420,6 +7361,7 @@
           <a:lstStyle/>
           <a:p>
             <a:pPr algn="ctr"/>
+            <a:endParaRPr/>
           </a:p>
         </p:txBody>
       </p:sp>
@@ -7440,7 +7382,7 @@
           <a:noFill/>
         </p:spPr>
         <p:txBody>
-          <a:bodyPr wrap="square" lIns="0" rIns="0" tIns="0" bIns="0" anchor="ctr">
+          <a:bodyPr wrap="square" lIns="0" tIns="0" rIns="0" bIns="0" anchor="ctr">
             <a:spAutoFit/>
           </a:bodyPr>
           <a:lstStyle/>
@@ -7475,7 +7417,7 @@
           <a:noFill/>
         </p:spPr>
         <p:txBody>
-          <a:bodyPr wrap="square" lIns="0" rIns="0" tIns="0" bIns="0" anchor="t">
+          <a:bodyPr wrap="square" lIns="0" tIns="0" rIns="0" bIns="0" anchor="t">
             <a:spAutoFit/>
           </a:bodyPr>
           <a:lstStyle/>
@@ -7538,6 +7480,7 @@
           <a:lstStyle/>
           <a:p>
             <a:pPr algn="ctr"/>
+            <a:endParaRPr/>
           </a:p>
         </p:txBody>
       </p:sp>
@@ -7558,7 +7501,7 @@
           <a:noFill/>
         </p:spPr>
         <p:txBody>
-          <a:bodyPr wrap="square" lIns="0" rIns="0" tIns="0" bIns="0" anchor="t">
+          <a:bodyPr wrap="square" lIns="0" tIns="0" rIns="0" bIns="0" anchor="t">
             <a:spAutoFit/>
           </a:bodyPr>
           <a:lstStyle/>
@@ -7593,7 +7536,7 @@
           <a:noFill/>
         </p:spPr>
         <p:txBody>
-          <a:bodyPr wrap="square" lIns="0" rIns="0" tIns="0" bIns="0" anchor="t">
+          <a:bodyPr wrap="square" lIns="0" tIns="0" rIns="0" bIns="0" anchor="t">
             <a:spAutoFit/>
           </a:bodyPr>
           <a:lstStyle/>
@@ -7654,6 +7597,7 @@
           <a:lstStyle/>
           <a:p>
             <a:pPr algn="ctr"/>
+            <a:endParaRPr/>
           </a:p>
         </p:txBody>
       </p:sp>
@@ -7674,7 +7618,7 @@
           <a:noFill/>
         </p:spPr>
         <p:txBody>
-          <a:bodyPr wrap="square" lIns="0" rIns="0" tIns="0" bIns="0" anchor="ctr">
+          <a:bodyPr wrap="square" lIns="0" tIns="0" rIns="0" bIns="0" anchor="ctr">
             <a:spAutoFit/>
           </a:bodyPr>
           <a:lstStyle/>
@@ -7709,7 +7653,7 @@
           <a:noFill/>
         </p:spPr>
         <p:txBody>
-          <a:bodyPr wrap="square" lIns="0" rIns="0" tIns="0" bIns="0" anchor="t">
+          <a:bodyPr wrap="square" lIns="0" tIns="0" rIns="0" bIns="0" anchor="t">
             <a:spAutoFit/>
           </a:bodyPr>
           <a:lstStyle/>
@@ -7744,7 +7688,7 @@
           <a:noFill/>
         </p:spPr>
         <p:txBody>
-          <a:bodyPr wrap="square" lIns="0" rIns="0" tIns="0" bIns="0" anchor="t">
+          <a:bodyPr wrap="square" lIns="0" tIns="0" rIns="0" bIns="0" anchor="t">
             <a:spAutoFit/>
           </a:bodyPr>
           <a:lstStyle/>
@@ -7779,7 +7723,7 @@
           <a:noFill/>
         </p:spPr>
         <p:txBody>
-          <a:bodyPr wrap="square" lIns="0" rIns="0" tIns="0" bIns="0" anchor="t">
+          <a:bodyPr wrap="square" lIns="0" tIns="0" rIns="0" bIns="0" anchor="t">
             <a:spAutoFit/>
           </a:bodyPr>
           <a:lstStyle/>
@@ -7814,7 +7758,7 @@
           <a:noFill/>
         </p:spPr>
         <p:txBody>
-          <a:bodyPr wrap="square" lIns="0" rIns="0" tIns="0" bIns="0" anchor="t">
+          <a:bodyPr wrap="square" lIns="0" tIns="0" rIns="0" bIns="0" anchor="t">
             <a:spAutoFit/>
           </a:bodyPr>
           <a:lstStyle/>
@@ -7849,7 +7793,7 @@
           <a:noFill/>
         </p:spPr>
         <p:txBody>
-          <a:bodyPr wrap="square" lIns="0" rIns="0" tIns="0" bIns="0" anchor="t">
+          <a:bodyPr wrap="square" lIns="0" tIns="0" rIns="0" bIns="0" anchor="t">
             <a:spAutoFit/>
           </a:bodyPr>
           <a:lstStyle/>
@@ -7884,7 +7828,7 @@
           <a:noFill/>
         </p:spPr>
         <p:txBody>
-          <a:bodyPr wrap="square" lIns="0" rIns="0" tIns="0" bIns="0" anchor="t">
+          <a:bodyPr wrap="square" lIns="0" tIns="0" rIns="0" bIns="0" anchor="t">
             <a:spAutoFit/>
           </a:bodyPr>
           <a:lstStyle/>
@@ -7911,7 +7855,7 @@
 </file>
 
 <file path=ppt/slides/slide5.xml><?xml version="1.0" encoding="utf-8"?>
-<p:sld xmlns:a="http://schemas.openxmlformats.org/drawingml/2006/main" xmlns:p="http://schemas.openxmlformats.org/presentationml/2006/main" xmlns:r="http://schemas.openxmlformats.org/officeDocument/2006/relationships">
+<p:sld xmlns:a="http://schemas.openxmlformats.org/drawingml/2006/main" xmlns:r="http://schemas.openxmlformats.org/officeDocument/2006/relationships" xmlns:p="http://schemas.openxmlformats.org/presentationml/2006/main">
   <p:cSld>
     <p:bg>
       <p:bgPr>
@@ -7927,7 +7871,14 @@
         <p:cNvGrpSpPr/>
         <p:nvPr/>
       </p:nvGrpSpPr>
-      <p:grpSpPr/>
+      <p:grpSpPr>
+        <a:xfrm>
+          <a:off x="0" y="0"/>
+          <a:ext cx="0" cy="0"/>
+          <a:chOff x="0" y="0"/>
+          <a:chExt cx="0" cy="0"/>
+        </a:xfrm>
+      </p:grpSpPr>
       <p:sp>
         <p:nvSpPr>
           <p:cNvPr id="2" name="Title"/>
@@ -7945,7 +7896,7 @@
           <a:noFill/>
         </p:spPr>
         <p:txBody>
-          <a:bodyPr wrap="square" lIns="0" rIns="0" tIns="0" bIns="0" anchor="ctr">
+          <a:bodyPr wrap="square" lIns="0" tIns="0" rIns="0" bIns="0" anchor="ctr">
             <a:spAutoFit/>
           </a:bodyPr>
           <a:lstStyle/>
@@ -7977,7 +7928,7 @@
         </p:xfrm>
         <a:graphic>
           <a:graphicData uri="http://schemas.openxmlformats.org/drawingml/2006/chart">
-            <c:chart xmlns:c="http://schemas.openxmlformats.org/drawingml/2006/chart" r:id="rId2"/>
+            <c:chart xmlns:c="http://schemas.openxmlformats.org/drawingml/2006/chart" xmlns:r="http://schemas.openxmlformats.org/officeDocument/2006/relationships" r:id="rId3"/>
           </a:graphicData>
         </a:graphic>
       </p:graphicFrame>
@@ -7998,12 +7949,12 @@
           <a:noFill/>
         </p:spPr>
         <p:txBody>
-          <a:bodyPr wrap="square" lIns="0" rIns="0" tIns="0" bIns="0" anchor="t">
+          <a:bodyPr wrap="square" lIns="0" tIns="0" rIns="0" bIns="0" anchor="t">
             <a:spAutoFit/>
           </a:bodyPr>
           <a:lstStyle/>
           <a:p>
-            <a:pPr algn="l" marL="201168" indent="-201168">
+            <a:pPr marL="201168" indent="-201168" algn="l">
               <a:spcAft>
                 <a:spcPts val="800"/>
               </a:spcAft>
@@ -8029,7 +7980,7 @@
             </a:r>
           </a:p>
           <a:p>
-            <a:pPr algn="l" marL="201168" indent="-201168">
+            <a:pPr marL="201168" indent="-201168" algn="l">
               <a:spcAft>
                 <a:spcPts val="800"/>
               </a:spcAft>
@@ -8055,7 +8006,7 @@
             </a:r>
           </a:p>
           <a:p>
-            <a:pPr algn="l" marL="201168" indent="-201168">
+            <a:pPr marL="201168" indent="-201168" algn="l">
               <a:spcAft>
                 <a:spcPts val="800"/>
               </a:spcAft>
@@ -8081,7 +8032,7 @@
             </a:r>
           </a:p>
           <a:p>
-            <a:pPr algn="l" marL="201168" indent="-201168">
+            <a:pPr marL="201168" indent="-201168" algn="l">
               <a:spcAft>
                 <a:spcPts val="800"/>
               </a:spcAft>
@@ -8125,7 +8076,7 @@
           <a:noFill/>
         </p:spPr>
         <p:txBody>
-          <a:bodyPr wrap="square" lIns="0" rIns="0" tIns="0" bIns="0" anchor="t">
+          <a:bodyPr wrap="square" lIns="0" tIns="0" rIns="0" bIns="0" anchor="t">
             <a:spAutoFit/>
           </a:bodyPr>
           <a:lstStyle/>
@@ -8152,7 +8103,7 @@
 </file>
 
 <file path=ppt/slides/slide6.xml><?xml version="1.0" encoding="utf-8"?>
-<p:sld xmlns:a="http://schemas.openxmlformats.org/drawingml/2006/main" xmlns:p="http://schemas.openxmlformats.org/presentationml/2006/main" xmlns:r="http://schemas.openxmlformats.org/officeDocument/2006/relationships">
+<p:sld xmlns:a="http://schemas.openxmlformats.org/drawingml/2006/main" xmlns:r="http://schemas.openxmlformats.org/officeDocument/2006/relationships" xmlns:p="http://schemas.openxmlformats.org/presentationml/2006/main">
   <p:cSld>
     <p:bg>
       <p:bgPr>
@@ -8168,7 +8119,14 @@
         <p:cNvGrpSpPr/>
         <p:nvPr/>
       </p:nvGrpSpPr>
-      <p:grpSpPr/>
+      <p:grpSpPr>
+        <a:xfrm>
+          <a:off x="0" y="0"/>
+          <a:ext cx="0" cy="0"/>
+          <a:chOff x="0" y="0"/>
+          <a:chExt cx="0" cy="0"/>
+        </a:xfrm>
+      </p:grpSpPr>
       <p:sp>
         <p:nvSpPr>
           <p:cNvPr id="2" name="Title"/>
@@ -8186,7 +8144,7 @@
           <a:noFill/>
         </p:spPr>
         <p:txBody>
-          <a:bodyPr wrap="square" lIns="0" rIns="0" tIns="0" bIns="0" anchor="ctr">
+          <a:bodyPr wrap="square" lIns="0" tIns="0" rIns="0" bIns="0" anchor="ctr">
             <a:spAutoFit/>
           </a:bodyPr>
           <a:lstStyle/>
@@ -8218,7 +8176,7 @@
         </p:xfrm>
         <a:graphic>
           <a:graphicData uri="http://schemas.openxmlformats.org/drawingml/2006/chart">
-            <c:chart xmlns:c="http://schemas.openxmlformats.org/drawingml/2006/chart" r:id="rId2"/>
+            <c:chart xmlns:c="http://schemas.openxmlformats.org/drawingml/2006/chart" xmlns:r="http://schemas.openxmlformats.org/officeDocument/2006/relationships" r:id="rId3"/>
           </a:graphicData>
         </a:graphic>
       </p:graphicFrame>
@@ -8239,7 +8197,7 @@
           <a:noFill/>
         </p:spPr>
         <p:txBody>
-          <a:bodyPr wrap="square" lIns="0" rIns="0" tIns="0" bIns="0" anchor="t">
+          <a:bodyPr wrap="square" lIns="0" tIns="0" rIns="0" bIns="0" anchor="t">
             <a:spAutoFit/>
           </a:bodyPr>
           <a:lstStyle/>
@@ -8274,7 +8232,7 @@
           <a:noFill/>
         </p:spPr>
         <p:txBody>
-          <a:bodyPr wrap="square" lIns="0" rIns="0" tIns="0" bIns="0" anchor="t">
+          <a:bodyPr wrap="square" lIns="0" tIns="0" rIns="0" bIns="0" anchor="t">
             <a:spAutoFit/>
           </a:bodyPr>
           <a:lstStyle/>
@@ -8309,7 +8267,7 @@
           <a:noFill/>
         </p:spPr>
         <p:txBody>
-          <a:bodyPr wrap="square" lIns="0" rIns="0" tIns="0" bIns="0" anchor="t">
+          <a:bodyPr wrap="square" lIns="0" tIns="0" rIns="0" bIns="0" anchor="t">
             <a:spAutoFit/>
           </a:bodyPr>
           <a:lstStyle/>
@@ -8344,7 +8302,7 @@
           <a:noFill/>
         </p:spPr>
         <p:txBody>
-          <a:bodyPr wrap="square" lIns="0" rIns="0" tIns="0" bIns="0" anchor="t">
+          <a:bodyPr wrap="square" lIns="0" tIns="0" rIns="0" bIns="0" anchor="t">
             <a:spAutoFit/>
           </a:bodyPr>
           <a:lstStyle/>
@@ -8379,7 +8337,7 @@
           <a:noFill/>
         </p:spPr>
         <p:txBody>
-          <a:bodyPr wrap="square" lIns="0" rIns="0" tIns="0" bIns="0" anchor="t">
+          <a:bodyPr wrap="square" lIns="0" tIns="0" rIns="0" bIns="0" anchor="t">
             <a:spAutoFit/>
           </a:bodyPr>
           <a:lstStyle/>
@@ -8414,7 +8372,7 @@
           <a:noFill/>
         </p:spPr>
         <p:txBody>
-          <a:bodyPr wrap="square" lIns="0" rIns="0" tIns="0" bIns="0" anchor="t">
+          <a:bodyPr wrap="square" lIns="0" tIns="0" rIns="0" bIns="0" anchor="t">
             <a:spAutoFit/>
           </a:bodyPr>
           <a:lstStyle/>
@@ -8449,7 +8407,7 @@
           <a:noFill/>
         </p:spPr>
         <p:txBody>
-          <a:bodyPr wrap="square" lIns="0" rIns="0" tIns="0" bIns="0" anchor="t">
+          <a:bodyPr wrap="square" lIns="0" tIns="0" rIns="0" bIns="0" anchor="t">
             <a:spAutoFit/>
           </a:bodyPr>
           <a:lstStyle/>
@@ -8484,7 +8442,7 @@
           <a:noFill/>
         </p:spPr>
         <p:txBody>
-          <a:bodyPr wrap="square" lIns="0" rIns="0" tIns="0" bIns="0" anchor="t">
+          <a:bodyPr wrap="square" lIns="0" tIns="0" rIns="0" bIns="0" anchor="t">
             <a:spAutoFit/>
           </a:bodyPr>
           <a:lstStyle/>
@@ -8519,7 +8477,7 @@
           <a:noFill/>
         </p:spPr>
         <p:txBody>
-          <a:bodyPr wrap="square" lIns="0" rIns="0" tIns="0" bIns="0" anchor="t">
+          <a:bodyPr wrap="square" lIns="0" tIns="0" rIns="0" bIns="0" anchor="t">
             <a:spAutoFit/>
           </a:bodyPr>
           <a:lstStyle/>
@@ -8546,7 +8504,7 @@
 </file>
 
 <file path=ppt/slides/slide7.xml><?xml version="1.0" encoding="utf-8"?>
-<p:sld xmlns:a="http://schemas.openxmlformats.org/drawingml/2006/main" xmlns:p="http://schemas.openxmlformats.org/presentationml/2006/main" xmlns:r="http://schemas.openxmlformats.org/officeDocument/2006/relationships">
+<p:sld xmlns:a="http://schemas.openxmlformats.org/drawingml/2006/main" xmlns:r="http://schemas.openxmlformats.org/officeDocument/2006/relationships" xmlns:p="http://schemas.openxmlformats.org/presentationml/2006/main">
   <p:cSld>
     <p:bg>
       <p:bgPr>
@@ -8562,7 +8520,14 @@
         <p:cNvGrpSpPr/>
         <p:nvPr/>
       </p:nvGrpSpPr>
-      <p:grpSpPr/>
+      <p:grpSpPr>
+        <a:xfrm>
+          <a:off x="0" y="0"/>
+          <a:ext cx="0" cy="0"/>
+          <a:chOff x="0" y="0"/>
+          <a:chExt cx="0" cy="0"/>
+        </a:xfrm>
+      </p:grpSpPr>
       <p:sp>
         <p:nvSpPr>
           <p:cNvPr id="2" name="Title"/>
@@ -8580,7 +8545,7 @@
           <a:noFill/>
         </p:spPr>
         <p:txBody>
-          <a:bodyPr wrap="square" lIns="0" rIns="0" tIns="0" bIns="0" anchor="ctr">
+          <a:bodyPr wrap="square" lIns="0" tIns="0" rIns="0" bIns="0" anchor="ctr">
             <a:spAutoFit/>
           </a:bodyPr>
           <a:lstStyle/>
@@ -8615,7 +8580,7 @@
           <a:noFill/>
         </p:spPr>
         <p:txBody>
-          <a:bodyPr wrap="square" lIns="0" rIns="0" tIns="0" bIns="0" anchor="t">
+          <a:bodyPr wrap="square" lIns="0" tIns="0" rIns="0" bIns="0" anchor="t">
             <a:spAutoFit/>
           </a:bodyPr>
           <a:lstStyle/>
@@ -8650,7 +8615,7 @@
           <a:noFill/>
         </p:spPr>
         <p:txBody>
-          <a:bodyPr wrap="square" lIns="0" rIns="0" tIns="0" bIns="0" anchor="t">
+          <a:bodyPr wrap="square" lIns="0" tIns="0" rIns="0" bIns="0" anchor="t">
             <a:spAutoFit/>
           </a:bodyPr>
           <a:lstStyle/>
@@ -8685,7 +8650,7 @@
           <a:noFill/>
         </p:spPr>
         <p:txBody>
-          <a:bodyPr wrap="square" lIns="0" rIns="0" tIns="0" bIns="0" anchor="t">
+          <a:bodyPr wrap="square" lIns="0" tIns="0" rIns="0" bIns="0" anchor="t">
             <a:spAutoFit/>
           </a:bodyPr>
           <a:lstStyle/>
@@ -8720,7 +8685,7 @@
           <a:noFill/>
         </p:spPr>
         <p:txBody>
-          <a:bodyPr wrap="square" lIns="0" rIns="0" tIns="0" bIns="0" anchor="t">
+          <a:bodyPr wrap="square" lIns="0" tIns="0" rIns="0" bIns="0" anchor="t">
             <a:spAutoFit/>
           </a:bodyPr>
           <a:lstStyle/>
@@ -8755,7 +8720,7 @@
           <a:noFill/>
         </p:spPr>
         <p:txBody>
-          <a:bodyPr wrap="square" lIns="0" rIns="0" tIns="0" bIns="0" anchor="t">
+          <a:bodyPr wrap="square" lIns="0" tIns="0" rIns="0" bIns="0" anchor="t">
             <a:spAutoFit/>
           </a:bodyPr>
           <a:lstStyle/>
@@ -8790,7 +8755,7 @@
           <a:noFill/>
         </p:spPr>
         <p:txBody>
-          <a:bodyPr wrap="square" lIns="0" rIns="0" tIns="0" bIns="0" anchor="t">
+          <a:bodyPr wrap="square" lIns="0" tIns="0" rIns="0" bIns="0" anchor="t">
             <a:spAutoFit/>
           </a:bodyPr>
           <a:lstStyle/>
@@ -8825,7 +8790,7 @@
           <a:noFill/>
         </p:spPr>
         <p:txBody>
-          <a:bodyPr wrap="square" lIns="0" rIns="0" tIns="0" bIns="0" anchor="t">
+          <a:bodyPr wrap="square" lIns="0" tIns="0" rIns="0" bIns="0" anchor="t">
             <a:spAutoFit/>
           </a:bodyPr>
           <a:lstStyle/>
@@ -8884,6 +8849,7 @@
           <a:lstStyle/>
           <a:p>
             <a:pPr algn="ctr"/>
+            <a:endParaRPr/>
           </a:p>
         </p:txBody>
       </p:sp>
@@ -8904,7 +8870,7 @@
           <a:noFill/>
         </p:spPr>
         <p:txBody>
-          <a:bodyPr wrap="square" lIns="0" rIns="0" tIns="0" bIns="0" anchor="t">
+          <a:bodyPr wrap="square" lIns="0" tIns="0" rIns="0" bIns="0" anchor="t">
             <a:spAutoFit/>
           </a:bodyPr>
           <a:lstStyle/>
@@ -8939,7 +8905,7 @@
           <a:noFill/>
         </p:spPr>
         <p:txBody>
-          <a:bodyPr wrap="square" lIns="0" rIns="0" tIns="0" bIns="0" anchor="t">
+          <a:bodyPr wrap="square" lIns="0" tIns="0" rIns="0" bIns="0" anchor="t">
             <a:spAutoFit/>
           </a:bodyPr>
           <a:lstStyle/>
@@ -8998,6 +8964,7 @@
           <a:lstStyle/>
           <a:p>
             <a:pPr algn="ctr"/>
+            <a:endParaRPr/>
           </a:p>
         </p:txBody>
       </p:sp>
@@ -9042,6 +9009,7 @@
           <a:lstStyle/>
           <a:p>
             <a:pPr algn="ctr"/>
+            <a:endParaRPr/>
           </a:p>
         </p:txBody>
       </p:sp>
@@ -9062,7 +9030,7 @@
           <a:noFill/>
         </p:spPr>
         <p:txBody>
-          <a:bodyPr wrap="square" lIns="0" rIns="0" tIns="0" bIns="0" anchor="t">
+          <a:bodyPr wrap="square" lIns="0" tIns="0" rIns="0" bIns="0" anchor="t">
             <a:spAutoFit/>
           </a:bodyPr>
           <a:lstStyle/>
@@ -9097,7 +9065,7 @@
           <a:noFill/>
         </p:spPr>
         <p:txBody>
-          <a:bodyPr wrap="square" lIns="0" rIns="0" tIns="0" bIns="0" anchor="t">
+          <a:bodyPr wrap="square" lIns="0" tIns="0" rIns="0" bIns="0" anchor="t">
             <a:spAutoFit/>
           </a:bodyPr>
           <a:lstStyle/>
@@ -9156,6 +9124,7 @@
           <a:lstStyle/>
           <a:p>
             <a:pPr algn="ctr"/>
+            <a:endParaRPr/>
           </a:p>
         </p:txBody>
       </p:sp>
@@ -9200,6 +9169,7 @@
           <a:lstStyle/>
           <a:p>
             <a:pPr algn="ctr"/>
+            <a:endParaRPr/>
           </a:p>
         </p:txBody>
       </p:sp>
@@ -9220,7 +9190,7 @@
           <a:noFill/>
         </p:spPr>
         <p:txBody>
-          <a:bodyPr wrap="square" lIns="0" rIns="0" tIns="0" bIns="0" anchor="t">
+          <a:bodyPr wrap="square" lIns="0" tIns="0" rIns="0" bIns="0" anchor="t">
             <a:spAutoFit/>
           </a:bodyPr>
           <a:lstStyle/>
@@ -9255,7 +9225,7 @@
           <a:noFill/>
         </p:spPr>
         <p:txBody>
-          <a:bodyPr wrap="square" lIns="0" rIns="0" tIns="0" bIns="0" anchor="t">
+          <a:bodyPr wrap="square" lIns="0" tIns="0" rIns="0" bIns="0" anchor="t">
             <a:spAutoFit/>
           </a:bodyPr>
           <a:lstStyle/>
@@ -9314,6 +9284,7 @@
           <a:lstStyle/>
           <a:p>
             <a:pPr algn="ctr"/>
+            <a:endParaRPr/>
           </a:p>
         </p:txBody>
       </p:sp>
@@ -9358,6 +9329,7 @@
           <a:lstStyle/>
           <a:p>
             <a:pPr algn="ctr"/>
+            <a:endParaRPr/>
           </a:p>
         </p:txBody>
       </p:sp>
@@ -9378,7 +9350,7 @@
           <a:noFill/>
         </p:spPr>
         <p:txBody>
-          <a:bodyPr wrap="square" lIns="0" rIns="0" tIns="0" bIns="0" anchor="t">
+          <a:bodyPr wrap="square" lIns="0" tIns="0" rIns="0" bIns="0" anchor="t">
             <a:spAutoFit/>
           </a:bodyPr>
           <a:lstStyle/>
@@ -9413,7 +9385,7 @@
           <a:noFill/>
         </p:spPr>
         <p:txBody>
-          <a:bodyPr wrap="square" lIns="0" rIns="0" tIns="0" bIns="0" anchor="t">
+          <a:bodyPr wrap="square" lIns="0" tIns="0" rIns="0" bIns="0" anchor="t">
             <a:spAutoFit/>
           </a:bodyPr>
           <a:lstStyle/>
@@ -9472,6 +9444,7 @@
           <a:lstStyle/>
           <a:p>
             <a:pPr algn="ctr"/>
+            <a:endParaRPr/>
           </a:p>
         </p:txBody>
       </p:sp>
@@ -9516,6 +9489,7 @@
           <a:lstStyle/>
           <a:p>
             <a:pPr algn="ctr"/>
+            <a:endParaRPr/>
           </a:p>
         </p:txBody>
       </p:sp>
@@ -9536,7 +9510,7 @@
           <a:noFill/>
         </p:spPr>
         <p:txBody>
-          <a:bodyPr wrap="square" lIns="0" rIns="0" tIns="0" bIns="0" anchor="t">
+          <a:bodyPr wrap="square" lIns="0" tIns="0" rIns="0" bIns="0" anchor="t">
             <a:spAutoFit/>
           </a:bodyPr>
           <a:lstStyle/>
@@ -9571,7 +9545,7 @@
           <a:noFill/>
         </p:spPr>
         <p:txBody>
-          <a:bodyPr wrap="square" lIns="0" rIns="0" tIns="0" bIns="0" anchor="t">
+          <a:bodyPr wrap="square" lIns="0" tIns="0" rIns="0" bIns="0" anchor="t">
             <a:spAutoFit/>
           </a:bodyPr>
           <a:lstStyle/>
@@ -9630,6 +9604,7 @@
           <a:lstStyle/>
           <a:p>
             <a:pPr algn="ctr"/>
+            <a:endParaRPr/>
           </a:p>
         </p:txBody>
       </p:sp>
@@ -9674,6 +9649,7 @@
           <a:lstStyle/>
           <a:p>
             <a:pPr algn="ctr"/>
+            <a:endParaRPr/>
           </a:p>
         </p:txBody>
       </p:sp>
@@ -9694,7 +9670,7 @@
           <a:noFill/>
         </p:spPr>
         <p:txBody>
-          <a:bodyPr wrap="square" lIns="0" rIns="0" tIns="0" bIns="0" anchor="t">
+          <a:bodyPr wrap="square" lIns="0" tIns="0" rIns="0" bIns="0" anchor="t">
             <a:spAutoFit/>
           </a:bodyPr>
           <a:lstStyle/>
@@ -9729,7 +9705,7 @@
           <a:noFill/>
         </p:spPr>
         <p:txBody>
-          <a:bodyPr wrap="square" lIns="0" rIns="0" tIns="0" bIns="0" anchor="t">
+          <a:bodyPr wrap="square" lIns="0" tIns="0" rIns="0" bIns="0" anchor="t">
             <a:spAutoFit/>
           </a:bodyPr>
           <a:lstStyle/>
@@ -9788,6 +9764,7 @@
           <a:lstStyle/>
           <a:p>
             <a:pPr algn="ctr"/>
+            <a:endParaRPr/>
           </a:p>
         </p:txBody>
       </p:sp>
@@ -9832,6 +9809,7 @@
           <a:lstStyle/>
           <a:p>
             <a:pPr algn="ctr"/>
+            <a:endParaRPr/>
           </a:p>
         </p:txBody>
       </p:sp>
@@ -9852,7 +9830,7 @@
           <a:noFill/>
         </p:spPr>
         <p:txBody>
-          <a:bodyPr wrap="square" lIns="0" rIns="0" tIns="0" bIns="0" anchor="t">
+          <a:bodyPr wrap="square" lIns="0" tIns="0" rIns="0" bIns="0" anchor="t">
             <a:spAutoFit/>
           </a:bodyPr>
           <a:lstStyle/>
@@ -9887,7 +9865,7 @@
           <a:noFill/>
         </p:spPr>
         <p:txBody>
-          <a:bodyPr wrap="square" lIns="0" rIns="0" tIns="0" bIns="0" anchor="t">
+          <a:bodyPr wrap="square" lIns="0" tIns="0" rIns="0" bIns="0" anchor="t">
             <a:spAutoFit/>
           </a:bodyPr>
           <a:lstStyle/>
@@ -9914,7 +9892,7 @@
 </file>
 
 <file path=ppt/slides/slide8.xml><?xml version="1.0" encoding="utf-8"?>
-<p:sld xmlns:a="http://schemas.openxmlformats.org/drawingml/2006/main" xmlns:p="http://schemas.openxmlformats.org/presentationml/2006/main" xmlns:r="http://schemas.openxmlformats.org/officeDocument/2006/relationships">
+<p:sld xmlns:a="http://schemas.openxmlformats.org/drawingml/2006/main" xmlns:r="http://schemas.openxmlformats.org/officeDocument/2006/relationships" xmlns:p="http://schemas.openxmlformats.org/presentationml/2006/main">
   <p:cSld>
     <p:bg>
       <p:bgPr>
@@ -9930,7 +9908,14 @@
         <p:cNvGrpSpPr/>
         <p:nvPr/>
       </p:nvGrpSpPr>
-      <p:grpSpPr/>
+      <p:grpSpPr>
+        <a:xfrm>
+          <a:off x="0" y="0"/>
+          <a:ext cx="0" cy="0"/>
+          <a:chOff x="0" y="0"/>
+          <a:chExt cx="0" cy="0"/>
+        </a:xfrm>
+      </p:grpSpPr>
       <p:sp>
         <p:nvSpPr>
           <p:cNvPr id="2" name="Title"/>
@@ -9948,7 +9933,7 @@
           <a:noFill/>
         </p:spPr>
         <p:txBody>
-          <a:bodyPr wrap="square" lIns="0" rIns="0" tIns="0" bIns="0" anchor="ctr">
+          <a:bodyPr wrap="square" lIns="0" tIns="0" rIns="0" bIns="0" anchor="ctr">
             <a:spAutoFit/>
           </a:bodyPr>
           <a:lstStyle/>
@@ -10011,6 +9996,7 @@
           <a:lstStyle/>
           <a:p>
             <a:pPr algn="ctr"/>
+            <a:endParaRPr/>
           </a:p>
         </p:txBody>
       </p:sp>
@@ -10031,7 +10017,7 @@
           <a:noFill/>
         </p:spPr>
         <p:txBody>
-          <a:bodyPr wrap="square" lIns="0" rIns="0" tIns="0" bIns="0" anchor="t">
+          <a:bodyPr wrap="square" lIns="0" tIns="0" rIns="0" bIns="0" anchor="t">
             <a:spAutoFit/>
           </a:bodyPr>
           <a:lstStyle/>
@@ -10066,12 +10052,12 @@
           <a:noFill/>
         </p:spPr>
         <p:txBody>
-          <a:bodyPr wrap="square" lIns="0" rIns="0" tIns="0" bIns="0" anchor="t">
+          <a:bodyPr wrap="square" lIns="0" tIns="0" rIns="0" bIns="0" anchor="t">
             <a:spAutoFit/>
           </a:bodyPr>
           <a:lstStyle/>
           <a:p>
-            <a:pPr algn="l" marL="201168" indent="-201168">
+            <a:pPr marL="201168" indent="-201168" algn="l">
               <a:spcAft>
                 <a:spcPts val="600"/>
               </a:spcAft>
@@ -10088,7 +10074,7 @@
             </a:r>
           </a:p>
           <a:p>
-            <a:pPr algn="l" marL="201168" indent="-201168">
+            <a:pPr marL="201168" indent="-201168" algn="l">
               <a:spcAft>
                 <a:spcPts val="600"/>
               </a:spcAft>
@@ -10105,7 +10091,7 @@
             </a:r>
           </a:p>
           <a:p>
-            <a:pPr algn="l" marL="201168" indent="-201168">
+            <a:pPr marL="201168" indent="-201168" algn="l">
               <a:spcAft>
                 <a:spcPts val="600"/>
               </a:spcAft>
@@ -10122,7 +10108,7 @@
             </a:r>
           </a:p>
           <a:p>
-            <a:pPr algn="l" marL="201168" indent="-201168">
+            <a:pPr marL="201168" indent="-201168" algn="l">
               <a:spcAft>
                 <a:spcPts val="600"/>
               </a:spcAft>
@@ -10185,6 +10171,7 @@
           <a:lstStyle/>
           <a:p>
             <a:pPr algn="ctr"/>
+            <a:endParaRPr/>
           </a:p>
         </p:txBody>
       </p:sp>
@@ -10205,7 +10192,7 @@
           <a:noFill/>
         </p:spPr>
         <p:txBody>
-          <a:bodyPr wrap="square" lIns="0" rIns="0" tIns="0" bIns="0" anchor="t">
+          <a:bodyPr wrap="square" lIns="0" tIns="0" rIns="0" bIns="0" anchor="t">
             <a:spAutoFit/>
           </a:bodyPr>
           <a:lstStyle/>
@@ -10232,7 +10219,7 @@
         <p:spPr>
           <a:xfrm>
             <a:off x="4892040" y="1874519"/>
-            <a:ext cx="3474720" cy="2194560"/>
+            <a:ext cx="3474720" cy="877163"/>
           </a:xfrm>
           <a:prstGeom prst="rect">
             <a:avLst/>
@@ -10240,19 +10227,19 @@
           <a:noFill/>
         </p:spPr>
         <p:txBody>
-          <a:bodyPr wrap="square" lIns="0" rIns="0" tIns="0" bIns="0" anchor="t">
+          <a:bodyPr wrap="square" lIns="0" tIns="0" rIns="0" bIns="0" anchor="t">
             <a:spAutoFit/>
           </a:bodyPr>
           <a:lstStyle/>
           <a:p>
-            <a:pPr algn="l" marL="201168" indent="-201168">
+            <a:pPr marL="201168" indent="-201168" algn="l">
               <a:spcAft>
                 <a:spcPts val="600"/>
               </a:spcAft>
               <a:buChar char="•"/>
             </a:pPr>
             <a:r>
-              <a:rPr sz="1300" b="0" i="0">
+              <a:rPr sz="1300" b="0" i="0" dirty="0">
                 <a:solidFill>
                   <a:srgbClr val="1B2336"/>
                 </a:solidFill>
@@ -10262,37 +10249,20 @@
             </a:r>
           </a:p>
           <a:p>
-            <a:pPr algn="l" marL="201168" indent="-201168">
+            <a:pPr marL="201168" indent="-201168" algn="l">
               <a:spcAft>
                 <a:spcPts val="600"/>
               </a:spcAft>
               <a:buChar char="•"/>
             </a:pPr>
             <a:r>
-              <a:rPr sz="1300" b="0" i="0">
+              <a:rPr sz="1300" b="0" i="0" dirty="0">
                 <a:solidFill>
                   <a:srgbClr val="1B2336"/>
                 </a:solidFill>
                 <a:latin typeface="Calibri"/>
               </a:rPr>
               <a:t>Who pays, or that rolling caused any move</a:t>
-            </a:r>
-          </a:p>
-          <a:p>
-            <a:pPr algn="l" marL="201168" indent="-201168">
-              <a:spcAft>
-                <a:spcPts val="600"/>
-              </a:spcAft>
-              <a:buChar char="•"/>
-            </a:pPr>
-            <a:r>
-              <a:rPr sz="1300" b="0" i="0">
-                <a:solidFill>
-                  <a:srgbClr val="1B2336"/>
-                </a:solidFill>
-                <a:latin typeface="Calibri"/>
-              </a:rPr>
-              <a:t>That the plan was fully frozen: the test ran before the last sign-off</a:t>
             </a:r>
           </a:p>
         </p:txBody>
@@ -10314,14 +10284,14 @@
           <a:noFill/>
         </p:spPr>
         <p:txBody>
-          <a:bodyPr wrap="square" lIns="0" rIns="0" tIns="0" bIns="0" anchor="t">
+          <a:bodyPr wrap="square" lIns="0" tIns="0" rIns="0" bIns="0" anchor="t">
             <a:spAutoFit/>
           </a:bodyPr>
           <a:lstStyle/>
           <a:p>
             <a:pPr algn="l"/>
             <a:r>
-              <a:rPr sz="1300" b="1" i="0">
+              <a:rPr sz="1300" b="1" i="0" dirty="0">
                 <a:solidFill>
                   <a:srgbClr val="0F2A6B"/>
                 </a:solidFill>
@@ -10330,7 +10300,7 @@
               <a:t>Cut for time: </a:t>
             </a:r>
             <a:r>
-              <a:rPr sz="1300" b="0" i="0">
+              <a:rPr sz="1300" b="0" i="0" dirty="0">
                 <a:solidFill>
                   <a:srgbClr val="1B2336"/>
                 </a:solidFill>
@@ -10680,44 +10650,44 @@
         <a:sysClr val="window" lastClr="FFFFFF"/>
       </a:lt1>
       <a:dk2>
-        <a:srgbClr val="1F497D"/>
+        <a:srgbClr val="0E2841"/>
       </a:dk2>
       <a:lt2>
-        <a:srgbClr val="EEECE1"/>
+        <a:srgbClr val="E8E8E8"/>
       </a:lt2>
       <a:accent1>
-        <a:srgbClr val="4F81BD"/>
+        <a:srgbClr val="156082"/>
       </a:accent1>
       <a:accent2>
-        <a:srgbClr val="C0504D"/>
+        <a:srgbClr val="E97132"/>
       </a:accent2>
       <a:accent3>
-        <a:srgbClr val="9BBB59"/>
+        <a:srgbClr val="196B24"/>
       </a:accent3>
       <a:accent4>
-        <a:srgbClr val="8064A2"/>
+        <a:srgbClr val="0F9ED5"/>
       </a:accent4>
       <a:accent5>
-        <a:srgbClr val="4BACC6"/>
+        <a:srgbClr val="A02B93"/>
       </a:accent5>
       <a:accent6>
-        <a:srgbClr val="F79646"/>
+        <a:srgbClr val="4EA72E"/>
       </a:accent6>
       <a:hlink>
-        <a:srgbClr val="0000FF"/>
+        <a:srgbClr val="467886"/>
       </a:hlink>
       <a:folHlink>
-        <a:srgbClr val="800080"/>
+        <a:srgbClr val="96607D"/>
       </a:folHlink>
     </a:clrScheme>
     <a:fontScheme name="Office">
       <a:majorFont>
-        <a:latin typeface="Calibri"/>
+        <a:latin typeface="Aptos Display" panose="02110004020202020204"/>
         <a:ea typeface=""/>
         <a:cs typeface=""/>
-        <a:font script="Jpan" typeface="ＭＳ Ｐゴシック"/>
+        <a:font script="Jpan" typeface="游ゴシック Light"/>
         <a:font script="Hang" typeface="맑은 고딕"/>
-        <a:font script="Hans" typeface="宋体"/>
+        <a:font script="Hans" typeface="等线 Light"/>
         <a:font script="Hant" typeface="新細明體"/>
         <a:font script="Arab" typeface="Times New Roman"/>
         <a:font script="Hebr" typeface="Times New Roman"/>
@@ -10745,14 +10715,31 @@
         <a:font script="Viet" typeface="Times New Roman"/>
         <a:font script="Uigh" typeface="Microsoft Uighur"/>
         <a:font script="Geor" typeface="Sylfaen"/>
+        <a:font script="Armn" typeface="Arial"/>
+        <a:font script="Bugi" typeface="Leelawadee UI"/>
+        <a:font script="Bopo" typeface="Microsoft JhengHei"/>
+        <a:font script="Java" typeface="Javanese Text"/>
+        <a:font script="Lisu" typeface="Segoe UI"/>
+        <a:font script="Mymr" typeface="Myanmar Text"/>
+        <a:font script="Nkoo" typeface="Ebrima"/>
+        <a:font script="Olck" typeface="Nirmala UI"/>
+        <a:font script="Osma" typeface="Ebrima"/>
+        <a:font script="Phag" typeface="Phagspa"/>
+        <a:font script="Syrn" typeface="Estrangelo Edessa"/>
+        <a:font script="Syrj" typeface="Estrangelo Edessa"/>
+        <a:font script="Syre" typeface="Estrangelo Edessa"/>
+        <a:font script="Sora" typeface="Nirmala UI"/>
+        <a:font script="Tale" typeface="Microsoft Tai Le"/>
+        <a:font script="Talu" typeface="Microsoft New Tai Lue"/>
+        <a:font script="Tfng" typeface="Ebrima"/>
       </a:majorFont>
       <a:minorFont>
-        <a:latin typeface="Calibri"/>
+        <a:latin typeface="Aptos" panose="02110004020202020204"/>
         <a:ea typeface=""/>
         <a:cs typeface=""/>
-        <a:font script="Jpan" typeface="ＭＳ Ｐゴシック"/>
+        <a:font script="Jpan" typeface="游ゴシック"/>
         <a:font script="Hang" typeface="맑은 고딕"/>
-        <a:font script="Hans" typeface="宋体"/>
+        <a:font script="Hans" typeface="等线"/>
         <a:font script="Hant" typeface="新細明體"/>
         <a:font script="Arab" typeface="Arial"/>
         <a:font script="Hebr" typeface="Arial"/>
@@ -10780,6 +10767,23 @@
         <a:font script="Viet" typeface="Arial"/>
         <a:font script="Uigh" typeface="Microsoft Uighur"/>
         <a:font script="Geor" typeface="Sylfaen"/>
+        <a:font script="Armn" typeface="Arial"/>
+        <a:font script="Bugi" typeface="Leelawadee UI"/>
+        <a:font script="Bopo" typeface="Microsoft JhengHei"/>
+        <a:font script="Java" typeface="Javanese Text"/>
+        <a:font script="Lisu" typeface="Segoe UI"/>
+        <a:font script="Mymr" typeface="Myanmar Text"/>
+        <a:font script="Nkoo" typeface="Ebrima"/>
+        <a:font script="Olck" typeface="Nirmala UI"/>
+        <a:font script="Osma" typeface="Ebrima"/>
+        <a:font script="Phag" typeface="Phagspa"/>
+        <a:font script="Syrn" typeface="Estrangelo Edessa"/>
+        <a:font script="Syrj" typeface="Estrangelo Edessa"/>
+        <a:font script="Syre" typeface="Estrangelo Edessa"/>
+        <a:font script="Sora" typeface="Nirmala UI"/>
+        <a:font script="Tale" typeface="Microsoft Tai Le"/>
+        <a:font script="Talu" typeface="Microsoft New Tai Lue"/>
+        <a:font script="Tfng" typeface="Ebrima"/>
       </a:minorFont>
     </a:fontScheme>
     <a:fmtScheme name="Office">
@@ -10791,180 +10795,136 @@
           <a:gsLst>
             <a:gs pos="0">
               <a:schemeClr val="phClr">
-                <a:tint val="50000"/>
-                <a:satMod val="300000"/>
+                <a:lumMod val="110000"/>
+                <a:satMod val="105000"/>
+                <a:tint val="67000"/>
               </a:schemeClr>
             </a:gs>
-            <a:gs pos="35000">
+            <a:gs pos="50000">
               <a:schemeClr val="phClr">
-                <a:tint val="37000"/>
-                <a:satMod val="300000"/>
+                <a:lumMod val="105000"/>
+                <a:satMod val="103000"/>
+                <a:tint val="73000"/>
               </a:schemeClr>
             </a:gs>
             <a:gs pos="100000">
               <a:schemeClr val="phClr">
-                <a:tint val="15000"/>
-                <a:satMod val="350000"/>
+                <a:lumMod val="105000"/>
+                <a:satMod val="109000"/>
+                <a:tint val="81000"/>
               </a:schemeClr>
             </a:gs>
           </a:gsLst>
-          <a:lin ang="16200000" scaled="1"/>
+          <a:lin ang="5400000" scaled="0"/>
         </a:gradFill>
         <a:gradFill rotWithShape="1">
           <a:gsLst>
             <a:gs pos="0">
               <a:schemeClr val="phClr">
-                <a:tint val="100000"/>
+                <a:satMod val="103000"/>
+                <a:lumMod val="102000"/>
+                <a:tint val="94000"/>
+              </a:schemeClr>
+            </a:gs>
+            <a:gs pos="50000">
+              <a:schemeClr val="phClr">
+                <a:satMod val="110000"/>
+                <a:lumMod val="100000"/>
                 <a:shade val="100000"/>
-                <a:satMod val="130000"/>
               </a:schemeClr>
             </a:gs>
             <a:gs pos="100000">
               <a:schemeClr val="phClr">
-                <a:tint val="50000"/>
-                <a:shade val="100000"/>
-                <a:satMod val="350000"/>
+                <a:lumMod val="99000"/>
+                <a:satMod val="120000"/>
+                <a:shade val="78000"/>
               </a:schemeClr>
             </a:gs>
           </a:gsLst>
-          <a:lin ang="16200000" scaled="0"/>
+          <a:lin ang="5400000" scaled="0"/>
         </a:gradFill>
       </a:fillStyleLst>
       <a:lnStyleLst>
-        <a:ln w="9525" cap="flat" cmpd="sng" algn="ctr">
+        <a:ln w="12700" cap="flat" cmpd="sng" algn="ctr">
           <a:solidFill>
-            <a:schemeClr val="phClr">
-              <a:shade val="95000"/>
-              <a:satMod val="105000"/>
-            </a:schemeClr>
+            <a:schemeClr val="phClr"/>
           </a:solidFill>
           <a:prstDash val="solid"/>
+          <a:miter lim="800000"/>
+        </a:ln>
+        <a:ln w="19050" cap="flat" cmpd="sng" algn="ctr">
+          <a:solidFill>
+            <a:schemeClr val="phClr"/>
+          </a:solidFill>
+          <a:prstDash val="solid"/>
+          <a:miter lim="800000"/>
         </a:ln>
         <a:ln w="25400" cap="flat" cmpd="sng" algn="ctr">
           <a:solidFill>
             <a:schemeClr val="phClr"/>
           </a:solidFill>
           <a:prstDash val="solid"/>
-        </a:ln>
-        <a:ln w="38100" cap="flat" cmpd="sng" algn="ctr">
-          <a:solidFill>
-            <a:schemeClr val="phClr"/>
-          </a:solidFill>
-          <a:prstDash val="solid"/>
+          <a:miter lim="800000"/>
         </a:ln>
       </a:lnStyleLst>
       <a:effectStyleLst>
         <a:effectStyle>
+          <a:effectLst/>
+        </a:effectStyle>
+        <a:effectStyle>
+          <a:effectLst/>
+        </a:effectStyle>
+        <a:effectStyle>
           <a:effectLst>
-            <a:outerShdw blurRad="40000" dist="20000" dir="5400000" rotWithShape="0">
+            <a:outerShdw blurRad="57150" dist="19050" dir="5400000" algn="ctr" rotWithShape="0">
               <a:srgbClr val="000000">
-                <a:alpha val="38000"/>
+                <a:alpha val="63000"/>
               </a:srgbClr>
             </a:outerShdw>
           </a:effectLst>
-        </a:effectStyle>
-        <a:effectStyle>
-          <a:effectLst>
-            <a:outerShdw blurRad="40000" dist="23000" dir="5400000" rotWithShape="0">
-              <a:srgbClr val="000000">
-                <a:alpha val="35000"/>
-              </a:srgbClr>
-            </a:outerShdw>
-          </a:effectLst>
-        </a:effectStyle>
-        <a:effectStyle>
-          <a:effectLst>
-            <a:outerShdw blurRad="40000" dist="23000" dir="5400000" rotWithShape="0">
-              <a:srgbClr val="000000">
-                <a:alpha val="35000"/>
-              </a:srgbClr>
-            </a:outerShdw>
-          </a:effectLst>
-          <a:scene3d>
-            <a:camera prst="orthographicFront">
-              <a:rot lat="0" lon="0" rev="0"/>
-            </a:camera>
-            <a:lightRig rig="threePt" dir="t">
-              <a:rot lat="0" lon="0" rev="1200000"/>
-            </a:lightRig>
-          </a:scene3d>
-          <a:sp3d>
-            <a:bevelT w="63500" h="25400"/>
-          </a:sp3d>
         </a:effectStyle>
       </a:effectStyleLst>
       <a:bgFillStyleLst>
         <a:solidFill>
           <a:schemeClr val="phClr"/>
         </a:solidFill>
+        <a:solidFill>
+          <a:schemeClr val="phClr">
+            <a:tint val="95000"/>
+            <a:satMod val="170000"/>
+          </a:schemeClr>
+        </a:solidFill>
         <a:gradFill rotWithShape="1">
           <a:gsLst>
             <a:gs pos="0">
               <a:schemeClr val="phClr">
-                <a:tint val="40000"/>
-                <a:satMod val="350000"/>
+                <a:tint val="93000"/>
+                <a:satMod val="150000"/>
+                <a:shade val="98000"/>
+                <a:lumMod val="102000"/>
               </a:schemeClr>
             </a:gs>
-            <a:gs pos="40000">
+            <a:gs pos="50000">
               <a:schemeClr val="phClr">
-                <a:tint val="45000"/>
-                <a:shade val="99000"/>
-                <a:satMod val="350000"/>
+                <a:tint val="98000"/>
+                <a:satMod val="130000"/>
+                <a:shade val="90000"/>
+                <a:lumMod val="103000"/>
               </a:schemeClr>
             </a:gs>
             <a:gs pos="100000">
               <a:schemeClr val="phClr">
-                <a:shade val="20000"/>
-                <a:satMod val="255000"/>
+                <a:shade val="63000"/>
+                <a:satMod val="120000"/>
               </a:schemeClr>
             </a:gs>
           </a:gsLst>
-          <a:path path="circle">
-            <a:fillToRect l="50000" t="-80000" r="50000" b="180000"/>
-          </a:path>
-        </a:gradFill>
-        <a:gradFill rotWithShape="1">
-          <a:gsLst>
-            <a:gs pos="0">
-              <a:schemeClr val="phClr">
-                <a:tint val="80000"/>
-                <a:satMod val="300000"/>
-              </a:schemeClr>
-            </a:gs>
-            <a:gs pos="100000">
-              <a:schemeClr val="phClr">
-                <a:shade val="30000"/>
-                <a:satMod val="200000"/>
-              </a:schemeClr>
-            </a:gs>
-          </a:gsLst>
-          <a:path path="circle">
-            <a:fillToRect l="50000" t="50000" r="50000" b="50000"/>
-          </a:path>
+          <a:lin ang="5400000" scaled="0"/>
         </a:gradFill>
       </a:bgFillStyleLst>
     </a:fmtScheme>
   </a:themeElements>
   <a:objectDefaults>
-    <a:spDef>
-      <a:spPr/>
-      <a:bodyPr/>
-      <a:lstStyle/>
-      <a:style>
-        <a:lnRef idx="1">
-          <a:schemeClr val="accent1"/>
-        </a:lnRef>
-        <a:fillRef idx="3">
-          <a:schemeClr val="accent1"/>
-        </a:fillRef>
-        <a:effectRef idx="2">
-          <a:schemeClr val="accent1"/>
-        </a:effectRef>
-        <a:fontRef idx="minor">
-          <a:schemeClr val="lt1"/>
-        </a:fontRef>
-      </a:style>
-    </a:spDef>
     <a:lnDef>
       <a:spPr/>
       <a:bodyPr/>
@@ -10986,5 +10946,10 @@
     </a:lnDef>
   </a:objectDefaults>
   <a:extraClrSchemeLst/>
+  <a:extLst>
+    <a:ext uri="{05A4C25C-085E-4340-85A3-A5531E510DB2}">
+      <thm15:themeFamily xmlns:thm15="http://schemas.microsoft.com/office/thememl/2012/main" name="Office Theme" id="{2E142A2C-CD16-42D6-873A-C26D2A0506FA}" vid="{1BDDFF52-6CD6-40A5-AB3C-68EB2F1E4D0A}"/>
+    </a:ext>
+  </a:extLst>
 </a:theme>
 </file>